--- a/PizzaSolution Presentation.pptx
+++ b/PizzaSolution Presentation.pptx
@@ -2,19 +2,26 @@
 <file path=ppt/presentation.xml><?xml version="1.0" encoding="utf-8"?>
 <p:presentation xmlns:a="http://schemas.openxmlformats.org/drawingml/2006/main" xmlns:r="http://schemas.openxmlformats.org/officeDocument/2006/relationships" xmlns:p="http://schemas.openxmlformats.org/presentationml/2006/main" saveSubsetFonts="1">
   <p:sldMasterIdLst>
-    <p:sldMasterId id="2147483648" r:id="rId1"/>
+    <p:sldMasterId id="2147483660" r:id="rId1"/>
   </p:sldMasterIdLst>
+  <p:notesMasterIdLst>
+    <p:notesMasterId r:id="rId8"/>
+  </p:notesMasterIdLst>
   <p:sldIdLst>
     <p:sldId id="256" r:id="rId2"/>
     <p:sldId id="257" r:id="rId3"/>
+    <p:sldId id="258" r:id="rId4"/>
+    <p:sldId id="259" r:id="rId5"/>
+    <p:sldId id="261" r:id="rId6"/>
+    <p:sldId id="260" r:id="rId7"/>
   </p:sldIdLst>
   <p:sldSz cx="12192000" cy="6858000"/>
   <p:notesSz cx="6858000" cy="9144000"/>
   <p:defaultTextStyle>
     <a:defPPr>
-      <a:defRPr lang="en-DK"/>
+      <a:defRPr lang="en-US"/>
     </a:defPPr>
-    <a:lvl1pPr marL="0" algn="l" defTabSz="914400" rtl="0" eaLnBrk="1" latinLnBrk="0" hangingPunct="1">
+    <a:lvl1pPr marL="0" algn="l" defTabSz="457200" rtl="0" eaLnBrk="1" latinLnBrk="0" hangingPunct="1">
       <a:defRPr sz="1800" kern="1200">
         <a:solidFill>
           <a:schemeClr val="tx1"/>
@@ -24,7 +31,7 @@
         <a:cs typeface="+mn-cs"/>
       </a:defRPr>
     </a:lvl1pPr>
-    <a:lvl2pPr marL="457200" algn="l" defTabSz="914400" rtl="0" eaLnBrk="1" latinLnBrk="0" hangingPunct="1">
+    <a:lvl2pPr marL="457200" algn="l" defTabSz="457200" rtl="0" eaLnBrk="1" latinLnBrk="0" hangingPunct="1">
       <a:defRPr sz="1800" kern="1200">
         <a:solidFill>
           <a:schemeClr val="tx1"/>
@@ -34,7 +41,7 @@
         <a:cs typeface="+mn-cs"/>
       </a:defRPr>
     </a:lvl2pPr>
-    <a:lvl3pPr marL="914400" algn="l" defTabSz="914400" rtl="0" eaLnBrk="1" latinLnBrk="0" hangingPunct="1">
+    <a:lvl3pPr marL="914400" algn="l" defTabSz="457200" rtl="0" eaLnBrk="1" latinLnBrk="0" hangingPunct="1">
       <a:defRPr sz="1800" kern="1200">
         <a:solidFill>
           <a:schemeClr val="tx1"/>
@@ -44,7 +51,7 @@
         <a:cs typeface="+mn-cs"/>
       </a:defRPr>
     </a:lvl3pPr>
-    <a:lvl4pPr marL="1371600" algn="l" defTabSz="914400" rtl="0" eaLnBrk="1" latinLnBrk="0" hangingPunct="1">
+    <a:lvl4pPr marL="1371600" algn="l" defTabSz="457200" rtl="0" eaLnBrk="1" latinLnBrk="0" hangingPunct="1">
       <a:defRPr sz="1800" kern="1200">
         <a:solidFill>
           <a:schemeClr val="tx1"/>
@@ -54,7 +61,7 @@
         <a:cs typeface="+mn-cs"/>
       </a:defRPr>
     </a:lvl4pPr>
-    <a:lvl5pPr marL="1828800" algn="l" defTabSz="914400" rtl="0" eaLnBrk="1" latinLnBrk="0" hangingPunct="1">
+    <a:lvl5pPr marL="1828800" algn="l" defTabSz="457200" rtl="0" eaLnBrk="1" latinLnBrk="0" hangingPunct="1">
       <a:defRPr sz="1800" kern="1200">
         <a:solidFill>
           <a:schemeClr val="tx1"/>
@@ -64,7 +71,7 @@
         <a:cs typeface="+mn-cs"/>
       </a:defRPr>
     </a:lvl5pPr>
-    <a:lvl6pPr marL="2286000" algn="l" defTabSz="914400" rtl="0" eaLnBrk="1" latinLnBrk="0" hangingPunct="1">
+    <a:lvl6pPr marL="2286000" algn="l" defTabSz="457200" rtl="0" eaLnBrk="1" latinLnBrk="0" hangingPunct="1">
       <a:defRPr sz="1800" kern="1200">
         <a:solidFill>
           <a:schemeClr val="tx1"/>
@@ -74,7 +81,7 @@
         <a:cs typeface="+mn-cs"/>
       </a:defRPr>
     </a:lvl6pPr>
-    <a:lvl7pPr marL="2743200" algn="l" defTabSz="914400" rtl="0" eaLnBrk="1" latinLnBrk="0" hangingPunct="1">
+    <a:lvl7pPr marL="2743200" algn="l" defTabSz="457200" rtl="0" eaLnBrk="1" latinLnBrk="0" hangingPunct="1">
       <a:defRPr sz="1800" kern="1200">
         <a:solidFill>
           <a:schemeClr val="tx1"/>
@@ -84,7 +91,7 @@
         <a:cs typeface="+mn-cs"/>
       </a:defRPr>
     </a:lvl7pPr>
-    <a:lvl8pPr marL="3200400" algn="l" defTabSz="914400" rtl="0" eaLnBrk="1" latinLnBrk="0" hangingPunct="1">
+    <a:lvl8pPr marL="3200400" algn="l" defTabSz="457200" rtl="0" eaLnBrk="1" latinLnBrk="0" hangingPunct="1">
       <a:defRPr sz="1800" kern="1200">
         <a:solidFill>
           <a:schemeClr val="tx1"/>
@@ -94,7 +101,7 @@
         <a:cs typeface="+mn-cs"/>
       </a:defRPr>
     </a:lvl8pPr>
-    <a:lvl9pPr marL="3657600" algn="l" defTabSz="914400" rtl="0" eaLnBrk="1" latinLnBrk="0" hangingPunct="1">
+    <a:lvl9pPr marL="3657600" algn="l" defTabSz="457200" rtl="0" eaLnBrk="1" latinLnBrk="0" hangingPunct="1">
       <a:defRPr sz="1800" kern="1200">
         <a:solidFill>
           <a:schemeClr val="tx1"/>
@@ -105,12 +112,22 @@
       </a:defRPr>
     </a:lvl9pPr>
   </p:defaultTextStyle>
+  <p:extLst>
+    <p:ext uri="{EFAFB233-063F-42B5-8137-9DF3F51BA10A}">
+      <p15:sldGuideLst xmlns:p15="http://schemas.microsoft.com/office/powerpoint/2012/main"/>
+    </p:ext>
+  </p:extLst>
 </p:presentation>
 </file>
 
-<file path=ppt/slideLayouts/slideLayout1.xml><?xml version="1.0" encoding="utf-8"?>
-<p:sldLayout xmlns:a="http://schemas.openxmlformats.org/drawingml/2006/main" xmlns:r="http://schemas.openxmlformats.org/officeDocument/2006/relationships" xmlns:p="http://schemas.openxmlformats.org/presentationml/2006/main" type="title" preserve="1">
-  <p:cSld name="Titelslide">
+<file path=ppt/notesMasters/notesMaster1.xml><?xml version="1.0" encoding="utf-8"?>
+<p:notesMaster xmlns:a="http://schemas.openxmlformats.org/drawingml/2006/main" xmlns:r="http://schemas.openxmlformats.org/officeDocument/2006/relationships" xmlns:p="http://schemas.openxmlformats.org/presentationml/2006/main">
+  <p:cSld>
+    <p:bg>
+      <p:bgRef idx="1001">
+        <a:schemeClr val="bg1"/>
+      </p:bgRef>
+    </p:bg>
     <p:spTree>
       <p:nvGrpSpPr>
         <p:cNvPr id="1" name=""/>
@@ -127,31 +144,1875 @@
       </p:grpSpPr>
       <p:sp>
         <p:nvSpPr>
-          <p:cNvPr id="2" name="Titel 1">
-            <a:extLst>
-              <a:ext uri="{FF2B5EF4-FFF2-40B4-BE49-F238E27FC236}">
-                <a16:creationId xmlns:a16="http://schemas.microsoft.com/office/drawing/2014/main" id="{440D980E-B024-AB0B-DD96-E8C3453E0C52}"/>
-              </a:ext>
-            </a:extLst>
-          </p:cNvPr>
+          <p:cNvPr id="2" name="Pladsholder til sidehoved 1"/>
           <p:cNvSpPr>
             <a:spLocks noGrp="1"/>
           </p:cNvSpPr>
           <p:nvPr>
-            <p:ph type="ctrTitle"/>
+            <p:ph type="hdr" sz="quarter"/>
           </p:nvPr>
         </p:nvSpPr>
         <p:spPr>
           <a:xfrm>
-            <a:off x="1524000" y="1122363"/>
-            <a:ext cx="9144000" cy="2387600"/>
+            <a:off x="0" y="0"/>
+            <a:ext cx="2971800" cy="458788"/>
+          </a:xfrm>
+          <a:prstGeom prst="rect">
+            <a:avLst/>
+          </a:prstGeom>
+        </p:spPr>
+        <p:txBody>
+          <a:bodyPr vert="horz" lIns="91440" tIns="45720" rIns="91440" bIns="45720" rtlCol="0"/>
+          <a:lstStyle>
+            <a:lvl1pPr algn="l">
+              <a:defRPr sz="1200"/>
+            </a:lvl1pPr>
+          </a:lstStyle>
+          <a:p>
+            <a:endParaRPr lang="da-DK"/>
+          </a:p>
+        </p:txBody>
+      </p:sp>
+      <p:sp>
+        <p:nvSpPr>
+          <p:cNvPr id="3" name="Pladsholder til dato 2"/>
+          <p:cNvSpPr>
+            <a:spLocks noGrp="1"/>
+          </p:cNvSpPr>
+          <p:nvPr>
+            <p:ph type="dt" idx="1"/>
+          </p:nvPr>
+        </p:nvSpPr>
+        <p:spPr>
+          <a:xfrm>
+            <a:off x="3884613" y="0"/>
+            <a:ext cx="2971800" cy="458788"/>
+          </a:xfrm>
+          <a:prstGeom prst="rect">
+            <a:avLst/>
+          </a:prstGeom>
+        </p:spPr>
+        <p:txBody>
+          <a:bodyPr vert="horz" lIns="91440" tIns="45720" rIns="91440" bIns="45720" rtlCol="0"/>
+          <a:lstStyle>
+            <a:lvl1pPr algn="r">
+              <a:defRPr sz="1200"/>
+            </a:lvl1pPr>
+          </a:lstStyle>
+          <a:p>
+            <a:fld id="{0F1AA9B0-0C32-482B-B713-D8137480A8FA}" type="datetimeFigureOut">
+              <a:rPr lang="da-DK" smtClean="0"/>
+              <a:t>20-03-2026</a:t>
+            </a:fld>
+            <a:endParaRPr lang="da-DK"/>
+          </a:p>
+        </p:txBody>
+      </p:sp>
+      <p:sp>
+        <p:nvSpPr>
+          <p:cNvPr id="4" name="Pladsholder til slidebillede 3"/>
+          <p:cNvSpPr>
+            <a:spLocks noGrp="1" noRot="1" noChangeAspect="1"/>
+          </p:cNvSpPr>
+          <p:nvPr>
+            <p:ph type="sldImg" idx="2"/>
+          </p:nvPr>
+        </p:nvSpPr>
+        <p:spPr>
+          <a:xfrm>
+            <a:off x="685800" y="1143000"/>
+            <a:ext cx="5486400" cy="3086100"/>
+          </a:xfrm>
+          <a:prstGeom prst="rect">
+            <a:avLst/>
+          </a:prstGeom>
+          <a:noFill/>
+          <a:ln w="12700">
+            <a:solidFill>
+              <a:prstClr val="black"/>
+            </a:solidFill>
+          </a:ln>
+        </p:spPr>
+        <p:txBody>
+          <a:bodyPr vert="horz" lIns="91440" tIns="45720" rIns="91440" bIns="45720" rtlCol="0" anchor="ctr"/>
+          <a:lstStyle/>
+          <a:p>
+            <a:endParaRPr lang="da-DK"/>
+          </a:p>
+        </p:txBody>
+      </p:sp>
+      <p:sp>
+        <p:nvSpPr>
+          <p:cNvPr id="5" name="Pladsholder til noter 4"/>
+          <p:cNvSpPr>
+            <a:spLocks noGrp="1"/>
+          </p:cNvSpPr>
+          <p:nvPr>
+            <p:ph type="body" sz="quarter" idx="3"/>
+          </p:nvPr>
+        </p:nvSpPr>
+        <p:spPr>
+          <a:xfrm>
+            <a:off x="685800" y="4400550"/>
+            <a:ext cx="5486400" cy="3600450"/>
+          </a:xfrm>
+          <a:prstGeom prst="rect">
+            <a:avLst/>
+          </a:prstGeom>
+        </p:spPr>
+        <p:txBody>
+          <a:bodyPr vert="horz" lIns="91440" tIns="45720" rIns="91440" bIns="45720" rtlCol="0"/>
+          <a:lstStyle/>
+          <a:p>
+            <a:pPr lvl="0"/>
+            <a:r>
+              <a:rPr lang="da-DK"/>
+              <a:t>Klik for at redigere teksttypografierne i masteren</a:t>
+            </a:r>
+          </a:p>
+          <a:p>
+            <a:pPr lvl="1"/>
+            <a:r>
+              <a:rPr lang="da-DK"/>
+              <a:t>Andet niveau</a:t>
+            </a:r>
+          </a:p>
+          <a:p>
+            <a:pPr lvl="2"/>
+            <a:r>
+              <a:rPr lang="da-DK"/>
+              <a:t>Tredje niveau</a:t>
+            </a:r>
+          </a:p>
+          <a:p>
+            <a:pPr lvl="3"/>
+            <a:r>
+              <a:rPr lang="da-DK"/>
+              <a:t>Fjerde niveau</a:t>
+            </a:r>
+          </a:p>
+          <a:p>
+            <a:pPr lvl="4"/>
+            <a:r>
+              <a:rPr lang="da-DK"/>
+              <a:t>Femte niveau</a:t>
+            </a:r>
+          </a:p>
+        </p:txBody>
+      </p:sp>
+      <p:sp>
+        <p:nvSpPr>
+          <p:cNvPr id="6" name="Pladsholder til sidefod 5"/>
+          <p:cNvSpPr>
+            <a:spLocks noGrp="1"/>
+          </p:cNvSpPr>
+          <p:nvPr>
+            <p:ph type="ftr" sz="quarter" idx="4"/>
+          </p:nvPr>
+        </p:nvSpPr>
+        <p:spPr>
+          <a:xfrm>
+            <a:off x="0" y="8685213"/>
+            <a:ext cx="2971800" cy="458787"/>
+          </a:xfrm>
+          <a:prstGeom prst="rect">
+            <a:avLst/>
+          </a:prstGeom>
+        </p:spPr>
+        <p:txBody>
+          <a:bodyPr vert="horz" lIns="91440" tIns="45720" rIns="91440" bIns="45720" rtlCol="0" anchor="b"/>
+          <a:lstStyle>
+            <a:lvl1pPr algn="l">
+              <a:defRPr sz="1200"/>
+            </a:lvl1pPr>
+          </a:lstStyle>
+          <a:p>
+            <a:endParaRPr lang="da-DK"/>
+          </a:p>
+        </p:txBody>
+      </p:sp>
+      <p:sp>
+        <p:nvSpPr>
+          <p:cNvPr id="7" name="Pladsholder til slidenummer 6"/>
+          <p:cNvSpPr>
+            <a:spLocks noGrp="1"/>
+          </p:cNvSpPr>
+          <p:nvPr>
+            <p:ph type="sldNum" sz="quarter" idx="5"/>
+          </p:nvPr>
+        </p:nvSpPr>
+        <p:spPr>
+          <a:xfrm>
+            <a:off x="3884613" y="8685213"/>
+            <a:ext cx="2971800" cy="458787"/>
+          </a:xfrm>
+          <a:prstGeom prst="rect">
+            <a:avLst/>
+          </a:prstGeom>
+        </p:spPr>
+        <p:txBody>
+          <a:bodyPr vert="horz" lIns="91440" tIns="45720" rIns="91440" bIns="45720" rtlCol="0" anchor="b"/>
+          <a:lstStyle>
+            <a:lvl1pPr algn="r">
+              <a:defRPr sz="1200"/>
+            </a:lvl1pPr>
+          </a:lstStyle>
+          <a:p>
+            <a:fld id="{C2B1EF5D-2231-4646-8EED-1BCCADFE16C5}" type="slidenum">
+              <a:rPr lang="da-DK" smtClean="0"/>
+              <a:t>‹nr.›</a:t>
+            </a:fld>
+            <a:endParaRPr lang="da-DK"/>
+          </a:p>
+        </p:txBody>
+      </p:sp>
+    </p:spTree>
+    <p:extLst>
+      <p:ext uri="{BB962C8B-B14F-4D97-AF65-F5344CB8AC3E}">
+        <p14:creationId xmlns:p14="http://schemas.microsoft.com/office/powerpoint/2010/main" val="2914922386"/>
+      </p:ext>
+    </p:extLst>
+  </p:cSld>
+  <p:clrMap bg1="lt1" tx1="dk1" bg2="lt2" tx2="dk2" accent1="accent1" accent2="accent2" accent3="accent3" accent4="accent4" accent5="accent5" accent6="accent6" hlink="hlink" folHlink="folHlink"/>
+  <p:notesStyle>
+    <a:lvl1pPr marL="0" algn="l" defTabSz="914400" rtl="0" eaLnBrk="1" latinLnBrk="0" hangingPunct="1">
+      <a:defRPr sz="1200" kern="1200">
+        <a:solidFill>
+          <a:schemeClr val="tx1"/>
+        </a:solidFill>
+        <a:latin typeface="+mn-lt"/>
+        <a:ea typeface="+mn-ea"/>
+        <a:cs typeface="+mn-cs"/>
+      </a:defRPr>
+    </a:lvl1pPr>
+    <a:lvl2pPr marL="457200" algn="l" defTabSz="914400" rtl="0" eaLnBrk="1" latinLnBrk="0" hangingPunct="1">
+      <a:defRPr sz="1200" kern="1200">
+        <a:solidFill>
+          <a:schemeClr val="tx1"/>
+        </a:solidFill>
+        <a:latin typeface="+mn-lt"/>
+        <a:ea typeface="+mn-ea"/>
+        <a:cs typeface="+mn-cs"/>
+      </a:defRPr>
+    </a:lvl2pPr>
+    <a:lvl3pPr marL="914400" algn="l" defTabSz="914400" rtl="0" eaLnBrk="1" latinLnBrk="0" hangingPunct="1">
+      <a:defRPr sz="1200" kern="1200">
+        <a:solidFill>
+          <a:schemeClr val="tx1"/>
+        </a:solidFill>
+        <a:latin typeface="+mn-lt"/>
+        <a:ea typeface="+mn-ea"/>
+        <a:cs typeface="+mn-cs"/>
+      </a:defRPr>
+    </a:lvl3pPr>
+    <a:lvl4pPr marL="1371600" algn="l" defTabSz="914400" rtl="0" eaLnBrk="1" latinLnBrk="0" hangingPunct="1">
+      <a:defRPr sz="1200" kern="1200">
+        <a:solidFill>
+          <a:schemeClr val="tx1"/>
+        </a:solidFill>
+        <a:latin typeface="+mn-lt"/>
+        <a:ea typeface="+mn-ea"/>
+        <a:cs typeface="+mn-cs"/>
+      </a:defRPr>
+    </a:lvl4pPr>
+    <a:lvl5pPr marL="1828800" algn="l" defTabSz="914400" rtl="0" eaLnBrk="1" latinLnBrk="0" hangingPunct="1">
+      <a:defRPr sz="1200" kern="1200">
+        <a:solidFill>
+          <a:schemeClr val="tx1"/>
+        </a:solidFill>
+        <a:latin typeface="+mn-lt"/>
+        <a:ea typeface="+mn-ea"/>
+        <a:cs typeface="+mn-cs"/>
+      </a:defRPr>
+    </a:lvl5pPr>
+    <a:lvl6pPr marL="2286000" algn="l" defTabSz="914400" rtl="0" eaLnBrk="1" latinLnBrk="0" hangingPunct="1">
+      <a:defRPr sz="1200" kern="1200">
+        <a:solidFill>
+          <a:schemeClr val="tx1"/>
+        </a:solidFill>
+        <a:latin typeface="+mn-lt"/>
+        <a:ea typeface="+mn-ea"/>
+        <a:cs typeface="+mn-cs"/>
+      </a:defRPr>
+    </a:lvl6pPr>
+    <a:lvl7pPr marL="2743200" algn="l" defTabSz="914400" rtl="0" eaLnBrk="1" latinLnBrk="0" hangingPunct="1">
+      <a:defRPr sz="1200" kern="1200">
+        <a:solidFill>
+          <a:schemeClr val="tx1"/>
+        </a:solidFill>
+        <a:latin typeface="+mn-lt"/>
+        <a:ea typeface="+mn-ea"/>
+        <a:cs typeface="+mn-cs"/>
+      </a:defRPr>
+    </a:lvl7pPr>
+    <a:lvl8pPr marL="3200400" algn="l" defTabSz="914400" rtl="0" eaLnBrk="1" latinLnBrk="0" hangingPunct="1">
+      <a:defRPr sz="1200" kern="1200">
+        <a:solidFill>
+          <a:schemeClr val="tx1"/>
+        </a:solidFill>
+        <a:latin typeface="+mn-lt"/>
+        <a:ea typeface="+mn-ea"/>
+        <a:cs typeface="+mn-cs"/>
+      </a:defRPr>
+    </a:lvl8pPr>
+    <a:lvl9pPr marL="3657600" algn="l" defTabSz="914400" rtl="0" eaLnBrk="1" latinLnBrk="0" hangingPunct="1">
+      <a:defRPr sz="1200" kern="1200">
+        <a:solidFill>
+          <a:schemeClr val="tx1"/>
+        </a:solidFill>
+        <a:latin typeface="+mn-lt"/>
+        <a:ea typeface="+mn-ea"/>
+        <a:cs typeface="+mn-cs"/>
+      </a:defRPr>
+    </a:lvl9pPr>
+  </p:notesStyle>
+</p:notesMaster>
+</file>
+
+<file path=ppt/notesSlides/notesSlide1.xml><?xml version="1.0" encoding="utf-8"?>
+<p:notes xmlns:a="http://schemas.openxmlformats.org/drawingml/2006/main" xmlns:r="http://schemas.openxmlformats.org/officeDocument/2006/relationships" xmlns:p="http://schemas.openxmlformats.org/presentationml/2006/main">
+  <p:cSld>
+    <p:spTree>
+      <p:nvGrpSpPr>
+        <p:cNvPr id="1" name=""/>
+        <p:cNvGrpSpPr/>
+        <p:nvPr/>
+      </p:nvGrpSpPr>
+      <p:grpSpPr>
+        <a:xfrm>
+          <a:off x="0" y="0"/>
+          <a:ext cx="0" cy="0"/>
+          <a:chOff x="0" y="0"/>
+          <a:chExt cx="0" cy="0"/>
+        </a:xfrm>
+      </p:grpSpPr>
+      <p:sp>
+        <p:nvSpPr>
+          <p:cNvPr id="2" name="Pladsholder til slidebillede 1"/>
+          <p:cNvSpPr>
+            <a:spLocks noGrp="1" noRot="1" noChangeAspect="1"/>
+          </p:cNvSpPr>
+          <p:nvPr>
+            <p:ph type="sldImg"/>
+          </p:nvPr>
+        </p:nvSpPr>
+        <p:spPr/>
+      </p:sp>
+      <p:sp>
+        <p:nvSpPr>
+          <p:cNvPr id="3" name="Pladsholder til noter 2"/>
+          <p:cNvSpPr>
+            <a:spLocks noGrp="1"/>
+          </p:cNvSpPr>
+          <p:nvPr>
+            <p:ph type="body" idx="1"/>
+          </p:nvPr>
+        </p:nvSpPr>
+        <p:spPr/>
+        <p:txBody>
+          <a:bodyPr/>
+          <a:lstStyle/>
+          <a:p>
+            <a:r>
+              <a:rPr lang="da-DK" dirty="0"/>
+              <a:t>Initial </a:t>
+            </a:r>
+            <a:r>
+              <a:rPr lang="da-DK" dirty="0" err="1"/>
+              <a:t>thoughts</a:t>
+            </a:r>
+            <a:r>
+              <a:rPr lang="da-DK" dirty="0"/>
+              <a:t>:</a:t>
+            </a:r>
+          </a:p>
+          <a:p>
+            <a:pPr marL="171450" indent="-171450">
+              <a:buFontTx/>
+              <a:buChar char="-"/>
+            </a:pPr>
+            <a:r>
+              <a:rPr lang="da-DK" dirty="0" err="1"/>
+              <a:t>I’ve</a:t>
+            </a:r>
+            <a:r>
+              <a:rPr lang="da-DK" dirty="0"/>
+              <a:t> </a:t>
+            </a:r>
+            <a:r>
+              <a:rPr lang="da-DK" dirty="0" err="1"/>
+              <a:t>worked</a:t>
+            </a:r>
+            <a:r>
+              <a:rPr lang="da-DK" dirty="0"/>
+              <a:t> on </a:t>
+            </a:r>
+            <a:r>
+              <a:rPr lang="da-DK" dirty="0" err="1"/>
+              <a:t>something</a:t>
+            </a:r>
+            <a:r>
+              <a:rPr lang="da-DK" dirty="0"/>
+              <a:t> </a:t>
+            </a:r>
+            <a:r>
+              <a:rPr lang="da-DK" dirty="0" err="1"/>
+              <a:t>very</a:t>
+            </a:r>
+            <a:r>
+              <a:rPr lang="da-DK" dirty="0"/>
+              <a:t> </a:t>
+            </a:r>
+            <a:r>
+              <a:rPr lang="da-DK" dirty="0" err="1"/>
+              <a:t>similar</a:t>
+            </a:r>
+            <a:r>
+              <a:rPr lang="da-DK" dirty="0"/>
+              <a:t> </a:t>
+            </a:r>
+            <a:r>
+              <a:rPr lang="da-DK" dirty="0" err="1"/>
+              <a:t>before</a:t>
+            </a:r>
+            <a:endParaRPr lang="da-DK" dirty="0"/>
+          </a:p>
+          <a:p>
+            <a:pPr marL="628650" lvl="1" indent="-171450">
+              <a:buFontTx/>
+              <a:buChar char="-"/>
+            </a:pPr>
+            <a:r>
+              <a:rPr lang="da-DK" dirty="0"/>
+              <a:t>Did not </a:t>
+            </a:r>
+            <a:r>
+              <a:rPr lang="da-DK" dirty="0" err="1"/>
+              <a:t>mess</a:t>
+            </a:r>
+            <a:r>
+              <a:rPr lang="da-DK" dirty="0"/>
+              <a:t> with the controllers </a:t>
+            </a:r>
+            <a:r>
+              <a:rPr lang="da-DK" dirty="0" err="1"/>
+              <a:t>much</a:t>
+            </a:r>
+            <a:r>
+              <a:rPr lang="da-DK" dirty="0"/>
+              <a:t> </a:t>
+            </a:r>
+            <a:r>
+              <a:rPr lang="da-DK" dirty="0" err="1"/>
+              <a:t>though</a:t>
+            </a:r>
+            <a:r>
+              <a:rPr lang="da-DK" dirty="0"/>
+              <a:t> and </a:t>
+            </a:r>
+            <a:r>
+              <a:rPr lang="da-DK" dirty="0" err="1"/>
+              <a:t>was</a:t>
+            </a:r>
+            <a:r>
+              <a:rPr lang="da-DK" dirty="0"/>
+              <a:t> </a:t>
+            </a:r>
+            <a:r>
+              <a:rPr lang="da-DK" dirty="0" err="1"/>
+              <a:t>mostly</a:t>
+            </a:r>
+            <a:r>
+              <a:rPr lang="da-DK" dirty="0"/>
+              <a:t> </a:t>
+            </a:r>
+            <a:r>
+              <a:rPr lang="da-DK" dirty="0" err="1"/>
+              <a:t>frontend</a:t>
+            </a:r>
+            <a:endParaRPr lang="da-DK" dirty="0"/>
+          </a:p>
+          <a:p>
+            <a:pPr marL="171450" indent="-171450">
+              <a:buFontTx/>
+              <a:buChar char="-"/>
+            </a:pPr>
+            <a:r>
+              <a:rPr lang="da-DK" dirty="0" err="1"/>
+              <a:t>Used</a:t>
+            </a:r>
+            <a:r>
+              <a:rPr lang="da-DK" dirty="0"/>
+              <a:t> to the </a:t>
+            </a:r>
+            <a:r>
+              <a:rPr lang="da-DK" dirty="0" err="1"/>
+              <a:t>whole</a:t>
+            </a:r>
+            <a:r>
+              <a:rPr lang="da-DK" dirty="0"/>
+              <a:t> </a:t>
+            </a:r>
+            <a:r>
+              <a:rPr lang="da-DK" dirty="0" err="1"/>
+              <a:t>git</a:t>
+            </a:r>
+            <a:r>
+              <a:rPr lang="da-DK" dirty="0"/>
+              <a:t>-push</a:t>
+            </a:r>
+          </a:p>
+          <a:p>
+            <a:pPr marL="171450" indent="-171450">
+              <a:buFontTx/>
+              <a:buChar char="-"/>
+            </a:pPr>
+            <a:r>
+              <a:rPr lang="da-DK" dirty="0" err="1"/>
+              <a:t>Unsure</a:t>
+            </a:r>
+            <a:r>
+              <a:rPr lang="da-DK" dirty="0"/>
+              <a:t> </a:t>
+            </a:r>
+            <a:r>
+              <a:rPr lang="da-DK" dirty="0" err="1"/>
+              <a:t>if</a:t>
+            </a:r>
+            <a:r>
+              <a:rPr lang="da-DK" dirty="0"/>
+              <a:t> I </a:t>
+            </a:r>
+            <a:r>
+              <a:rPr lang="da-DK" dirty="0" err="1"/>
+              <a:t>would</a:t>
+            </a:r>
+            <a:r>
+              <a:rPr lang="da-DK" dirty="0"/>
+              <a:t> </a:t>
+            </a:r>
+            <a:r>
+              <a:rPr lang="da-DK" dirty="0" err="1"/>
+              <a:t>be</a:t>
+            </a:r>
+            <a:r>
+              <a:rPr lang="da-DK" dirty="0"/>
+              <a:t> </a:t>
+            </a:r>
+            <a:r>
+              <a:rPr lang="da-DK" dirty="0" err="1"/>
+              <a:t>able</a:t>
+            </a:r>
+            <a:r>
+              <a:rPr lang="da-DK" dirty="0"/>
+              <a:t> to finish</a:t>
+            </a:r>
+          </a:p>
+          <a:p>
+            <a:pPr marL="0" indent="0">
+              <a:buFontTx/>
+              <a:buNone/>
+            </a:pPr>
+            <a:endParaRPr lang="da-DK" dirty="0"/>
+          </a:p>
+          <a:p>
+            <a:pPr marL="0" indent="0">
+              <a:buFontTx/>
+              <a:buNone/>
+            </a:pPr>
+            <a:r>
+              <a:rPr lang="da-DK" dirty="0" err="1"/>
+              <a:t>Skipping</a:t>
+            </a:r>
+            <a:r>
+              <a:rPr lang="da-DK" dirty="0"/>
+              <a:t> </a:t>
+            </a:r>
+            <a:r>
+              <a:rPr lang="da-DK" dirty="0" err="1"/>
+              <a:t>explanation</a:t>
+            </a:r>
+            <a:r>
+              <a:rPr lang="da-DK" dirty="0"/>
+              <a:t> of </a:t>
+            </a:r>
+            <a:r>
+              <a:rPr lang="da-DK" dirty="0" err="1"/>
+              <a:t>structure</a:t>
+            </a:r>
+            <a:r>
+              <a:rPr lang="da-DK" dirty="0"/>
+              <a:t> </a:t>
+            </a:r>
+            <a:r>
+              <a:rPr lang="da-DK" dirty="0" err="1"/>
+              <a:t>because</a:t>
+            </a:r>
+            <a:r>
+              <a:rPr lang="da-DK" dirty="0"/>
+              <a:t> </a:t>
+            </a:r>
+            <a:r>
+              <a:rPr lang="da-DK" dirty="0" err="1"/>
+              <a:t>we</a:t>
+            </a:r>
+            <a:r>
+              <a:rPr lang="da-DK" dirty="0"/>
+              <a:t> all </a:t>
+            </a:r>
+            <a:r>
+              <a:rPr lang="da-DK" dirty="0" err="1"/>
+              <a:t>know</a:t>
+            </a:r>
+            <a:r>
+              <a:rPr lang="da-DK" dirty="0"/>
+              <a:t> it</a:t>
+            </a:r>
+          </a:p>
+        </p:txBody>
+      </p:sp>
+      <p:sp>
+        <p:nvSpPr>
+          <p:cNvPr id="4" name="Pladsholder til slidenummer 3"/>
+          <p:cNvSpPr>
+            <a:spLocks noGrp="1"/>
+          </p:cNvSpPr>
+          <p:nvPr>
+            <p:ph type="sldNum" sz="quarter" idx="5"/>
+          </p:nvPr>
+        </p:nvSpPr>
+        <p:spPr/>
+        <p:txBody>
+          <a:bodyPr/>
+          <a:lstStyle/>
+          <a:p>
+            <a:fld id="{C2B1EF5D-2231-4646-8EED-1BCCADFE16C5}" type="slidenum">
+              <a:rPr lang="da-DK" smtClean="0"/>
+              <a:t>1</a:t>
+            </a:fld>
+            <a:endParaRPr lang="da-DK"/>
+          </a:p>
+        </p:txBody>
+      </p:sp>
+    </p:spTree>
+    <p:extLst>
+      <p:ext uri="{BB962C8B-B14F-4D97-AF65-F5344CB8AC3E}">
+        <p14:creationId xmlns:p14="http://schemas.microsoft.com/office/powerpoint/2010/main" val="1033343221"/>
+      </p:ext>
+    </p:extLst>
+  </p:cSld>
+  <p:clrMapOvr>
+    <a:masterClrMapping/>
+  </p:clrMapOvr>
+</p:notes>
+</file>
+
+<file path=ppt/notesSlides/notesSlide2.xml><?xml version="1.0" encoding="utf-8"?>
+<p:notes xmlns:a="http://schemas.openxmlformats.org/drawingml/2006/main" xmlns:r="http://schemas.openxmlformats.org/officeDocument/2006/relationships" xmlns:p="http://schemas.openxmlformats.org/presentationml/2006/main">
+  <p:cSld>
+    <p:spTree>
+      <p:nvGrpSpPr>
+        <p:cNvPr id="1" name=""/>
+        <p:cNvGrpSpPr/>
+        <p:nvPr/>
+      </p:nvGrpSpPr>
+      <p:grpSpPr>
+        <a:xfrm>
+          <a:off x="0" y="0"/>
+          <a:ext cx="0" cy="0"/>
+          <a:chOff x="0" y="0"/>
+          <a:chExt cx="0" cy="0"/>
+        </a:xfrm>
+      </p:grpSpPr>
+      <p:sp>
+        <p:nvSpPr>
+          <p:cNvPr id="2" name="Pladsholder til slidebillede 1"/>
+          <p:cNvSpPr>
+            <a:spLocks noGrp="1" noRot="1" noChangeAspect="1"/>
+          </p:cNvSpPr>
+          <p:nvPr>
+            <p:ph type="sldImg"/>
+          </p:nvPr>
+        </p:nvSpPr>
+        <p:spPr/>
+      </p:sp>
+      <p:sp>
+        <p:nvSpPr>
+          <p:cNvPr id="3" name="Pladsholder til noter 2"/>
+          <p:cNvSpPr>
+            <a:spLocks noGrp="1"/>
+          </p:cNvSpPr>
+          <p:nvPr>
+            <p:ph type="body" idx="1"/>
+          </p:nvPr>
+        </p:nvSpPr>
+        <p:spPr/>
+        <p:txBody>
+          <a:bodyPr/>
+          <a:lstStyle/>
+          <a:p>
+            <a:r>
+              <a:rPr lang="da-DK" dirty="0" err="1"/>
+              <a:t>Could</a:t>
+            </a:r>
+            <a:r>
+              <a:rPr lang="da-DK" dirty="0"/>
+              <a:t> have </a:t>
+            </a:r>
+            <a:r>
+              <a:rPr lang="da-DK" dirty="0" err="1"/>
+              <a:t>one</a:t>
+            </a:r>
+            <a:r>
+              <a:rPr lang="da-DK" dirty="0"/>
+              <a:t> for </a:t>
+            </a:r>
+            <a:r>
+              <a:rPr lang="da-DK" dirty="0" err="1"/>
+              <a:t>HasInsufficientStock</a:t>
+            </a:r>
+            <a:r>
+              <a:rPr lang="da-DK" dirty="0"/>
+              <a:t> in </a:t>
+            </a:r>
+            <a:r>
+              <a:rPr lang="da-DK" dirty="0" err="1"/>
+              <a:t>StockService</a:t>
+            </a:r>
+            <a:endParaRPr lang="da-DK" dirty="0"/>
+          </a:p>
+        </p:txBody>
+      </p:sp>
+      <p:sp>
+        <p:nvSpPr>
+          <p:cNvPr id="4" name="Pladsholder til slidenummer 3"/>
+          <p:cNvSpPr>
+            <a:spLocks noGrp="1"/>
+          </p:cNvSpPr>
+          <p:nvPr>
+            <p:ph type="sldNum" sz="quarter" idx="5"/>
+          </p:nvPr>
+        </p:nvSpPr>
+        <p:spPr/>
+        <p:txBody>
+          <a:bodyPr/>
+          <a:lstStyle/>
+          <a:p>
+            <a:fld id="{C2B1EF5D-2231-4646-8EED-1BCCADFE16C5}" type="slidenum">
+              <a:rPr lang="da-DK" smtClean="0"/>
+              <a:t>5</a:t>
+            </a:fld>
+            <a:endParaRPr lang="da-DK"/>
+          </a:p>
+        </p:txBody>
+      </p:sp>
+    </p:spTree>
+    <p:extLst>
+      <p:ext uri="{BB962C8B-B14F-4D97-AF65-F5344CB8AC3E}">
+        <p14:creationId xmlns:p14="http://schemas.microsoft.com/office/powerpoint/2010/main" val="2778589724"/>
+      </p:ext>
+    </p:extLst>
+  </p:cSld>
+  <p:clrMapOvr>
+    <a:masterClrMapping/>
+  </p:clrMapOvr>
+</p:notes>
+</file>
+
+<file path=ppt/slideLayouts/slideLayout1.xml><?xml version="1.0" encoding="utf-8"?>
+<p:sldLayout xmlns:a="http://schemas.openxmlformats.org/drawingml/2006/main" xmlns:r="http://schemas.openxmlformats.org/officeDocument/2006/relationships" xmlns:p="http://schemas.openxmlformats.org/presentationml/2006/main" showMasterSp="0" type="title" preserve="1">
+  <p:cSld name="Titelslide">
+    <p:bg>
+      <p:bgPr>
+        <a:solidFill>
+          <a:schemeClr val="accent1"/>
+        </a:solidFill>
+        <a:effectLst/>
+      </p:bgPr>
+    </p:bg>
+    <p:spTree>
+      <p:nvGrpSpPr>
+        <p:cNvPr id="1" name=""/>
+        <p:cNvGrpSpPr/>
+        <p:nvPr/>
+      </p:nvGrpSpPr>
+      <p:grpSpPr>
+        <a:xfrm>
+          <a:off x="0" y="0"/>
+          <a:ext cx="0" cy="0"/>
+          <a:chOff x="0" y="0"/>
+          <a:chExt cx="0" cy="0"/>
+        </a:xfrm>
+      </p:grpSpPr>
+      <p:sp>
+        <p:nvSpPr>
+          <p:cNvPr id="11" name="Freeform 6" title="scalloped circle"/>
+          <p:cNvSpPr/>
+          <p:nvPr/>
+        </p:nvSpPr>
+        <p:spPr bwMode="auto">
+          <a:xfrm>
+            <a:off x="3557016" y="630936"/>
+            <a:ext cx="5235575" cy="5229225"/>
+          </a:xfrm>
+          <a:custGeom>
+            <a:avLst/>
+            <a:gdLst/>
+            <a:ahLst/>
+            <a:cxnLst/>
+            <a:rect l="0" t="0" r="r" b="b"/>
+            <a:pathLst>
+              <a:path w="3298" h="3294">
+                <a:moveTo>
+                  <a:pt x="1649" y="0"/>
+                </a:moveTo>
+                <a:lnTo>
+                  <a:pt x="1681" y="3"/>
+                </a:lnTo>
+                <a:lnTo>
+                  <a:pt x="1712" y="11"/>
+                </a:lnTo>
+                <a:lnTo>
+                  <a:pt x="1742" y="23"/>
+                </a:lnTo>
+                <a:lnTo>
+                  <a:pt x="1773" y="38"/>
+                </a:lnTo>
+                <a:lnTo>
+                  <a:pt x="1802" y="55"/>
+                </a:lnTo>
+                <a:lnTo>
+                  <a:pt x="1832" y="73"/>
+                </a:lnTo>
+                <a:lnTo>
+                  <a:pt x="1862" y="89"/>
+                </a:lnTo>
+                <a:lnTo>
+                  <a:pt x="1892" y="105"/>
+                </a:lnTo>
+                <a:lnTo>
+                  <a:pt x="1921" y="117"/>
+                </a:lnTo>
+                <a:lnTo>
+                  <a:pt x="1953" y="125"/>
+                </a:lnTo>
+                <a:lnTo>
+                  <a:pt x="1984" y="129"/>
+                </a:lnTo>
+                <a:lnTo>
+                  <a:pt x="2017" y="129"/>
+                </a:lnTo>
+                <a:lnTo>
+                  <a:pt x="2051" y="127"/>
+                </a:lnTo>
+                <a:lnTo>
+                  <a:pt x="2085" y="123"/>
+                </a:lnTo>
+                <a:lnTo>
+                  <a:pt x="2119" y="118"/>
+                </a:lnTo>
+                <a:lnTo>
+                  <a:pt x="2153" y="114"/>
+                </a:lnTo>
+                <a:lnTo>
+                  <a:pt x="2187" y="111"/>
+                </a:lnTo>
+                <a:lnTo>
+                  <a:pt x="2219" y="112"/>
+                </a:lnTo>
+                <a:lnTo>
+                  <a:pt x="2250" y="116"/>
+                </a:lnTo>
+                <a:lnTo>
+                  <a:pt x="2280" y="125"/>
+                </a:lnTo>
+                <a:lnTo>
+                  <a:pt x="2305" y="138"/>
+                </a:lnTo>
+                <a:lnTo>
+                  <a:pt x="2329" y="155"/>
+                </a:lnTo>
+                <a:lnTo>
+                  <a:pt x="2350" y="175"/>
+                </a:lnTo>
+                <a:lnTo>
+                  <a:pt x="2371" y="198"/>
+                </a:lnTo>
+                <a:lnTo>
+                  <a:pt x="2390" y="222"/>
+                </a:lnTo>
+                <a:lnTo>
+                  <a:pt x="2409" y="247"/>
+                </a:lnTo>
+                <a:lnTo>
+                  <a:pt x="2428" y="272"/>
+                </a:lnTo>
+                <a:lnTo>
+                  <a:pt x="2447" y="296"/>
+                </a:lnTo>
+                <a:lnTo>
+                  <a:pt x="2467" y="319"/>
+                </a:lnTo>
+                <a:lnTo>
+                  <a:pt x="2490" y="339"/>
+                </a:lnTo>
+                <a:lnTo>
+                  <a:pt x="2512" y="357"/>
+                </a:lnTo>
+                <a:lnTo>
+                  <a:pt x="2537" y="371"/>
+                </a:lnTo>
+                <a:lnTo>
+                  <a:pt x="2564" y="383"/>
+                </a:lnTo>
+                <a:lnTo>
+                  <a:pt x="2593" y="393"/>
+                </a:lnTo>
+                <a:lnTo>
+                  <a:pt x="2623" y="402"/>
+                </a:lnTo>
+                <a:lnTo>
+                  <a:pt x="2653" y="410"/>
+                </a:lnTo>
+                <a:lnTo>
+                  <a:pt x="2684" y="418"/>
+                </a:lnTo>
+                <a:lnTo>
+                  <a:pt x="2713" y="427"/>
+                </a:lnTo>
+                <a:lnTo>
+                  <a:pt x="2742" y="437"/>
+                </a:lnTo>
+                <a:lnTo>
+                  <a:pt x="2769" y="449"/>
+                </a:lnTo>
+                <a:lnTo>
+                  <a:pt x="2793" y="464"/>
+                </a:lnTo>
+                <a:lnTo>
+                  <a:pt x="2815" y="482"/>
+                </a:lnTo>
+                <a:lnTo>
+                  <a:pt x="2833" y="504"/>
+                </a:lnTo>
+                <a:lnTo>
+                  <a:pt x="2848" y="528"/>
+                </a:lnTo>
+                <a:lnTo>
+                  <a:pt x="2860" y="555"/>
+                </a:lnTo>
+                <a:lnTo>
+                  <a:pt x="2870" y="584"/>
+                </a:lnTo>
+                <a:lnTo>
+                  <a:pt x="2879" y="613"/>
+                </a:lnTo>
+                <a:lnTo>
+                  <a:pt x="2887" y="644"/>
+                </a:lnTo>
+                <a:lnTo>
+                  <a:pt x="2895" y="674"/>
+                </a:lnTo>
+                <a:lnTo>
+                  <a:pt x="2904" y="704"/>
+                </a:lnTo>
+                <a:lnTo>
+                  <a:pt x="2914" y="733"/>
+                </a:lnTo>
+                <a:lnTo>
+                  <a:pt x="2926" y="760"/>
+                </a:lnTo>
+                <a:lnTo>
+                  <a:pt x="2940" y="785"/>
+                </a:lnTo>
+                <a:lnTo>
+                  <a:pt x="2958" y="807"/>
+                </a:lnTo>
+                <a:lnTo>
+                  <a:pt x="2978" y="830"/>
+                </a:lnTo>
+                <a:lnTo>
+                  <a:pt x="3001" y="850"/>
+                </a:lnTo>
+                <a:lnTo>
+                  <a:pt x="3025" y="869"/>
+                </a:lnTo>
+                <a:lnTo>
+                  <a:pt x="3051" y="888"/>
+                </a:lnTo>
+                <a:lnTo>
+                  <a:pt x="3076" y="907"/>
+                </a:lnTo>
+                <a:lnTo>
+                  <a:pt x="3100" y="926"/>
+                </a:lnTo>
+                <a:lnTo>
+                  <a:pt x="3123" y="947"/>
+                </a:lnTo>
+                <a:lnTo>
+                  <a:pt x="3143" y="968"/>
+                </a:lnTo>
+                <a:lnTo>
+                  <a:pt x="3160" y="992"/>
+                </a:lnTo>
+                <a:lnTo>
+                  <a:pt x="3173" y="1017"/>
+                </a:lnTo>
+                <a:lnTo>
+                  <a:pt x="3182" y="1047"/>
+                </a:lnTo>
+                <a:lnTo>
+                  <a:pt x="3186" y="1078"/>
+                </a:lnTo>
+                <a:lnTo>
+                  <a:pt x="3187" y="1110"/>
+                </a:lnTo>
+                <a:lnTo>
+                  <a:pt x="3184" y="1144"/>
+                </a:lnTo>
+                <a:lnTo>
+                  <a:pt x="3180" y="1178"/>
+                </a:lnTo>
+                <a:lnTo>
+                  <a:pt x="3175" y="1212"/>
+                </a:lnTo>
+                <a:lnTo>
+                  <a:pt x="3171" y="1246"/>
+                </a:lnTo>
+                <a:lnTo>
+                  <a:pt x="3169" y="1280"/>
+                </a:lnTo>
+                <a:lnTo>
+                  <a:pt x="3169" y="1313"/>
+                </a:lnTo>
+                <a:lnTo>
+                  <a:pt x="3173" y="1344"/>
+                </a:lnTo>
+                <a:lnTo>
+                  <a:pt x="3181" y="1375"/>
+                </a:lnTo>
+                <a:lnTo>
+                  <a:pt x="3193" y="1404"/>
+                </a:lnTo>
+                <a:lnTo>
+                  <a:pt x="3209" y="1434"/>
+                </a:lnTo>
+                <a:lnTo>
+                  <a:pt x="3225" y="1464"/>
+                </a:lnTo>
+                <a:lnTo>
+                  <a:pt x="3243" y="1494"/>
+                </a:lnTo>
+                <a:lnTo>
+                  <a:pt x="3260" y="1523"/>
+                </a:lnTo>
+                <a:lnTo>
+                  <a:pt x="3275" y="1554"/>
+                </a:lnTo>
+                <a:lnTo>
+                  <a:pt x="3287" y="1584"/>
+                </a:lnTo>
+                <a:lnTo>
+                  <a:pt x="3295" y="1615"/>
+                </a:lnTo>
+                <a:lnTo>
+                  <a:pt x="3298" y="1647"/>
+                </a:lnTo>
+                <a:lnTo>
+                  <a:pt x="3295" y="1679"/>
+                </a:lnTo>
+                <a:lnTo>
+                  <a:pt x="3287" y="1710"/>
+                </a:lnTo>
+                <a:lnTo>
+                  <a:pt x="3275" y="1740"/>
+                </a:lnTo>
+                <a:lnTo>
+                  <a:pt x="3260" y="1771"/>
+                </a:lnTo>
+                <a:lnTo>
+                  <a:pt x="3243" y="1800"/>
+                </a:lnTo>
+                <a:lnTo>
+                  <a:pt x="3225" y="1830"/>
+                </a:lnTo>
+                <a:lnTo>
+                  <a:pt x="3209" y="1860"/>
+                </a:lnTo>
+                <a:lnTo>
+                  <a:pt x="3193" y="1890"/>
+                </a:lnTo>
+                <a:lnTo>
+                  <a:pt x="3181" y="1919"/>
+                </a:lnTo>
+                <a:lnTo>
+                  <a:pt x="3173" y="1950"/>
+                </a:lnTo>
+                <a:lnTo>
+                  <a:pt x="3169" y="1981"/>
+                </a:lnTo>
+                <a:lnTo>
+                  <a:pt x="3169" y="2014"/>
+                </a:lnTo>
+                <a:lnTo>
+                  <a:pt x="3171" y="2048"/>
+                </a:lnTo>
+                <a:lnTo>
+                  <a:pt x="3175" y="2082"/>
+                </a:lnTo>
+                <a:lnTo>
+                  <a:pt x="3180" y="2116"/>
+                </a:lnTo>
+                <a:lnTo>
+                  <a:pt x="3184" y="2150"/>
+                </a:lnTo>
+                <a:lnTo>
+                  <a:pt x="3187" y="2184"/>
+                </a:lnTo>
+                <a:lnTo>
+                  <a:pt x="3186" y="2216"/>
+                </a:lnTo>
+                <a:lnTo>
+                  <a:pt x="3182" y="2247"/>
+                </a:lnTo>
+                <a:lnTo>
+                  <a:pt x="3173" y="2277"/>
+                </a:lnTo>
+                <a:lnTo>
+                  <a:pt x="3160" y="2302"/>
+                </a:lnTo>
+                <a:lnTo>
+                  <a:pt x="3143" y="2326"/>
+                </a:lnTo>
+                <a:lnTo>
+                  <a:pt x="3123" y="2347"/>
+                </a:lnTo>
+                <a:lnTo>
+                  <a:pt x="3100" y="2368"/>
+                </a:lnTo>
+                <a:lnTo>
+                  <a:pt x="3076" y="2387"/>
+                </a:lnTo>
+                <a:lnTo>
+                  <a:pt x="3051" y="2406"/>
+                </a:lnTo>
+                <a:lnTo>
+                  <a:pt x="3025" y="2425"/>
+                </a:lnTo>
+                <a:lnTo>
+                  <a:pt x="3001" y="2444"/>
+                </a:lnTo>
+                <a:lnTo>
+                  <a:pt x="2978" y="2464"/>
+                </a:lnTo>
+                <a:lnTo>
+                  <a:pt x="2958" y="2487"/>
+                </a:lnTo>
+                <a:lnTo>
+                  <a:pt x="2940" y="2509"/>
+                </a:lnTo>
+                <a:lnTo>
+                  <a:pt x="2926" y="2534"/>
+                </a:lnTo>
+                <a:lnTo>
+                  <a:pt x="2914" y="2561"/>
+                </a:lnTo>
+                <a:lnTo>
+                  <a:pt x="2904" y="2590"/>
+                </a:lnTo>
+                <a:lnTo>
+                  <a:pt x="2895" y="2620"/>
+                </a:lnTo>
+                <a:lnTo>
+                  <a:pt x="2887" y="2650"/>
+                </a:lnTo>
+                <a:lnTo>
+                  <a:pt x="2879" y="2681"/>
+                </a:lnTo>
+                <a:lnTo>
+                  <a:pt x="2870" y="2710"/>
+                </a:lnTo>
+                <a:lnTo>
+                  <a:pt x="2860" y="2739"/>
+                </a:lnTo>
+                <a:lnTo>
+                  <a:pt x="2848" y="2766"/>
+                </a:lnTo>
+                <a:lnTo>
+                  <a:pt x="2833" y="2790"/>
+                </a:lnTo>
+                <a:lnTo>
+                  <a:pt x="2815" y="2812"/>
+                </a:lnTo>
+                <a:lnTo>
+                  <a:pt x="2793" y="2830"/>
+                </a:lnTo>
+                <a:lnTo>
+                  <a:pt x="2769" y="2845"/>
+                </a:lnTo>
+                <a:lnTo>
+                  <a:pt x="2742" y="2857"/>
+                </a:lnTo>
+                <a:lnTo>
+                  <a:pt x="2713" y="2867"/>
+                </a:lnTo>
+                <a:lnTo>
+                  <a:pt x="2684" y="2876"/>
+                </a:lnTo>
+                <a:lnTo>
+                  <a:pt x="2653" y="2884"/>
+                </a:lnTo>
+                <a:lnTo>
+                  <a:pt x="2623" y="2892"/>
+                </a:lnTo>
+                <a:lnTo>
+                  <a:pt x="2593" y="2901"/>
+                </a:lnTo>
+                <a:lnTo>
+                  <a:pt x="2564" y="2911"/>
+                </a:lnTo>
+                <a:lnTo>
+                  <a:pt x="2537" y="2923"/>
+                </a:lnTo>
+                <a:lnTo>
+                  <a:pt x="2512" y="2937"/>
+                </a:lnTo>
+                <a:lnTo>
+                  <a:pt x="2490" y="2955"/>
+                </a:lnTo>
+                <a:lnTo>
+                  <a:pt x="2467" y="2975"/>
+                </a:lnTo>
+                <a:lnTo>
+                  <a:pt x="2447" y="2998"/>
+                </a:lnTo>
+                <a:lnTo>
+                  <a:pt x="2428" y="3022"/>
+                </a:lnTo>
+                <a:lnTo>
+                  <a:pt x="2409" y="3047"/>
+                </a:lnTo>
+                <a:lnTo>
+                  <a:pt x="2390" y="3072"/>
+                </a:lnTo>
+                <a:lnTo>
+                  <a:pt x="2371" y="3096"/>
+                </a:lnTo>
+                <a:lnTo>
+                  <a:pt x="2350" y="3119"/>
+                </a:lnTo>
+                <a:lnTo>
+                  <a:pt x="2329" y="3139"/>
+                </a:lnTo>
+                <a:lnTo>
+                  <a:pt x="2305" y="3156"/>
+                </a:lnTo>
+                <a:lnTo>
+                  <a:pt x="2280" y="3169"/>
+                </a:lnTo>
+                <a:lnTo>
+                  <a:pt x="2250" y="3178"/>
+                </a:lnTo>
+                <a:lnTo>
+                  <a:pt x="2219" y="3182"/>
+                </a:lnTo>
+                <a:lnTo>
+                  <a:pt x="2187" y="3183"/>
+                </a:lnTo>
+                <a:lnTo>
+                  <a:pt x="2153" y="3180"/>
+                </a:lnTo>
+                <a:lnTo>
+                  <a:pt x="2119" y="3176"/>
+                </a:lnTo>
+                <a:lnTo>
+                  <a:pt x="2085" y="3171"/>
+                </a:lnTo>
+                <a:lnTo>
+                  <a:pt x="2051" y="3167"/>
+                </a:lnTo>
+                <a:lnTo>
+                  <a:pt x="2017" y="3165"/>
+                </a:lnTo>
+                <a:lnTo>
+                  <a:pt x="1984" y="3165"/>
+                </a:lnTo>
+                <a:lnTo>
+                  <a:pt x="1953" y="3169"/>
+                </a:lnTo>
+                <a:lnTo>
+                  <a:pt x="1921" y="3177"/>
+                </a:lnTo>
+                <a:lnTo>
+                  <a:pt x="1892" y="3189"/>
+                </a:lnTo>
+                <a:lnTo>
+                  <a:pt x="1862" y="3205"/>
+                </a:lnTo>
+                <a:lnTo>
+                  <a:pt x="1832" y="3221"/>
+                </a:lnTo>
+                <a:lnTo>
+                  <a:pt x="1802" y="3239"/>
+                </a:lnTo>
+                <a:lnTo>
+                  <a:pt x="1773" y="3256"/>
+                </a:lnTo>
+                <a:lnTo>
+                  <a:pt x="1742" y="3271"/>
+                </a:lnTo>
+                <a:lnTo>
+                  <a:pt x="1712" y="3283"/>
+                </a:lnTo>
+                <a:lnTo>
+                  <a:pt x="1681" y="3291"/>
+                </a:lnTo>
+                <a:lnTo>
+                  <a:pt x="1649" y="3294"/>
+                </a:lnTo>
+                <a:lnTo>
+                  <a:pt x="1617" y="3291"/>
+                </a:lnTo>
+                <a:lnTo>
+                  <a:pt x="1586" y="3283"/>
+                </a:lnTo>
+                <a:lnTo>
+                  <a:pt x="1556" y="3271"/>
+                </a:lnTo>
+                <a:lnTo>
+                  <a:pt x="1525" y="3256"/>
+                </a:lnTo>
+                <a:lnTo>
+                  <a:pt x="1496" y="3239"/>
+                </a:lnTo>
+                <a:lnTo>
+                  <a:pt x="1466" y="3221"/>
+                </a:lnTo>
+                <a:lnTo>
+                  <a:pt x="1436" y="3205"/>
+                </a:lnTo>
+                <a:lnTo>
+                  <a:pt x="1406" y="3189"/>
+                </a:lnTo>
+                <a:lnTo>
+                  <a:pt x="1376" y="3177"/>
+                </a:lnTo>
+                <a:lnTo>
+                  <a:pt x="1345" y="3169"/>
+                </a:lnTo>
+                <a:lnTo>
+                  <a:pt x="1314" y="3165"/>
+                </a:lnTo>
+                <a:lnTo>
+                  <a:pt x="1281" y="3165"/>
+                </a:lnTo>
+                <a:lnTo>
+                  <a:pt x="1247" y="3167"/>
+                </a:lnTo>
+                <a:lnTo>
+                  <a:pt x="1213" y="3171"/>
+                </a:lnTo>
+                <a:lnTo>
+                  <a:pt x="1179" y="3176"/>
+                </a:lnTo>
+                <a:lnTo>
+                  <a:pt x="1145" y="3180"/>
+                </a:lnTo>
+                <a:lnTo>
+                  <a:pt x="1111" y="3183"/>
+                </a:lnTo>
+                <a:lnTo>
+                  <a:pt x="1079" y="3182"/>
+                </a:lnTo>
+                <a:lnTo>
+                  <a:pt x="1048" y="3178"/>
+                </a:lnTo>
+                <a:lnTo>
+                  <a:pt x="1018" y="3169"/>
+                </a:lnTo>
+                <a:lnTo>
+                  <a:pt x="993" y="3156"/>
+                </a:lnTo>
+                <a:lnTo>
+                  <a:pt x="969" y="3139"/>
+                </a:lnTo>
+                <a:lnTo>
+                  <a:pt x="948" y="3119"/>
+                </a:lnTo>
+                <a:lnTo>
+                  <a:pt x="927" y="3096"/>
+                </a:lnTo>
+                <a:lnTo>
+                  <a:pt x="908" y="3072"/>
+                </a:lnTo>
+                <a:lnTo>
+                  <a:pt x="889" y="3047"/>
+                </a:lnTo>
+                <a:lnTo>
+                  <a:pt x="870" y="3022"/>
+                </a:lnTo>
+                <a:lnTo>
+                  <a:pt x="851" y="2998"/>
+                </a:lnTo>
+                <a:lnTo>
+                  <a:pt x="831" y="2975"/>
+                </a:lnTo>
+                <a:lnTo>
+                  <a:pt x="808" y="2955"/>
+                </a:lnTo>
+                <a:lnTo>
+                  <a:pt x="786" y="2937"/>
+                </a:lnTo>
+                <a:lnTo>
+                  <a:pt x="761" y="2923"/>
+                </a:lnTo>
+                <a:lnTo>
+                  <a:pt x="734" y="2911"/>
+                </a:lnTo>
+                <a:lnTo>
+                  <a:pt x="705" y="2901"/>
+                </a:lnTo>
+                <a:lnTo>
+                  <a:pt x="675" y="2892"/>
+                </a:lnTo>
+                <a:lnTo>
+                  <a:pt x="645" y="2884"/>
+                </a:lnTo>
+                <a:lnTo>
+                  <a:pt x="614" y="2876"/>
+                </a:lnTo>
+                <a:lnTo>
+                  <a:pt x="585" y="2867"/>
+                </a:lnTo>
+                <a:lnTo>
+                  <a:pt x="556" y="2857"/>
+                </a:lnTo>
+                <a:lnTo>
+                  <a:pt x="529" y="2845"/>
+                </a:lnTo>
+                <a:lnTo>
+                  <a:pt x="505" y="2830"/>
+                </a:lnTo>
+                <a:lnTo>
+                  <a:pt x="483" y="2812"/>
+                </a:lnTo>
+                <a:lnTo>
+                  <a:pt x="465" y="2790"/>
+                </a:lnTo>
+                <a:lnTo>
+                  <a:pt x="450" y="2766"/>
+                </a:lnTo>
+                <a:lnTo>
+                  <a:pt x="438" y="2739"/>
+                </a:lnTo>
+                <a:lnTo>
+                  <a:pt x="428" y="2710"/>
+                </a:lnTo>
+                <a:lnTo>
+                  <a:pt x="419" y="2681"/>
+                </a:lnTo>
+                <a:lnTo>
+                  <a:pt x="411" y="2650"/>
+                </a:lnTo>
+                <a:lnTo>
+                  <a:pt x="403" y="2620"/>
+                </a:lnTo>
+                <a:lnTo>
+                  <a:pt x="394" y="2590"/>
+                </a:lnTo>
+                <a:lnTo>
+                  <a:pt x="384" y="2561"/>
+                </a:lnTo>
+                <a:lnTo>
+                  <a:pt x="372" y="2534"/>
+                </a:lnTo>
+                <a:lnTo>
+                  <a:pt x="358" y="2509"/>
+                </a:lnTo>
+                <a:lnTo>
+                  <a:pt x="340" y="2487"/>
+                </a:lnTo>
+                <a:lnTo>
+                  <a:pt x="320" y="2464"/>
+                </a:lnTo>
+                <a:lnTo>
+                  <a:pt x="297" y="2444"/>
+                </a:lnTo>
+                <a:lnTo>
+                  <a:pt x="272" y="2425"/>
+                </a:lnTo>
+                <a:lnTo>
+                  <a:pt x="247" y="2406"/>
+                </a:lnTo>
+                <a:lnTo>
+                  <a:pt x="222" y="2387"/>
+                </a:lnTo>
+                <a:lnTo>
+                  <a:pt x="198" y="2368"/>
+                </a:lnTo>
+                <a:lnTo>
+                  <a:pt x="175" y="2347"/>
+                </a:lnTo>
+                <a:lnTo>
+                  <a:pt x="155" y="2326"/>
+                </a:lnTo>
+                <a:lnTo>
+                  <a:pt x="138" y="2302"/>
+                </a:lnTo>
+                <a:lnTo>
+                  <a:pt x="125" y="2277"/>
+                </a:lnTo>
+                <a:lnTo>
+                  <a:pt x="116" y="2247"/>
+                </a:lnTo>
+                <a:lnTo>
+                  <a:pt x="112" y="2216"/>
+                </a:lnTo>
+                <a:lnTo>
+                  <a:pt x="111" y="2184"/>
+                </a:lnTo>
+                <a:lnTo>
+                  <a:pt x="114" y="2150"/>
+                </a:lnTo>
+                <a:lnTo>
+                  <a:pt x="118" y="2116"/>
+                </a:lnTo>
+                <a:lnTo>
+                  <a:pt x="123" y="2082"/>
+                </a:lnTo>
+                <a:lnTo>
+                  <a:pt x="127" y="2048"/>
+                </a:lnTo>
+                <a:lnTo>
+                  <a:pt x="129" y="2014"/>
+                </a:lnTo>
+                <a:lnTo>
+                  <a:pt x="129" y="1981"/>
+                </a:lnTo>
+                <a:lnTo>
+                  <a:pt x="125" y="1950"/>
+                </a:lnTo>
+                <a:lnTo>
+                  <a:pt x="117" y="1919"/>
+                </a:lnTo>
+                <a:lnTo>
+                  <a:pt x="105" y="1890"/>
+                </a:lnTo>
+                <a:lnTo>
+                  <a:pt x="90" y="1860"/>
+                </a:lnTo>
+                <a:lnTo>
+                  <a:pt x="73" y="1830"/>
+                </a:lnTo>
+                <a:lnTo>
+                  <a:pt x="55" y="1800"/>
+                </a:lnTo>
+                <a:lnTo>
+                  <a:pt x="38" y="1771"/>
+                </a:lnTo>
+                <a:lnTo>
+                  <a:pt x="23" y="1740"/>
+                </a:lnTo>
+                <a:lnTo>
+                  <a:pt x="11" y="1710"/>
+                </a:lnTo>
+                <a:lnTo>
+                  <a:pt x="3" y="1679"/>
+                </a:lnTo>
+                <a:lnTo>
+                  <a:pt x="0" y="1647"/>
+                </a:lnTo>
+                <a:lnTo>
+                  <a:pt x="3" y="1615"/>
+                </a:lnTo>
+                <a:lnTo>
+                  <a:pt x="11" y="1584"/>
+                </a:lnTo>
+                <a:lnTo>
+                  <a:pt x="23" y="1554"/>
+                </a:lnTo>
+                <a:lnTo>
+                  <a:pt x="38" y="1523"/>
+                </a:lnTo>
+                <a:lnTo>
+                  <a:pt x="55" y="1494"/>
+                </a:lnTo>
+                <a:lnTo>
+                  <a:pt x="73" y="1464"/>
+                </a:lnTo>
+                <a:lnTo>
+                  <a:pt x="90" y="1434"/>
+                </a:lnTo>
+                <a:lnTo>
+                  <a:pt x="105" y="1404"/>
+                </a:lnTo>
+                <a:lnTo>
+                  <a:pt x="117" y="1375"/>
+                </a:lnTo>
+                <a:lnTo>
+                  <a:pt x="125" y="1344"/>
+                </a:lnTo>
+                <a:lnTo>
+                  <a:pt x="129" y="1313"/>
+                </a:lnTo>
+                <a:lnTo>
+                  <a:pt x="129" y="1280"/>
+                </a:lnTo>
+                <a:lnTo>
+                  <a:pt x="127" y="1246"/>
+                </a:lnTo>
+                <a:lnTo>
+                  <a:pt x="123" y="1212"/>
+                </a:lnTo>
+                <a:lnTo>
+                  <a:pt x="118" y="1178"/>
+                </a:lnTo>
+                <a:lnTo>
+                  <a:pt x="114" y="1144"/>
+                </a:lnTo>
+                <a:lnTo>
+                  <a:pt x="111" y="1110"/>
+                </a:lnTo>
+                <a:lnTo>
+                  <a:pt x="112" y="1078"/>
+                </a:lnTo>
+                <a:lnTo>
+                  <a:pt x="116" y="1047"/>
+                </a:lnTo>
+                <a:lnTo>
+                  <a:pt x="125" y="1017"/>
+                </a:lnTo>
+                <a:lnTo>
+                  <a:pt x="138" y="992"/>
+                </a:lnTo>
+                <a:lnTo>
+                  <a:pt x="155" y="968"/>
+                </a:lnTo>
+                <a:lnTo>
+                  <a:pt x="175" y="947"/>
+                </a:lnTo>
+                <a:lnTo>
+                  <a:pt x="198" y="926"/>
+                </a:lnTo>
+                <a:lnTo>
+                  <a:pt x="222" y="907"/>
+                </a:lnTo>
+                <a:lnTo>
+                  <a:pt x="247" y="888"/>
+                </a:lnTo>
+                <a:lnTo>
+                  <a:pt x="272" y="869"/>
+                </a:lnTo>
+                <a:lnTo>
+                  <a:pt x="297" y="850"/>
+                </a:lnTo>
+                <a:lnTo>
+                  <a:pt x="320" y="830"/>
+                </a:lnTo>
+                <a:lnTo>
+                  <a:pt x="340" y="807"/>
+                </a:lnTo>
+                <a:lnTo>
+                  <a:pt x="358" y="785"/>
+                </a:lnTo>
+                <a:lnTo>
+                  <a:pt x="372" y="760"/>
+                </a:lnTo>
+                <a:lnTo>
+                  <a:pt x="384" y="733"/>
+                </a:lnTo>
+                <a:lnTo>
+                  <a:pt x="394" y="704"/>
+                </a:lnTo>
+                <a:lnTo>
+                  <a:pt x="403" y="674"/>
+                </a:lnTo>
+                <a:lnTo>
+                  <a:pt x="411" y="644"/>
+                </a:lnTo>
+                <a:lnTo>
+                  <a:pt x="419" y="613"/>
+                </a:lnTo>
+                <a:lnTo>
+                  <a:pt x="428" y="584"/>
+                </a:lnTo>
+                <a:lnTo>
+                  <a:pt x="438" y="555"/>
+                </a:lnTo>
+                <a:lnTo>
+                  <a:pt x="450" y="528"/>
+                </a:lnTo>
+                <a:lnTo>
+                  <a:pt x="465" y="504"/>
+                </a:lnTo>
+                <a:lnTo>
+                  <a:pt x="483" y="482"/>
+                </a:lnTo>
+                <a:lnTo>
+                  <a:pt x="505" y="464"/>
+                </a:lnTo>
+                <a:lnTo>
+                  <a:pt x="529" y="449"/>
+                </a:lnTo>
+                <a:lnTo>
+                  <a:pt x="556" y="437"/>
+                </a:lnTo>
+                <a:lnTo>
+                  <a:pt x="585" y="427"/>
+                </a:lnTo>
+                <a:lnTo>
+                  <a:pt x="614" y="418"/>
+                </a:lnTo>
+                <a:lnTo>
+                  <a:pt x="645" y="410"/>
+                </a:lnTo>
+                <a:lnTo>
+                  <a:pt x="675" y="402"/>
+                </a:lnTo>
+                <a:lnTo>
+                  <a:pt x="705" y="393"/>
+                </a:lnTo>
+                <a:lnTo>
+                  <a:pt x="734" y="383"/>
+                </a:lnTo>
+                <a:lnTo>
+                  <a:pt x="761" y="371"/>
+                </a:lnTo>
+                <a:lnTo>
+                  <a:pt x="786" y="357"/>
+                </a:lnTo>
+                <a:lnTo>
+                  <a:pt x="808" y="339"/>
+                </a:lnTo>
+                <a:lnTo>
+                  <a:pt x="831" y="319"/>
+                </a:lnTo>
+                <a:lnTo>
+                  <a:pt x="851" y="296"/>
+                </a:lnTo>
+                <a:lnTo>
+                  <a:pt x="870" y="272"/>
+                </a:lnTo>
+                <a:lnTo>
+                  <a:pt x="889" y="247"/>
+                </a:lnTo>
+                <a:lnTo>
+                  <a:pt x="908" y="222"/>
+                </a:lnTo>
+                <a:lnTo>
+                  <a:pt x="927" y="198"/>
+                </a:lnTo>
+                <a:lnTo>
+                  <a:pt x="948" y="175"/>
+                </a:lnTo>
+                <a:lnTo>
+                  <a:pt x="969" y="155"/>
+                </a:lnTo>
+                <a:lnTo>
+                  <a:pt x="993" y="138"/>
+                </a:lnTo>
+                <a:lnTo>
+                  <a:pt x="1018" y="125"/>
+                </a:lnTo>
+                <a:lnTo>
+                  <a:pt x="1048" y="116"/>
+                </a:lnTo>
+                <a:lnTo>
+                  <a:pt x="1079" y="112"/>
+                </a:lnTo>
+                <a:lnTo>
+                  <a:pt x="1111" y="111"/>
+                </a:lnTo>
+                <a:lnTo>
+                  <a:pt x="1145" y="114"/>
+                </a:lnTo>
+                <a:lnTo>
+                  <a:pt x="1179" y="118"/>
+                </a:lnTo>
+                <a:lnTo>
+                  <a:pt x="1213" y="123"/>
+                </a:lnTo>
+                <a:lnTo>
+                  <a:pt x="1247" y="127"/>
+                </a:lnTo>
+                <a:lnTo>
+                  <a:pt x="1281" y="129"/>
+                </a:lnTo>
+                <a:lnTo>
+                  <a:pt x="1314" y="129"/>
+                </a:lnTo>
+                <a:lnTo>
+                  <a:pt x="1345" y="125"/>
+                </a:lnTo>
+                <a:lnTo>
+                  <a:pt x="1376" y="117"/>
+                </a:lnTo>
+                <a:lnTo>
+                  <a:pt x="1406" y="105"/>
+                </a:lnTo>
+                <a:lnTo>
+                  <a:pt x="1436" y="89"/>
+                </a:lnTo>
+                <a:lnTo>
+                  <a:pt x="1466" y="73"/>
+                </a:lnTo>
+                <a:lnTo>
+                  <a:pt x="1496" y="55"/>
+                </a:lnTo>
+                <a:lnTo>
+                  <a:pt x="1525" y="38"/>
+                </a:lnTo>
+                <a:lnTo>
+                  <a:pt x="1556" y="23"/>
+                </a:lnTo>
+                <a:lnTo>
+                  <a:pt x="1586" y="11"/>
+                </a:lnTo>
+                <a:lnTo>
+                  <a:pt x="1617" y="3"/>
+                </a:lnTo>
+                <a:lnTo>
+                  <a:pt x="1649" y="0"/>
+                </a:lnTo>
+                <a:close/>
+              </a:path>
+            </a:pathLst>
+          </a:custGeom>
+          <a:solidFill>
+            <a:schemeClr val="bg2"/>
+          </a:solidFill>
+          <a:ln w="0">
+            <a:noFill/>
+            <a:prstDash val="solid"/>
+            <a:round/>
+            <a:headEnd/>
+            <a:tailEnd/>
+          </a:ln>
+        </p:spPr>
+      </p:sp>
+      <p:sp>
+        <p:nvSpPr>
+          <p:cNvPr id="2" name="Title 1"/>
+          <p:cNvSpPr>
+            <a:spLocks noGrp="1"/>
+          </p:cNvSpPr>
+          <p:nvPr>
+            <p:ph type="ctrTitle"/>
+          </p:nvPr>
+        </p:nvSpPr>
+        <p:spPr>
+          <a:xfrm>
+            <a:off x="1078523" y="1098388"/>
+            <a:ext cx="10318418" cy="4394988"/>
           </a:xfrm>
         </p:spPr>
         <p:txBody>
-          <a:bodyPr anchor="b"/>
+          <a:bodyPr anchor="ctr">
+            <a:noAutofit/>
+          </a:bodyPr>
           <a:lstStyle>
             <a:lvl1pPr algn="ctr">
-              <a:defRPr sz="6000"/>
+              <a:defRPr sz="10000" spc="800" baseline="0"/>
             </a:lvl1pPr>
           </a:lstStyle>
           <a:p>
@@ -159,18 +2020,13 @@
               <a:rPr lang="da-DK"/>
               <a:t>Klik for at redigere titeltypografien i masteren</a:t>
             </a:r>
+            <a:endParaRPr lang="en-US" dirty="0"/>
           </a:p>
         </p:txBody>
       </p:sp>
       <p:sp>
         <p:nvSpPr>
-          <p:cNvPr id="3" name="Undertitel 2">
-            <a:extLst>
-              <a:ext uri="{FF2B5EF4-FFF2-40B4-BE49-F238E27FC236}">
-                <a16:creationId xmlns:a16="http://schemas.microsoft.com/office/drawing/2014/main" id="{263CD936-50DC-4AB1-9D2A-2A3D8EAAFA92}"/>
-              </a:ext>
-            </a:extLst>
-          </p:cNvPr>
+          <p:cNvPr id="3" name="Subtitle 2"/>
           <p:cNvSpPr>
             <a:spLocks noGrp="1"/>
           </p:cNvSpPr>
@@ -180,16 +2036,25 @@
         </p:nvSpPr>
         <p:spPr>
           <a:xfrm>
-            <a:off x="1524000" y="3602038"/>
-            <a:ext cx="9144000" cy="1655762"/>
+            <a:off x="2215045" y="5979196"/>
+            <a:ext cx="8045373" cy="742279"/>
           </a:xfrm>
         </p:spPr>
         <p:txBody>
-          <a:bodyPr/>
+          <a:bodyPr anchor="t">
+            <a:normAutofit/>
+          </a:bodyPr>
           <a:lstStyle>
             <a:lvl1pPr marL="0" indent="0" algn="ctr">
+              <a:lnSpc>
+                <a:spcPct val="100000"/>
+              </a:lnSpc>
               <a:buNone/>
-              <a:defRPr sz="2400"/>
+              <a:defRPr sz="2000" b="1" i="0" cap="all" spc="400" baseline="0">
+                <a:solidFill>
+                  <a:schemeClr val="tx2"/>
+                </a:solidFill>
+              </a:defRPr>
             </a:lvl1pPr>
             <a:lvl2pPr marL="457200" indent="0" algn="ctr">
               <a:buNone/>
@@ -229,18 +2094,13 @@
               <a:rPr lang="da-DK"/>
               <a:t>Klik for at redigere undertiteltypografien i masteren</a:t>
             </a:r>
+            <a:endParaRPr lang="en-US" dirty="0"/>
           </a:p>
         </p:txBody>
       </p:sp>
       <p:sp>
         <p:nvSpPr>
-          <p:cNvPr id="4" name="Pladsholder til dato 3">
-            <a:extLst>
-              <a:ext uri="{FF2B5EF4-FFF2-40B4-BE49-F238E27FC236}">
-                <a16:creationId xmlns:a16="http://schemas.microsoft.com/office/drawing/2014/main" id="{F3D30992-C9B6-CDD3-AA6B-C63EBA154812}"/>
-              </a:ext>
-            </a:extLst>
-          </p:cNvPr>
+          <p:cNvPr id="4" name="Date Placeholder 3"/>
           <p:cNvSpPr>
             <a:spLocks noGrp="1"/>
           </p:cNvSpPr>
@@ -248,14 +2108,29 @@
             <p:ph type="dt" sz="half" idx="10"/>
           </p:nvPr>
         </p:nvSpPr>
-        <p:spPr/>
+        <p:spPr>
+          <a:xfrm>
+            <a:off x="1078523" y="6375679"/>
+            <a:ext cx="2329722" cy="348462"/>
+          </a:xfrm>
+        </p:spPr>
         <p:txBody>
           <a:bodyPr/>
-          <a:lstStyle/>
+          <a:lstStyle>
+            <a:lvl1pPr>
+              <a:defRPr baseline="0">
+                <a:solidFill>
+                  <a:schemeClr val="accent1">
+                    <a:lumMod val="50000"/>
+                  </a:schemeClr>
+                </a:solidFill>
+              </a:defRPr>
+            </a:lvl1pPr>
+          </a:lstStyle>
           <a:p>
             <a:fld id="{9F2C61E5-4FB9-4B7B-BFC7-89973F7231D0}" type="datetimeFigureOut">
               <a:rPr lang="da-DK" smtClean="0"/>
-              <a:t>16-03-2026</a:t>
+              <a:t>20-03-2026</a:t>
             </a:fld>
             <a:endParaRPr lang="da-DK"/>
           </a:p>
@@ -263,13 +2138,7 @@
       </p:sp>
       <p:sp>
         <p:nvSpPr>
-          <p:cNvPr id="5" name="Pladsholder til sidefod 4">
-            <a:extLst>
-              <a:ext uri="{FF2B5EF4-FFF2-40B4-BE49-F238E27FC236}">
-                <a16:creationId xmlns:a16="http://schemas.microsoft.com/office/drawing/2014/main" id="{BD08146D-69C5-9B4F-5424-B066667C3D91}"/>
-              </a:ext>
-            </a:extLst>
-          </p:cNvPr>
+          <p:cNvPr id="5" name="Footer Placeholder 4"/>
           <p:cNvSpPr>
             <a:spLocks noGrp="1"/>
           </p:cNvSpPr>
@@ -277,10 +2146,25 @@
             <p:ph type="ftr" sz="quarter" idx="11"/>
           </p:nvPr>
         </p:nvSpPr>
-        <p:spPr/>
+        <p:spPr>
+          <a:xfrm>
+            <a:off x="4180332" y="6375679"/>
+            <a:ext cx="4114800" cy="345796"/>
+          </a:xfrm>
+        </p:spPr>
         <p:txBody>
           <a:bodyPr/>
-          <a:lstStyle/>
+          <a:lstStyle>
+            <a:lvl1pPr>
+              <a:defRPr baseline="0">
+                <a:solidFill>
+                  <a:schemeClr val="accent1">
+                    <a:lumMod val="50000"/>
+                  </a:schemeClr>
+                </a:solidFill>
+              </a:defRPr>
+            </a:lvl1pPr>
+          </a:lstStyle>
           <a:p>
             <a:endParaRPr lang="da-DK"/>
           </a:p>
@@ -288,13 +2172,7 @@
       </p:sp>
       <p:sp>
         <p:nvSpPr>
-          <p:cNvPr id="6" name="Pladsholder til slidenummer 5">
-            <a:extLst>
-              <a:ext uri="{FF2B5EF4-FFF2-40B4-BE49-F238E27FC236}">
-                <a16:creationId xmlns:a16="http://schemas.microsoft.com/office/drawing/2014/main" id="{6839D282-43B0-9A40-B789-690E0D9CF5F0}"/>
-              </a:ext>
-            </a:extLst>
-          </p:cNvPr>
+          <p:cNvPr id="6" name="Slide Number Placeholder 5"/>
           <p:cNvSpPr>
             <a:spLocks noGrp="1"/>
           </p:cNvSpPr>
@@ -302,10 +2180,25 @@
             <p:ph type="sldNum" sz="quarter" idx="12"/>
           </p:nvPr>
         </p:nvSpPr>
-        <p:spPr/>
+        <p:spPr>
+          <a:xfrm>
+            <a:off x="9067218" y="6375679"/>
+            <a:ext cx="2329723" cy="345796"/>
+          </a:xfrm>
+        </p:spPr>
         <p:txBody>
           <a:bodyPr/>
-          <a:lstStyle/>
+          <a:lstStyle>
+            <a:lvl1pPr>
+              <a:defRPr baseline="0">
+                <a:solidFill>
+                  <a:schemeClr val="accent1">
+                    <a:lumMod val="50000"/>
+                  </a:schemeClr>
+                </a:solidFill>
+              </a:defRPr>
+            </a:lvl1pPr>
+          </a:lstStyle>
           <a:p>
             <a:fld id="{AD261232-67BA-4014-8C42-A66C16385292}" type="slidenum">
               <a:rPr lang="da-DK" smtClean="0"/>
@@ -315,10 +2208,48 @@
           </a:p>
         </p:txBody>
       </p:sp>
+      <p:sp>
+        <p:nvSpPr>
+          <p:cNvPr id="13" name="Rectangle 12" title="left edge border"/>
+          <p:cNvSpPr/>
+          <p:nvPr/>
+        </p:nvSpPr>
+        <p:spPr>
+          <a:xfrm>
+            <a:off x="0" y="0"/>
+            <a:ext cx="283464" cy="6858000"/>
+          </a:xfrm>
+          <a:prstGeom prst="rect">
+            <a:avLst/>
+          </a:prstGeom>
+          <a:solidFill>
+            <a:schemeClr val="tx2"/>
+          </a:solidFill>
+          <a:ln>
+            <a:noFill/>
+          </a:ln>
+        </p:spPr>
+        <p:style>
+          <a:lnRef idx="2">
+            <a:schemeClr val="accent1">
+              <a:shade val="50000"/>
+            </a:schemeClr>
+          </a:lnRef>
+          <a:fillRef idx="1">
+            <a:schemeClr val="accent1"/>
+          </a:fillRef>
+          <a:effectRef idx="0">
+            <a:schemeClr val="accent1"/>
+          </a:effectRef>
+          <a:fontRef idx="minor">
+            <a:schemeClr val="lt1"/>
+          </a:fontRef>
+        </p:style>
+      </p:sp>
     </p:spTree>
     <p:extLst>
       <p:ext uri="{BB962C8B-B14F-4D97-AF65-F5344CB8AC3E}">
-        <p14:creationId xmlns:p14="http://schemas.microsoft.com/office/powerpoint/2010/main" val="3639393774"/>
+        <p14:creationId xmlns:p14="http://schemas.microsoft.com/office/powerpoint/2010/main" val="2207234085"/>
       </p:ext>
     </p:extLst>
   </p:cSld>
@@ -347,13 +2278,7 @@
       </p:grpSpPr>
       <p:sp>
         <p:nvSpPr>
-          <p:cNvPr id="2" name="Titel 1">
-            <a:extLst>
-              <a:ext uri="{FF2B5EF4-FFF2-40B4-BE49-F238E27FC236}">
-                <a16:creationId xmlns:a16="http://schemas.microsoft.com/office/drawing/2014/main" id="{7E1C5022-2786-DCB5-027C-5F71C3F9A46A}"/>
-              </a:ext>
-            </a:extLst>
-          </p:cNvPr>
+          <p:cNvPr id="2" name="Title 1"/>
           <p:cNvSpPr>
             <a:spLocks noGrp="1"/>
           </p:cNvSpPr>
@@ -370,18 +2295,13 @@
               <a:rPr lang="da-DK"/>
               <a:t>Klik for at redigere titeltypografien i masteren</a:t>
             </a:r>
+            <a:endParaRPr lang="en-US" dirty="0"/>
           </a:p>
         </p:txBody>
       </p:sp>
       <p:sp>
         <p:nvSpPr>
-          <p:cNvPr id="3" name="Pladsholder til lodret titel 2">
-            <a:extLst>
-              <a:ext uri="{FF2B5EF4-FFF2-40B4-BE49-F238E27FC236}">
-                <a16:creationId xmlns:a16="http://schemas.microsoft.com/office/drawing/2014/main" id="{FE545021-9FF1-099C-93F7-928948FC1A93}"/>
-              </a:ext>
-            </a:extLst>
-          </p:cNvPr>
+          <p:cNvPr id="3" name="Vertical Text Placeholder 2"/>
           <p:cNvSpPr>
             <a:spLocks noGrp="1"/>
           </p:cNvSpPr>
@@ -427,18 +2347,13 @@
               <a:rPr lang="da-DK"/>
               <a:t>Femte niveau</a:t>
             </a:r>
+            <a:endParaRPr lang="en-US" dirty="0"/>
           </a:p>
         </p:txBody>
       </p:sp>
       <p:sp>
         <p:nvSpPr>
-          <p:cNvPr id="4" name="Pladsholder til dato 3">
-            <a:extLst>
-              <a:ext uri="{FF2B5EF4-FFF2-40B4-BE49-F238E27FC236}">
-                <a16:creationId xmlns:a16="http://schemas.microsoft.com/office/drawing/2014/main" id="{6F852C11-C81B-8480-8134-B6B355BFCA18}"/>
-              </a:ext>
-            </a:extLst>
-          </p:cNvPr>
+          <p:cNvPr id="4" name="Date Placeholder 3"/>
           <p:cNvSpPr>
             <a:spLocks noGrp="1"/>
           </p:cNvSpPr>
@@ -453,7 +2368,7 @@
           <a:p>
             <a:fld id="{9F2C61E5-4FB9-4B7B-BFC7-89973F7231D0}" type="datetimeFigureOut">
               <a:rPr lang="da-DK" smtClean="0"/>
-              <a:t>16-03-2026</a:t>
+              <a:t>20-03-2026</a:t>
             </a:fld>
             <a:endParaRPr lang="da-DK"/>
           </a:p>
@@ -461,13 +2376,7 @@
       </p:sp>
       <p:sp>
         <p:nvSpPr>
-          <p:cNvPr id="5" name="Pladsholder til sidefod 4">
-            <a:extLst>
-              <a:ext uri="{FF2B5EF4-FFF2-40B4-BE49-F238E27FC236}">
-                <a16:creationId xmlns:a16="http://schemas.microsoft.com/office/drawing/2014/main" id="{802255D7-1F0A-A593-76C9-DC7063B42181}"/>
-              </a:ext>
-            </a:extLst>
-          </p:cNvPr>
+          <p:cNvPr id="5" name="Footer Placeholder 4"/>
           <p:cNvSpPr>
             <a:spLocks noGrp="1"/>
           </p:cNvSpPr>
@@ -486,13 +2395,7 @@
       </p:sp>
       <p:sp>
         <p:nvSpPr>
-          <p:cNvPr id="6" name="Pladsholder til slidenummer 5">
-            <a:extLst>
-              <a:ext uri="{FF2B5EF4-FFF2-40B4-BE49-F238E27FC236}">
-                <a16:creationId xmlns:a16="http://schemas.microsoft.com/office/drawing/2014/main" id="{9DF352C4-CCBD-AA68-ED1A-8DAE1DD74DAF}"/>
-              </a:ext>
-            </a:extLst>
-          </p:cNvPr>
+          <p:cNvPr id="6" name="Slide Number Placeholder 5"/>
           <p:cNvSpPr>
             <a:spLocks noGrp="1"/>
           </p:cNvSpPr>
@@ -516,7 +2419,7 @@
     </p:spTree>
     <p:extLst>
       <p:ext uri="{BB962C8B-B14F-4D97-AF65-F5344CB8AC3E}">
-        <p14:creationId xmlns:p14="http://schemas.microsoft.com/office/powerpoint/2010/main" val="3271635729"/>
+        <p14:creationId xmlns:p14="http://schemas.microsoft.com/office/powerpoint/2010/main" val="1307778306"/>
       </p:ext>
     </p:extLst>
   </p:cSld>
@@ -545,13 +2448,7 @@
       </p:grpSpPr>
       <p:sp>
         <p:nvSpPr>
-          <p:cNvPr id="2" name="Lodret titel 1">
-            <a:extLst>
-              <a:ext uri="{FF2B5EF4-FFF2-40B4-BE49-F238E27FC236}">
-                <a16:creationId xmlns:a16="http://schemas.microsoft.com/office/drawing/2014/main" id="{64A6BFB7-34D0-6070-0CD5-ADCCE46E613F}"/>
-              </a:ext>
-            </a:extLst>
-          </p:cNvPr>
+          <p:cNvPr id="2" name="Vertical Title 1"/>
           <p:cNvSpPr>
             <a:spLocks noGrp="1"/>
           </p:cNvSpPr>
@@ -561,8 +2458,8 @@
         </p:nvSpPr>
         <p:spPr>
           <a:xfrm>
-            <a:off x="8724900" y="365125"/>
-            <a:ext cx="2628900" cy="5811838"/>
+            <a:off x="10066321" y="382386"/>
+            <a:ext cx="1492132" cy="5600404"/>
           </a:xfrm>
         </p:spPr>
         <p:txBody>
@@ -573,18 +2470,13 @@
               <a:rPr lang="da-DK"/>
               <a:t>Klik for at redigere titeltypografien i masteren</a:t>
             </a:r>
+            <a:endParaRPr lang="en-US" dirty="0"/>
           </a:p>
         </p:txBody>
       </p:sp>
       <p:sp>
         <p:nvSpPr>
-          <p:cNvPr id="3" name="Pladsholder til lodret titel 2">
-            <a:extLst>
-              <a:ext uri="{FF2B5EF4-FFF2-40B4-BE49-F238E27FC236}">
-                <a16:creationId xmlns:a16="http://schemas.microsoft.com/office/drawing/2014/main" id="{B8E39B72-37F0-78DC-5811-259118BEF008}"/>
-              </a:ext>
-            </a:extLst>
-          </p:cNvPr>
+          <p:cNvPr id="3" name="Vertical Text Placeholder 2"/>
           <p:cNvSpPr>
             <a:spLocks noGrp="1"/>
           </p:cNvSpPr>
@@ -594,8 +2486,8 @@
         </p:nvSpPr>
         <p:spPr>
           <a:xfrm>
-            <a:off x="838200" y="365125"/>
-            <a:ext cx="7734300" cy="5811838"/>
+            <a:off x="1257300" y="382385"/>
+            <a:ext cx="8392585" cy="5600405"/>
           </a:xfrm>
         </p:spPr>
         <p:txBody>
@@ -635,18 +2527,13 @@
               <a:rPr lang="da-DK"/>
               <a:t>Femte niveau</a:t>
             </a:r>
+            <a:endParaRPr lang="en-US" dirty="0"/>
           </a:p>
         </p:txBody>
       </p:sp>
       <p:sp>
         <p:nvSpPr>
-          <p:cNvPr id="4" name="Pladsholder til dato 3">
-            <a:extLst>
-              <a:ext uri="{FF2B5EF4-FFF2-40B4-BE49-F238E27FC236}">
-                <a16:creationId xmlns:a16="http://schemas.microsoft.com/office/drawing/2014/main" id="{3969DDA4-6104-4848-3648-7AC1EA7BB776}"/>
-              </a:ext>
-            </a:extLst>
-          </p:cNvPr>
+          <p:cNvPr id="4" name="Date Placeholder 3"/>
           <p:cNvSpPr>
             <a:spLocks noGrp="1"/>
           </p:cNvSpPr>
@@ -661,7 +2548,7 @@
           <a:p>
             <a:fld id="{9F2C61E5-4FB9-4B7B-BFC7-89973F7231D0}" type="datetimeFigureOut">
               <a:rPr lang="da-DK" smtClean="0"/>
-              <a:t>16-03-2026</a:t>
+              <a:t>20-03-2026</a:t>
             </a:fld>
             <a:endParaRPr lang="da-DK"/>
           </a:p>
@@ -669,13 +2556,7 @@
       </p:sp>
       <p:sp>
         <p:nvSpPr>
-          <p:cNvPr id="5" name="Pladsholder til sidefod 4">
-            <a:extLst>
-              <a:ext uri="{FF2B5EF4-FFF2-40B4-BE49-F238E27FC236}">
-                <a16:creationId xmlns:a16="http://schemas.microsoft.com/office/drawing/2014/main" id="{8E5221B0-1414-1C06-4F6B-A1FCBA3F66BD}"/>
-              </a:ext>
-            </a:extLst>
-          </p:cNvPr>
+          <p:cNvPr id="5" name="Footer Placeholder 4"/>
           <p:cNvSpPr>
             <a:spLocks noGrp="1"/>
           </p:cNvSpPr>
@@ -694,13 +2575,7 @@
       </p:sp>
       <p:sp>
         <p:nvSpPr>
-          <p:cNvPr id="6" name="Pladsholder til slidenummer 5">
-            <a:extLst>
-              <a:ext uri="{FF2B5EF4-FFF2-40B4-BE49-F238E27FC236}">
-                <a16:creationId xmlns:a16="http://schemas.microsoft.com/office/drawing/2014/main" id="{9FDDD582-FF5F-26F0-A6A3-B667359A74D5}"/>
-              </a:ext>
-            </a:extLst>
-          </p:cNvPr>
+          <p:cNvPr id="6" name="Slide Number Placeholder 5"/>
           <p:cNvSpPr>
             <a:spLocks noGrp="1"/>
           </p:cNvSpPr>
@@ -724,7 +2599,7 @@
     </p:spTree>
     <p:extLst>
       <p:ext uri="{BB962C8B-B14F-4D97-AF65-F5344CB8AC3E}">
-        <p14:creationId xmlns:p14="http://schemas.microsoft.com/office/powerpoint/2010/main" val="1768586364"/>
+        <p14:creationId xmlns:p14="http://schemas.microsoft.com/office/powerpoint/2010/main" val="3951959403"/>
       </p:ext>
     </p:extLst>
   </p:cSld>
@@ -753,13 +2628,7 @@
       </p:grpSpPr>
       <p:sp>
         <p:nvSpPr>
-          <p:cNvPr id="2" name="Titel 1">
-            <a:extLst>
-              <a:ext uri="{FF2B5EF4-FFF2-40B4-BE49-F238E27FC236}">
-                <a16:creationId xmlns:a16="http://schemas.microsoft.com/office/drawing/2014/main" id="{BA2DF114-DD81-0ECB-9845-9C541CAC52B1}"/>
-              </a:ext>
-            </a:extLst>
-          </p:cNvPr>
+          <p:cNvPr id="2" name="Title 1"/>
           <p:cNvSpPr>
             <a:spLocks noGrp="1"/>
           </p:cNvSpPr>
@@ -776,18 +2645,13 @@
               <a:rPr lang="da-DK"/>
               <a:t>Klik for at redigere titeltypografien i masteren</a:t>
             </a:r>
+            <a:endParaRPr lang="en-US" dirty="0"/>
           </a:p>
         </p:txBody>
       </p:sp>
       <p:sp>
         <p:nvSpPr>
-          <p:cNvPr id="3" name="Pladsholder til indhold 2">
-            <a:extLst>
-              <a:ext uri="{FF2B5EF4-FFF2-40B4-BE49-F238E27FC236}">
-                <a16:creationId xmlns:a16="http://schemas.microsoft.com/office/drawing/2014/main" id="{659C0C0E-E6E9-626E-FBDC-197AADC95787}"/>
-              </a:ext>
-            </a:extLst>
-          </p:cNvPr>
+          <p:cNvPr id="3" name="Content Placeholder 2"/>
           <p:cNvSpPr>
             <a:spLocks noGrp="1"/>
           </p:cNvSpPr>
@@ -833,18 +2697,13 @@
               <a:rPr lang="da-DK"/>
               <a:t>Femte niveau</a:t>
             </a:r>
+            <a:endParaRPr lang="en-US" dirty="0"/>
           </a:p>
         </p:txBody>
       </p:sp>
       <p:sp>
         <p:nvSpPr>
-          <p:cNvPr id="4" name="Pladsholder til dato 3">
-            <a:extLst>
-              <a:ext uri="{FF2B5EF4-FFF2-40B4-BE49-F238E27FC236}">
-                <a16:creationId xmlns:a16="http://schemas.microsoft.com/office/drawing/2014/main" id="{B89BD19C-15EF-2641-D71F-EE655A16FBE0}"/>
-              </a:ext>
-            </a:extLst>
-          </p:cNvPr>
+          <p:cNvPr id="4" name="Date Placeholder 3"/>
           <p:cNvSpPr>
             <a:spLocks noGrp="1"/>
           </p:cNvSpPr>
@@ -859,7 +2718,7 @@
           <a:p>
             <a:fld id="{9F2C61E5-4FB9-4B7B-BFC7-89973F7231D0}" type="datetimeFigureOut">
               <a:rPr lang="da-DK" smtClean="0"/>
-              <a:t>16-03-2026</a:t>
+              <a:t>20-03-2026</a:t>
             </a:fld>
             <a:endParaRPr lang="da-DK"/>
           </a:p>
@@ -867,13 +2726,7 @@
       </p:sp>
       <p:sp>
         <p:nvSpPr>
-          <p:cNvPr id="5" name="Pladsholder til sidefod 4">
-            <a:extLst>
-              <a:ext uri="{FF2B5EF4-FFF2-40B4-BE49-F238E27FC236}">
-                <a16:creationId xmlns:a16="http://schemas.microsoft.com/office/drawing/2014/main" id="{4346BF04-809C-A3A0-A896-BFD5E65D169A}"/>
-              </a:ext>
-            </a:extLst>
-          </p:cNvPr>
+          <p:cNvPr id="5" name="Footer Placeholder 4"/>
           <p:cNvSpPr>
             <a:spLocks noGrp="1"/>
           </p:cNvSpPr>
@@ -892,13 +2745,7 @@
       </p:sp>
       <p:sp>
         <p:nvSpPr>
-          <p:cNvPr id="6" name="Pladsholder til slidenummer 5">
-            <a:extLst>
-              <a:ext uri="{FF2B5EF4-FFF2-40B4-BE49-F238E27FC236}">
-                <a16:creationId xmlns:a16="http://schemas.microsoft.com/office/drawing/2014/main" id="{75256893-3A2A-F83E-CF37-FA21949D4473}"/>
-              </a:ext>
-            </a:extLst>
-          </p:cNvPr>
+          <p:cNvPr id="6" name="Slide Number Placeholder 5"/>
           <p:cNvSpPr>
             <a:spLocks noGrp="1"/>
           </p:cNvSpPr>
@@ -922,7 +2769,7 @@
     </p:spTree>
     <p:extLst>
       <p:ext uri="{BB962C8B-B14F-4D97-AF65-F5344CB8AC3E}">
-        <p14:creationId xmlns:p14="http://schemas.microsoft.com/office/powerpoint/2010/main" val="2601527275"/>
+        <p14:creationId xmlns:p14="http://schemas.microsoft.com/office/powerpoint/2010/main" val="224390055"/>
       </p:ext>
     </p:extLst>
   </p:cSld>
@@ -933,8 +2780,16 @@
 </file>
 
 <file path=ppt/slideLayouts/slideLayout3.xml><?xml version="1.0" encoding="utf-8"?>
-<p:sldLayout xmlns:a="http://schemas.openxmlformats.org/drawingml/2006/main" xmlns:r="http://schemas.openxmlformats.org/officeDocument/2006/relationships" xmlns:p="http://schemas.openxmlformats.org/presentationml/2006/main" type="secHead" preserve="1">
+<p:sldLayout xmlns:a="http://schemas.openxmlformats.org/drawingml/2006/main" xmlns:r="http://schemas.openxmlformats.org/officeDocument/2006/relationships" xmlns:p="http://schemas.openxmlformats.org/presentationml/2006/main" showMasterSp="0" type="secHead" preserve="1">
   <p:cSld name="Afsnitsoverskrift">
+    <p:bg>
+      <p:bgPr>
+        <a:solidFill>
+          <a:schemeClr val="bg2"/>
+        </a:solidFill>
+        <a:effectLst/>
+      </p:bgPr>
+    </p:bg>
     <p:spTree>
       <p:nvGrpSpPr>
         <p:cNvPr id="1" name=""/>
@@ -951,13 +2806,7 @@
       </p:grpSpPr>
       <p:sp>
         <p:nvSpPr>
-          <p:cNvPr id="2" name="Titel 1">
-            <a:extLst>
-              <a:ext uri="{FF2B5EF4-FFF2-40B4-BE49-F238E27FC236}">
-                <a16:creationId xmlns:a16="http://schemas.microsoft.com/office/drawing/2014/main" id="{36124039-602C-5A8D-FD1A-3779CACAFB3D}"/>
-              </a:ext>
-            </a:extLst>
-          </p:cNvPr>
+          <p:cNvPr id="2" name="Title 1"/>
           <p:cNvSpPr>
             <a:spLocks noGrp="1"/>
           </p:cNvSpPr>
@@ -967,15 +2816,21 @@
         </p:nvSpPr>
         <p:spPr>
           <a:xfrm>
-            <a:off x="831850" y="1709738"/>
-            <a:ext cx="10515600" cy="2852737"/>
+            <a:off x="3242929" y="1073888"/>
+            <a:ext cx="8187071" cy="4064627"/>
           </a:xfrm>
         </p:spPr>
         <p:txBody>
-          <a:bodyPr anchor="b"/>
+          <a:bodyPr anchor="b">
+            <a:normAutofit/>
+          </a:bodyPr>
           <a:lstStyle>
             <a:lvl1pPr>
-              <a:defRPr sz="6000"/>
+              <a:defRPr sz="8400" spc="800" baseline="0">
+                <a:solidFill>
+                  <a:schemeClr val="tx2"/>
+                </a:solidFill>
+              </a:defRPr>
             </a:lvl1pPr>
           </a:lstStyle>
           <a:p>
@@ -983,18 +2838,13 @@
               <a:rPr lang="da-DK"/>
               <a:t>Klik for at redigere titeltypografien i masteren</a:t>
             </a:r>
+            <a:endParaRPr lang="en-US" dirty="0"/>
           </a:p>
         </p:txBody>
       </p:sp>
       <p:sp>
         <p:nvSpPr>
-          <p:cNvPr id="3" name="Pladsholder til tekst 2">
-            <a:extLst>
-              <a:ext uri="{FF2B5EF4-FFF2-40B4-BE49-F238E27FC236}">
-                <a16:creationId xmlns:a16="http://schemas.microsoft.com/office/drawing/2014/main" id="{8074D7C7-0EFC-4804-05BB-53C4D7D38F14}"/>
-              </a:ext>
-            </a:extLst>
-          </p:cNvPr>
+          <p:cNvPr id="3" name="Text Placeholder 2"/>
           <p:cNvSpPr>
             <a:spLocks noGrp="1"/>
           </p:cNvSpPr>
@@ -1004,20 +2854,23 @@
         </p:nvSpPr>
         <p:spPr>
           <a:xfrm>
-            <a:off x="831850" y="4589463"/>
-            <a:ext cx="10515600" cy="1500187"/>
+            <a:off x="3242930" y="5159781"/>
+            <a:ext cx="7017488" cy="951135"/>
           </a:xfrm>
         </p:spPr>
         <p:txBody>
-          <a:bodyPr/>
+          <a:bodyPr>
+            <a:normAutofit/>
+          </a:bodyPr>
           <a:lstStyle>
             <a:lvl1pPr marL="0" indent="0">
+              <a:lnSpc>
+                <a:spcPct val="100000"/>
+              </a:lnSpc>
               <a:buNone/>
-              <a:defRPr sz="2400">
+              <a:defRPr sz="2000" b="1" i="0" cap="all" spc="400" baseline="0">
                 <a:solidFill>
-                  <a:schemeClr val="tx1">
-                    <a:tint val="75000"/>
-                  </a:schemeClr>
+                  <a:schemeClr val="accent1"/>
                 </a:solidFill>
               </a:defRPr>
             </a:lvl1pPr>
@@ -1113,13 +2966,7 @@
       </p:sp>
       <p:sp>
         <p:nvSpPr>
-          <p:cNvPr id="4" name="Pladsholder til dato 3">
-            <a:extLst>
-              <a:ext uri="{FF2B5EF4-FFF2-40B4-BE49-F238E27FC236}">
-                <a16:creationId xmlns:a16="http://schemas.microsoft.com/office/drawing/2014/main" id="{671BD9A9-2B86-8A82-79A9-3C6403D351C9}"/>
-              </a:ext>
-            </a:extLst>
-          </p:cNvPr>
+          <p:cNvPr id="4" name="Date Placeholder 3"/>
           <p:cNvSpPr>
             <a:spLocks noGrp="1"/>
           </p:cNvSpPr>
@@ -1127,14 +2974,27 @@
             <p:ph type="dt" sz="half" idx="10"/>
           </p:nvPr>
         </p:nvSpPr>
-        <p:spPr/>
+        <p:spPr>
+          <a:xfrm>
+            <a:off x="3236546" y="6375679"/>
+            <a:ext cx="1493947" cy="348462"/>
+          </a:xfrm>
+        </p:spPr>
         <p:txBody>
           <a:bodyPr/>
-          <a:lstStyle/>
+          <a:lstStyle>
+            <a:lvl1pPr>
+              <a:defRPr baseline="0">
+                <a:solidFill>
+                  <a:schemeClr val="tx2"/>
+                </a:solidFill>
+              </a:defRPr>
+            </a:lvl1pPr>
+          </a:lstStyle>
           <a:p>
             <a:fld id="{9F2C61E5-4FB9-4B7B-BFC7-89973F7231D0}" type="datetimeFigureOut">
               <a:rPr lang="da-DK" smtClean="0"/>
-              <a:t>16-03-2026</a:t>
+              <a:t>20-03-2026</a:t>
             </a:fld>
             <a:endParaRPr lang="da-DK"/>
           </a:p>
@@ -1142,13 +3002,7 @@
       </p:sp>
       <p:sp>
         <p:nvSpPr>
-          <p:cNvPr id="5" name="Pladsholder til sidefod 4">
-            <a:extLst>
-              <a:ext uri="{FF2B5EF4-FFF2-40B4-BE49-F238E27FC236}">
-                <a16:creationId xmlns:a16="http://schemas.microsoft.com/office/drawing/2014/main" id="{E23BEE90-FFC9-ED7C-57C6-A9748A9918E9}"/>
-              </a:ext>
-            </a:extLst>
-          </p:cNvPr>
+          <p:cNvPr id="5" name="Footer Placeholder 4"/>
           <p:cNvSpPr>
             <a:spLocks noGrp="1"/>
           </p:cNvSpPr>
@@ -1156,10 +3010,23 @@
             <p:ph type="ftr" sz="quarter" idx="11"/>
           </p:nvPr>
         </p:nvSpPr>
-        <p:spPr/>
+        <p:spPr>
+          <a:xfrm>
+            <a:off x="5279064" y="6375679"/>
+            <a:ext cx="4114800" cy="345796"/>
+          </a:xfrm>
+        </p:spPr>
         <p:txBody>
           <a:bodyPr/>
-          <a:lstStyle/>
+          <a:lstStyle>
+            <a:lvl1pPr>
+              <a:defRPr baseline="0">
+                <a:solidFill>
+                  <a:schemeClr val="tx2"/>
+                </a:solidFill>
+              </a:defRPr>
+            </a:lvl1pPr>
+          </a:lstStyle>
           <a:p>
             <a:endParaRPr lang="da-DK"/>
           </a:p>
@@ -1167,13 +3034,7 @@
       </p:sp>
       <p:sp>
         <p:nvSpPr>
-          <p:cNvPr id="6" name="Pladsholder til slidenummer 5">
-            <a:extLst>
-              <a:ext uri="{FF2B5EF4-FFF2-40B4-BE49-F238E27FC236}">
-                <a16:creationId xmlns:a16="http://schemas.microsoft.com/office/drawing/2014/main" id="{5D7660C5-B747-8096-5281-889A6DF616D2}"/>
-              </a:ext>
-            </a:extLst>
-          </p:cNvPr>
+          <p:cNvPr id="6" name="Slide Number Placeholder 5"/>
           <p:cNvSpPr>
             <a:spLocks noGrp="1"/>
           </p:cNvSpPr>
@@ -1181,10 +3042,23 @@
             <p:ph type="sldNum" sz="quarter" idx="12"/>
           </p:nvPr>
         </p:nvSpPr>
-        <p:spPr/>
+        <p:spPr>
+          <a:xfrm>
+            <a:off x="9942434" y="6375679"/>
+            <a:ext cx="1487566" cy="345796"/>
+          </a:xfrm>
+        </p:spPr>
         <p:txBody>
           <a:bodyPr/>
-          <a:lstStyle/>
+          <a:lstStyle>
+            <a:lvl1pPr>
+              <a:defRPr baseline="0">
+                <a:solidFill>
+                  <a:schemeClr val="tx2"/>
+                </a:solidFill>
+              </a:defRPr>
+            </a:lvl1pPr>
+          </a:lstStyle>
           <a:p>
             <a:fld id="{AD261232-67BA-4014-8C42-A66C16385292}" type="slidenum">
               <a:rPr lang="da-DK" smtClean="0"/>
@@ -1194,15 +3068,958 @@
           </a:p>
         </p:txBody>
       </p:sp>
+      <p:grpSp>
+        <p:nvGrpSpPr>
+          <p:cNvPr id="7" name="Group 6" title="left scallop shape"/>
+          <p:cNvGrpSpPr/>
+          <p:nvPr/>
+        </p:nvGrpSpPr>
+        <p:grpSpPr>
+          <a:xfrm>
+            <a:off x="0" y="0"/>
+            <a:ext cx="2814638" cy="6858000"/>
+            <a:chOff x="0" y="0"/>
+            <a:chExt cx="2814638" cy="6858000"/>
+          </a:xfrm>
+        </p:grpSpPr>
+        <p:sp>
+          <p:nvSpPr>
+            <p:cNvPr id="11" name="Freeform 6" title="left scallop shape"/>
+            <p:cNvSpPr/>
+            <p:nvPr/>
+          </p:nvSpPr>
+          <p:spPr bwMode="auto">
+            <a:xfrm>
+              <a:off x="0" y="0"/>
+              <a:ext cx="2814638" cy="6858000"/>
+            </a:xfrm>
+            <a:custGeom>
+              <a:avLst/>
+              <a:gdLst/>
+              <a:ahLst/>
+              <a:cxnLst/>
+              <a:rect l="0" t="0" r="r" b="b"/>
+              <a:pathLst>
+                <a:path w="1773" h="4320">
+                  <a:moveTo>
+                    <a:pt x="0" y="0"/>
+                  </a:moveTo>
+                  <a:lnTo>
+                    <a:pt x="891" y="0"/>
+                  </a:lnTo>
+                  <a:lnTo>
+                    <a:pt x="906" y="56"/>
+                  </a:lnTo>
+                  <a:lnTo>
+                    <a:pt x="921" y="111"/>
+                  </a:lnTo>
+                  <a:lnTo>
+                    <a:pt x="938" y="165"/>
+                  </a:lnTo>
+                  <a:lnTo>
+                    <a:pt x="957" y="217"/>
+                  </a:lnTo>
+                  <a:lnTo>
+                    <a:pt x="980" y="266"/>
+                  </a:lnTo>
+                  <a:lnTo>
+                    <a:pt x="1007" y="312"/>
+                  </a:lnTo>
+                  <a:lnTo>
+                    <a:pt x="1036" y="351"/>
+                  </a:lnTo>
+                  <a:lnTo>
+                    <a:pt x="1069" y="387"/>
+                  </a:lnTo>
+                  <a:lnTo>
+                    <a:pt x="1105" y="422"/>
+                  </a:lnTo>
+                  <a:lnTo>
+                    <a:pt x="1145" y="456"/>
+                  </a:lnTo>
+                  <a:lnTo>
+                    <a:pt x="1185" y="487"/>
+                  </a:lnTo>
+                  <a:lnTo>
+                    <a:pt x="1227" y="520"/>
+                  </a:lnTo>
+                  <a:lnTo>
+                    <a:pt x="1270" y="551"/>
+                  </a:lnTo>
+                  <a:lnTo>
+                    <a:pt x="1311" y="584"/>
+                  </a:lnTo>
+                  <a:lnTo>
+                    <a:pt x="1352" y="617"/>
+                  </a:lnTo>
+                  <a:lnTo>
+                    <a:pt x="1390" y="651"/>
+                  </a:lnTo>
+                  <a:lnTo>
+                    <a:pt x="1425" y="687"/>
+                  </a:lnTo>
+                  <a:lnTo>
+                    <a:pt x="1456" y="725"/>
+                  </a:lnTo>
+                  <a:lnTo>
+                    <a:pt x="1484" y="765"/>
+                  </a:lnTo>
+                  <a:lnTo>
+                    <a:pt x="1505" y="808"/>
+                  </a:lnTo>
+                  <a:lnTo>
+                    <a:pt x="1521" y="856"/>
+                  </a:lnTo>
+                  <a:lnTo>
+                    <a:pt x="1530" y="907"/>
+                  </a:lnTo>
+                  <a:lnTo>
+                    <a:pt x="1534" y="960"/>
+                  </a:lnTo>
+                  <a:lnTo>
+                    <a:pt x="1534" y="1013"/>
+                  </a:lnTo>
+                  <a:lnTo>
+                    <a:pt x="1530" y="1068"/>
+                  </a:lnTo>
+                  <a:lnTo>
+                    <a:pt x="1523" y="1125"/>
+                  </a:lnTo>
+                  <a:lnTo>
+                    <a:pt x="1515" y="1181"/>
+                  </a:lnTo>
+                  <a:lnTo>
+                    <a:pt x="1508" y="1237"/>
+                  </a:lnTo>
+                  <a:lnTo>
+                    <a:pt x="1501" y="1293"/>
+                  </a:lnTo>
+                  <a:lnTo>
+                    <a:pt x="1496" y="1350"/>
+                  </a:lnTo>
+                  <a:lnTo>
+                    <a:pt x="1494" y="1405"/>
+                  </a:lnTo>
+                  <a:lnTo>
+                    <a:pt x="1497" y="1458"/>
+                  </a:lnTo>
+                  <a:lnTo>
+                    <a:pt x="1504" y="1511"/>
+                  </a:lnTo>
+                  <a:lnTo>
+                    <a:pt x="1517" y="1560"/>
+                  </a:lnTo>
+                  <a:lnTo>
+                    <a:pt x="1535" y="1610"/>
+                  </a:lnTo>
+                  <a:lnTo>
+                    <a:pt x="1557" y="1659"/>
+                  </a:lnTo>
+                  <a:lnTo>
+                    <a:pt x="1583" y="1708"/>
+                  </a:lnTo>
+                  <a:lnTo>
+                    <a:pt x="1611" y="1757"/>
+                  </a:lnTo>
+                  <a:lnTo>
+                    <a:pt x="1640" y="1807"/>
+                  </a:lnTo>
+                  <a:lnTo>
+                    <a:pt x="1669" y="1855"/>
+                  </a:lnTo>
+                  <a:lnTo>
+                    <a:pt x="1696" y="1905"/>
+                  </a:lnTo>
+                  <a:lnTo>
+                    <a:pt x="1721" y="1954"/>
+                  </a:lnTo>
+                  <a:lnTo>
+                    <a:pt x="1742" y="2006"/>
+                  </a:lnTo>
+                  <a:lnTo>
+                    <a:pt x="1759" y="2057"/>
+                  </a:lnTo>
+                  <a:lnTo>
+                    <a:pt x="1769" y="2108"/>
+                  </a:lnTo>
+                  <a:lnTo>
+                    <a:pt x="1773" y="2160"/>
+                  </a:lnTo>
+                  <a:lnTo>
+                    <a:pt x="1769" y="2212"/>
+                  </a:lnTo>
+                  <a:lnTo>
+                    <a:pt x="1759" y="2263"/>
+                  </a:lnTo>
+                  <a:lnTo>
+                    <a:pt x="1742" y="2314"/>
+                  </a:lnTo>
+                  <a:lnTo>
+                    <a:pt x="1721" y="2366"/>
+                  </a:lnTo>
+                  <a:lnTo>
+                    <a:pt x="1696" y="2415"/>
+                  </a:lnTo>
+                  <a:lnTo>
+                    <a:pt x="1669" y="2465"/>
+                  </a:lnTo>
+                  <a:lnTo>
+                    <a:pt x="1640" y="2513"/>
+                  </a:lnTo>
+                  <a:lnTo>
+                    <a:pt x="1611" y="2563"/>
+                  </a:lnTo>
+                  <a:lnTo>
+                    <a:pt x="1583" y="2612"/>
+                  </a:lnTo>
+                  <a:lnTo>
+                    <a:pt x="1557" y="2661"/>
+                  </a:lnTo>
+                  <a:lnTo>
+                    <a:pt x="1535" y="2710"/>
+                  </a:lnTo>
+                  <a:lnTo>
+                    <a:pt x="1517" y="2760"/>
+                  </a:lnTo>
+                  <a:lnTo>
+                    <a:pt x="1504" y="2809"/>
+                  </a:lnTo>
+                  <a:lnTo>
+                    <a:pt x="1497" y="2862"/>
+                  </a:lnTo>
+                  <a:lnTo>
+                    <a:pt x="1494" y="2915"/>
+                  </a:lnTo>
+                  <a:lnTo>
+                    <a:pt x="1496" y="2970"/>
+                  </a:lnTo>
+                  <a:lnTo>
+                    <a:pt x="1501" y="3027"/>
+                  </a:lnTo>
+                  <a:lnTo>
+                    <a:pt x="1508" y="3083"/>
+                  </a:lnTo>
+                  <a:lnTo>
+                    <a:pt x="1515" y="3139"/>
+                  </a:lnTo>
+                  <a:lnTo>
+                    <a:pt x="1523" y="3195"/>
+                  </a:lnTo>
+                  <a:lnTo>
+                    <a:pt x="1530" y="3252"/>
+                  </a:lnTo>
+                  <a:lnTo>
+                    <a:pt x="1534" y="3307"/>
+                  </a:lnTo>
+                  <a:lnTo>
+                    <a:pt x="1534" y="3360"/>
+                  </a:lnTo>
+                  <a:lnTo>
+                    <a:pt x="1530" y="3413"/>
+                  </a:lnTo>
+                  <a:lnTo>
+                    <a:pt x="1521" y="3464"/>
+                  </a:lnTo>
+                  <a:lnTo>
+                    <a:pt x="1505" y="3512"/>
+                  </a:lnTo>
+                  <a:lnTo>
+                    <a:pt x="1484" y="3555"/>
+                  </a:lnTo>
+                  <a:lnTo>
+                    <a:pt x="1456" y="3595"/>
+                  </a:lnTo>
+                  <a:lnTo>
+                    <a:pt x="1425" y="3633"/>
+                  </a:lnTo>
+                  <a:lnTo>
+                    <a:pt x="1390" y="3669"/>
+                  </a:lnTo>
+                  <a:lnTo>
+                    <a:pt x="1352" y="3703"/>
+                  </a:lnTo>
+                  <a:lnTo>
+                    <a:pt x="1311" y="3736"/>
+                  </a:lnTo>
+                  <a:lnTo>
+                    <a:pt x="1270" y="3769"/>
+                  </a:lnTo>
+                  <a:lnTo>
+                    <a:pt x="1227" y="3800"/>
+                  </a:lnTo>
+                  <a:lnTo>
+                    <a:pt x="1185" y="3833"/>
+                  </a:lnTo>
+                  <a:lnTo>
+                    <a:pt x="1145" y="3864"/>
+                  </a:lnTo>
+                  <a:lnTo>
+                    <a:pt x="1105" y="3898"/>
+                  </a:lnTo>
+                  <a:lnTo>
+                    <a:pt x="1069" y="3933"/>
+                  </a:lnTo>
+                  <a:lnTo>
+                    <a:pt x="1036" y="3969"/>
+                  </a:lnTo>
+                  <a:lnTo>
+                    <a:pt x="1007" y="4008"/>
+                  </a:lnTo>
+                  <a:lnTo>
+                    <a:pt x="980" y="4054"/>
+                  </a:lnTo>
+                  <a:lnTo>
+                    <a:pt x="957" y="4103"/>
+                  </a:lnTo>
+                  <a:lnTo>
+                    <a:pt x="938" y="4155"/>
+                  </a:lnTo>
+                  <a:lnTo>
+                    <a:pt x="921" y="4209"/>
+                  </a:lnTo>
+                  <a:lnTo>
+                    <a:pt x="906" y="4264"/>
+                  </a:lnTo>
+                  <a:lnTo>
+                    <a:pt x="891" y="4320"/>
+                  </a:lnTo>
+                  <a:lnTo>
+                    <a:pt x="0" y="4320"/>
+                  </a:lnTo>
+                  <a:lnTo>
+                    <a:pt x="0" y="0"/>
+                  </a:lnTo>
+                  <a:close/>
+                </a:path>
+              </a:pathLst>
+            </a:custGeom>
+            <a:solidFill>
+              <a:schemeClr val="tx2"/>
+            </a:solidFill>
+            <a:ln w="0">
+              <a:noFill/>
+              <a:prstDash val="solid"/>
+              <a:round/>
+              <a:headEnd/>
+              <a:tailEnd/>
+            </a:ln>
+          </p:spPr>
+        </p:sp>
+        <p:sp>
+          <p:nvSpPr>
+            <p:cNvPr id="16" name="Freeform 11" title="left scallop inline"/>
+            <p:cNvSpPr/>
+            <p:nvPr/>
+          </p:nvSpPr>
+          <p:spPr bwMode="auto">
+            <a:xfrm>
+              <a:off x="874382" y="0"/>
+              <a:ext cx="1646238" cy="6858000"/>
+            </a:xfrm>
+            <a:custGeom>
+              <a:avLst/>
+              <a:gdLst/>
+              <a:ahLst/>
+              <a:cxnLst/>
+              <a:rect l="0" t="0" r="r" b="b"/>
+              <a:pathLst>
+                <a:path w="1037" h="4320">
+                  <a:moveTo>
+                    <a:pt x="0" y="0"/>
+                  </a:moveTo>
+                  <a:lnTo>
+                    <a:pt x="171" y="0"/>
+                  </a:lnTo>
+                  <a:lnTo>
+                    <a:pt x="188" y="55"/>
+                  </a:lnTo>
+                  <a:lnTo>
+                    <a:pt x="204" y="110"/>
+                  </a:lnTo>
+                  <a:lnTo>
+                    <a:pt x="220" y="166"/>
+                  </a:lnTo>
+                  <a:lnTo>
+                    <a:pt x="234" y="223"/>
+                  </a:lnTo>
+                  <a:lnTo>
+                    <a:pt x="251" y="278"/>
+                  </a:lnTo>
+                  <a:lnTo>
+                    <a:pt x="269" y="331"/>
+                  </a:lnTo>
+                  <a:lnTo>
+                    <a:pt x="292" y="381"/>
+                  </a:lnTo>
+                  <a:lnTo>
+                    <a:pt x="319" y="427"/>
+                  </a:lnTo>
+                  <a:lnTo>
+                    <a:pt x="349" y="466"/>
+                  </a:lnTo>
+                  <a:lnTo>
+                    <a:pt x="382" y="503"/>
+                  </a:lnTo>
+                  <a:lnTo>
+                    <a:pt x="420" y="537"/>
+                  </a:lnTo>
+                  <a:lnTo>
+                    <a:pt x="460" y="571"/>
+                  </a:lnTo>
+                  <a:lnTo>
+                    <a:pt x="502" y="603"/>
+                  </a:lnTo>
+                  <a:lnTo>
+                    <a:pt x="544" y="635"/>
+                  </a:lnTo>
+                  <a:lnTo>
+                    <a:pt x="587" y="668"/>
+                  </a:lnTo>
+                  <a:lnTo>
+                    <a:pt x="628" y="700"/>
+                  </a:lnTo>
+                  <a:lnTo>
+                    <a:pt x="667" y="734"/>
+                  </a:lnTo>
+                  <a:lnTo>
+                    <a:pt x="703" y="771"/>
+                  </a:lnTo>
+                  <a:lnTo>
+                    <a:pt x="736" y="808"/>
+                  </a:lnTo>
+                  <a:lnTo>
+                    <a:pt x="763" y="848"/>
+                  </a:lnTo>
+                  <a:lnTo>
+                    <a:pt x="786" y="893"/>
+                  </a:lnTo>
+                  <a:lnTo>
+                    <a:pt x="800" y="937"/>
+                  </a:lnTo>
+                  <a:lnTo>
+                    <a:pt x="809" y="986"/>
+                  </a:lnTo>
+                  <a:lnTo>
+                    <a:pt x="813" y="1034"/>
+                  </a:lnTo>
+                  <a:lnTo>
+                    <a:pt x="812" y="1085"/>
+                  </a:lnTo>
+                  <a:lnTo>
+                    <a:pt x="808" y="1136"/>
+                  </a:lnTo>
+                  <a:lnTo>
+                    <a:pt x="803" y="1189"/>
+                  </a:lnTo>
+                  <a:lnTo>
+                    <a:pt x="796" y="1242"/>
+                  </a:lnTo>
+                  <a:lnTo>
+                    <a:pt x="788" y="1295"/>
+                  </a:lnTo>
+                  <a:lnTo>
+                    <a:pt x="782" y="1348"/>
+                  </a:lnTo>
+                  <a:lnTo>
+                    <a:pt x="778" y="1401"/>
+                  </a:lnTo>
+                  <a:lnTo>
+                    <a:pt x="775" y="1452"/>
+                  </a:lnTo>
+                  <a:lnTo>
+                    <a:pt x="778" y="1502"/>
+                  </a:lnTo>
+                  <a:lnTo>
+                    <a:pt x="784" y="1551"/>
+                  </a:lnTo>
+                  <a:lnTo>
+                    <a:pt x="797" y="1602"/>
+                  </a:lnTo>
+                  <a:lnTo>
+                    <a:pt x="817" y="1652"/>
+                  </a:lnTo>
+                  <a:lnTo>
+                    <a:pt x="841" y="1702"/>
+                  </a:lnTo>
+                  <a:lnTo>
+                    <a:pt x="868" y="1752"/>
+                  </a:lnTo>
+                  <a:lnTo>
+                    <a:pt x="896" y="1801"/>
+                  </a:lnTo>
+                  <a:lnTo>
+                    <a:pt x="926" y="1851"/>
+                  </a:lnTo>
+                  <a:lnTo>
+                    <a:pt x="953" y="1901"/>
+                  </a:lnTo>
+                  <a:lnTo>
+                    <a:pt x="980" y="1952"/>
+                  </a:lnTo>
+                  <a:lnTo>
+                    <a:pt x="1003" y="2003"/>
+                  </a:lnTo>
+                  <a:lnTo>
+                    <a:pt x="1021" y="2054"/>
+                  </a:lnTo>
+                  <a:lnTo>
+                    <a:pt x="1031" y="2106"/>
+                  </a:lnTo>
+                  <a:lnTo>
+                    <a:pt x="1037" y="2160"/>
+                  </a:lnTo>
+                  <a:lnTo>
+                    <a:pt x="1031" y="2214"/>
+                  </a:lnTo>
+                  <a:lnTo>
+                    <a:pt x="1021" y="2266"/>
+                  </a:lnTo>
+                  <a:lnTo>
+                    <a:pt x="1003" y="2317"/>
+                  </a:lnTo>
+                  <a:lnTo>
+                    <a:pt x="980" y="2368"/>
+                  </a:lnTo>
+                  <a:lnTo>
+                    <a:pt x="953" y="2419"/>
+                  </a:lnTo>
+                  <a:lnTo>
+                    <a:pt x="926" y="2469"/>
+                  </a:lnTo>
+                  <a:lnTo>
+                    <a:pt x="896" y="2519"/>
+                  </a:lnTo>
+                  <a:lnTo>
+                    <a:pt x="868" y="2568"/>
+                  </a:lnTo>
+                  <a:lnTo>
+                    <a:pt x="841" y="2618"/>
+                  </a:lnTo>
+                  <a:lnTo>
+                    <a:pt x="817" y="2668"/>
+                  </a:lnTo>
+                  <a:lnTo>
+                    <a:pt x="797" y="2718"/>
+                  </a:lnTo>
+                  <a:lnTo>
+                    <a:pt x="784" y="2769"/>
+                  </a:lnTo>
+                  <a:lnTo>
+                    <a:pt x="778" y="2818"/>
+                  </a:lnTo>
+                  <a:lnTo>
+                    <a:pt x="775" y="2868"/>
+                  </a:lnTo>
+                  <a:lnTo>
+                    <a:pt x="778" y="2919"/>
+                  </a:lnTo>
+                  <a:lnTo>
+                    <a:pt x="782" y="2972"/>
+                  </a:lnTo>
+                  <a:lnTo>
+                    <a:pt x="788" y="3025"/>
+                  </a:lnTo>
+                  <a:lnTo>
+                    <a:pt x="796" y="3078"/>
+                  </a:lnTo>
+                  <a:lnTo>
+                    <a:pt x="803" y="3131"/>
+                  </a:lnTo>
+                  <a:lnTo>
+                    <a:pt x="808" y="3184"/>
+                  </a:lnTo>
+                  <a:lnTo>
+                    <a:pt x="812" y="3235"/>
+                  </a:lnTo>
+                  <a:lnTo>
+                    <a:pt x="813" y="3286"/>
+                  </a:lnTo>
+                  <a:lnTo>
+                    <a:pt x="809" y="3334"/>
+                  </a:lnTo>
+                  <a:lnTo>
+                    <a:pt x="800" y="3383"/>
+                  </a:lnTo>
+                  <a:lnTo>
+                    <a:pt x="786" y="3427"/>
+                  </a:lnTo>
+                  <a:lnTo>
+                    <a:pt x="763" y="3472"/>
+                  </a:lnTo>
+                  <a:lnTo>
+                    <a:pt x="736" y="3512"/>
+                  </a:lnTo>
+                  <a:lnTo>
+                    <a:pt x="703" y="3549"/>
+                  </a:lnTo>
+                  <a:lnTo>
+                    <a:pt x="667" y="3586"/>
+                  </a:lnTo>
+                  <a:lnTo>
+                    <a:pt x="628" y="3620"/>
+                  </a:lnTo>
+                  <a:lnTo>
+                    <a:pt x="587" y="3652"/>
+                  </a:lnTo>
+                  <a:lnTo>
+                    <a:pt x="544" y="3685"/>
+                  </a:lnTo>
+                  <a:lnTo>
+                    <a:pt x="502" y="3717"/>
+                  </a:lnTo>
+                  <a:lnTo>
+                    <a:pt x="460" y="3749"/>
+                  </a:lnTo>
+                  <a:lnTo>
+                    <a:pt x="420" y="3783"/>
+                  </a:lnTo>
+                  <a:lnTo>
+                    <a:pt x="382" y="3817"/>
+                  </a:lnTo>
+                  <a:lnTo>
+                    <a:pt x="349" y="3854"/>
+                  </a:lnTo>
+                  <a:lnTo>
+                    <a:pt x="319" y="3893"/>
+                  </a:lnTo>
+                  <a:lnTo>
+                    <a:pt x="292" y="3939"/>
+                  </a:lnTo>
+                  <a:lnTo>
+                    <a:pt x="269" y="3989"/>
+                  </a:lnTo>
+                  <a:lnTo>
+                    <a:pt x="251" y="4042"/>
+                  </a:lnTo>
+                  <a:lnTo>
+                    <a:pt x="234" y="4097"/>
+                  </a:lnTo>
+                  <a:lnTo>
+                    <a:pt x="220" y="4154"/>
+                  </a:lnTo>
+                  <a:lnTo>
+                    <a:pt x="204" y="4210"/>
+                  </a:lnTo>
+                  <a:lnTo>
+                    <a:pt x="188" y="4265"/>
+                  </a:lnTo>
+                  <a:lnTo>
+                    <a:pt x="171" y="4320"/>
+                  </a:lnTo>
+                  <a:lnTo>
+                    <a:pt x="0" y="4320"/>
+                  </a:lnTo>
+                  <a:lnTo>
+                    <a:pt x="17" y="4278"/>
+                  </a:lnTo>
+                  <a:lnTo>
+                    <a:pt x="33" y="4232"/>
+                  </a:lnTo>
+                  <a:lnTo>
+                    <a:pt x="46" y="4183"/>
+                  </a:lnTo>
+                  <a:lnTo>
+                    <a:pt x="60" y="4131"/>
+                  </a:lnTo>
+                  <a:lnTo>
+                    <a:pt x="75" y="4075"/>
+                  </a:lnTo>
+                  <a:lnTo>
+                    <a:pt x="90" y="4019"/>
+                  </a:lnTo>
+                  <a:lnTo>
+                    <a:pt x="109" y="3964"/>
+                  </a:lnTo>
+                  <a:lnTo>
+                    <a:pt x="129" y="3909"/>
+                  </a:lnTo>
+                  <a:lnTo>
+                    <a:pt x="156" y="3855"/>
+                  </a:lnTo>
+                  <a:lnTo>
+                    <a:pt x="186" y="3804"/>
+                  </a:lnTo>
+                  <a:lnTo>
+                    <a:pt x="222" y="3756"/>
+                  </a:lnTo>
+                  <a:lnTo>
+                    <a:pt x="261" y="3713"/>
+                  </a:lnTo>
+                  <a:lnTo>
+                    <a:pt x="303" y="3672"/>
+                  </a:lnTo>
+                  <a:lnTo>
+                    <a:pt x="348" y="3634"/>
+                  </a:lnTo>
+                  <a:lnTo>
+                    <a:pt x="392" y="3599"/>
+                  </a:lnTo>
+                  <a:lnTo>
+                    <a:pt x="438" y="3565"/>
+                  </a:lnTo>
+                  <a:lnTo>
+                    <a:pt x="482" y="3531"/>
+                  </a:lnTo>
+                  <a:lnTo>
+                    <a:pt x="523" y="3499"/>
+                  </a:lnTo>
+                  <a:lnTo>
+                    <a:pt x="561" y="3466"/>
+                  </a:lnTo>
+                  <a:lnTo>
+                    <a:pt x="594" y="3434"/>
+                  </a:lnTo>
+                  <a:lnTo>
+                    <a:pt x="620" y="3400"/>
+                  </a:lnTo>
+                  <a:lnTo>
+                    <a:pt x="638" y="3367"/>
+                  </a:lnTo>
+                  <a:lnTo>
+                    <a:pt x="647" y="3336"/>
+                  </a:lnTo>
+                  <a:lnTo>
+                    <a:pt x="652" y="3302"/>
+                  </a:lnTo>
+                  <a:lnTo>
+                    <a:pt x="654" y="3265"/>
+                  </a:lnTo>
+                  <a:lnTo>
+                    <a:pt x="651" y="3224"/>
+                  </a:lnTo>
+                  <a:lnTo>
+                    <a:pt x="647" y="3181"/>
+                  </a:lnTo>
+                  <a:lnTo>
+                    <a:pt x="642" y="3137"/>
+                  </a:lnTo>
+                  <a:lnTo>
+                    <a:pt x="637" y="3091"/>
+                  </a:lnTo>
+                  <a:lnTo>
+                    <a:pt x="626" y="3021"/>
+                  </a:lnTo>
+                  <a:lnTo>
+                    <a:pt x="620" y="2952"/>
+                  </a:lnTo>
+                  <a:lnTo>
+                    <a:pt x="616" y="2881"/>
+                  </a:lnTo>
+                  <a:lnTo>
+                    <a:pt x="618" y="2809"/>
+                  </a:lnTo>
+                  <a:lnTo>
+                    <a:pt x="628" y="2737"/>
+                  </a:lnTo>
+                  <a:lnTo>
+                    <a:pt x="642" y="2681"/>
+                  </a:lnTo>
+                  <a:lnTo>
+                    <a:pt x="661" y="2626"/>
+                  </a:lnTo>
+                  <a:lnTo>
+                    <a:pt x="685" y="2574"/>
+                  </a:lnTo>
+                  <a:lnTo>
+                    <a:pt x="711" y="2521"/>
+                  </a:lnTo>
+                  <a:lnTo>
+                    <a:pt x="739" y="2472"/>
+                  </a:lnTo>
+                  <a:lnTo>
+                    <a:pt x="767" y="2423"/>
+                  </a:lnTo>
+                  <a:lnTo>
+                    <a:pt x="791" y="2381"/>
+                  </a:lnTo>
+                  <a:lnTo>
+                    <a:pt x="813" y="2342"/>
+                  </a:lnTo>
+                  <a:lnTo>
+                    <a:pt x="834" y="2303"/>
+                  </a:lnTo>
+                  <a:lnTo>
+                    <a:pt x="851" y="2265"/>
+                  </a:lnTo>
+                  <a:lnTo>
+                    <a:pt x="864" y="2228"/>
+                  </a:lnTo>
+                  <a:lnTo>
+                    <a:pt x="873" y="2194"/>
+                  </a:lnTo>
+                  <a:lnTo>
+                    <a:pt x="876" y="2160"/>
+                  </a:lnTo>
+                  <a:lnTo>
+                    <a:pt x="873" y="2126"/>
+                  </a:lnTo>
+                  <a:lnTo>
+                    <a:pt x="864" y="2092"/>
+                  </a:lnTo>
+                  <a:lnTo>
+                    <a:pt x="851" y="2055"/>
+                  </a:lnTo>
+                  <a:lnTo>
+                    <a:pt x="834" y="2017"/>
+                  </a:lnTo>
+                  <a:lnTo>
+                    <a:pt x="813" y="1978"/>
+                  </a:lnTo>
+                  <a:lnTo>
+                    <a:pt x="791" y="1939"/>
+                  </a:lnTo>
+                  <a:lnTo>
+                    <a:pt x="767" y="1897"/>
+                  </a:lnTo>
+                  <a:lnTo>
+                    <a:pt x="739" y="1848"/>
+                  </a:lnTo>
+                  <a:lnTo>
+                    <a:pt x="711" y="1799"/>
+                  </a:lnTo>
+                  <a:lnTo>
+                    <a:pt x="685" y="1746"/>
+                  </a:lnTo>
+                  <a:lnTo>
+                    <a:pt x="661" y="1694"/>
+                  </a:lnTo>
+                  <a:lnTo>
+                    <a:pt x="642" y="1639"/>
+                  </a:lnTo>
+                  <a:lnTo>
+                    <a:pt x="628" y="1583"/>
+                  </a:lnTo>
+                  <a:lnTo>
+                    <a:pt x="618" y="1511"/>
+                  </a:lnTo>
+                  <a:lnTo>
+                    <a:pt x="616" y="1439"/>
+                  </a:lnTo>
+                  <a:lnTo>
+                    <a:pt x="620" y="1368"/>
+                  </a:lnTo>
+                  <a:lnTo>
+                    <a:pt x="626" y="1299"/>
+                  </a:lnTo>
+                  <a:lnTo>
+                    <a:pt x="637" y="1229"/>
+                  </a:lnTo>
+                  <a:lnTo>
+                    <a:pt x="642" y="1183"/>
+                  </a:lnTo>
+                  <a:lnTo>
+                    <a:pt x="647" y="1139"/>
+                  </a:lnTo>
+                  <a:lnTo>
+                    <a:pt x="651" y="1096"/>
+                  </a:lnTo>
+                  <a:lnTo>
+                    <a:pt x="654" y="1055"/>
+                  </a:lnTo>
+                  <a:lnTo>
+                    <a:pt x="652" y="1018"/>
+                  </a:lnTo>
+                  <a:lnTo>
+                    <a:pt x="647" y="984"/>
+                  </a:lnTo>
+                  <a:lnTo>
+                    <a:pt x="638" y="953"/>
+                  </a:lnTo>
+                  <a:lnTo>
+                    <a:pt x="620" y="920"/>
+                  </a:lnTo>
+                  <a:lnTo>
+                    <a:pt x="594" y="886"/>
+                  </a:lnTo>
+                  <a:lnTo>
+                    <a:pt x="561" y="854"/>
+                  </a:lnTo>
+                  <a:lnTo>
+                    <a:pt x="523" y="822"/>
+                  </a:lnTo>
+                  <a:lnTo>
+                    <a:pt x="482" y="789"/>
+                  </a:lnTo>
+                  <a:lnTo>
+                    <a:pt x="438" y="755"/>
+                  </a:lnTo>
+                  <a:lnTo>
+                    <a:pt x="392" y="721"/>
+                  </a:lnTo>
+                  <a:lnTo>
+                    <a:pt x="348" y="686"/>
+                  </a:lnTo>
+                  <a:lnTo>
+                    <a:pt x="303" y="648"/>
+                  </a:lnTo>
+                  <a:lnTo>
+                    <a:pt x="261" y="607"/>
+                  </a:lnTo>
+                  <a:lnTo>
+                    <a:pt x="222" y="564"/>
+                  </a:lnTo>
+                  <a:lnTo>
+                    <a:pt x="186" y="516"/>
+                  </a:lnTo>
+                  <a:lnTo>
+                    <a:pt x="156" y="465"/>
+                  </a:lnTo>
+                  <a:lnTo>
+                    <a:pt x="129" y="411"/>
+                  </a:lnTo>
+                  <a:lnTo>
+                    <a:pt x="109" y="356"/>
+                  </a:lnTo>
+                  <a:lnTo>
+                    <a:pt x="90" y="301"/>
+                  </a:lnTo>
+                  <a:lnTo>
+                    <a:pt x="75" y="245"/>
+                  </a:lnTo>
+                  <a:lnTo>
+                    <a:pt x="60" y="189"/>
+                  </a:lnTo>
+                  <a:lnTo>
+                    <a:pt x="46" y="137"/>
+                  </a:lnTo>
+                  <a:lnTo>
+                    <a:pt x="33" y="88"/>
+                  </a:lnTo>
+                  <a:lnTo>
+                    <a:pt x="17" y="42"/>
+                  </a:lnTo>
+                  <a:lnTo>
+                    <a:pt x="0" y="0"/>
+                  </a:lnTo>
+                  <a:lnTo>
+                    <a:pt x="0" y="0"/>
+                  </a:lnTo>
+                  <a:close/>
+                </a:path>
+              </a:pathLst>
+            </a:custGeom>
+            <a:solidFill>
+              <a:schemeClr val="accent1"/>
+            </a:solidFill>
+            <a:ln w="0">
+              <a:noFill/>
+              <a:prstDash val="solid"/>
+              <a:round/>
+              <a:headEnd/>
+              <a:tailEnd/>
+            </a:ln>
+          </p:spPr>
+        </p:sp>
+      </p:grpSp>
     </p:spTree>
     <p:extLst>
       <p:ext uri="{BB962C8B-B14F-4D97-AF65-F5344CB8AC3E}">
-        <p14:creationId xmlns:p14="http://schemas.microsoft.com/office/powerpoint/2010/main" val="370130844"/>
+        <p14:creationId xmlns:p14="http://schemas.microsoft.com/office/powerpoint/2010/main" val="53301214"/>
       </p:ext>
     </p:extLst>
   </p:cSld>
   <p:clrMapOvr>
-    <a:masterClrMapping/>
+    <a:overrideClrMapping bg1="dk1" tx1="lt1" bg2="dk2" tx2="lt2" accent1="accent1" accent2="accent2" accent3="accent3" accent4="accent4" accent5="accent5" accent6="accent6" hlink="hlink" folHlink="folHlink"/>
   </p:clrMapOvr>
 </p:sldLayout>
 </file>
@@ -1226,13 +4043,7 @@
       </p:grpSpPr>
       <p:sp>
         <p:nvSpPr>
-          <p:cNvPr id="2" name="Titel 1">
-            <a:extLst>
-              <a:ext uri="{FF2B5EF4-FFF2-40B4-BE49-F238E27FC236}">
-                <a16:creationId xmlns:a16="http://schemas.microsoft.com/office/drawing/2014/main" id="{0EA56014-5398-7C7F-D9D4-182A289783F9}"/>
-              </a:ext>
-            </a:extLst>
-          </p:cNvPr>
+          <p:cNvPr id="2" name="Title 1"/>
           <p:cNvSpPr>
             <a:spLocks noGrp="1"/>
           </p:cNvSpPr>
@@ -1249,18 +4060,13 @@
               <a:rPr lang="da-DK"/>
               <a:t>Klik for at redigere titeltypografien i masteren</a:t>
             </a:r>
+            <a:endParaRPr lang="en-US" dirty="0"/>
           </a:p>
         </p:txBody>
       </p:sp>
       <p:sp>
         <p:nvSpPr>
-          <p:cNvPr id="3" name="Pladsholder til indhold 2">
-            <a:extLst>
-              <a:ext uri="{FF2B5EF4-FFF2-40B4-BE49-F238E27FC236}">
-                <a16:creationId xmlns:a16="http://schemas.microsoft.com/office/drawing/2014/main" id="{4876C2E5-6120-8268-1D7A-642D1A32CF6A}"/>
-              </a:ext>
-            </a:extLst>
-          </p:cNvPr>
+          <p:cNvPr id="3" name="Content Placeholder 2"/>
           <p:cNvSpPr>
             <a:spLocks noGrp="1"/>
           </p:cNvSpPr>
@@ -1270,8 +4076,8 @@
         </p:nvSpPr>
         <p:spPr>
           <a:xfrm>
-            <a:off x="838200" y="1825625"/>
-            <a:ext cx="5181600" cy="4351338"/>
+            <a:off x="1257300" y="2286000"/>
+            <a:ext cx="4800600" cy="3619500"/>
           </a:xfrm>
         </p:spPr>
         <p:txBody>
@@ -1311,18 +4117,13 @@
               <a:rPr lang="da-DK"/>
               <a:t>Femte niveau</a:t>
             </a:r>
+            <a:endParaRPr lang="en-US" dirty="0"/>
           </a:p>
         </p:txBody>
       </p:sp>
       <p:sp>
         <p:nvSpPr>
-          <p:cNvPr id="4" name="Pladsholder til indhold 3">
-            <a:extLst>
-              <a:ext uri="{FF2B5EF4-FFF2-40B4-BE49-F238E27FC236}">
-                <a16:creationId xmlns:a16="http://schemas.microsoft.com/office/drawing/2014/main" id="{80A437E7-8B07-E201-FF29-2B7EB6BADF89}"/>
-              </a:ext>
-            </a:extLst>
-          </p:cNvPr>
+          <p:cNvPr id="4" name="Content Placeholder 3"/>
           <p:cNvSpPr>
             <a:spLocks noGrp="1"/>
           </p:cNvSpPr>
@@ -1332,8 +4133,8 @@
         </p:nvSpPr>
         <p:spPr>
           <a:xfrm>
-            <a:off x="6172200" y="1825625"/>
-            <a:ext cx="5181600" cy="4351338"/>
+            <a:off x="6647796" y="2286000"/>
+            <a:ext cx="4800600" cy="3619500"/>
           </a:xfrm>
         </p:spPr>
         <p:txBody>
@@ -1373,18 +4174,13 @@
               <a:rPr lang="da-DK"/>
               <a:t>Femte niveau</a:t>
             </a:r>
+            <a:endParaRPr lang="en-US" dirty="0"/>
           </a:p>
         </p:txBody>
       </p:sp>
       <p:sp>
         <p:nvSpPr>
-          <p:cNvPr id="5" name="Pladsholder til dato 4">
-            <a:extLst>
-              <a:ext uri="{FF2B5EF4-FFF2-40B4-BE49-F238E27FC236}">
-                <a16:creationId xmlns:a16="http://schemas.microsoft.com/office/drawing/2014/main" id="{5C8274AA-096B-D2E8-C021-9638C2B925F6}"/>
-              </a:ext>
-            </a:extLst>
-          </p:cNvPr>
+          <p:cNvPr id="5" name="Date Placeholder 4"/>
           <p:cNvSpPr>
             <a:spLocks noGrp="1"/>
           </p:cNvSpPr>
@@ -1399,7 +4195,7 @@
           <a:p>
             <a:fld id="{9F2C61E5-4FB9-4B7B-BFC7-89973F7231D0}" type="datetimeFigureOut">
               <a:rPr lang="da-DK" smtClean="0"/>
-              <a:t>16-03-2026</a:t>
+              <a:t>20-03-2026</a:t>
             </a:fld>
             <a:endParaRPr lang="da-DK"/>
           </a:p>
@@ -1407,13 +4203,7 @@
       </p:sp>
       <p:sp>
         <p:nvSpPr>
-          <p:cNvPr id="6" name="Pladsholder til sidefod 5">
-            <a:extLst>
-              <a:ext uri="{FF2B5EF4-FFF2-40B4-BE49-F238E27FC236}">
-                <a16:creationId xmlns:a16="http://schemas.microsoft.com/office/drawing/2014/main" id="{4C2D56CC-ED7C-5F57-2BD7-7A308A2CB8D3}"/>
-              </a:ext>
-            </a:extLst>
-          </p:cNvPr>
+          <p:cNvPr id="6" name="Footer Placeholder 5"/>
           <p:cNvSpPr>
             <a:spLocks noGrp="1"/>
           </p:cNvSpPr>
@@ -1432,13 +4222,7 @@
       </p:sp>
       <p:sp>
         <p:nvSpPr>
-          <p:cNvPr id="7" name="Pladsholder til slidenummer 6">
-            <a:extLst>
-              <a:ext uri="{FF2B5EF4-FFF2-40B4-BE49-F238E27FC236}">
-                <a16:creationId xmlns:a16="http://schemas.microsoft.com/office/drawing/2014/main" id="{9C29AAA1-49CA-DA55-8408-F9824FA03258}"/>
-              </a:ext>
-            </a:extLst>
-          </p:cNvPr>
+          <p:cNvPr id="7" name="Slide Number Placeholder 6"/>
           <p:cNvSpPr>
             <a:spLocks noGrp="1"/>
           </p:cNvSpPr>
@@ -1462,13 +4246,18 @@
     </p:spTree>
     <p:extLst>
       <p:ext uri="{BB962C8B-B14F-4D97-AF65-F5344CB8AC3E}">
-        <p14:creationId xmlns:p14="http://schemas.microsoft.com/office/powerpoint/2010/main" val="2796377919"/>
+        <p14:creationId xmlns:p14="http://schemas.microsoft.com/office/powerpoint/2010/main" val="60616970"/>
       </p:ext>
     </p:extLst>
   </p:cSld>
   <p:clrMapOvr>
     <a:masterClrMapping/>
   </p:clrMapOvr>
+  <p:extLst>
+    <p:ext uri="{DCECCB84-F9BA-43D5-87BE-67443E8EF086}">
+      <p15:sldGuideLst xmlns:p15="http://schemas.microsoft.com/office/powerpoint/2012/main"/>
+    </p:ext>
+  </p:extLst>
 </p:sldLayout>
 </file>
 
@@ -1491,13 +4280,7 @@
       </p:grpSpPr>
       <p:sp>
         <p:nvSpPr>
-          <p:cNvPr id="2" name="Titel 1">
-            <a:extLst>
-              <a:ext uri="{FF2B5EF4-FFF2-40B4-BE49-F238E27FC236}">
-                <a16:creationId xmlns:a16="http://schemas.microsoft.com/office/drawing/2014/main" id="{BC9E4E78-B23B-BD90-3A30-E4084BA2C6F6}"/>
-              </a:ext>
-            </a:extLst>
-          </p:cNvPr>
+          <p:cNvPr id="2" name="Title 1"/>
           <p:cNvSpPr>
             <a:spLocks noGrp="1"/>
           </p:cNvSpPr>
@@ -1507,8 +4290,8 @@
         </p:nvSpPr>
         <p:spPr>
           <a:xfrm>
-            <a:off x="839788" y="365125"/>
-            <a:ext cx="10515600" cy="1325563"/>
+            <a:off x="1252728" y="381000"/>
+            <a:ext cx="10172700" cy="1493517"/>
           </a:xfrm>
         </p:spPr>
         <p:txBody>
@@ -1519,18 +4302,13 @@
               <a:rPr lang="da-DK"/>
               <a:t>Klik for at redigere titeltypografien i masteren</a:t>
             </a:r>
+            <a:endParaRPr lang="en-US" dirty="0"/>
           </a:p>
         </p:txBody>
       </p:sp>
       <p:sp>
         <p:nvSpPr>
-          <p:cNvPr id="3" name="Pladsholder til tekst 2">
-            <a:extLst>
-              <a:ext uri="{FF2B5EF4-FFF2-40B4-BE49-F238E27FC236}">
-                <a16:creationId xmlns:a16="http://schemas.microsoft.com/office/drawing/2014/main" id="{3AEAF65C-E2A2-6A00-05D7-F63B9A37D8BD}"/>
-              </a:ext>
-            </a:extLst>
-          </p:cNvPr>
+          <p:cNvPr id="3" name="Text Placeholder 2"/>
           <p:cNvSpPr>
             <a:spLocks noGrp="1"/>
           </p:cNvSpPr>
@@ -1540,20 +4318,29 @@
         </p:nvSpPr>
         <p:spPr>
           <a:xfrm>
-            <a:off x="839788" y="1681163"/>
-            <a:ext cx="5157787" cy="823912"/>
+            <a:off x="1251678" y="2199633"/>
+            <a:ext cx="4800600" cy="632529"/>
           </a:xfrm>
         </p:spPr>
         <p:txBody>
-          <a:bodyPr anchor="b"/>
+          <a:bodyPr anchor="b">
+            <a:noAutofit/>
+          </a:bodyPr>
           <a:lstStyle>
             <a:lvl1pPr marL="0" indent="0">
+              <a:lnSpc>
+                <a:spcPct val="100000"/>
+              </a:lnSpc>
               <a:buNone/>
-              <a:defRPr sz="2400" b="1"/>
+              <a:defRPr sz="1900" b="1" cap="all" spc="200" baseline="0">
+                <a:solidFill>
+                  <a:schemeClr val="tx2"/>
+                </a:solidFill>
+              </a:defRPr>
             </a:lvl1pPr>
             <a:lvl2pPr marL="457200" indent="0">
               <a:buNone/>
-              <a:defRPr sz="2000" b="1"/>
+              <a:defRPr sz="1900" b="1"/>
             </a:lvl2pPr>
             <a:lvl3pPr marL="914400" indent="0">
               <a:buNone/>
@@ -1595,13 +4382,7 @@
       </p:sp>
       <p:sp>
         <p:nvSpPr>
-          <p:cNvPr id="4" name="Pladsholder til indhold 3">
-            <a:extLst>
-              <a:ext uri="{FF2B5EF4-FFF2-40B4-BE49-F238E27FC236}">
-                <a16:creationId xmlns:a16="http://schemas.microsoft.com/office/drawing/2014/main" id="{BC9D7D42-4A48-DD9F-F2E5-20B2429D45AC}"/>
-              </a:ext>
-            </a:extLst>
-          </p:cNvPr>
+          <p:cNvPr id="4" name="Content Placeholder 3"/>
           <p:cNvSpPr>
             <a:spLocks noGrp="1"/>
           </p:cNvSpPr>
@@ -1611,8 +4392,8 @@
         </p:nvSpPr>
         <p:spPr>
           <a:xfrm>
-            <a:off x="839788" y="2505075"/>
-            <a:ext cx="5157787" cy="3684588"/>
+            <a:off x="1257300" y="2909102"/>
+            <a:ext cx="4800600" cy="2996398"/>
           </a:xfrm>
         </p:spPr>
         <p:txBody>
@@ -1652,18 +4433,13 @@
               <a:rPr lang="da-DK"/>
               <a:t>Femte niveau</a:t>
             </a:r>
+            <a:endParaRPr lang="en-US" dirty="0"/>
           </a:p>
         </p:txBody>
       </p:sp>
       <p:sp>
         <p:nvSpPr>
-          <p:cNvPr id="5" name="Pladsholder til tekst 4">
-            <a:extLst>
-              <a:ext uri="{FF2B5EF4-FFF2-40B4-BE49-F238E27FC236}">
-                <a16:creationId xmlns:a16="http://schemas.microsoft.com/office/drawing/2014/main" id="{0910A0CA-34D7-0D3A-7862-07B3350B13F1}"/>
-              </a:ext>
-            </a:extLst>
-          </p:cNvPr>
+          <p:cNvPr id="5" name="Text Placeholder 4"/>
           <p:cNvSpPr>
             <a:spLocks noGrp="1"/>
           </p:cNvSpPr>
@@ -1673,20 +4449,29 @@
         </p:nvSpPr>
         <p:spPr>
           <a:xfrm>
-            <a:off x="6172200" y="1681163"/>
-            <a:ext cx="5183188" cy="823912"/>
+            <a:off x="6633864" y="2199633"/>
+            <a:ext cx="4800600" cy="632529"/>
           </a:xfrm>
         </p:spPr>
         <p:txBody>
-          <a:bodyPr anchor="b"/>
+          <a:bodyPr anchor="b">
+            <a:noAutofit/>
+          </a:bodyPr>
           <a:lstStyle>
             <a:lvl1pPr marL="0" indent="0">
+              <a:lnSpc>
+                <a:spcPct val="100000"/>
+              </a:lnSpc>
               <a:buNone/>
-              <a:defRPr sz="2400" b="1"/>
+              <a:defRPr sz="1900" b="1" cap="all" spc="200" baseline="0">
+                <a:solidFill>
+                  <a:schemeClr val="tx2"/>
+                </a:solidFill>
+              </a:defRPr>
             </a:lvl1pPr>
             <a:lvl2pPr marL="457200" indent="0">
               <a:buNone/>
-              <a:defRPr sz="2000" b="1"/>
+              <a:defRPr sz="1900" b="1"/>
             </a:lvl2pPr>
             <a:lvl3pPr marL="914400" indent="0">
               <a:buNone/>
@@ -1728,13 +4513,7 @@
       </p:sp>
       <p:sp>
         <p:nvSpPr>
-          <p:cNvPr id="6" name="Pladsholder til indhold 5">
-            <a:extLst>
-              <a:ext uri="{FF2B5EF4-FFF2-40B4-BE49-F238E27FC236}">
-                <a16:creationId xmlns:a16="http://schemas.microsoft.com/office/drawing/2014/main" id="{D75BDD78-E8AB-0446-07E6-DA70A550F658}"/>
-              </a:ext>
-            </a:extLst>
-          </p:cNvPr>
+          <p:cNvPr id="6" name="Content Placeholder 5"/>
           <p:cNvSpPr>
             <a:spLocks noGrp="1"/>
           </p:cNvSpPr>
@@ -1744,8 +4523,8 @@
         </p:nvSpPr>
         <p:spPr>
           <a:xfrm>
-            <a:off x="6172200" y="2505075"/>
-            <a:ext cx="5183188" cy="3684588"/>
+            <a:off x="6633864" y="2909102"/>
+            <a:ext cx="4800600" cy="2996398"/>
           </a:xfrm>
         </p:spPr>
         <p:txBody>
@@ -1785,18 +4564,13 @@
               <a:rPr lang="da-DK"/>
               <a:t>Femte niveau</a:t>
             </a:r>
+            <a:endParaRPr lang="en-US" dirty="0"/>
           </a:p>
         </p:txBody>
       </p:sp>
       <p:sp>
         <p:nvSpPr>
-          <p:cNvPr id="7" name="Pladsholder til dato 6">
-            <a:extLst>
-              <a:ext uri="{FF2B5EF4-FFF2-40B4-BE49-F238E27FC236}">
-                <a16:creationId xmlns:a16="http://schemas.microsoft.com/office/drawing/2014/main" id="{8E41FCF6-6A4E-1D52-B73B-66E3FCC42920}"/>
-              </a:ext>
-            </a:extLst>
-          </p:cNvPr>
+          <p:cNvPr id="7" name="Date Placeholder 6"/>
           <p:cNvSpPr>
             <a:spLocks noGrp="1"/>
           </p:cNvSpPr>
@@ -1811,7 +4585,7 @@
           <a:p>
             <a:fld id="{9F2C61E5-4FB9-4B7B-BFC7-89973F7231D0}" type="datetimeFigureOut">
               <a:rPr lang="da-DK" smtClean="0"/>
-              <a:t>16-03-2026</a:t>
+              <a:t>20-03-2026</a:t>
             </a:fld>
             <a:endParaRPr lang="da-DK"/>
           </a:p>
@@ -1819,13 +4593,7 @@
       </p:sp>
       <p:sp>
         <p:nvSpPr>
-          <p:cNvPr id="8" name="Pladsholder til sidefod 7">
-            <a:extLst>
-              <a:ext uri="{FF2B5EF4-FFF2-40B4-BE49-F238E27FC236}">
-                <a16:creationId xmlns:a16="http://schemas.microsoft.com/office/drawing/2014/main" id="{BE667D61-A438-A734-6F88-455E623F07A7}"/>
-              </a:ext>
-            </a:extLst>
-          </p:cNvPr>
+          <p:cNvPr id="8" name="Footer Placeholder 7"/>
           <p:cNvSpPr>
             <a:spLocks noGrp="1"/>
           </p:cNvSpPr>
@@ -1844,13 +4612,7 @@
       </p:sp>
       <p:sp>
         <p:nvSpPr>
-          <p:cNvPr id="9" name="Pladsholder til slidenummer 8">
-            <a:extLst>
-              <a:ext uri="{FF2B5EF4-FFF2-40B4-BE49-F238E27FC236}">
-                <a16:creationId xmlns:a16="http://schemas.microsoft.com/office/drawing/2014/main" id="{F4ABE8BD-B641-32C9-F382-038BA8B8619A}"/>
-              </a:ext>
-            </a:extLst>
-          </p:cNvPr>
+          <p:cNvPr id="9" name="Slide Number Placeholder 8"/>
           <p:cNvSpPr>
             <a:spLocks noGrp="1"/>
           </p:cNvSpPr>
@@ -1874,13 +4636,18 @@
     </p:spTree>
     <p:extLst>
       <p:ext uri="{BB962C8B-B14F-4D97-AF65-F5344CB8AC3E}">
-        <p14:creationId xmlns:p14="http://schemas.microsoft.com/office/powerpoint/2010/main" val="953169784"/>
+        <p14:creationId xmlns:p14="http://schemas.microsoft.com/office/powerpoint/2010/main" val="1634845329"/>
       </p:ext>
     </p:extLst>
   </p:cSld>
   <p:clrMapOvr>
     <a:masterClrMapping/>
   </p:clrMapOvr>
+  <p:extLst>
+    <p:ext uri="{DCECCB84-F9BA-43D5-87BE-67443E8EF086}">
+      <p15:sldGuideLst xmlns:p15="http://schemas.microsoft.com/office/powerpoint/2012/main"/>
+    </p:ext>
+  </p:extLst>
 </p:sldLayout>
 </file>
 
@@ -1903,13 +4670,7 @@
       </p:grpSpPr>
       <p:sp>
         <p:nvSpPr>
-          <p:cNvPr id="2" name="Titel 1">
-            <a:extLst>
-              <a:ext uri="{FF2B5EF4-FFF2-40B4-BE49-F238E27FC236}">
-                <a16:creationId xmlns:a16="http://schemas.microsoft.com/office/drawing/2014/main" id="{A02A4417-7939-3D63-E6F3-DA3844019739}"/>
-              </a:ext>
-            </a:extLst>
-          </p:cNvPr>
+          <p:cNvPr id="2" name="Title 1"/>
           <p:cNvSpPr>
             <a:spLocks noGrp="1"/>
           </p:cNvSpPr>
@@ -1926,18 +4687,13 @@
               <a:rPr lang="da-DK"/>
               <a:t>Klik for at redigere titeltypografien i masteren</a:t>
             </a:r>
+            <a:endParaRPr lang="en-US" dirty="0"/>
           </a:p>
         </p:txBody>
       </p:sp>
       <p:sp>
         <p:nvSpPr>
-          <p:cNvPr id="3" name="Pladsholder til dato 2">
-            <a:extLst>
-              <a:ext uri="{FF2B5EF4-FFF2-40B4-BE49-F238E27FC236}">
-                <a16:creationId xmlns:a16="http://schemas.microsoft.com/office/drawing/2014/main" id="{115CC937-0CF2-C3BF-DCC2-167E9F8A2F9B}"/>
-              </a:ext>
-            </a:extLst>
-          </p:cNvPr>
+          <p:cNvPr id="3" name="Date Placeholder 2"/>
           <p:cNvSpPr>
             <a:spLocks noGrp="1"/>
           </p:cNvSpPr>
@@ -1952,7 +4708,7 @@
           <a:p>
             <a:fld id="{9F2C61E5-4FB9-4B7B-BFC7-89973F7231D0}" type="datetimeFigureOut">
               <a:rPr lang="da-DK" smtClean="0"/>
-              <a:t>16-03-2026</a:t>
+              <a:t>20-03-2026</a:t>
             </a:fld>
             <a:endParaRPr lang="da-DK"/>
           </a:p>
@@ -1960,13 +4716,7 @@
       </p:sp>
       <p:sp>
         <p:nvSpPr>
-          <p:cNvPr id="4" name="Pladsholder til sidefod 3">
-            <a:extLst>
-              <a:ext uri="{FF2B5EF4-FFF2-40B4-BE49-F238E27FC236}">
-                <a16:creationId xmlns:a16="http://schemas.microsoft.com/office/drawing/2014/main" id="{7DEFC3B5-11B8-F4E4-6919-DB3A0BA618A4}"/>
-              </a:ext>
-            </a:extLst>
-          </p:cNvPr>
+          <p:cNvPr id="4" name="Footer Placeholder 3"/>
           <p:cNvSpPr>
             <a:spLocks noGrp="1"/>
           </p:cNvSpPr>
@@ -1985,13 +4735,7 @@
       </p:sp>
       <p:sp>
         <p:nvSpPr>
-          <p:cNvPr id="5" name="Pladsholder til slidenummer 4">
-            <a:extLst>
-              <a:ext uri="{FF2B5EF4-FFF2-40B4-BE49-F238E27FC236}">
-                <a16:creationId xmlns:a16="http://schemas.microsoft.com/office/drawing/2014/main" id="{42DD3273-B237-3416-EF05-7AFD3F6549C6}"/>
-              </a:ext>
-            </a:extLst>
-          </p:cNvPr>
+          <p:cNvPr id="5" name="Slide Number Placeholder 4"/>
           <p:cNvSpPr>
             <a:spLocks noGrp="1"/>
           </p:cNvSpPr>
@@ -2015,7 +4759,7 @@
     </p:spTree>
     <p:extLst>
       <p:ext uri="{BB962C8B-B14F-4D97-AF65-F5344CB8AC3E}">
-        <p14:creationId xmlns:p14="http://schemas.microsoft.com/office/powerpoint/2010/main" val="3096619872"/>
+        <p14:creationId xmlns:p14="http://schemas.microsoft.com/office/powerpoint/2010/main" val="711740743"/>
       </p:ext>
     </p:extLst>
   </p:cSld>
@@ -2044,13 +4788,7 @@
       </p:grpSpPr>
       <p:sp>
         <p:nvSpPr>
-          <p:cNvPr id="2" name="Pladsholder til dato 1">
-            <a:extLst>
-              <a:ext uri="{FF2B5EF4-FFF2-40B4-BE49-F238E27FC236}">
-                <a16:creationId xmlns:a16="http://schemas.microsoft.com/office/drawing/2014/main" id="{DE3FA7D9-DA24-60A3-EB26-00457FD54BE3}"/>
-              </a:ext>
-            </a:extLst>
-          </p:cNvPr>
+          <p:cNvPr id="2" name="Date Placeholder 1"/>
           <p:cNvSpPr>
             <a:spLocks noGrp="1"/>
           </p:cNvSpPr>
@@ -2065,7 +4803,7 @@
           <a:p>
             <a:fld id="{9F2C61E5-4FB9-4B7B-BFC7-89973F7231D0}" type="datetimeFigureOut">
               <a:rPr lang="da-DK" smtClean="0"/>
-              <a:t>16-03-2026</a:t>
+              <a:t>20-03-2026</a:t>
             </a:fld>
             <a:endParaRPr lang="da-DK"/>
           </a:p>
@@ -2073,13 +4811,7 @@
       </p:sp>
       <p:sp>
         <p:nvSpPr>
-          <p:cNvPr id="3" name="Pladsholder til sidefod 2">
-            <a:extLst>
-              <a:ext uri="{FF2B5EF4-FFF2-40B4-BE49-F238E27FC236}">
-                <a16:creationId xmlns:a16="http://schemas.microsoft.com/office/drawing/2014/main" id="{FCBA3287-3ABD-B3F9-3145-A32BC1C213A5}"/>
-              </a:ext>
-            </a:extLst>
-          </p:cNvPr>
+          <p:cNvPr id="3" name="Footer Placeholder 2"/>
           <p:cNvSpPr>
             <a:spLocks noGrp="1"/>
           </p:cNvSpPr>
@@ -2098,13 +4830,7 @@
       </p:sp>
       <p:sp>
         <p:nvSpPr>
-          <p:cNvPr id="4" name="Pladsholder til slidenummer 3">
-            <a:extLst>
-              <a:ext uri="{FF2B5EF4-FFF2-40B4-BE49-F238E27FC236}">
-                <a16:creationId xmlns:a16="http://schemas.microsoft.com/office/drawing/2014/main" id="{DD5A73C4-E9D7-3D49-D032-8E7467E3B8C3}"/>
-              </a:ext>
-            </a:extLst>
-          </p:cNvPr>
+          <p:cNvPr id="4" name="Slide Number Placeholder 3"/>
           <p:cNvSpPr>
             <a:spLocks noGrp="1"/>
           </p:cNvSpPr>
@@ -2128,7 +4854,7 @@
     </p:spTree>
     <p:extLst>
       <p:ext uri="{BB962C8B-B14F-4D97-AF65-F5344CB8AC3E}">
-        <p14:creationId xmlns:p14="http://schemas.microsoft.com/office/powerpoint/2010/main" val="2121237055"/>
+        <p14:creationId xmlns:p14="http://schemas.microsoft.com/office/powerpoint/2010/main" val="1187116954"/>
       </p:ext>
     </p:extLst>
   </p:cSld>
@@ -2139,7 +4865,7 @@
 </file>
 
 <file path=ppt/slideLayouts/slideLayout8.xml><?xml version="1.0" encoding="utf-8"?>
-<p:sldLayout xmlns:a="http://schemas.openxmlformats.org/drawingml/2006/main" xmlns:r="http://schemas.openxmlformats.org/officeDocument/2006/relationships" xmlns:p="http://schemas.openxmlformats.org/presentationml/2006/main" type="objTx" preserve="1">
+<p:sldLayout xmlns:a="http://schemas.openxmlformats.org/drawingml/2006/main" xmlns:r="http://schemas.openxmlformats.org/officeDocument/2006/relationships" xmlns:p="http://schemas.openxmlformats.org/presentationml/2006/main" showMasterSp="0" type="objTx" preserve="1">
   <p:cSld name="Indhold med billedtekst">
     <p:spTree>
       <p:nvGrpSpPr>
@@ -2157,13 +4883,468 @@
       </p:grpSpPr>
       <p:sp>
         <p:nvSpPr>
-          <p:cNvPr id="2" name="Titel 1">
-            <a:extLst>
-              <a:ext uri="{FF2B5EF4-FFF2-40B4-BE49-F238E27FC236}">
-                <a16:creationId xmlns:a16="http://schemas.microsoft.com/office/drawing/2014/main" id="{E609AB15-71F8-342B-3DCD-15F254DD7327}"/>
-              </a:ext>
-            </a:extLst>
-          </p:cNvPr>
+          <p:cNvPr id="17" name="Freeform 11" title="right scallop background shape"/>
+          <p:cNvSpPr/>
+          <p:nvPr/>
+        </p:nvSpPr>
+        <p:spPr bwMode="auto">
+          <a:xfrm>
+            <a:off x="7389812" y="0"/>
+            <a:ext cx="4802188" cy="6858000"/>
+          </a:xfrm>
+          <a:custGeom>
+            <a:avLst/>
+            <a:gdLst/>
+            <a:ahLst/>
+            <a:cxnLst/>
+            <a:rect l="0" t="0" r="r" b="b"/>
+            <a:pathLst>
+              <a:path w="3025" h="4320">
+                <a:moveTo>
+                  <a:pt x="0" y="0"/>
+                </a:moveTo>
+                <a:lnTo>
+                  <a:pt x="3025" y="0"/>
+                </a:lnTo>
+                <a:lnTo>
+                  <a:pt x="3025" y="4320"/>
+                </a:lnTo>
+                <a:lnTo>
+                  <a:pt x="0" y="4320"/>
+                </a:lnTo>
+                <a:lnTo>
+                  <a:pt x="3" y="4278"/>
+                </a:lnTo>
+                <a:lnTo>
+                  <a:pt x="8" y="4243"/>
+                </a:lnTo>
+                <a:lnTo>
+                  <a:pt x="14" y="4210"/>
+                </a:lnTo>
+                <a:lnTo>
+                  <a:pt x="24" y="4183"/>
+                </a:lnTo>
+                <a:lnTo>
+                  <a:pt x="34" y="4156"/>
+                </a:lnTo>
+                <a:lnTo>
+                  <a:pt x="46" y="4133"/>
+                </a:lnTo>
+                <a:lnTo>
+                  <a:pt x="58" y="4109"/>
+                </a:lnTo>
+                <a:lnTo>
+                  <a:pt x="69" y="4087"/>
+                </a:lnTo>
+                <a:lnTo>
+                  <a:pt x="80" y="4062"/>
+                </a:lnTo>
+                <a:lnTo>
+                  <a:pt x="90" y="4036"/>
+                </a:lnTo>
+                <a:lnTo>
+                  <a:pt x="99" y="4007"/>
+                </a:lnTo>
+                <a:lnTo>
+                  <a:pt x="106" y="3976"/>
+                </a:lnTo>
+                <a:lnTo>
+                  <a:pt x="111" y="3938"/>
+                </a:lnTo>
+                <a:lnTo>
+                  <a:pt x="113" y="3895"/>
+                </a:lnTo>
+                <a:lnTo>
+                  <a:pt x="111" y="3851"/>
+                </a:lnTo>
+                <a:lnTo>
+                  <a:pt x="106" y="3815"/>
+                </a:lnTo>
+                <a:lnTo>
+                  <a:pt x="99" y="3782"/>
+                </a:lnTo>
+                <a:lnTo>
+                  <a:pt x="90" y="3752"/>
+                </a:lnTo>
+                <a:lnTo>
+                  <a:pt x="80" y="3726"/>
+                </a:lnTo>
+                <a:lnTo>
+                  <a:pt x="68" y="3702"/>
+                </a:lnTo>
+                <a:lnTo>
+                  <a:pt x="56" y="3679"/>
+                </a:lnTo>
+                <a:lnTo>
+                  <a:pt x="44" y="3655"/>
+                </a:lnTo>
+                <a:lnTo>
+                  <a:pt x="33" y="3630"/>
+                </a:lnTo>
+                <a:lnTo>
+                  <a:pt x="22" y="3604"/>
+                </a:lnTo>
+                <a:lnTo>
+                  <a:pt x="13" y="3575"/>
+                </a:lnTo>
+                <a:lnTo>
+                  <a:pt x="7" y="3542"/>
+                </a:lnTo>
+                <a:lnTo>
+                  <a:pt x="1" y="3504"/>
+                </a:lnTo>
+                <a:lnTo>
+                  <a:pt x="0" y="3461"/>
+                </a:lnTo>
+                <a:lnTo>
+                  <a:pt x="1" y="3418"/>
+                </a:lnTo>
+                <a:lnTo>
+                  <a:pt x="7" y="3380"/>
+                </a:lnTo>
+                <a:lnTo>
+                  <a:pt x="13" y="3347"/>
+                </a:lnTo>
+                <a:lnTo>
+                  <a:pt x="22" y="3319"/>
+                </a:lnTo>
+                <a:lnTo>
+                  <a:pt x="33" y="3292"/>
+                </a:lnTo>
+                <a:lnTo>
+                  <a:pt x="44" y="3267"/>
+                </a:lnTo>
+                <a:lnTo>
+                  <a:pt x="56" y="3244"/>
+                </a:lnTo>
+                <a:lnTo>
+                  <a:pt x="68" y="3222"/>
+                </a:lnTo>
+                <a:lnTo>
+                  <a:pt x="80" y="3197"/>
+                </a:lnTo>
+                <a:lnTo>
+                  <a:pt x="90" y="3171"/>
+                </a:lnTo>
+                <a:lnTo>
+                  <a:pt x="99" y="3142"/>
+                </a:lnTo>
+                <a:lnTo>
+                  <a:pt x="106" y="3109"/>
+                </a:lnTo>
+                <a:lnTo>
+                  <a:pt x="111" y="3071"/>
+                </a:lnTo>
+                <a:lnTo>
+                  <a:pt x="113" y="3028"/>
+                </a:lnTo>
+                <a:lnTo>
+                  <a:pt x="111" y="2985"/>
+                </a:lnTo>
+                <a:lnTo>
+                  <a:pt x="106" y="2947"/>
+                </a:lnTo>
+                <a:lnTo>
+                  <a:pt x="99" y="2914"/>
+                </a:lnTo>
+                <a:lnTo>
+                  <a:pt x="90" y="2885"/>
+                </a:lnTo>
+                <a:lnTo>
+                  <a:pt x="80" y="2858"/>
+                </a:lnTo>
+                <a:lnTo>
+                  <a:pt x="68" y="2834"/>
+                </a:lnTo>
+                <a:lnTo>
+                  <a:pt x="44" y="2787"/>
+                </a:lnTo>
+                <a:lnTo>
+                  <a:pt x="33" y="2763"/>
+                </a:lnTo>
+                <a:lnTo>
+                  <a:pt x="22" y="2736"/>
+                </a:lnTo>
+                <a:lnTo>
+                  <a:pt x="13" y="2707"/>
+                </a:lnTo>
+                <a:lnTo>
+                  <a:pt x="7" y="2674"/>
+                </a:lnTo>
+                <a:lnTo>
+                  <a:pt x="1" y="2637"/>
+                </a:lnTo>
+                <a:lnTo>
+                  <a:pt x="0" y="2593"/>
+                </a:lnTo>
+                <a:lnTo>
+                  <a:pt x="1" y="2550"/>
+                </a:lnTo>
+                <a:lnTo>
+                  <a:pt x="7" y="2512"/>
+                </a:lnTo>
+                <a:lnTo>
+                  <a:pt x="13" y="2479"/>
+                </a:lnTo>
+                <a:lnTo>
+                  <a:pt x="22" y="2451"/>
+                </a:lnTo>
+                <a:lnTo>
+                  <a:pt x="33" y="2424"/>
+                </a:lnTo>
+                <a:lnTo>
+                  <a:pt x="44" y="2401"/>
+                </a:lnTo>
+                <a:lnTo>
+                  <a:pt x="68" y="2354"/>
+                </a:lnTo>
+                <a:lnTo>
+                  <a:pt x="80" y="2329"/>
+                </a:lnTo>
+                <a:lnTo>
+                  <a:pt x="90" y="2303"/>
+                </a:lnTo>
+                <a:lnTo>
+                  <a:pt x="99" y="2274"/>
+                </a:lnTo>
+                <a:lnTo>
+                  <a:pt x="106" y="2241"/>
+                </a:lnTo>
+                <a:lnTo>
+                  <a:pt x="111" y="2203"/>
+                </a:lnTo>
+                <a:lnTo>
+                  <a:pt x="113" y="2159"/>
+                </a:lnTo>
+                <a:lnTo>
+                  <a:pt x="111" y="2117"/>
+                </a:lnTo>
+                <a:lnTo>
+                  <a:pt x="106" y="2079"/>
+                </a:lnTo>
+                <a:lnTo>
+                  <a:pt x="99" y="2046"/>
+                </a:lnTo>
+                <a:lnTo>
+                  <a:pt x="90" y="2017"/>
+                </a:lnTo>
+                <a:lnTo>
+                  <a:pt x="80" y="1991"/>
+                </a:lnTo>
+                <a:lnTo>
+                  <a:pt x="68" y="1966"/>
+                </a:lnTo>
+                <a:lnTo>
+                  <a:pt x="56" y="1943"/>
+                </a:lnTo>
+                <a:lnTo>
+                  <a:pt x="44" y="1919"/>
+                </a:lnTo>
+                <a:lnTo>
+                  <a:pt x="33" y="1896"/>
+                </a:lnTo>
+                <a:lnTo>
+                  <a:pt x="22" y="1869"/>
+                </a:lnTo>
+                <a:lnTo>
+                  <a:pt x="13" y="1841"/>
+                </a:lnTo>
+                <a:lnTo>
+                  <a:pt x="7" y="1807"/>
+                </a:lnTo>
+                <a:lnTo>
+                  <a:pt x="1" y="1770"/>
+                </a:lnTo>
+                <a:lnTo>
+                  <a:pt x="0" y="1727"/>
+                </a:lnTo>
+                <a:lnTo>
+                  <a:pt x="1" y="1683"/>
+                </a:lnTo>
+                <a:lnTo>
+                  <a:pt x="7" y="1646"/>
+                </a:lnTo>
+                <a:lnTo>
+                  <a:pt x="13" y="1613"/>
+                </a:lnTo>
+                <a:lnTo>
+                  <a:pt x="22" y="1583"/>
+                </a:lnTo>
+                <a:lnTo>
+                  <a:pt x="33" y="1557"/>
+                </a:lnTo>
+                <a:lnTo>
+                  <a:pt x="44" y="1533"/>
+                </a:lnTo>
+                <a:lnTo>
+                  <a:pt x="56" y="1509"/>
+                </a:lnTo>
+                <a:lnTo>
+                  <a:pt x="68" y="1486"/>
+                </a:lnTo>
+                <a:lnTo>
+                  <a:pt x="80" y="1461"/>
+                </a:lnTo>
+                <a:lnTo>
+                  <a:pt x="90" y="1435"/>
+                </a:lnTo>
+                <a:lnTo>
+                  <a:pt x="99" y="1406"/>
+                </a:lnTo>
+                <a:lnTo>
+                  <a:pt x="106" y="1373"/>
+                </a:lnTo>
+                <a:lnTo>
+                  <a:pt x="111" y="1335"/>
+                </a:lnTo>
+                <a:lnTo>
+                  <a:pt x="113" y="1292"/>
+                </a:lnTo>
+                <a:lnTo>
+                  <a:pt x="111" y="1249"/>
+                </a:lnTo>
+                <a:lnTo>
+                  <a:pt x="106" y="1211"/>
+                </a:lnTo>
+                <a:lnTo>
+                  <a:pt x="99" y="1178"/>
+                </a:lnTo>
+                <a:lnTo>
+                  <a:pt x="90" y="1149"/>
+                </a:lnTo>
+                <a:lnTo>
+                  <a:pt x="80" y="1123"/>
+                </a:lnTo>
+                <a:lnTo>
+                  <a:pt x="68" y="1098"/>
+                </a:lnTo>
+                <a:lnTo>
+                  <a:pt x="56" y="1076"/>
+                </a:lnTo>
+                <a:lnTo>
+                  <a:pt x="44" y="1053"/>
+                </a:lnTo>
+                <a:lnTo>
+                  <a:pt x="33" y="1028"/>
+                </a:lnTo>
+                <a:lnTo>
+                  <a:pt x="22" y="1001"/>
+                </a:lnTo>
+                <a:lnTo>
+                  <a:pt x="13" y="973"/>
+                </a:lnTo>
+                <a:lnTo>
+                  <a:pt x="7" y="940"/>
+                </a:lnTo>
+                <a:lnTo>
+                  <a:pt x="1" y="902"/>
+                </a:lnTo>
+                <a:lnTo>
+                  <a:pt x="0" y="859"/>
+                </a:lnTo>
+                <a:lnTo>
+                  <a:pt x="1" y="816"/>
+                </a:lnTo>
+                <a:lnTo>
+                  <a:pt x="7" y="778"/>
+                </a:lnTo>
+                <a:lnTo>
+                  <a:pt x="13" y="745"/>
+                </a:lnTo>
+                <a:lnTo>
+                  <a:pt x="22" y="716"/>
+                </a:lnTo>
+                <a:lnTo>
+                  <a:pt x="33" y="690"/>
+                </a:lnTo>
+                <a:lnTo>
+                  <a:pt x="44" y="665"/>
+                </a:lnTo>
+                <a:lnTo>
+                  <a:pt x="56" y="641"/>
+                </a:lnTo>
+                <a:lnTo>
+                  <a:pt x="68" y="618"/>
+                </a:lnTo>
+                <a:lnTo>
+                  <a:pt x="80" y="594"/>
+                </a:lnTo>
+                <a:lnTo>
+                  <a:pt x="90" y="568"/>
+                </a:lnTo>
+                <a:lnTo>
+                  <a:pt x="99" y="538"/>
+                </a:lnTo>
+                <a:lnTo>
+                  <a:pt x="106" y="505"/>
+                </a:lnTo>
+                <a:lnTo>
+                  <a:pt x="111" y="469"/>
+                </a:lnTo>
+                <a:lnTo>
+                  <a:pt x="113" y="424"/>
+                </a:lnTo>
+                <a:lnTo>
+                  <a:pt x="111" y="382"/>
+                </a:lnTo>
+                <a:lnTo>
+                  <a:pt x="106" y="344"/>
+                </a:lnTo>
+                <a:lnTo>
+                  <a:pt x="99" y="313"/>
+                </a:lnTo>
+                <a:lnTo>
+                  <a:pt x="90" y="284"/>
+                </a:lnTo>
+                <a:lnTo>
+                  <a:pt x="80" y="258"/>
+                </a:lnTo>
+                <a:lnTo>
+                  <a:pt x="69" y="233"/>
+                </a:lnTo>
+                <a:lnTo>
+                  <a:pt x="58" y="211"/>
+                </a:lnTo>
+                <a:lnTo>
+                  <a:pt x="46" y="187"/>
+                </a:lnTo>
+                <a:lnTo>
+                  <a:pt x="34" y="164"/>
+                </a:lnTo>
+                <a:lnTo>
+                  <a:pt x="24" y="137"/>
+                </a:lnTo>
+                <a:lnTo>
+                  <a:pt x="14" y="110"/>
+                </a:lnTo>
+                <a:lnTo>
+                  <a:pt x="8" y="77"/>
+                </a:lnTo>
+                <a:lnTo>
+                  <a:pt x="3" y="42"/>
+                </a:lnTo>
+                <a:lnTo>
+                  <a:pt x="0" y="0"/>
+                </a:lnTo>
+                <a:close/>
+              </a:path>
+            </a:pathLst>
+          </a:custGeom>
+          <a:solidFill>
+            <a:schemeClr val="tx2"/>
+          </a:solidFill>
+          <a:ln w="0">
+            <a:noFill/>
+            <a:prstDash val="solid"/>
+            <a:round/>
+            <a:headEnd/>
+            <a:tailEnd/>
+          </a:ln>
+        </p:spPr>
+      </p:sp>
+      <p:sp>
+        <p:nvSpPr>
+          <p:cNvPr id="2" name="Title 1"/>
           <p:cNvSpPr>
             <a:spLocks noGrp="1"/>
           </p:cNvSpPr>
@@ -2173,15 +5354,25 @@
         </p:nvSpPr>
         <p:spPr>
           <a:xfrm>
-            <a:off x="839788" y="457200"/>
-            <a:ext cx="3932237" cy="1600200"/>
+            <a:off x="8337884" y="457199"/>
+            <a:ext cx="3092115" cy="1196671"/>
           </a:xfrm>
         </p:spPr>
         <p:txBody>
-          <a:bodyPr anchor="b"/>
+          <a:bodyPr anchor="b">
+            <a:normAutofit/>
+          </a:bodyPr>
           <a:lstStyle>
             <a:lvl1pPr>
-              <a:defRPr sz="3200"/>
+              <a:lnSpc>
+                <a:spcPct val="100000"/>
+              </a:lnSpc>
+              <a:defRPr sz="1900" b="1" i="0" cap="all" spc="300" baseline="0">
+                <a:solidFill>
+                  <a:schemeClr val="accent1"/>
+                </a:solidFill>
+                <a:latin typeface="+mn-lt"/>
+              </a:defRPr>
             </a:lvl1pPr>
           </a:lstStyle>
           <a:p>
@@ -2189,18 +5380,13 @@
               <a:rPr lang="da-DK"/>
               <a:t>Klik for at redigere titeltypografien i masteren</a:t>
             </a:r>
+            <a:endParaRPr lang="en-US" dirty="0"/>
           </a:p>
         </p:txBody>
       </p:sp>
       <p:sp>
         <p:nvSpPr>
-          <p:cNvPr id="3" name="Pladsholder til indhold 2">
-            <a:extLst>
-              <a:ext uri="{FF2B5EF4-FFF2-40B4-BE49-F238E27FC236}">
-                <a16:creationId xmlns:a16="http://schemas.microsoft.com/office/drawing/2014/main" id="{A651AC08-E495-92D2-7F67-7DB05AE3626B}"/>
-              </a:ext>
-            </a:extLst>
-          </p:cNvPr>
+          <p:cNvPr id="3" name="Content Placeholder 2"/>
           <p:cNvSpPr>
             <a:spLocks noGrp="1"/>
           </p:cNvSpPr>
@@ -2210,8 +5396,8 @@
         </p:nvSpPr>
         <p:spPr>
           <a:xfrm>
-            <a:off x="5183188" y="987425"/>
-            <a:ext cx="6172200" cy="4873625"/>
+            <a:off x="765051" y="920377"/>
+            <a:ext cx="6158418" cy="4985124"/>
           </a:xfrm>
         </p:spPr>
         <p:txBody>
@@ -2279,18 +5465,13 @@
               <a:rPr lang="da-DK"/>
               <a:t>Femte niveau</a:t>
             </a:r>
+            <a:endParaRPr lang="en-US" dirty="0"/>
           </a:p>
         </p:txBody>
       </p:sp>
       <p:sp>
         <p:nvSpPr>
-          <p:cNvPr id="4" name="Pladsholder til tekst 3">
-            <a:extLst>
-              <a:ext uri="{FF2B5EF4-FFF2-40B4-BE49-F238E27FC236}">
-                <a16:creationId xmlns:a16="http://schemas.microsoft.com/office/drawing/2014/main" id="{714D3063-A545-6162-19B6-7DA77A541C02}"/>
-              </a:ext>
-            </a:extLst>
-          </p:cNvPr>
+          <p:cNvPr id="4" name="Text Placeholder 3"/>
           <p:cNvSpPr>
             <a:spLocks noGrp="1"/>
           </p:cNvSpPr>
@@ -2300,16 +5481,26 @@
         </p:nvSpPr>
         <p:spPr>
           <a:xfrm>
-            <a:off x="839788" y="2057400"/>
-            <a:ext cx="3932237" cy="3811588"/>
+            <a:off x="8337885" y="1741336"/>
+            <a:ext cx="3092115" cy="4164164"/>
           </a:xfrm>
         </p:spPr>
         <p:txBody>
           <a:bodyPr/>
           <a:lstStyle>
             <a:lvl1pPr marL="0" indent="0">
+              <a:lnSpc>
+                <a:spcPct val="120000"/>
+              </a:lnSpc>
+              <a:spcBef>
+                <a:spcPts val="1200"/>
+              </a:spcBef>
               <a:buNone/>
-              <a:defRPr sz="1600"/>
+              <a:defRPr sz="1600" baseline="0">
+                <a:solidFill>
+                  <a:schemeClr val="bg2"/>
+                </a:solidFill>
+              </a:defRPr>
             </a:lvl1pPr>
             <a:lvl2pPr marL="457200" indent="0">
               <a:buNone/>
@@ -2355,13 +5546,7 @@
       </p:sp>
       <p:sp>
         <p:nvSpPr>
-          <p:cNvPr id="5" name="Pladsholder til dato 4">
-            <a:extLst>
-              <a:ext uri="{FF2B5EF4-FFF2-40B4-BE49-F238E27FC236}">
-                <a16:creationId xmlns:a16="http://schemas.microsoft.com/office/drawing/2014/main" id="{FDE347CB-EB90-0D47-A873-84C93D042ADE}"/>
-              </a:ext>
-            </a:extLst>
-          </p:cNvPr>
+          <p:cNvPr id="5" name="Date Placeholder 4"/>
           <p:cNvSpPr>
             <a:spLocks noGrp="1"/>
           </p:cNvSpPr>
@@ -2369,14 +5554,19 @@
             <p:ph type="dt" sz="half" idx="10"/>
           </p:nvPr>
         </p:nvSpPr>
-        <p:spPr/>
+        <p:spPr>
+          <a:xfrm>
+            <a:off x="765051" y="6375679"/>
+            <a:ext cx="1233355" cy="348462"/>
+          </a:xfrm>
+        </p:spPr>
         <p:txBody>
           <a:bodyPr/>
           <a:lstStyle/>
           <a:p>
             <a:fld id="{9F2C61E5-4FB9-4B7B-BFC7-89973F7231D0}" type="datetimeFigureOut">
               <a:rPr lang="da-DK" smtClean="0"/>
-              <a:t>16-03-2026</a:t>
+              <a:t>20-03-2026</a:t>
             </a:fld>
             <a:endParaRPr lang="da-DK"/>
           </a:p>
@@ -2384,13 +5574,7 @@
       </p:sp>
       <p:sp>
         <p:nvSpPr>
-          <p:cNvPr id="6" name="Pladsholder til sidefod 5">
-            <a:extLst>
-              <a:ext uri="{FF2B5EF4-FFF2-40B4-BE49-F238E27FC236}">
-                <a16:creationId xmlns:a16="http://schemas.microsoft.com/office/drawing/2014/main" id="{358A4439-949C-B8C4-23A6-53770397ABC6}"/>
-              </a:ext>
-            </a:extLst>
-          </p:cNvPr>
+          <p:cNvPr id="6" name="Footer Placeholder 5"/>
           <p:cNvSpPr>
             <a:spLocks noGrp="1"/>
           </p:cNvSpPr>
@@ -2398,7 +5582,12 @@
             <p:ph type="ftr" sz="quarter" idx="11"/>
           </p:nvPr>
         </p:nvSpPr>
-        <p:spPr/>
+        <p:spPr>
+          <a:xfrm>
+            <a:off x="2103620" y="6375679"/>
+            <a:ext cx="3482179" cy="345796"/>
+          </a:xfrm>
+        </p:spPr>
         <p:txBody>
           <a:bodyPr/>
           <a:lstStyle/>
@@ -2409,13 +5598,7 @@
       </p:sp>
       <p:sp>
         <p:nvSpPr>
-          <p:cNvPr id="7" name="Pladsholder til slidenummer 6">
-            <a:extLst>
-              <a:ext uri="{FF2B5EF4-FFF2-40B4-BE49-F238E27FC236}">
-                <a16:creationId xmlns:a16="http://schemas.microsoft.com/office/drawing/2014/main" id="{975D26A7-BC87-93FE-CC47-334D115959D4}"/>
-              </a:ext>
-            </a:extLst>
-          </p:cNvPr>
+          <p:cNvPr id="7" name="Slide Number Placeholder 6"/>
           <p:cNvSpPr>
             <a:spLocks noGrp="1"/>
           </p:cNvSpPr>
@@ -2423,7 +5606,12 @@
             <p:ph type="sldNum" sz="quarter" idx="12"/>
           </p:nvPr>
         </p:nvSpPr>
-        <p:spPr/>
+        <p:spPr>
+          <a:xfrm>
+            <a:off x="5691014" y="6375679"/>
+            <a:ext cx="1232456" cy="345796"/>
+          </a:xfrm>
+        </p:spPr>
         <p:txBody>
           <a:bodyPr/>
           <a:lstStyle/>
@@ -2436,21 +5624,70 @@
           </a:p>
         </p:txBody>
       </p:sp>
+      <p:sp>
+        <p:nvSpPr>
+          <p:cNvPr id="8" name="Rectangle 7" title="left edge border"/>
+          <p:cNvSpPr/>
+          <p:nvPr/>
+        </p:nvSpPr>
+        <p:spPr>
+          <a:xfrm>
+            <a:off x="0" y="0"/>
+            <a:ext cx="283464" cy="6858000"/>
+          </a:xfrm>
+          <a:prstGeom prst="rect">
+            <a:avLst/>
+          </a:prstGeom>
+          <a:solidFill>
+            <a:schemeClr val="accent1"/>
+          </a:solidFill>
+          <a:ln>
+            <a:noFill/>
+          </a:ln>
+        </p:spPr>
+        <p:style>
+          <a:lnRef idx="2">
+            <a:schemeClr val="accent1">
+              <a:shade val="50000"/>
+            </a:schemeClr>
+          </a:lnRef>
+          <a:fillRef idx="1">
+            <a:schemeClr val="accent1"/>
+          </a:fillRef>
+          <a:effectRef idx="0">
+            <a:schemeClr val="accent1"/>
+          </a:effectRef>
+          <a:fontRef idx="minor">
+            <a:schemeClr val="lt1"/>
+          </a:fontRef>
+        </p:style>
+      </p:sp>
     </p:spTree>
     <p:extLst>
       <p:ext uri="{BB962C8B-B14F-4D97-AF65-F5344CB8AC3E}">
-        <p14:creationId xmlns:p14="http://schemas.microsoft.com/office/powerpoint/2010/main" val="574179829"/>
+        <p14:creationId xmlns:p14="http://schemas.microsoft.com/office/powerpoint/2010/main" val="833920964"/>
       </p:ext>
     </p:extLst>
   </p:cSld>
   <p:clrMapOvr>
     <a:masterClrMapping/>
   </p:clrMapOvr>
+  <p:extLst>
+    <p:ext uri="{DCECCB84-F9BA-43D5-87BE-67443E8EF086}">
+      <p15:sldGuideLst xmlns:p15="http://schemas.microsoft.com/office/powerpoint/2012/main">
+        <p15:guide id="1" orient="horz" pos="696">
+          <p15:clr>
+            <a:srgbClr val="FBAE40"/>
+          </p15:clr>
+        </p15:guide>
+      </p15:sldGuideLst>
+    </p:ext>
+  </p:extLst>
 </p:sldLayout>
 </file>
 
 <file path=ppt/slideLayouts/slideLayout9.xml><?xml version="1.0" encoding="utf-8"?>
-<p:sldLayout xmlns:a="http://schemas.openxmlformats.org/drawingml/2006/main" xmlns:r="http://schemas.openxmlformats.org/officeDocument/2006/relationships" xmlns:p="http://schemas.openxmlformats.org/presentationml/2006/main" type="picTx" preserve="1">
+<p:sldLayout xmlns:a="http://schemas.openxmlformats.org/drawingml/2006/main" xmlns:r="http://schemas.openxmlformats.org/officeDocument/2006/relationships" xmlns:p="http://schemas.openxmlformats.org/presentationml/2006/main" showMasterSp="0" type="picTx" preserve="1">
   <p:cSld name="Billede med billedtekst">
     <p:spTree>
       <p:nvGrpSpPr>
@@ -2468,65 +5705,22 @@
       </p:grpSpPr>
       <p:sp>
         <p:nvSpPr>
-          <p:cNvPr id="2" name="Titel 1">
-            <a:extLst>
-              <a:ext uri="{FF2B5EF4-FFF2-40B4-BE49-F238E27FC236}">
-                <a16:creationId xmlns:a16="http://schemas.microsoft.com/office/drawing/2014/main" id="{91CAB6B0-6E2A-5833-BDF4-EB7E6F70D1B4}"/>
-              </a:ext>
-            </a:extLst>
-          </p:cNvPr>
-          <p:cNvSpPr>
-            <a:spLocks noGrp="1"/>
-          </p:cNvSpPr>
-          <p:nvPr>
-            <p:ph type="title"/>
+          <p:cNvPr id="3" name="Picture Placeholder 2"/>
+          <p:cNvSpPr>
+            <a:spLocks noGrp="1" noChangeAspect="1"/>
+          </p:cNvSpPr>
+          <p:nvPr>
+            <p:ph type="pic" idx="1"/>
           </p:nvPr>
         </p:nvSpPr>
         <p:spPr>
           <a:xfrm>
-            <a:off x="839788" y="457200"/>
-            <a:ext cx="3932237" cy="1600200"/>
+            <a:off x="283464" y="0"/>
+            <a:ext cx="7355585" cy="6857999"/>
           </a:xfrm>
         </p:spPr>
         <p:txBody>
-          <a:bodyPr anchor="b"/>
-          <a:lstStyle>
-            <a:lvl1pPr>
-              <a:defRPr sz="3200"/>
-            </a:lvl1pPr>
-          </a:lstStyle>
-          <a:p>
-            <a:r>
-              <a:rPr lang="da-DK"/>
-              <a:t>Klik for at redigere titeltypografien i masteren</a:t>
-            </a:r>
-          </a:p>
-        </p:txBody>
-      </p:sp>
-      <p:sp>
-        <p:nvSpPr>
-          <p:cNvPr id="3" name="Pladsholder til billede 2">
-            <a:extLst>
-              <a:ext uri="{FF2B5EF4-FFF2-40B4-BE49-F238E27FC236}">
-                <a16:creationId xmlns:a16="http://schemas.microsoft.com/office/drawing/2014/main" id="{64F4DD0B-4771-E2CC-BA0E-3DD3A2366C17}"/>
-              </a:ext>
-            </a:extLst>
-          </p:cNvPr>
-          <p:cNvSpPr>
-            <a:spLocks noGrp="1"/>
-          </p:cNvSpPr>
-          <p:nvPr>
-            <p:ph type="pic" idx="1"/>
-          </p:nvPr>
-        </p:nvSpPr>
-        <p:spPr>
-          <a:xfrm>
-            <a:off x="5183188" y="987425"/>
-            <a:ext cx="6172200" cy="4873625"/>
-          </a:xfrm>
-        </p:spPr>
-        <p:txBody>
-          <a:bodyPr/>
+          <a:bodyPr anchor="t"/>
           <a:lstStyle>
             <a:lvl1pPr marL="0" indent="0">
               <a:buNone/>
@@ -2566,38 +5760,587 @@
             </a:lvl9pPr>
           </a:lstStyle>
           <a:p>
-            <a:endParaRPr lang="da-DK"/>
+            <a:r>
+              <a:rPr lang="da-DK"/>
+              <a:t>Klik på ikonet for at tilføje et billede</a:t>
+            </a:r>
+            <a:endParaRPr lang="en-US" dirty="0"/>
           </a:p>
         </p:txBody>
       </p:sp>
       <p:sp>
         <p:nvSpPr>
-          <p:cNvPr id="4" name="Pladsholder til tekst 3">
-            <a:extLst>
-              <a:ext uri="{FF2B5EF4-FFF2-40B4-BE49-F238E27FC236}">
-                <a16:creationId xmlns:a16="http://schemas.microsoft.com/office/drawing/2014/main" id="{55E0D679-271B-683E-E3AC-CF398FB51BEF}"/>
-              </a:ext>
-            </a:extLst>
-          </p:cNvPr>
-          <p:cNvSpPr>
-            <a:spLocks noGrp="1"/>
-          </p:cNvSpPr>
-          <p:nvPr>
-            <p:ph type="body" sz="half" idx="2"/>
-          </p:nvPr>
+          <p:cNvPr id="11" name="Freeform 11" title="right scallop background shape"/>
+          <p:cNvSpPr/>
+          <p:nvPr/>
+        </p:nvSpPr>
+        <p:spPr bwMode="auto">
+          <a:xfrm>
+            <a:off x="7389812" y="0"/>
+            <a:ext cx="4802188" cy="6858000"/>
+          </a:xfrm>
+          <a:custGeom>
+            <a:avLst/>
+            <a:gdLst/>
+            <a:ahLst/>
+            <a:cxnLst/>
+            <a:rect l="0" t="0" r="r" b="b"/>
+            <a:pathLst>
+              <a:path w="3025" h="4320">
+                <a:moveTo>
+                  <a:pt x="0" y="0"/>
+                </a:moveTo>
+                <a:lnTo>
+                  <a:pt x="3025" y="0"/>
+                </a:lnTo>
+                <a:lnTo>
+                  <a:pt x="3025" y="4320"/>
+                </a:lnTo>
+                <a:lnTo>
+                  <a:pt x="0" y="4320"/>
+                </a:lnTo>
+                <a:lnTo>
+                  <a:pt x="3" y="4278"/>
+                </a:lnTo>
+                <a:lnTo>
+                  <a:pt x="8" y="4243"/>
+                </a:lnTo>
+                <a:lnTo>
+                  <a:pt x="14" y="4210"/>
+                </a:lnTo>
+                <a:lnTo>
+                  <a:pt x="24" y="4183"/>
+                </a:lnTo>
+                <a:lnTo>
+                  <a:pt x="34" y="4156"/>
+                </a:lnTo>
+                <a:lnTo>
+                  <a:pt x="46" y="4133"/>
+                </a:lnTo>
+                <a:lnTo>
+                  <a:pt x="58" y="4109"/>
+                </a:lnTo>
+                <a:lnTo>
+                  <a:pt x="69" y="4087"/>
+                </a:lnTo>
+                <a:lnTo>
+                  <a:pt x="80" y="4062"/>
+                </a:lnTo>
+                <a:lnTo>
+                  <a:pt x="90" y="4036"/>
+                </a:lnTo>
+                <a:lnTo>
+                  <a:pt x="99" y="4007"/>
+                </a:lnTo>
+                <a:lnTo>
+                  <a:pt x="106" y="3976"/>
+                </a:lnTo>
+                <a:lnTo>
+                  <a:pt x="111" y="3938"/>
+                </a:lnTo>
+                <a:lnTo>
+                  <a:pt x="113" y="3895"/>
+                </a:lnTo>
+                <a:lnTo>
+                  <a:pt x="111" y="3851"/>
+                </a:lnTo>
+                <a:lnTo>
+                  <a:pt x="106" y="3815"/>
+                </a:lnTo>
+                <a:lnTo>
+                  <a:pt x="99" y="3782"/>
+                </a:lnTo>
+                <a:lnTo>
+                  <a:pt x="90" y="3752"/>
+                </a:lnTo>
+                <a:lnTo>
+                  <a:pt x="80" y="3726"/>
+                </a:lnTo>
+                <a:lnTo>
+                  <a:pt x="68" y="3702"/>
+                </a:lnTo>
+                <a:lnTo>
+                  <a:pt x="56" y="3679"/>
+                </a:lnTo>
+                <a:lnTo>
+                  <a:pt x="44" y="3655"/>
+                </a:lnTo>
+                <a:lnTo>
+                  <a:pt x="33" y="3630"/>
+                </a:lnTo>
+                <a:lnTo>
+                  <a:pt x="22" y="3604"/>
+                </a:lnTo>
+                <a:lnTo>
+                  <a:pt x="13" y="3575"/>
+                </a:lnTo>
+                <a:lnTo>
+                  <a:pt x="7" y="3542"/>
+                </a:lnTo>
+                <a:lnTo>
+                  <a:pt x="1" y="3504"/>
+                </a:lnTo>
+                <a:lnTo>
+                  <a:pt x="0" y="3461"/>
+                </a:lnTo>
+                <a:lnTo>
+                  <a:pt x="1" y="3418"/>
+                </a:lnTo>
+                <a:lnTo>
+                  <a:pt x="7" y="3380"/>
+                </a:lnTo>
+                <a:lnTo>
+                  <a:pt x="13" y="3347"/>
+                </a:lnTo>
+                <a:lnTo>
+                  <a:pt x="22" y="3319"/>
+                </a:lnTo>
+                <a:lnTo>
+                  <a:pt x="33" y="3292"/>
+                </a:lnTo>
+                <a:lnTo>
+                  <a:pt x="44" y="3267"/>
+                </a:lnTo>
+                <a:lnTo>
+                  <a:pt x="56" y="3244"/>
+                </a:lnTo>
+                <a:lnTo>
+                  <a:pt x="68" y="3222"/>
+                </a:lnTo>
+                <a:lnTo>
+                  <a:pt x="80" y="3197"/>
+                </a:lnTo>
+                <a:lnTo>
+                  <a:pt x="90" y="3171"/>
+                </a:lnTo>
+                <a:lnTo>
+                  <a:pt x="99" y="3142"/>
+                </a:lnTo>
+                <a:lnTo>
+                  <a:pt x="106" y="3109"/>
+                </a:lnTo>
+                <a:lnTo>
+                  <a:pt x="111" y="3071"/>
+                </a:lnTo>
+                <a:lnTo>
+                  <a:pt x="113" y="3028"/>
+                </a:lnTo>
+                <a:lnTo>
+                  <a:pt x="111" y="2985"/>
+                </a:lnTo>
+                <a:lnTo>
+                  <a:pt x="106" y="2947"/>
+                </a:lnTo>
+                <a:lnTo>
+                  <a:pt x="99" y="2914"/>
+                </a:lnTo>
+                <a:lnTo>
+                  <a:pt x="90" y="2885"/>
+                </a:lnTo>
+                <a:lnTo>
+                  <a:pt x="80" y="2858"/>
+                </a:lnTo>
+                <a:lnTo>
+                  <a:pt x="68" y="2834"/>
+                </a:lnTo>
+                <a:lnTo>
+                  <a:pt x="44" y="2787"/>
+                </a:lnTo>
+                <a:lnTo>
+                  <a:pt x="33" y="2763"/>
+                </a:lnTo>
+                <a:lnTo>
+                  <a:pt x="22" y="2736"/>
+                </a:lnTo>
+                <a:lnTo>
+                  <a:pt x="13" y="2707"/>
+                </a:lnTo>
+                <a:lnTo>
+                  <a:pt x="7" y="2674"/>
+                </a:lnTo>
+                <a:lnTo>
+                  <a:pt x="1" y="2637"/>
+                </a:lnTo>
+                <a:lnTo>
+                  <a:pt x="0" y="2593"/>
+                </a:lnTo>
+                <a:lnTo>
+                  <a:pt x="1" y="2550"/>
+                </a:lnTo>
+                <a:lnTo>
+                  <a:pt x="7" y="2512"/>
+                </a:lnTo>
+                <a:lnTo>
+                  <a:pt x="13" y="2479"/>
+                </a:lnTo>
+                <a:lnTo>
+                  <a:pt x="22" y="2451"/>
+                </a:lnTo>
+                <a:lnTo>
+                  <a:pt x="33" y="2424"/>
+                </a:lnTo>
+                <a:lnTo>
+                  <a:pt x="44" y="2401"/>
+                </a:lnTo>
+                <a:lnTo>
+                  <a:pt x="68" y="2354"/>
+                </a:lnTo>
+                <a:lnTo>
+                  <a:pt x="80" y="2329"/>
+                </a:lnTo>
+                <a:lnTo>
+                  <a:pt x="90" y="2303"/>
+                </a:lnTo>
+                <a:lnTo>
+                  <a:pt x="99" y="2274"/>
+                </a:lnTo>
+                <a:lnTo>
+                  <a:pt x="106" y="2241"/>
+                </a:lnTo>
+                <a:lnTo>
+                  <a:pt x="111" y="2203"/>
+                </a:lnTo>
+                <a:lnTo>
+                  <a:pt x="113" y="2159"/>
+                </a:lnTo>
+                <a:lnTo>
+                  <a:pt x="111" y="2117"/>
+                </a:lnTo>
+                <a:lnTo>
+                  <a:pt x="106" y="2079"/>
+                </a:lnTo>
+                <a:lnTo>
+                  <a:pt x="99" y="2046"/>
+                </a:lnTo>
+                <a:lnTo>
+                  <a:pt x="90" y="2017"/>
+                </a:lnTo>
+                <a:lnTo>
+                  <a:pt x="80" y="1991"/>
+                </a:lnTo>
+                <a:lnTo>
+                  <a:pt x="68" y="1966"/>
+                </a:lnTo>
+                <a:lnTo>
+                  <a:pt x="56" y="1943"/>
+                </a:lnTo>
+                <a:lnTo>
+                  <a:pt x="44" y="1919"/>
+                </a:lnTo>
+                <a:lnTo>
+                  <a:pt x="33" y="1896"/>
+                </a:lnTo>
+                <a:lnTo>
+                  <a:pt x="22" y="1869"/>
+                </a:lnTo>
+                <a:lnTo>
+                  <a:pt x="13" y="1841"/>
+                </a:lnTo>
+                <a:lnTo>
+                  <a:pt x="7" y="1807"/>
+                </a:lnTo>
+                <a:lnTo>
+                  <a:pt x="1" y="1770"/>
+                </a:lnTo>
+                <a:lnTo>
+                  <a:pt x="0" y="1727"/>
+                </a:lnTo>
+                <a:lnTo>
+                  <a:pt x="1" y="1683"/>
+                </a:lnTo>
+                <a:lnTo>
+                  <a:pt x="7" y="1646"/>
+                </a:lnTo>
+                <a:lnTo>
+                  <a:pt x="13" y="1613"/>
+                </a:lnTo>
+                <a:lnTo>
+                  <a:pt x="22" y="1583"/>
+                </a:lnTo>
+                <a:lnTo>
+                  <a:pt x="33" y="1557"/>
+                </a:lnTo>
+                <a:lnTo>
+                  <a:pt x="44" y="1533"/>
+                </a:lnTo>
+                <a:lnTo>
+                  <a:pt x="56" y="1509"/>
+                </a:lnTo>
+                <a:lnTo>
+                  <a:pt x="68" y="1486"/>
+                </a:lnTo>
+                <a:lnTo>
+                  <a:pt x="80" y="1461"/>
+                </a:lnTo>
+                <a:lnTo>
+                  <a:pt x="90" y="1435"/>
+                </a:lnTo>
+                <a:lnTo>
+                  <a:pt x="99" y="1406"/>
+                </a:lnTo>
+                <a:lnTo>
+                  <a:pt x="106" y="1373"/>
+                </a:lnTo>
+                <a:lnTo>
+                  <a:pt x="111" y="1335"/>
+                </a:lnTo>
+                <a:lnTo>
+                  <a:pt x="113" y="1292"/>
+                </a:lnTo>
+                <a:lnTo>
+                  <a:pt x="111" y="1249"/>
+                </a:lnTo>
+                <a:lnTo>
+                  <a:pt x="106" y="1211"/>
+                </a:lnTo>
+                <a:lnTo>
+                  <a:pt x="99" y="1178"/>
+                </a:lnTo>
+                <a:lnTo>
+                  <a:pt x="90" y="1149"/>
+                </a:lnTo>
+                <a:lnTo>
+                  <a:pt x="80" y="1123"/>
+                </a:lnTo>
+                <a:lnTo>
+                  <a:pt x="68" y="1098"/>
+                </a:lnTo>
+                <a:lnTo>
+                  <a:pt x="56" y="1076"/>
+                </a:lnTo>
+                <a:lnTo>
+                  <a:pt x="44" y="1053"/>
+                </a:lnTo>
+                <a:lnTo>
+                  <a:pt x="33" y="1028"/>
+                </a:lnTo>
+                <a:lnTo>
+                  <a:pt x="22" y="1001"/>
+                </a:lnTo>
+                <a:lnTo>
+                  <a:pt x="13" y="973"/>
+                </a:lnTo>
+                <a:lnTo>
+                  <a:pt x="7" y="940"/>
+                </a:lnTo>
+                <a:lnTo>
+                  <a:pt x="1" y="902"/>
+                </a:lnTo>
+                <a:lnTo>
+                  <a:pt x="0" y="859"/>
+                </a:lnTo>
+                <a:lnTo>
+                  <a:pt x="1" y="816"/>
+                </a:lnTo>
+                <a:lnTo>
+                  <a:pt x="7" y="778"/>
+                </a:lnTo>
+                <a:lnTo>
+                  <a:pt x="13" y="745"/>
+                </a:lnTo>
+                <a:lnTo>
+                  <a:pt x="22" y="716"/>
+                </a:lnTo>
+                <a:lnTo>
+                  <a:pt x="33" y="690"/>
+                </a:lnTo>
+                <a:lnTo>
+                  <a:pt x="44" y="665"/>
+                </a:lnTo>
+                <a:lnTo>
+                  <a:pt x="56" y="641"/>
+                </a:lnTo>
+                <a:lnTo>
+                  <a:pt x="68" y="618"/>
+                </a:lnTo>
+                <a:lnTo>
+                  <a:pt x="80" y="594"/>
+                </a:lnTo>
+                <a:lnTo>
+                  <a:pt x="90" y="568"/>
+                </a:lnTo>
+                <a:lnTo>
+                  <a:pt x="99" y="538"/>
+                </a:lnTo>
+                <a:lnTo>
+                  <a:pt x="106" y="505"/>
+                </a:lnTo>
+                <a:lnTo>
+                  <a:pt x="111" y="469"/>
+                </a:lnTo>
+                <a:lnTo>
+                  <a:pt x="113" y="424"/>
+                </a:lnTo>
+                <a:lnTo>
+                  <a:pt x="111" y="382"/>
+                </a:lnTo>
+                <a:lnTo>
+                  <a:pt x="106" y="344"/>
+                </a:lnTo>
+                <a:lnTo>
+                  <a:pt x="99" y="313"/>
+                </a:lnTo>
+                <a:lnTo>
+                  <a:pt x="90" y="284"/>
+                </a:lnTo>
+                <a:lnTo>
+                  <a:pt x="80" y="258"/>
+                </a:lnTo>
+                <a:lnTo>
+                  <a:pt x="69" y="233"/>
+                </a:lnTo>
+                <a:lnTo>
+                  <a:pt x="58" y="211"/>
+                </a:lnTo>
+                <a:lnTo>
+                  <a:pt x="46" y="187"/>
+                </a:lnTo>
+                <a:lnTo>
+                  <a:pt x="34" y="164"/>
+                </a:lnTo>
+                <a:lnTo>
+                  <a:pt x="24" y="137"/>
+                </a:lnTo>
+                <a:lnTo>
+                  <a:pt x="14" y="110"/>
+                </a:lnTo>
+                <a:lnTo>
+                  <a:pt x="8" y="77"/>
+                </a:lnTo>
+                <a:lnTo>
+                  <a:pt x="3" y="42"/>
+                </a:lnTo>
+                <a:lnTo>
+                  <a:pt x="0" y="0"/>
+                </a:lnTo>
+                <a:close/>
+              </a:path>
+            </a:pathLst>
+          </a:custGeom>
+          <a:solidFill>
+            <a:schemeClr val="tx2"/>
+          </a:solidFill>
+          <a:ln w="0">
+            <a:noFill/>
+            <a:prstDash val="solid"/>
+            <a:round/>
+            <a:headEnd/>
+            <a:tailEnd/>
+          </a:ln>
+        </p:spPr>
+      </p:sp>
+      <p:sp>
+        <p:nvSpPr>
+          <p:cNvPr id="12" name="Rectangle 11" title="left edge border"/>
+          <p:cNvSpPr/>
+          <p:nvPr/>
         </p:nvSpPr>
         <p:spPr>
           <a:xfrm>
-            <a:off x="839788" y="2057400"/>
-            <a:ext cx="3932237" cy="3811588"/>
+            <a:off x="0" y="0"/>
+            <a:ext cx="283464" cy="6858000"/>
+          </a:xfrm>
+          <a:prstGeom prst="rect">
+            <a:avLst/>
+          </a:prstGeom>
+          <a:solidFill>
+            <a:schemeClr val="accent1"/>
+          </a:solidFill>
+          <a:ln>
+            <a:noFill/>
+          </a:ln>
+        </p:spPr>
+        <p:style>
+          <a:lnRef idx="2">
+            <a:schemeClr val="accent1">
+              <a:shade val="50000"/>
+            </a:schemeClr>
+          </a:lnRef>
+          <a:fillRef idx="1">
+            <a:schemeClr val="accent1"/>
+          </a:fillRef>
+          <a:effectRef idx="0">
+            <a:schemeClr val="accent1"/>
+          </a:effectRef>
+          <a:fontRef idx="minor">
+            <a:schemeClr val="lt1"/>
+          </a:fontRef>
+        </p:style>
+      </p:sp>
+      <p:sp>
+        <p:nvSpPr>
+          <p:cNvPr id="2" name="Title 1"/>
+          <p:cNvSpPr>
+            <a:spLocks noGrp="1"/>
+          </p:cNvSpPr>
+          <p:nvPr>
+            <p:ph type="title"/>
+          </p:nvPr>
+        </p:nvSpPr>
+        <p:spPr>
+          <a:xfrm>
+            <a:off x="8337883" y="457200"/>
+            <a:ext cx="3092117" cy="1196670"/>
+          </a:xfrm>
+        </p:spPr>
+        <p:txBody>
+          <a:bodyPr anchor="b">
+            <a:normAutofit/>
+          </a:bodyPr>
+          <a:lstStyle>
+            <a:lvl1pPr>
+              <a:lnSpc>
+                <a:spcPct val="100000"/>
+              </a:lnSpc>
+              <a:defRPr sz="1900" b="1" i="0" spc="300" baseline="0">
+                <a:solidFill>
+                  <a:schemeClr val="accent1"/>
+                </a:solidFill>
+                <a:latin typeface="+mn-lt"/>
+              </a:defRPr>
+            </a:lvl1pPr>
+          </a:lstStyle>
+          <a:p>
+            <a:r>
+              <a:rPr lang="da-DK"/>
+              <a:t>Klik for at redigere titeltypografien i masteren</a:t>
+            </a:r>
+            <a:endParaRPr lang="en-US" dirty="0"/>
+          </a:p>
+        </p:txBody>
+      </p:sp>
+      <p:sp>
+        <p:nvSpPr>
+          <p:cNvPr id="4" name="Text Placeholder 3"/>
+          <p:cNvSpPr>
+            <a:spLocks noGrp="1"/>
+          </p:cNvSpPr>
+          <p:nvPr>
+            <p:ph type="body" sz="half" idx="2"/>
+          </p:nvPr>
+        </p:nvSpPr>
+        <p:spPr>
+          <a:xfrm>
+            <a:off x="8337883" y="1741336"/>
+            <a:ext cx="3092117" cy="4164164"/>
           </a:xfrm>
         </p:spPr>
         <p:txBody>
           <a:bodyPr/>
           <a:lstStyle>
             <a:lvl1pPr marL="0" indent="0">
+              <a:lnSpc>
+                <a:spcPct val="120000"/>
+              </a:lnSpc>
+              <a:spcBef>
+                <a:spcPts val="1200"/>
+              </a:spcBef>
               <a:buNone/>
-              <a:defRPr sz="1600"/>
+              <a:defRPr sz="1600" baseline="0">
+                <a:solidFill>
+                  <a:schemeClr val="bg2"/>
+                </a:solidFill>
+              </a:defRPr>
             </a:lvl1pPr>
             <a:lvl2pPr marL="457200" indent="0">
               <a:buNone/>
@@ -2643,13 +6386,7 @@
       </p:sp>
       <p:sp>
         <p:nvSpPr>
-          <p:cNvPr id="5" name="Pladsholder til dato 4">
-            <a:extLst>
-              <a:ext uri="{FF2B5EF4-FFF2-40B4-BE49-F238E27FC236}">
-                <a16:creationId xmlns:a16="http://schemas.microsoft.com/office/drawing/2014/main" id="{A56B5DEF-5272-AAA2-B6AD-09D953E8DF2A}"/>
-              </a:ext>
-            </a:extLst>
-          </p:cNvPr>
+          <p:cNvPr id="5" name="Date Placeholder 4"/>
           <p:cNvSpPr>
             <a:spLocks noGrp="1"/>
           </p:cNvSpPr>
@@ -2657,14 +6394,19 @@
             <p:ph type="dt" sz="half" idx="10"/>
           </p:nvPr>
         </p:nvSpPr>
-        <p:spPr/>
+        <p:spPr>
+          <a:xfrm>
+            <a:off x="765950" y="6375679"/>
+            <a:ext cx="1232456" cy="348462"/>
+          </a:xfrm>
+        </p:spPr>
         <p:txBody>
           <a:bodyPr/>
           <a:lstStyle/>
           <a:p>
             <a:fld id="{9F2C61E5-4FB9-4B7B-BFC7-89973F7231D0}" type="datetimeFigureOut">
               <a:rPr lang="da-DK" smtClean="0"/>
-              <a:t>16-03-2026</a:t>
+              <a:t>20-03-2026</a:t>
             </a:fld>
             <a:endParaRPr lang="da-DK"/>
           </a:p>
@@ -2672,13 +6414,7 @@
       </p:sp>
       <p:sp>
         <p:nvSpPr>
-          <p:cNvPr id="6" name="Pladsholder til sidefod 5">
-            <a:extLst>
-              <a:ext uri="{FF2B5EF4-FFF2-40B4-BE49-F238E27FC236}">
-                <a16:creationId xmlns:a16="http://schemas.microsoft.com/office/drawing/2014/main" id="{AE64F6F0-2D7C-7218-9EE2-2C36720A1340}"/>
-              </a:ext>
-            </a:extLst>
-          </p:cNvPr>
+          <p:cNvPr id="6" name="Footer Placeholder 5"/>
           <p:cNvSpPr>
             <a:spLocks noGrp="1"/>
           </p:cNvSpPr>
@@ -2686,7 +6422,12 @@
             <p:ph type="ftr" sz="quarter" idx="11"/>
           </p:nvPr>
         </p:nvSpPr>
-        <p:spPr/>
+        <p:spPr>
+          <a:xfrm>
+            <a:off x="2103621" y="6375679"/>
+            <a:ext cx="3482178" cy="345796"/>
+          </a:xfrm>
+        </p:spPr>
         <p:txBody>
           <a:bodyPr/>
           <a:lstStyle/>
@@ -2697,13 +6438,7 @@
       </p:sp>
       <p:sp>
         <p:nvSpPr>
-          <p:cNvPr id="7" name="Pladsholder til slidenummer 6">
-            <a:extLst>
-              <a:ext uri="{FF2B5EF4-FFF2-40B4-BE49-F238E27FC236}">
-                <a16:creationId xmlns:a16="http://schemas.microsoft.com/office/drawing/2014/main" id="{463611BC-2754-C431-EB26-C494E8836174}"/>
-              </a:ext>
-            </a:extLst>
-          </p:cNvPr>
+          <p:cNvPr id="7" name="Slide Number Placeholder 6"/>
           <p:cNvSpPr>
             <a:spLocks noGrp="1"/>
           </p:cNvSpPr>
@@ -2711,7 +6446,12 @@
             <p:ph type="sldNum" sz="quarter" idx="12"/>
           </p:nvPr>
         </p:nvSpPr>
-        <p:spPr/>
+        <p:spPr>
+          <a:xfrm>
+            <a:off x="5687568" y="6375679"/>
+            <a:ext cx="1234440" cy="345796"/>
+          </a:xfrm>
+        </p:spPr>
         <p:txBody>
           <a:bodyPr/>
           <a:lstStyle/>
@@ -2727,7 +6467,7 @@
     </p:spTree>
     <p:extLst>
       <p:ext uri="{BB962C8B-B14F-4D97-AF65-F5344CB8AC3E}">
-        <p14:creationId xmlns:p14="http://schemas.microsoft.com/office/powerpoint/2010/main" val="3003889205"/>
+        <p14:creationId xmlns:p14="http://schemas.microsoft.com/office/powerpoint/2010/main" val="2035148498"/>
       </p:ext>
     </p:extLst>
   </p:cSld>
@@ -2741,9 +6481,12 @@
 <p:sldMaster xmlns:a="http://schemas.openxmlformats.org/drawingml/2006/main" xmlns:r="http://schemas.openxmlformats.org/officeDocument/2006/relationships" xmlns:p="http://schemas.openxmlformats.org/presentationml/2006/main">
   <p:cSld>
     <p:bg>
-      <p:bgRef idx="1001">
-        <a:schemeClr val="bg1"/>
-      </p:bgRef>
+      <p:bgPr>
+        <a:solidFill>
+          <a:schemeClr val="bg2"/>
+        </a:solidFill>
+        <a:effectLst/>
+      </p:bgPr>
     </p:bg>
     <p:spTree>
       <p:nvGrpSpPr>
@@ -2761,13 +6504,7 @@
       </p:grpSpPr>
       <p:sp>
         <p:nvSpPr>
-          <p:cNvPr id="2" name="Pladsholder til titel 1">
-            <a:extLst>
-              <a:ext uri="{FF2B5EF4-FFF2-40B4-BE49-F238E27FC236}">
-                <a16:creationId xmlns:a16="http://schemas.microsoft.com/office/drawing/2014/main" id="{0AC2AE9D-58B0-A06C-A7EE-A88C4965AEAA}"/>
-              </a:ext>
-            </a:extLst>
-          </p:cNvPr>
+          <p:cNvPr id="2" name="Title Placeholder 1"/>
           <p:cNvSpPr>
             <a:spLocks noGrp="1"/>
           </p:cNvSpPr>
@@ -2777,15 +6514,15 @@
         </p:nvSpPr>
         <p:spPr>
           <a:xfrm>
-            <a:off x="838200" y="365125"/>
-            <a:ext cx="10515600" cy="1325563"/>
+            <a:off x="1251678" y="382385"/>
+            <a:ext cx="10178322" cy="1492132"/>
           </a:xfrm>
           <a:prstGeom prst="rect">
             <a:avLst/>
           </a:prstGeom>
         </p:spPr>
         <p:txBody>
-          <a:bodyPr vert="horz" lIns="91440" tIns="45720" rIns="91440" bIns="45720" rtlCol="0" anchor="ctr">
+          <a:bodyPr vert="horz" lIns="91440" tIns="45720" rIns="91440" bIns="45720" rtlCol="0" anchor="t">
             <a:normAutofit/>
           </a:bodyPr>
           <a:lstStyle/>
@@ -2794,18 +6531,13 @@
               <a:rPr lang="da-DK"/>
               <a:t>Klik for at redigere titeltypografien i masteren</a:t>
             </a:r>
+            <a:endParaRPr lang="en-US" dirty="0"/>
           </a:p>
         </p:txBody>
       </p:sp>
       <p:sp>
         <p:nvSpPr>
-          <p:cNvPr id="3" name="Pladsholder til tekst 2">
-            <a:extLst>
-              <a:ext uri="{FF2B5EF4-FFF2-40B4-BE49-F238E27FC236}">
-                <a16:creationId xmlns:a16="http://schemas.microsoft.com/office/drawing/2014/main" id="{02DA6D91-386F-D6B3-88B5-6C039AC75F31}"/>
-              </a:ext>
-            </a:extLst>
-          </p:cNvPr>
+          <p:cNvPr id="3" name="Text Placeholder 2"/>
           <p:cNvSpPr>
             <a:spLocks noGrp="1"/>
           </p:cNvSpPr>
@@ -2815,8 +6547,8 @@
         </p:nvSpPr>
         <p:spPr>
           <a:xfrm>
-            <a:off x="838200" y="1825625"/>
-            <a:ext cx="10515600" cy="4351338"/>
+            <a:off x="1251678" y="2286001"/>
+            <a:ext cx="10178322" cy="3593591"/>
           </a:xfrm>
           <a:prstGeom prst="rect">
             <a:avLst/>
@@ -2861,18 +6593,13 @@
               <a:rPr lang="da-DK"/>
               <a:t>Femte niveau</a:t>
             </a:r>
+            <a:endParaRPr lang="en-US" dirty="0"/>
           </a:p>
         </p:txBody>
       </p:sp>
       <p:sp>
         <p:nvSpPr>
-          <p:cNvPr id="4" name="Pladsholder til dato 3">
-            <a:extLst>
-              <a:ext uri="{FF2B5EF4-FFF2-40B4-BE49-F238E27FC236}">
-                <a16:creationId xmlns:a16="http://schemas.microsoft.com/office/drawing/2014/main" id="{2B478143-B9B1-038A-DA85-6B3455D40984}"/>
-              </a:ext>
-            </a:extLst>
-          </p:cNvPr>
+          <p:cNvPr id="4" name="Date Placeholder 3"/>
           <p:cNvSpPr>
             <a:spLocks noGrp="1"/>
           </p:cNvSpPr>
@@ -2882,8 +6609,8 @@
         </p:nvSpPr>
         <p:spPr>
           <a:xfrm>
-            <a:off x="838200" y="6356350"/>
-            <a:ext cx="2743200" cy="365125"/>
+            <a:off x="1251678" y="6375679"/>
+            <a:ext cx="2329722" cy="348462"/>
           </a:xfrm>
           <a:prstGeom prst="rect">
             <a:avLst/>
@@ -2896,7 +6623,8 @@
               <a:defRPr sz="1200">
                 <a:solidFill>
                   <a:schemeClr val="tx1">
-                    <a:tint val="75000"/>
+                    <a:lumMod val="65000"/>
+                    <a:lumOff val="35000"/>
                   </a:schemeClr>
                 </a:solidFill>
               </a:defRPr>
@@ -2905,7 +6633,7 @@
           <a:p>
             <a:fld id="{9F2C61E5-4FB9-4B7B-BFC7-89973F7231D0}" type="datetimeFigureOut">
               <a:rPr lang="da-DK" smtClean="0"/>
-              <a:t>16-03-2026</a:t>
+              <a:t>20-03-2026</a:t>
             </a:fld>
             <a:endParaRPr lang="da-DK"/>
           </a:p>
@@ -2913,13 +6641,7 @@
       </p:sp>
       <p:sp>
         <p:nvSpPr>
-          <p:cNvPr id="5" name="Pladsholder til sidefod 4">
-            <a:extLst>
-              <a:ext uri="{FF2B5EF4-FFF2-40B4-BE49-F238E27FC236}">
-                <a16:creationId xmlns:a16="http://schemas.microsoft.com/office/drawing/2014/main" id="{EA3314DD-908C-3F17-3590-D2D7374AE709}"/>
-              </a:ext>
-            </a:extLst>
-          </p:cNvPr>
+          <p:cNvPr id="5" name="Footer Placeholder 4"/>
           <p:cNvSpPr>
             <a:spLocks noGrp="1"/>
           </p:cNvSpPr>
@@ -2929,8 +6651,8 @@
         </p:nvSpPr>
         <p:spPr>
           <a:xfrm>
-            <a:off x="4038600" y="6356350"/>
-            <a:ext cx="4114800" cy="365125"/>
+            <a:off x="4038600" y="6375679"/>
+            <a:ext cx="4114800" cy="345796"/>
           </a:xfrm>
           <a:prstGeom prst="rect">
             <a:avLst/>
@@ -2943,7 +6665,8 @@
               <a:defRPr sz="1200">
                 <a:solidFill>
                   <a:schemeClr val="tx1">
-                    <a:tint val="75000"/>
+                    <a:lumMod val="65000"/>
+                    <a:lumOff val="35000"/>
                   </a:schemeClr>
                 </a:solidFill>
               </a:defRPr>
@@ -2956,13 +6679,7 @@
       </p:sp>
       <p:sp>
         <p:nvSpPr>
-          <p:cNvPr id="6" name="Pladsholder til slidenummer 5">
-            <a:extLst>
-              <a:ext uri="{FF2B5EF4-FFF2-40B4-BE49-F238E27FC236}">
-                <a16:creationId xmlns:a16="http://schemas.microsoft.com/office/drawing/2014/main" id="{9D08449C-3F84-AEF5-8348-7856A15327EF}"/>
-              </a:ext>
-            </a:extLst>
-          </p:cNvPr>
+          <p:cNvPr id="6" name="Slide Number Placeholder 5"/>
           <p:cNvSpPr>
             <a:spLocks noGrp="1"/>
           </p:cNvSpPr>
@@ -2972,8 +6689,8 @@
         </p:nvSpPr>
         <p:spPr>
           <a:xfrm>
-            <a:off x="8610600" y="6356350"/>
-            <a:ext cx="2743200" cy="365125"/>
+            <a:off x="8610601" y="6375679"/>
+            <a:ext cx="2819399" cy="345796"/>
           </a:xfrm>
           <a:prstGeom prst="rect">
             <a:avLst/>
@@ -2986,7 +6703,8 @@
               <a:defRPr sz="1200">
                 <a:solidFill>
                   <a:schemeClr val="tx1">
-                    <a:tint val="75000"/>
+                    <a:lumMod val="65000"/>
+                    <a:lumOff val="35000"/>
                   </a:schemeClr>
                 </a:solidFill>
               </a:defRPr>
@@ -3001,26 +6719,528 @@
           </a:p>
         </p:txBody>
       </p:sp>
+      <p:sp>
+        <p:nvSpPr>
+          <p:cNvPr id="11" name="Freeform 6" title="Left scallop edge"/>
+          <p:cNvSpPr/>
+          <p:nvPr/>
+        </p:nvSpPr>
+        <p:spPr bwMode="auto">
+          <a:xfrm>
+            <a:off x="0" y="0"/>
+            <a:ext cx="885825" cy="6858000"/>
+          </a:xfrm>
+          <a:custGeom>
+            <a:avLst/>
+            <a:gdLst/>
+            <a:ahLst/>
+            <a:cxnLst/>
+            <a:rect l="0" t="0" r="r" b="b"/>
+            <a:pathLst>
+              <a:path w="558" h="4320">
+                <a:moveTo>
+                  <a:pt x="0" y="0"/>
+                </a:moveTo>
+                <a:lnTo>
+                  <a:pt x="447" y="0"/>
+                </a:lnTo>
+                <a:lnTo>
+                  <a:pt x="448" y="43"/>
+                </a:lnTo>
+                <a:lnTo>
+                  <a:pt x="453" y="81"/>
+                </a:lnTo>
+                <a:lnTo>
+                  <a:pt x="460" y="114"/>
+                </a:lnTo>
+                <a:lnTo>
+                  <a:pt x="469" y="143"/>
+                </a:lnTo>
+                <a:lnTo>
+                  <a:pt x="479" y="169"/>
+                </a:lnTo>
+                <a:lnTo>
+                  <a:pt x="491" y="192"/>
+                </a:lnTo>
+                <a:lnTo>
+                  <a:pt x="503" y="216"/>
+                </a:lnTo>
+                <a:lnTo>
+                  <a:pt x="515" y="240"/>
+                </a:lnTo>
+                <a:lnTo>
+                  <a:pt x="525" y="263"/>
+                </a:lnTo>
+                <a:lnTo>
+                  <a:pt x="535" y="289"/>
+                </a:lnTo>
+                <a:lnTo>
+                  <a:pt x="545" y="318"/>
+                </a:lnTo>
+                <a:lnTo>
+                  <a:pt x="552" y="351"/>
+                </a:lnTo>
+                <a:lnTo>
+                  <a:pt x="556" y="389"/>
+                </a:lnTo>
+                <a:lnTo>
+                  <a:pt x="558" y="432"/>
+                </a:lnTo>
+                <a:lnTo>
+                  <a:pt x="556" y="475"/>
+                </a:lnTo>
+                <a:lnTo>
+                  <a:pt x="552" y="513"/>
+                </a:lnTo>
+                <a:lnTo>
+                  <a:pt x="545" y="546"/>
+                </a:lnTo>
+                <a:lnTo>
+                  <a:pt x="535" y="575"/>
+                </a:lnTo>
+                <a:lnTo>
+                  <a:pt x="525" y="601"/>
+                </a:lnTo>
+                <a:lnTo>
+                  <a:pt x="515" y="624"/>
+                </a:lnTo>
+                <a:lnTo>
+                  <a:pt x="503" y="648"/>
+                </a:lnTo>
+                <a:lnTo>
+                  <a:pt x="491" y="672"/>
+                </a:lnTo>
+                <a:lnTo>
+                  <a:pt x="479" y="695"/>
+                </a:lnTo>
+                <a:lnTo>
+                  <a:pt x="469" y="721"/>
+                </a:lnTo>
+                <a:lnTo>
+                  <a:pt x="460" y="750"/>
+                </a:lnTo>
+                <a:lnTo>
+                  <a:pt x="453" y="783"/>
+                </a:lnTo>
+                <a:lnTo>
+                  <a:pt x="448" y="821"/>
+                </a:lnTo>
+                <a:lnTo>
+                  <a:pt x="447" y="864"/>
+                </a:lnTo>
+                <a:lnTo>
+                  <a:pt x="448" y="907"/>
+                </a:lnTo>
+                <a:lnTo>
+                  <a:pt x="453" y="945"/>
+                </a:lnTo>
+                <a:lnTo>
+                  <a:pt x="460" y="978"/>
+                </a:lnTo>
+                <a:lnTo>
+                  <a:pt x="469" y="1007"/>
+                </a:lnTo>
+                <a:lnTo>
+                  <a:pt x="479" y="1033"/>
+                </a:lnTo>
+                <a:lnTo>
+                  <a:pt x="491" y="1056"/>
+                </a:lnTo>
+                <a:lnTo>
+                  <a:pt x="503" y="1080"/>
+                </a:lnTo>
+                <a:lnTo>
+                  <a:pt x="515" y="1104"/>
+                </a:lnTo>
+                <a:lnTo>
+                  <a:pt x="525" y="1127"/>
+                </a:lnTo>
+                <a:lnTo>
+                  <a:pt x="535" y="1153"/>
+                </a:lnTo>
+                <a:lnTo>
+                  <a:pt x="545" y="1182"/>
+                </a:lnTo>
+                <a:lnTo>
+                  <a:pt x="552" y="1215"/>
+                </a:lnTo>
+                <a:lnTo>
+                  <a:pt x="556" y="1253"/>
+                </a:lnTo>
+                <a:lnTo>
+                  <a:pt x="558" y="1296"/>
+                </a:lnTo>
+                <a:lnTo>
+                  <a:pt x="556" y="1339"/>
+                </a:lnTo>
+                <a:lnTo>
+                  <a:pt x="552" y="1377"/>
+                </a:lnTo>
+                <a:lnTo>
+                  <a:pt x="545" y="1410"/>
+                </a:lnTo>
+                <a:lnTo>
+                  <a:pt x="535" y="1439"/>
+                </a:lnTo>
+                <a:lnTo>
+                  <a:pt x="525" y="1465"/>
+                </a:lnTo>
+                <a:lnTo>
+                  <a:pt x="515" y="1488"/>
+                </a:lnTo>
+                <a:lnTo>
+                  <a:pt x="503" y="1512"/>
+                </a:lnTo>
+                <a:lnTo>
+                  <a:pt x="491" y="1536"/>
+                </a:lnTo>
+                <a:lnTo>
+                  <a:pt x="479" y="1559"/>
+                </a:lnTo>
+                <a:lnTo>
+                  <a:pt x="469" y="1585"/>
+                </a:lnTo>
+                <a:lnTo>
+                  <a:pt x="460" y="1614"/>
+                </a:lnTo>
+                <a:lnTo>
+                  <a:pt x="453" y="1647"/>
+                </a:lnTo>
+                <a:lnTo>
+                  <a:pt x="448" y="1685"/>
+                </a:lnTo>
+                <a:lnTo>
+                  <a:pt x="447" y="1728"/>
+                </a:lnTo>
+                <a:lnTo>
+                  <a:pt x="448" y="1771"/>
+                </a:lnTo>
+                <a:lnTo>
+                  <a:pt x="453" y="1809"/>
+                </a:lnTo>
+                <a:lnTo>
+                  <a:pt x="460" y="1842"/>
+                </a:lnTo>
+                <a:lnTo>
+                  <a:pt x="469" y="1871"/>
+                </a:lnTo>
+                <a:lnTo>
+                  <a:pt x="479" y="1897"/>
+                </a:lnTo>
+                <a:lnTo>
+                  <a:pt x="491" y="1920"/>
+                </a:lnTo>
+                <a:lnTo>
+                  <a:pt x="503" y="1944"/>
+                </a:lnTo>
+                <a:lnTo>
+                  <a:pt x="515" y="1968"/>
+                </a:lnTo>
+                <a:lnTo>
+                  <a:pt x="525" y="1991"/>
+                </a:lnTo>
+                <a:lnTo>
+                  <a:pt x="535" y="2017"/>
+                </a:lnTo>
+                <a:lnTo>
+                  <a:pt x="545" y="2046"/>
+                </a:lnTo>
+                <a:lnTo>
+                  <a:pt x="552" y="2079"/>
+                </a:lnTo>
+                <a:lnTo>
+                  <a:pt x="556" y="2117"/>
+                </a:lnTo>
+                <a:lnTo>
+                  <a:pt x="558" y="2159"/>
+                </a:lnTo>
+                <a:lnTo>
+                  <a:pt x="556" y="2203"/>
+                </a:lnTo>
+                <a:lnTo>
+                  <a:pt x="552" y="2241"/>
+                </a:lnTo>
+                <a:lnTo>
+                  <a:pt x="545" y="2274"/>
+                </a:lnTo>
+                <a:lnTo>
+                  <a:pt x="535" y="2303"/>
+                </a:lnTo>
+                <a:lnTo>
+                  <a:pt x="525" y="2329"/>
+                </a:lnTo>
+                <a:lnTo>
+                  <a:pt x="515" y="2352"/>
+                </a:lnTo>
+                <a:lnTo>
+                  <a:pt x="503" y="2376"/>
+                </a:lnTo>
+                <a:lnTo>
+                  <a:pt x="491" y="2400"/>
+                </a:lnTo>
+                <a:lnTo>
+                  <a:pt x="479" y="2423"/>
+                </a:lnTo>
+                <a:lnTo>
+                  <a:pt x="469" y="2449"/>
+                </a:lnTo>
+                <a:lnTo>
+                  <a:pt x="460" y="2478"/>
+                </a:lnTo>
+                <a:lnTo>
+                  <a:pt x="453" y="2511"/>
+                </a:lnTo>
+                <a:lnTo>
+                  <a:pt x="448" y="2549"/>
+                </a:lnTo>
+                <a:lnTo>
+                  <a:pt x="447" y="2592"/>
+                </a:lnTo>
+                <a:lnTo>
+                  <a:pt x="448" y="2635"/>
+                </a:lnTo>
+                <a:lnTo>
+                  <a:pt x="453" y="2673"/>
+                </a:lnTo>
+                <a:lnTo>
+                  <a:pt x="460" y="2706"/>
+                </a:lnTo>
+                <a:lnTo>
+                  <a:pt x="469" y="2735"/>
+                </a:lnTo>
+                <a:lnTo>
+                  <a:pt x="479" y="2761"/>
+                </a:lnTo>
+                <a:lnTo>
+                  <a:pt x="491" y="2784"/>
+                </a:lnTo>
+                <a:lnTo>
+                  <a:pt x="515" y="2832"/>
+                </a:lnTo>
+                <a:lnTo>
+                  <a:pt x="525" y="2855"/>
+                </a:lnTo>
+                <a:lnTo>
+                  <a:pt x="535" y="2881"/>
+                </a:lnTo>
+                <a:lnTo>
+                  <a:pt x="545" y="2910"/>
+                </a:lnTo>
+                <a:lnTo>
+                  <a:pt x="552" y="2943"/>
+                </a:lnTo>
+                <a:lnTo>
+                  <a:pt x="556" y="2981"/>
+                </a:lnTo>
+                <a:lnTo>
+                  <a:pt x="558" y="3024"/>
+                </a:lnTo>
+                <a:lnTo>
+                  <a:pt x="556" y="3067"/>
+                </a:lnTo>
+                <a:lnTo>
+                  <a:pt x="552" y="3105"/>
+                </a:lnTo>
+                <a:lnTo>
+                  <a:pt x="545" y="3138"/>
+                </a:lnTo>
+                <a:lnTo>
+                  <a:pt x="535" y="3167"/>
+                </a:lnTo>
+                <a:lnTo>
+                  <a:pt x="525" y="3193"/>
+                </a:lnTo>
+                <a:lnTo>
+                  <a:pt x="515" y="3216"/>
+                </a:lnTo>
+                <a:lnTo>
+                  <a:pt x="503" y="3240"/>
+                </a:lnTo>
+                <a:lnTo>
+                  <a:pt x="491" y="3264"/>
+                </a:lnTo>
+                <a:lnTo>
+                  <a:pt x="479" y="3287"/>
+                </a:lnTo>
+                <a:lnTo>
+                  <a:pt x="469" y="3313"/>
+                </a:lnTo>
+                <a:lnTo>
+                  <a:pt x="460" y="3342"/>
+                </a:lnTo>
+                <a:lnTo>
+                  <a:pt x="453" y="3375"/>
+                </a:lnTo>
+                <a:lnTo>
+                  <a:pt x="448" y="3413"/>
+                </a:lnTo>
+                <a:lnTo>
+                  <a:pt x="447" y="3456"/>
+                </a:lnTo>
+                <a:lnTo>
+                  <a:pt x="448" y="3499"/>
+                </a:lnTo>
+                <a:lnTo>
+                  <a:pt x="453" y="3537"/>
+                </a:lnTo>
+                <a:lnTo>
+                  <a:pt x="460" y="3570"/>
+                </a:lnTo>
+                <a:lnTo>
+                  <a:pt x="469" y="3599"/>
+                </a:lnTo>
+                <a:lnTo>
+                  <a:pt x="479" y="3625"/>
+                </a:lnTo>
+                <a:lnTo>
+                  <a:pt x="491" y="3648"/>
+                </a:lnTo>
+                <a:lnTo>
+                  <a:pt x="503" y="3672"/>
+                </a:lnTo>
+                <a:lnTo>
+                  <a:pt x="515" y="3696"/>
+                </a:lnTo>
+                <a:lnTo>
+                  <a:pt x="525" y="3719"/>
+                </a:lnTo>
+                <a:lnTo>
+                  <a:pt x="535" y="3745"/>
+                </a:lnTo>
+                <a:lnTo>
+                  <a:pt x="545" y="3774"/>
+                </a:lnTo>
+                <a:lnTo>
+                  <a:pt x="552" y="3807"/>
+                </a:lnTo>
+                <a:lnTo>
+                  <a:pt x="556" y="3845"/>
+                </a:lnTo>
+                <a:lnTo>
+                  <a:pt x="558" y="3888"/>
+                </a:lnTo>
+                <a:lnTo>
+                  <a:pt x="556" y="3931"/>
+                </a:lnTo>
+                <a:lnTo>
+                  <a:pt x="552" y="3969"/>
+                </a:lnTo>
+                <a:lnTo>
+                  <a:pt x="545" y="4002"/>
+                </a:lnTo>
+                <a:lnTo>
+                  <a:pt x="535" y="4031"/>
+                </a:lnTo>
+                <a:lnTo>
+                  <a:pt x="525" y="4057"/>
+                </a:lnTo>
+                <a:lnTo>
+                  <a:pt x="515" y="4080"/>
+                </a:lnTo>
+                <a:lnTo>
+                  <a:pt x="503" y="4104"/>
+                </a:lnTo>
+                <a:lnTo>
+                  <a:pt x="491" y="4128"/>
+                </a:lnTo>
+                <a:lnTo>
+                  <a:pt x="479" y="4151"/>
+                </a:lnTo>
+                <a:lnTo>
+                  <a:pt x="469" y="4177"/>
+                </a:lnTo>
+                <a:lnTo>
+                  <a:pt x="460" y="4206"/>
+                </a:lnTo>
+                <a:lnTo>
+                  <a:pt x="453" y="4239"/>
+                </a:lnTo>
+                <a:lnTo>
+                  <a:pt x="448" y="4277"/>
+                </a:lnTo>
+                <a:lnTo>
+                  <a:pt x="447" y="4320"/>
+                </a:lnTo>
+                <a:lnTo>
+                  <a:pt x="0" y="4320"/>
+                </a:lnTo>
+                <a:lnTo>
+                  <a:pt x="0" y="0"/>
+                </a:lnTo>
+                <a:close/>
+              </a:path>
+            </a:pathLst>
+          </a:custGeom>
+          <a:solidFill>
+            <a:schemeClr val="tx2"/>
+          </a:solidFill>
+          <a:ln w="0">
+            <a:noFill/>
+            <a:prstDash val="solid"/>
+            <a:round/>
+            <a:headEnd/>
+            <a:tailEnd/>
+          </a:ln>
+        </p:spPr>
+      </p:sp>
+      <p:sp>
+        <p:nvSpPr>
+          <p:cNvPr id="12" name="Rectangle 11" title="right edge border"/>
+          <p:cNvSpPr/>
+          <p:nvPr/>
+        </p:nvSpPr>
+        <p:spPr>
+          <a:xfrm>
+            <a:off x="11908536" y="0"/>
+            <a:ext cx="283464" cy="6858000"/>
+          </a:xfrm>
+          <a:prstGeom prst="rect">
+            <a:avLst/>
+          </a:prstGeom>
+          <a:solidFill>
+            <a:schemeClr val="accent1"/>
+          </a:solidFill>
+          <a:ln>
+            <a:noFill/>
+          </a:ln>
+        </p:spPr>
+        <p:style>
+          <a:lnRef idx="2">
+            <a:schemeClr val="accent1">
+              <a:shade val="50000"/>
+            </a:schemeClr>
+          </a:lnRef>
+          <a:fillRef idx="1">
+            <a:schemeClr val="accent1"/>
+          </a:fillRef>
+          <a:effectRef idx="0">
+            <a:schemeClr val="accent1"/>
+          </a:effectRef>
+          <a:fontRef idx="minor">
+            <a:schemeClr val="lt1"/>
+          </a:fontRef>
+        </p:style>
+      </p:sp>
     </p:spTree>
     <p:extLst>
       <p:ext uri="{BB962C8B-B14F-4D97-AF65-F5344CB8AC3E}">
-        <p14:creationId xmlns:p14="http://schemas.microsoft.com/office/powerpoint/2010/main" val="647252924"/>
+        <p14:creationId xmlns:p14="http://schemas.microsoft.com/office/powerpoint/2010/main" val="436770604"/>
       </p:ext>
     </p:extLst>
   </p:cSld>
   <p:clrMap bg1="lt1" tx1="dk1" bg2="lt2" tx2="dk2" accent1="accent1" accent2="accent2" accent3="accent3" accent4="accent4" accent5="accent5" accent6="accent6" hlink="hlink" folHlink="folHlink"/>
   <p:sldLayoutIdLst>
-    <p:sldLayoutId id="2147483649" r:id="rId1"/>
-    <p:sldLayoutId id="2147483650" r:id="rId2"/>
-    <p:sldLayoutId id="2147483651" r:id="rId3"/>
-    <p:sldLayoutId id="2147483652" r:id="rId4"/>
-    <p:sldLayoutId id="2147483653" r:id="rId5"/>
-    <p:sldLayoutId id="2147483654" r:id="rId6"/>
-    <p:sldLayoutId id="2147483655" r:id="rId7"/>
-    <p:sldLayoutId id="2147483656" r:id="rId8"/>
-    <p:sldLayoutId id="2147483657" r:id="rId9"/>
-    <p:sldLayoutId id="2147483658" r:id="rId10"/>
-    <p:sldLayoutId id="2147483659" r:id="rId11"/>
+    <p:sldLayoutId id="2147483661" r:id="rId1"/>
+    <p:sldLayoutId id="2147483662" r:id="rId2"/>
+    <p:sldLayoutId id="2147483663" r:id="rId3"/>
+    <p:sldLayoutId id="2147483664" r:id="rId4"/>
+    <p:sldLayoutId id="2147483665" r:id="rId5"/>
+    <p:sldLayoutId id="2147483666" r:id="rId6"/>
+    <p:sldLayoutId id="2147483667" r:id="rId7"/>
+    <p:sldLayoutId id="2147483668" r:id="rId8"/>
+    <p:sldLayoutId id="2147483669" r:id="rId9"/>
+    <p:sldLayoutId id="2147483670" r:id="rId10"/>
+    <p:sldLayoutId id="2147483671" r:id="rId11"/>
   </p:sldLayoutIdLst>
   <p:txStyles>
     <p:titleStyle>
@@ -3032,9 +7252,9 @@
           <a:spcPct val="0"/>
         </a:spcBef>
         <a:buNone/>
-        <a:defRPr sz="4400" kern="1200">
+        <a:defRPr sz="5100" kern="1200" cap="all" spc="200" baseline="0">
           <a:solidFill>
-            <a:schemeClr val="tx1"/>
+            <a:schemeClr val="tx2"/>
           </a:solidFill>
           <a:latin typeface="+mj-lt"/>
           <a:ea typeface="+mj-ea"/>
@@ -3045,16 +7265,22 @@
     <p:bodyStyle>
       <a:lvl1pPr marL="228600" indent="-228600" algn="l" defTabSz="914400" rtl="0" eaLnBrk="1" latinLnBrk="0" hangingPunct="1">
         <a:lnSpc>
-          <a:spcPct val="90000"/>
+          <a:spcPct val="110000"/>
         </a:lnSpc>
         <a:spcBef>
-          <a:spcPts val="1000"/>
+          <a:spcPts val="700"/>
         </a:spcBef>
+        <a:buClr>
+          <a:schemeClr val="tx2"/>
+        </a:buClr>
         <a:buFont typeface="Arial" panose="020B0604020202020204" pitchFamily="34" charset="0"/>
         <a:buChar char="•"/>
-        <a:defRPr sz="2800" kern="1200">
+        <a:defRPr sz="2000" kern="1200">
           <a:solidFill>
-            <a:schemeClr val="tx1"/>
+            <a:schemeClr val="tx1">
+              <a:lumMod val="65000"/>
+              <a:lumOff val="35000"/>
+            </a:schemeClr>
           </a:solidFill>
           <a:latin typeface="+mn-lt"/>
           <a:ea typeface="+mn-ea"/>
@@ -3063,16 +7289,22 @@
       </a:lvl1pPr>
       <a:lvl2pPr marL="685800" indent="-228600" algn="l" defTabSz="914400" rtl="0" eaLnBrk="1" latinLnBrk="0" hangingPunct="1">
         <a:lnSpc>
-          <a:spcPct val="90000"/>
+          <a:spcPct val="110000"/>
         </a:lnSpc>
         <a:spcBef>
-          <a:spcPts val="500"/>
+          <a:spcPts val="700"/>
         </a:spcBef>
-        <a:buFont typeface="Arial" panose="020B0604020202020204" pitchFamily="34" charset="0"/>
-        <a:buChar char="•"/>
-        <a:defRPr sz="2400" kern="1200">
+        <a:buClr>
+          <a:schemeClr val="tx2"/>
+        </a:buClr>
+        <a:buFont typeface="Gill Sans MT" panose="020B0502020104020203" pitchFamily="34" charset="0"/>
+        <a:buChar char="–"/>
+        <a:defRPr sz="1800" kern="1200">
           <a:solidFill>
-            <a:schemeClr val="tx1"/>
+            <a:schemeClr val="tx1">
+              <a:lumMod val="65000"/>
+              <a:lumOff val="35000"/>
+            </a:schemeClr>
           </a:solidFill>
           <a:latin typeface="+mn-lt"/>
           <a:ea typeface="+mn-ea"/>
@@ -3081,16 +7313,22 @@
       </a:lvl2pPr>
       <a:lvl3pPr marL="1143000" indent="-228600" algn="l" defTabSz="914400" rtl="0" eaLnBrk="1" latinLnBrk="0" hangingPunct="1">
         <a:lnSpc>
-          <a:spcPct val="90000"/>
+          <a:spcPct val="110000"/>
         </a:lnSpc>
         <a:spcBef>
-          <a:spcPts val="500"/>
+          <a:spcPts val="700"/>
         </a:spcBef>
+        <a:buClr>
+          <a:schemeClr val="tx2"/>
+        </a:buClr>
         <a:buFont typeface="Arial" panose="020B0604020202020204" pitchFamily="34" charset="0"/>
         <a:buChar char="•"/>
-        <a:defRPr sz="2000" kern="1200">
+        <a:defRPr sz="1600" kern="1200">
           <a:solidFill>
-            <a:schemeClr val="tx1"/>
+            <a:schemeClr val="tx1">
+              <a:lumMod val="65000"/>
+              <a:lumOff val="35000"/>
+            </a:schemeClr>
           </a:solidFill>
           <a:latin typeface="+mn-lt"/>
           <a:ea typeface="+mn-ea"/>
@@ -3099,16 +7337,22 @@
       </a:lvl3pPr>
       <a:lvl4pPr marL="1600200" indent="-228600" algn="l" defTabSz="914400" rtl="0" eaLnBrk="1" latinLnBrk="0" hangingPunct="1">
         <a:lnSpc>
-          <a:spcPct val="90000"/>
+          <a:spcPct val="110000"/>
         </a:lnSpc>
         <a:spcBef>
-          <a:spcPts val="500"/>
+          <a:spcPts val="700"/>
         </a:spcBef>
-        <a:buFont typeface="Arial" panose="020B0604020202020204" pitchFamily="34" charset="0"/>
-        <a:buChar char="•"/>
-        <a:defRPr sz="1800" kern="1200">
+        <a:buClr>
+          <a:schemeClr val="tx2"/>
+        </a:buClr>
+        <a:buFont typeface="Gill Sans MT" panose="020B0502020104020203" pitchFamily="34" charset="0"/>
+        <a:buChar char="–"/>
+        <a:defRPr sz="1400" kern="1200">
           <a:solidFill>
-            <a:schemeClr val="tx1"/>
+            <a:schemeClr val="tx1">
+              <a:lumMod val="65000"/>
+              <a:lumOff val="35000"/>
+            </a:schemeClr>
           </a:solidFill>
           <a:latin typeface="+mn-lt"/>
           <a:ea typeface="+mn-ea"/>
@@ -3117,16 +7361,22 @@
       </a:lvl4pPr>
       <a:lvl5pPr marL="2057400" indent="-228600" algn="l" defTabSz="914400" rtl="0" eaLnBrk="1" latinLnBrk="0" hangingPunct="1">
         <a:lnSpc>
-          <a:spcPct val="90000"/>
+          <a:spcPct val="110000"/>
         </a:lnSpc>
         <a:spcBef>
-          <a:spcPts val="500"/>
+          <a:spcPts val="700"/>
         </a:spcBef>
+        <a:buClr>
+          <a:schemeClr val="tx2"/>
+        </a:buClr>
         <a:buFont typeface="Arial" panose="020B0604020202020204" pitchFamily="34" charset="0"/>
         <a:buChar char="•"/>
-        <a:defRPr sz="1800" kern="1200">
+        <a:defRPr sz="1400" kern="1200">
           <a:solidFill>
-            <a:schemeClr val="tx1"/>
+            <a:schemeClr val="tx1">
+              <a:lumMod val="65000"/>
+              <a:lumOff val="35000"/>
+            </a:schemeClr>
           </a:solidFill>
           <a:latin typeface="+mn-lt"/>
           <a:ea typeface="+mn-ea"/>
@@ -3135,16 +7385,22 @@
       </a:lvl5pPr>
       <a:lvl6pPr marL="2514600" indent="-228600" algn="l" defTabSz="914400" rtl="0" eaLnBrk="1" latinLnBrk="0" hangingPunct="1">
         <a:lnSpc>
-          <a:spcPct val="90000"/>
+          <a:spcPct val="110000"/>
         </a:lnSpc>
         <a:spcBef>
-          <a:spcPts val="500"/>
+          <a:spcPts val="700"/>
         </a:spcBef>
-        <a:buFont typeface="Arial" panose="020B0604020202020204" pitchFamily="34" charset="0"/>
-        <a:buChar char="•"/>
-        <a:defRPr sz="1800" kern="1200">
+        <a:buClr>
+          <a:schemeClr val="tx2"/>
+        </a:buClr>
+        <a:buFont typeface="Gill Sans MT" panose="020B0502020104020203" pitchFamily="34" charset="0"/>
+        <a:buChar char="–"/>
+        <a:defRPr sz="1400" kern="1200">
           <a:solidFill>
-            <a:schemeClr val="tx1"/>
+            <a:schemeClr val="tx1">
+              <a:lumMod val="65000"/>
+              <a:lumOff val="35000"/>
+            </a:schemeClr>
           </a:solidFill>
           <a:latin typeface="+mn-lt"/>
           <a:ea typeface="+mn-ea"/>
@@ -3153,16 +7409,22 @@
       </a:lvl6pPr>
       <a:lvl7pPr marL="2971800" indent="-228600" algn="l" defTabSz="914400" rtl="0" eaLnBrk="1" latinLnBrk="0" hangingPunct="1">
         <a:lnSpc>
-          <a:spcPct val="90000"/>
+          <a:spcPct val="110000"/>
         </a:lnSpc>
         <a:spcBef>
-          <a:spcPts val="500"/>
+          <a:spcPts val="700"/>
         </a:spcBef>
+        <a:buClr>
+          <a:schemeClr val="tx2"/>
+        </a:buClr>
         <a:buFont typeface="Arial" panose="020B0604020202020204" pitchFamily="34" charset="0"/>
         <a:buChar char="•"/>
-        <a:defRPr sz="1800" kern="1200">
+        <a:defRPr sz="1400" kern="1200">
           <a:solidFill>
-            <a:schemeClr val="tx1"/>
+            <a:schemeClr val="tx1">
+              <a:lumMod val="65000"/>
+              <a:lumOff val="35000"/>
+            </a:schemeClr>
           </a:solidFill>
           <a:latin typeface="+mn-lt"/>
           <a:ea typeface="+mn-ea"/>
@@ -3171,16 +7433,22 @@
       </a:lvl7pPr>
       <a:lvl8pPr marL="3429000" indent="-228600" algn="l" defTabSz="914400" rtl="0" eaLnBrk="1" latinLnBrk="0" hangingPunct="1">
         <a:lnSpc>
-          <a:spcPct val="90000"/>
+          <a:spcPct val="110000"/>
         </a:lnSpc>
         <a:spcBef>
-          <a:spcPts val="500"/>
+          <a:spcPts val="700"/>
         </a:spcBef>
-        <a:buFont typeface="Arial" panose="020B0604020202020204" pitchFamily="34" charset="0"/>
-        <a:buChar char="•"/>
-        <a:defRPr sz="1800" kern="1200">
+        <a:buClr>
+          <a:schemeClr val="tx2"/>
+        </a:buClr>
+        <a:buFont typeface="Gill Sans MT" panose="020B0502020104020203" pitchFamily="34" charset="0"/>
+        <a:buChar char="–"/>
+        <a:defRPr sz="1400" kern="1200" baseline="0">
           <a:solidFill>
-            <a:schemeClr val="tx1"/>
+            <a:schemeClr val="tx1">
+              <a:lumMod val="65000"/>
+              <a:lumOff val="35000"/>
+            </a:schemeClr>
           </a:solidFill>
           <a:latin typeface="+mn-lt"/>
           <a:ea typeface="+mn-ea"/>
@@ -3189,16 +7457,22 @@
       </a:lvl8pPr>
       <a:lvl9pPr marL="3886200" indent="-228600" algn="l" defTabSz="914400" rtl="0" eaLnBrk="1" latinLnBrk="0" hangingPunct="1">
         <a:lnSpc>
-          <a:spcPct val="90000"/>
+          <a:spcPct val="110000"/>
         </a:lnSpc>
         <a:spcBef>
-          <a:spcPts val="500"/>
+          <a:spcPts val="700"/>
         </a:spcBef>
+        <a:buClr>
+          <a:schemeClr val="tx2"/>
+        </a:buClr>
         <a:buFont typeface="Arial" panose="020B0604020202020204" pitchFamily="34" charset="0"/>
         <a:buChar char="•"/>
-        <a:defRPr sz="1800" kern="1200">
+        <a:defRPr sz="1400" kern="1200" baseline="0">
           <a:solidFill>
-            <a:schemeClr val="tx1"/>
+            <a:schemeClr val="tx1">
+              <a:lumMod val="65000"/>
+              <a:lumOff val="35000"/>
+            </a:schemeClr>
           </a:solidFill>
           <a:latin typeface="+mn-lt"/>
           <a:ea typeface="+mn-ea"/>
@@ -3208,7 +7482,7 @@
     </p:bodyStyle>
     <p:otherStyle>
       <a:defPPr>
-        <a:defRPr lang="en-DK"/>
+        <a:defRPr lang="en-US"/>
       </a:defPPr>
       <a:lvl1pPr marL="0" algn="l" defTabSz="914400" rtl="0" eaLnBrk="1" latinLnBrk="0" hangingPunct="1">
         <a:defRPr sz="1800" kern="1200">
@@ -3302,6 +7576,42 @@
       </a:lvl9pPr>
     </p:otherStyle>
   </p:txStyles>
+  <p:extLst>
+    <p:ext uri="{27BBF7A9-308A-43DC-89C8-2F10F3537804}">
+      <p15:sldGuideLst xmlns:p15="http://schemas.microsoft.com/office/powerpoint/2012/main">
+        <p15:guide id="1" pos="792">
+          <p15:clr>
+            <a:srgbClr val="F26B43"/>
+          </p15:clr>
+        </p15:guide>
+        <p15:guide id="2" pos="7200">
+          <p15:clr>
+            <a:srgbClr val="F26B43"/>
+          </p15:clr>
+        </p15:guide>
+        <p15:guide id="3" orient="horz" pos="4008">
+          <p15:clr>
+            <a:srgbClr val="F26B43"/>
+          </p15:clr>
+        </p15:guide>
+        <p15:guide id="4" orient="horz" pos="1440">
+          <p15:clr>
+            <a:srgbClr val="F26B43"/>
+          </p15:clr>
+        </p15:guide>
+        <p15:guide id="5" orient="horz" pos="3720">
+          <p15:clr>
+            <a:srgbClr val="F26B43"/>
+          </p15:clr>
+        </p15:guide>
+        <p15:guide id="6" orient="horz" pos="240">
+          <p15:clr>
+            <a:srgbClr val="F26B43"/>
+          </p15:clr>
+        </p15:guide>
+      </p15:sldGuideLst>
+    </p:ext>
+  </p:extLst>
 </p:sldMaster>
 </file>
 
@@ -3431,14 +7741,14 @@
           <a:lstStyle/>
           <a:p>
             <a:r>
-              <a:rPr lang="da-DK" dirty="0"/>
-              <a:t>Initial </a:t>
-            </a:r>
-            <a:r>
-              <a:rPr lang="da-DK" dirty="0" err="1"/>
-              <a:t>thoughts</a:t>
-            </a:r>
-            <a:endParaRPr lang="da-DK" dirty="0"/>
+              <a:rPr lang="en-DK" noProof="0" dirty="0"/>
+              <a:t>Early problems</a:t>
+            </a:r>
+            <a:r>
+              <a:rPr lang="en-US" noProof="0" dirty="0"/>
+              <a:t>/thoughts</a:t>
+            </a:r>
+            <a:endParaRPr lang="en-DK" noProof="0" dirty="0"/>
           </a:p>
         </p:txBody>
       </p:sp>
@@ -3458,84 +7768,94 @@
             <p:ph sz="half" idx="1"/>
           </p:nvPr>
         </p:nvSpPr>
-        <p:spPr/>
+        <p:spPr>
+          <a:xfrm>
+            <a:off x="1257300" y="1364762"/>
+            <a:ext cx="4800600" cy="4540738"/>
+          </a:xfrm>
+        </p:spPr>
         <p:txBody>
           <a:bodyPr/>
           <a:lstStyle/>
           <a:p>
             <a:r>
-              <a:rPr lang="da-DK" dirty="0" err="1"/>
-              <a:t>I’ve</a:t>
-            </a:r>
-            <a:r>
-              <a:rPr lang="da-DK" dirty="0"/>
-              <a:t> </a:t>
-            </a:r>
-            <a:r>
-              <a:rPr lang="da-DK" dirty="0" err="1"/>
-              <a:t>worked</a:t>
-            </a:r>
-            <a:r>
-              <a:rPr lang="da-DK" dirty="0"/>
-              <a:t> on </a:t>
-            </a:r>
-            <a:r>
-              <a:rPr lang="da-DK" dirty="0" err="1"/>
-              <a:t>something</a:t>
-            </a:r>
-            <a:r>
-              <a:rPr lang="da-DK" dirty="0"/>
-              <a:t> </a:t>
-            </a:r>
-            <a:r>
-              <a:rPr lang="da-DK" dirty="0" err="1"/>
-              <a:t>very</a:t>
-            </a:r>
-            <a:r>
-              <a:rPr lang="da-DK" dirty="0"/>
-              <a:t> </a:t>
-            </a:r>
-            <a:r>
-              <a:rPr lang="da-DK" dirty="0" err="1"/>
-              <a:t>similar</a:t>
-            </a:r>
-            <a:r>
-              <a:rPr lang="da-DK" dirty="0"/>
-              <a:t> </a:t>
-            </a:r>
-            <a:r>
-              <a:rPr lang="da-DK" dirty="0" err="1"/>
-              <a:t>before</a:t>
-            </a:r>
-            <a:endParaRPr lang="da-DK" dirty="0"/>
+              <a:rPr lang="en-DK" noProof="0" dirty="0"/>
+              <a:t>Not used to Visual Studio</a:t>
+            </a:r>
+            <a:endParaRPr lang="en-US" noProof="0" dirty="0"/>
+          </a:p>
+          <a:p>
+            <a:r>
+              <a:rPr lang="en-US" dirty="0"/>
+              <a:t>Relationship between order, recipe and stock was confusing</a:t>
+            </a:r>
+            <a:endParaRPr lang="en-US" noProof="0" dirty="0"/>
+          </a:p>
+          <a:p>
+            <a:r>
+              <a:rPr lang="en-US" dirty="0"/>
+              <a:t>Getting used to </a:t>
+            </a:r>
+            <a:r>
+              <a:rPr lang="en-US" dirty="0" err="1"/>
+              <a:t>MSTest</a:t>
+            </a:r>
+            <a:r>
+              <a:rPr lang="en-US" dirty="0"/>
+              <a:t> and mocks</a:t>
+            </a:r>
+          </a:p>
+          <a:p>
+            <a:r>
+              <a:rPr lang="en-US" noProof="0" dirty="0"/>
+              <a:t>Codebase lacking in</a:t>
+            </a:r>
+            <a:r>
+              <a:rPr lang="en-US" dirty="0"/>
+              <a:t> code comments, so I wanted to make sure I made them for my new code</a:t>
+            </a:r>
+          </a:p>
+          <a:p>
+            <a:r>
+              <a:rPr lang="en-US" noProof="0" dirty="0"/>
+              <a:t>Throwing exceptions for the controller to handle – is that ideal?</a:t>
+            </a:r>
+            <a:endParaRPr lang="en-DK" noProof="0" dirty="0"/>
           </a:p>
         </p:txBody>
       </p:sp>
-      <p:sp>
-        <p:nvSpPr>
-          <p:cNvPr id="4" name="Pladsholder til indhold 3">
+      <p:pic>
+        <p:nvPicPr>
+          <p:cNvPr id="5" name="Pladsholder til indhold 4">
             <a:extLst>
               <a:ext uri="{FF2B5EF4-FFF2-40B4-BE49-F238E27FC236}">
-                <a16:creationId xmlns:a16="http://schemas.microsoft.com/office/drawing/2014/main" id="{3BD5C81E-E7C0-0EF9-6D5C-7C26253B50F2}"/>
+                <a16:creationId xmlns:a16="http://schemas.microsoft.com/office/drawing/2014/main" id="{4406BD38-5480-5E1C-C2D9-43612BB8CEB0}"/>
               </a:ext>
             </a:extLst>
           </p:cNvPr>
-          <p:cNvSpPr>
-            <a:spLocks noGrp="1"/>
-          </p:cNvSpPr>
+          <p:cNvPicPr>
+            <a:picLocks noGrp="1" noChangeAspect="1"/>
+          </p:cNvPicPr>
           <p:nvPr>
             <p:ph sz="half" idx="2"/>
           </p:nvPr>
-        </p:nvSpPr>
-        <p:spPr/>
-        <p:txBody>
-          <a:bodyPr/>
-          <a:lstStyle/>
-          <a:p>
-            <a:endParaRPr lang="da-DK"/>
-          </a:p>
-        </p:txBody>
-      </p:sp>
+        </p:nvPicPr>
+        <p:blipFill>
+          <a:blip r:embed="rId2"/>
+          <a:stretch>
+            <a:fillRect/>
+          </a:stretch>
+        </p:blipFill>
+        <p:spPr>
+          <a:xfrm>
+            <a:off x="7250655" y="1364762"/>
+            <a:ext cx="3833140" cy="5110853"/>
+          </a:xfrm>
+          <a:prstGeom prst="rect">
+            <a:avLst/>
+          </a:prstGeom>
+        </p:spPr>
+      </p:pic>
     </p:spTree>
     <p:extLst>
       <p:ext uri="{BB962C8B-B14F-4D97-AF65-F5344CB8AC3E}">
@@ -3549,7 +7869,709 @@
 </p:sld>
 </file>
 
+<file path=ppt/slides/slide3.xml><?xml version="1.0" encoding="utf-8"?>
+<p:sld xmlns:a="http://schemas.openxmlformats.org/drawingml/2006/main" xmlns:r="http://schemas.openxmlformats.org/officeDocument/2006/relationships" xmlns:p="http://schemas.openxmlformats.org/presentationml/2006/main">
+  <p:cSld>
+    <p:spTree>
+      <p:nvGrpSpPr>
+        <p:cNvPr id="1" name=""/>
+        <p:cNvGrpSpPr/>
+        <p:nvPr/>
+      </p:nvGrpSpPr>
+      <p:grpSpPr>
+        <a:xfrm>
+          <a:off x="0" y="0"/>
+          <a:ext cx="0" cy="0"/>
+          <a:chOff x="0" y="0"/>
+          <a:chExt cx="0" cy="0"/>
+        </a:xfrm>
+      </p:grpSpPr>
+      <p:sp>
+        <p:nvSpPr>
+          <p:cNvPr id="2" name="Titel 1">
+            <a:extLst>
+              <a:ext uri="{FF2B5EF4-FFF2-40B4-BE49-F238E27FC236}">
+                <a16:creationId xmlns:a16="http://schemas.microsoft.com/office/drawing/2014/main" id="{34D9E8E1-E657-E332-2B9A-1809FC7466A1}"/>
+              </a:ext>
+            </a:extLst>
+          </p:cNvPr>
+          <p:cNvSpPr>
+            <a:spLocks noGrp="1"/>
+          </p:cNvSpPr>
+          <p:nvPr>
+            <p:ph type="title"/>
+          </p:nvPr>
+        </p:nvSpPr>
+        <p:spPr/>
+        <p:txBody>
+          <a:bodyPr/>
+          <a:lstStyle/>
+          <a:p>
+            <a:r>
+              <a:rPr lang="en-DK" noProof="0" dirty="0"/>
+              <a:t>Morten’s advice</a:t>
+            </a:r>
+          </a:p>
+        </p:txBody>
+      </p:sp>
+      <p:sp>
+        <p:nvSpPr>
+          <p:cNvPr id="3" name="Pladsholder til indhold 2">
+            <a:extLst>
+              <a:ext uri="{FF2B5EF4-FFF2-40B4-BE49-F238E27FC236}">
+                <a16:creationId xmlns:a16="http://schemas.microsoft.com/office/drawing/2014/main" id="{62F9B0A4-6473-B666-2C27-1C3A4D0EB4A0}"/>
+              </a:ext>
+            </a:extLst>
+          </p:cNvPr>
+          <p:cNvSpPr>
+            <a:spLocks noGrp="1"/>
+          </p:cNvSpPr>
+          <p:nvPr>
+            <p:ph sz="half" idx="1"/>
+          </p:nvPr>
+        </p:nvSpPr>
+        <p:spPr/>
+        <p:txBody>
+          <a:bodyPr/>
+          <a:lstStyle/>
+          <a:p>
+            <a:endParaRPr lang="da-DK" dirty="0"/>
+          </a:p>
+        </p:txBody>
+      </p:sp>
+      <p:sp>
+        <p:nvSpPr>
+          <p:cNvPr id="4" name="Pladsholder til indhold 3">
+            <a:extLst>
+              <a:ext uri="{FF2B5EF4-FFF2-40B4-BE49-F238E27FC236}">
+                <a16:creationId xmlns:a16="http://schemas.microsoft.com/office/drawing/2014/main" id="{B75FDCF1-01E1-9778-7CD1-8816D1822B14}"/>
+              </a:ext>
+            </a:extLst>
+          </p:cNvPr>
+          <p:cNvSpPr>
+            <a:spLocks noGrp="1"/>
+          </p:cNvSpPr>
+          <p:nvPr>
+            <p:ph sz="half" idx="2"/>
+          </p:nvPr>
+        </p:nvSpPr>
+        <p:spPr/>
+        <p:txBody>
+          <a:bodyPr/>
+          <a:lstStyle/>
+          <a:p>
+            <a:endParaRPr lang="da-DK"/>
+          </a:p>
+        </p:txBody>
+      </p:sp>
+    </p:spTree>
+    <p:extLst>
+      <p:ext uri="{BB962C8B-B14F-4D97-AF65-F5344CB8AC3E}">
+        <p14:creationId xmlns:p14="http://schemas.microsoft.com/office/powerpoint/2010/main" val="4086695093"/>
+      </p:ext>
+    </p:extLst>
+  </p:cSld>
+  <p:clrMapOvr>
+    <a:masterClrMapping/>
+  </p:clrMapOvr>
+</p:sld>
+</file>
+
+<file path=ppt/slides/slide4.xml><?xml version="1.0" encoding="utf-8"?>
+<p:sld xmlns:a="http://schemas.openxmlformats.org/drawingml/2006/main" xmlns:r="http://schemas.openxmlformats.org/officeDocument/2006/relationships" xmlns:p="http://schemas.openxmlformats.org/presentationml/2006/main">
+  <p:cSld>
+    <p:spTree>
+      <p:nvGrpSpPr>
+        <p:cNvPr id="1" name=""/>
+        <p:cNvGrpSpPr/>
+        <p:nvPr/>
+      </p:nvGrpSpPr>
+      <p:grpSpPr>
+        <a:xfrm>
+          <a:off x="0" y="0"/>
+          <a:ext cx="0" cy="0"/>
+          <a:chOff x="0" y="0"/>
+          <a:chExt cx="0" cy="0"/>
+        </a:xfrm>
+      </p:grpSpPr>
+      <p:sp>
+        <p:nvSpPr>
+          <p:cNvPr id="2" name="Titel 1">
+            <a:extLst>
+              <a:ext uri="{FF2B5EF4-FFF2-40B4-BE49-F238E27FC236}">
+                <a16:creationId xmlns:a16="http://schemas.microsoft.com/office/drawing/2014/main" id="{16D6FD49-2DB9-5A7C-B33A-EB8FD60B1770}"/>
+              </a:ext>
+            </a:extLst>
+          </p:cNvPr>
+          <p:cNvSpPr>
+            <a:spLocks noGrp="1"/>
+          </p:cNvSpPr>
+          <p:nvPr>
+            <p:ph type="title"/>
+          </p:nvPr>
+        </p:nvSpPr>
+        <p:spPr/>
+        <p:txBody>
+          <a:bodyPr/>
+          <a:lstStyle/>
+          <a:p>
+            <a:r>
+              <a:rPr lang="en-US" noProof="0" dirty="0"/>
+              <a:t>Later problems/thoughts</a:t>
+            </a:r>
+            <a:endParaRPr lang="en-DK" noProof="0" dirty="0"/>
+          </a:p>
+        </p:txBody>
+      </p:sp>
+      <p:sp>
+        <p:nvSpPr>
+          <p:cNvPr id="3" name="Pladsholder til indhold 2">
+            <a:extLst>
+              <a:ext uri="{FF2B5EF4-FFF2-40B4-BE49-F238E27FC236}">
+                <a16:creationId xmlns:a16="http://schemas.microsoft.com/office/drawing/2014/main" id="{BC1823F3-3FB9-49C5-B880-461F2701AD27}"/>
+              </a:ext>
+            </a:extLst>
+          </p:cNvPr>
+          <p:cNvSpPr>
+            <a:spLocks noGrp="1"/>
+          </p:cNvSpPr>
+          <p:nvPr>
+            <p:ph sz="half" idx="1"/>
+          </p:nvPr>
+        </p:nvSpPr>
+        <p:spPr/>
+        <p:txBody>
+          <a:bodyPr/>
+          <a:lstStyle/>
+          <a:p>
+            <a:endParaRPr lang="da-DK" dirty="0"/>
+          </a:p>
+        </p:txBody>
+      </p:sp>
+      <p:sp>
+        <p:nvSpPr>
+          <p:cNvPr id="4" name="Pladsholder til indhold 3">
+            <a:extLst>
+              <a:ext uri="{FF2B5EF4-FFF2-40B4-BE49-F238E27FC236}">
+                <a16:creationId xmlns:a16="http://schemas.microsoft.com/office/drawing/2014/main" id="{47C8E8B0-70D6-0E5E-F1F3-83A2F00EB827}"/>
+              </a:ext>
+            </a:extLst>
+          </p:cNvPr>
+          <p:cNvSpPr>
+            <a:spLocks noGrp="1"/>
+          </p:cNvSpPr>
+          <p:nvPr>
+            <p:ph sz="half" idx="2"/>
+          </p:nvPr>
+        </p:nvSpPr>
+        <p:spPr/>
+        <p:txBody>
+          <a:bodyPr/>
+          <a:lstStyle/>
+          <a:p>
+            <a:endParaRPr lang="da-DK"/>
+          </a:p>
+        </p:txBody>
+      </p:sp>
+    </p:spTree>
+    <p:extLst>
+      <p:ext uri="{BB962C8B-B14F-4D97-AF65-F5344CB8AC3E}">
+        <p14:creationId xmlns:p14="http://schemas.microsoft.com/office/powerpoint/2010/main" val="1482066582"/>
+      </p:ext>
+    </p:extLst>
+  </p:cSld>
+  <p:clrMapOvr>
+    <a:masterClrMapping/>
+  </p:clrMapOvr>
+</p:sld>
+</file>
+
+<file path=ppt/slides/slide5.xml><?xml version="1.0" encoding="utf-8"?>
+<p:sld xmlns:a="http://schemas.openxmlformats.org/drawingml/2006/main" xmlns:r="http://schemas.openxmlformats.org/officeDocument/2006/relationships" xmlns:p="http://schemas.openxmlformats.org/presentationml/2006/main">
+  <p:cSld>
+    <p:spTree>
+      <p:nvGrpSpPr>
+        <p:cNvPr id="1" name=""/>
+        <p:cNvGrpSpPr/>
+        <p:nvPr/>
+      </p:nvGrpSpPr>
+      <p:grpSpPr>
+        <a:xfrm>
+          <a:off x="0" y="0"/>
+          <a:ext cx="0" cy="0"/>
+          <a:chOff x="0" y="0"/>
+          <a:chExt cx="0" cy="0"/>
+        </a:xfrm>
+      </p:grpSpPr>
+      <p:sp>
+        <p:nvSpPr>
+          <p:cNvPr id="2" name="Titel 1">
+            <a:extLst>
+              <a:ext uri="{FF2B5EF4-FFF2-40B4-BE49-F238E27FC236}">
+                <a16:creationId xmlns:a16="http://schemas.microsoft.com/office/drawing/2014/main" id="{6ACDFDA2-DBC4-31F5-4D86-13F3D8C2D1E4}"/>
+              </a:ext>
+            </a:extLst>
+          </p:cNvPr>
+          <p:cNvSpPr>
+            <a:spLocks noGrp="1"/>
+          </p:cNvSpPr>
+          <p:nvPr>
+            <p:ph type="title"/>
+          </p:nvPr>
+        </p:nvSpPr>
+        <p:spPr/>
+        <p:txBody>
+          <a:bodyPr/>
+          <a:lstStyle/>
+          <a:p>
+            <a:r>
+              <a:rPr lang="en-DK" noProof="0" dirty="0"/>
+              <a:t>Interesting code bits</a:t>
+            </a:r>
+          </a:p>
+        </p:txBody>
+      </p:sp>
+      <p:sp>
+        <p:nvSpPr>
+          <p:cNvPr id="3" name="Pladsholder til indhold 2">
+            <a:extLst>
+              <a:ext uri="{FF2B5EF4-FFF2-40B4-BE49-F238E27FC236}">
+                <a16:creationId xmlns:a16="http://schemas.microsoft.com/office/drawing/2014/main" id="{0139D2AC-9FBF-E54A-C1EF-C5B61B08497E}"/>
+              </a:ext>
+            </a:extLst>
+          </p:cNvPr>
+          <p:cNvSpPr>
+            <a:spLocks noGrp="1"/>
+          </p:cNvSpPr>
+          <p:nvPr>
+            <p:ph sz="half" idx="1"/>
+          </p:nvPr>
+        </p:nvSpPr>
+        <p:spPr/>
+        <p:txBody>
+          <a:bodyPr/>
+          <a:lstStyle/>
+          <a:p>
+            <a:endParaRPr lang="da-DK"/>
+          </a:p>
+        </p:txBody>
+      </p:sp>
+      <p:sp>
+        <p:nvSpPr>
+          <p:cNvPr id="4" name="Pladsholder til indhold 3">
+            <a:extLst>
+              <a:ext uri="{FF2B5EF4-FFF2-40B4-BE49-F238E27FC236}">
+                <a16:creationId xmlns:a16="http://schemas.microsoft.com/office/drawing/2014/main" id="{F9C84B06-3C3A-A31C-FA40-47A33CAEECF2}"/>
+              </a:ext>
+            </a:extLst>
+          </p:cNvPr>
+          <p:cNvSpPr>
+            <a:spLocks noGrp="1"/>
+          </p:cNvSpPr>
+          <p:nvPr>
+            <p:ph sz="half" idx="2"/>
+          </p:nvPr>
+        </p:nvSpPr>
+        <p:spPr/>
+        <p:txBody>
+          <a:bodyPr/>
+          <a:lstStyle/>
+          <a:p>
+            <a:endParaRPr lang="da-DK"/>
+          </a:p>
+        </p:txBody>
+      </p:sp>
+    </p:spTree>
+    <p:extLst>
+      <p:ext uri="{BB962C8B-B14F-4D97-AF65-F5344CB8AC3E}">
+        <p14:creationId xmlns:p14="http://schemas.microsoft.com/office/powerpoint/2010/main" val="3197318811"/>
+      </p:ext>
+    </p:extLst>
+  </p:cSld>
+  <p:clrMapOvr>
+    <a:masterClrMapping/>
+  </p:clrMapOvr>
+</p:sld>
+</file>
+
+<file path=ppt/slides/slide6.xml><?xml version="1.0" encoding="utf-8"?>
+<p:sld xmlns:a="http://schemas.openxmlformats.org/drawingml/2006/main" xmlns:r="http://schemas.openxmlformats.org/officeDocument/2006/relationships" xmlns:p="http://schemas.openxmlformats.org/presentationml/2006/main">
+  <p:cSld>
+    <p:spTree>
+      <p:nvGrpSpPr>
+        <p:cNvPr id="1" name=""/>
+        <p:cNvGrpSpPr/>
+        <p:nvPr/>
+      </p:nvGrpSpPr>
+      <p:grpSpPr>
+        <a:xfrm>
+          <a:off x="0" y="0"/>
+          <a:ext cx="0" cy="0"/>
+          <a:chOff x="0" y="0"/>
+          <a:chExt cx="0" cy="0"/>
+        </a:xfrm>
+      </p:grpSpPr>
+      <p:sp>
+        <p:nvSpPr>
+          <p:cNvPr id="2" name="Titel 1">
+            <a:extLst>
+              <a:ext uri="{FF2B5EF4-FFF2-40B4-BE49-F238E27FC236}">
+                <a16:creationId xmlns:a16="http://schemas.microsoft.com/office/drawing/2014/main" id="{B726AEE8-C798-4136-E025-F1A260436E52}"/>
+              </a:ext>
+            </a:extLst>
+          </p:cNvPr>
+          <p:cNvSpPr>
+            <a:spLocks noGrp="1"/>
+          </p:cNvSpPr>
+          <p:nvPr>
+            <p:ph type="title"/>
+          </p:nvPr>
+        </p:nvSpPr>
+        <p:spPr/>
+        <p:txBody>
+          <a:bodyPr/>
+          <a:lstStyle/>
+          <a:p>
+            <a:r>
+              <a:rPr lang="en-DK" noProof="0" dirty="0"/>
+              <a:t>Final Thoughts</a:t>
+            </a:r>
+          </a:p>
+        </p:txBody>
+      </p:sp>
+      <p:sp>
+        <p:nvSpPr>
+          <p:cNvPr id="3" name="Pladsholder til indhold 2">
+            <a:extLst>
+              <a:ext uri="{FF2B5EF4-FFF2-40B4-BE49-F238E27FC236}">
+                <a16:creationId xmlns:a16="http://schemas.microsoft.com/office/drawing/2014/main" id="{726D3CD8-F4EE-27A8-6FFC-51B30ACA61B1}"/>
+              </a:ext>
+            </a:extLst>
+          </p:cNvPr>
+          <p:cNvSpPr>
+            <a:spLocks noGrp="1"/>
+          </p:cNvSpPr>
+          <p:nvPr>
+            <p:ph sz="half" idx="1"/>
+          </p:nvPr>
+        </p:nvSpPr>
+        <p:spPr/>
+        <p:txBody>
+          <a:bodyPr/>
+          <a:lstStyle/>
+          <a:p>
+            <a:r>
+              <a:rPr lang="en-DK" noProof="0" dirty="0"/>
+              <a:t>Think it’s been pretty good overall</a:t>
+            </a:r>
+          </a:p>
+          <a:p>
+            <a:r>
+              <a:rPr lang="en-DK" noProof="0" dirty="0"/>
+              <a:t>Wished I could go back and improve the bits I know aren’t ideal</a:t>
+            </a:r>
+          </a:p>
+        </p:txBody>
+      </p:sp>
+      <p:sp>
+        <p:nvSpPr>
+          <p:cNvPr id="4" name="Pladsholder til indhold 3">
+            <a:extLst>
+              <a:ext uri="{FF2B5EF4-FFF2-40B4-BE49-F238E27FC236}">
+                <a16:creationId xmlns:a16="http://schemas.microsoft.com/office/drawing/2014/main" id="{5C2531A8-AFD4-C0F8-51BC-68177D2CD808}"/>
+              </a:ext>
+            </a:extLst>
+          </p:cNvPr>
+          <p:cNvSpPr>
+            <a:spLocks noGrp="1"/>
+          </p:cNvSpPr>
+          <p:nvPr>
+            <p:ph sz="half" idx="2"/>
+          </p:nvPr>
+        </p:nvSpPr>
+        <p:spPr/>
+        <p:txBody>
+          <a:bodyPr/>
+          <a:lstStyle/>
+          <a:p>
+            <a:endParaRPr lang="da-DK"/>
+          </a:p>
+        </p:txBody>
+      </p:sp>
+    </p:spTree>
+    <p:extLst>
+      <p:ext uri="{BB962C8B-B14F-4D97-AF65-F5344CB8AC3E}">
+        <p14:creationId xmlns:p14="http://schemas.microsoft.com/office/powerpoint/2010/main" val="627090686"/>
+      </p:ext>
+    </p:extLst>
+  </p:cSld>
+  <p:clrMapOvr>
+    <a:masterClrMapping/>
+  </p:clrMapOvr>
+</p:sld>
+</file>
+
 <file path=ppt/theme/theme1.xml><?xml version="1.0" encoding="utf-8"?>
+<a:theme xmlns:a="http://schemas.openxmlformats.org/drawingml/2006/main" name="Badge">
+  <a:themeElements>
+    <a:clrScheme name="Badge">
+      <a:dk1>
+        <a:sysClr val="windowText" lastClr="000000"/>
+      </a:dk1>
+      <a:lt1>
+        <a:sysClr val="window" lastClr="FFFFFF"/>
+      </a:lt1>
+      <a:dk2>
+        <a:srgbClr val="2A1A00"/>
+      </a:dk2>
+      <a:lt2>
+        <a:srgbClr val="F3F3F2"/>
+      </a:lt2>
+      <a:accent1>
+        <a:srgbClr val="F8B323"/>
+      </a:accent1>
+      <a:accent2>
+        <a:srgbClr val="656A59"/>
+      </a:accent2>
+      <a:accent3>
+        <a:srgbClr val="46B2B5"/>
+      </a:accent3>
+      <a:accent4>
+        <a:srgbClr val="8CAA7E"/>
+      </a:accent4>
+      <a:accent5>
+        <a:srgbClr val="D36F68"/>
+      </a:accent5>
+      <a:accent6>
+        <a:srgbClr val="826276"/>
+      </a:accent6>
+      <a:hlink>
+        <a:srgbClr val="46B2B5"/>
+      </a:hlink>
+      <a:folHlink>
+        <a:srgbClr val="A46694"/>
+      </a:folHlink>
+    </a:clrScheme>
+    <a:fontScheme name="Badge">
+      <a:majorFont>
+        <a:latin typeface="Impact" panose="020B0806030902050204"/>
+        <a:ea typeface=""/>
+        <a:cs typeface=""/>
+        <a:font script="Jpan" typeface="メイリオ"/>
+        <a:font script="Hang" typeface="맑은 고딕"/>
+        <a:font script="Hans" typeface="宋体"/>
+        <a:font script="Hant" typeface="新細明體"/>
+        <a:font script="Arab" typeface="Arial"/>
+        <a:font script="Hebr" typeface="Arial"/>
+        <a:font script="Thai" typeface="Cordia New"/>
+        <a:font script="Ethi" typeface="Nyala"/>
+        <a:font script="Beng" typeface="Vrinda"/>
+        <a:font script="Gujr" typeface="Shruti"/>
+        <a:font script="Khmr" typeface="DaunPenh"/>
+        <a:font script="Knda" typeface="Tunga"/>
+        <a:font script="Guru" typeface="Raavi"/>
+        <a:font script="Cans" typeface="Euphemia"/>
+        <a:font script="Cher" typeface="Plantagenet Cherokee"/>
+        <a:font script="Yiii" typeface="Microsoft Yi Baiti"/>
+        <a:font script="Tibt" typeface="Microsoft Himalaya"/>
+        <a:font script="Thaa" typeface="MV Boli"/>
+        <a:font script="Deva" typeface="Mangal"/>
+        <a:font script="Telu" typeface="Gautami"/>
+        <a:font script="Taml" typeface="Latha"/>
+        <a:font script="Syrc" typeface="Estrangelo Edessa"/>
+        <a:font script="Orya" typeface="Kalinga"/>
+        <a:font script="Mlym" typeface="Kartika"/>
+        <a:font script="Laoo" typeface="DokChampa"/>
+        <a:font script="Sinh" typeface="Iskoola Pota"/>
+        <a:font script="Mong" typeface="Mongolian Baiti"/>
+        <a:font script="Viet" typeface="Arial"/>
+        <a:font script="Uigh" typeface="Microsoft Uighur"/>
+        <a:font script="Geor" typeface="Sylfaen"/>
+      </a:majorFont>
+      <a:minorFont>
+        <a:latin typeface="Gill Sans MT" panose="020B0502020104020203"/>
+        <a:ea typeface=""/>
+        <a:cs typeface=""/>
+        <a:font script="Grek" typeface="Corbel"/>
+        <a:font script="Cyrl" typeface="Corbel"/>
+        <a:font script="Jpan" typeface="メイリオ"/>
+        <a:font script="Hang" typeface="휴먼매직체"/>
+        <a:font script="Hans" typeface="华文中宋"/>
+        <a:font script="Hant" typeface="微軟正黑體"/>
+        <a:font script="Arab" typeface="Majalla UI"/>
+        <a:font script="Hebr" typeface="Arial"/>
+        <a:font script="Thai" typeface="Cordia New"/>
+        <a:font script="Ethi" typeface="Nyala"/>
+        <a:font script="Beng" typeface="Vrinda"/>
+        <a:font script="Gujr" typeface="Shruti"/>
+        <a:font script="Khmr" typeface="DaunPenh"/>
+        <a:font script="Knda" typeface="Tunga"/>
+        <a:font script="Guru" typeface="Raavi"/>
+        <a:font script="Cans" typeface="Euphemia"/>
+        <a:font script="Cher" typeface="Plantagenet Cherokee"/>
+        <a:font script="Yiii" typeface="Microsoft Yi Baiti"/>
+        <a:font script="Tibt" typeface="Microsoft Himalaya"/>
+        <a:font script="Thaa" typeface="MV Boli"/>
+        <a:font script="Deva" typeface="Mangal"/>
+        <a:font script="Telu" typeface="Gautami"/>
+        <a:font script="Taml" typeface="Latha"/>
+        <a:font script="Syrc" typeface="Estrangelo Edessa"/>
+        <a:font script="Orya" typeface="Kalinga"/>
+        <a:font script="Mlym" typeface="Kartika"/>
+        <a:font script="Laoo" typeface="DokChampa"/>
+        <a:font script="Sinh" typeface="Iskoola Pota"/>
+        <a:font script="Mong" typeface="Mongolian Baiti"/>
+        <a:font script="Viet" typeface="Tahoma"/>
+        <a:font script="Uigh" typeface="Microsoft Uighur"/>
+        <a:font script="Geor" typeface="Sylfaen"/>
+      </a:minorFont>
+    </a:fontScheme>
+    <a:fmtScheme name="Badge">
+      <a:fillStyleLst>
+        <a:solidFill>
+          <a:schemeClr val="phClr"/>
+        </a:solidFill>
+        <a:gradFill rotWithShape="1">
+          <a:gsLst>
+            <a:gs pos="0">
+              <a:schemeClr val="phClr">
+                <a:tint val="67000"/>
+                <a:satMod val="105000"/>
+                <a:lumMod val="110000"/>
+              </a:schemeClr>
+            </a:gs>
+            <a:gs pos="50000">
+              <a:schemeClr val="phClr">
+                <a:tint val="73000"/>
+                <a:satMod val="103000"/>
+                <a:lumMod val="105000"/>
+              </a:schemeClr>
+            </a:gs>
+            <a:gs pos="100000">
+              <a:schemeClr val="phClr">
+                <a:tint val="81000"/>
+                <a:satMod val="109000"/>
+                <a:lumMod val="105000"/>
+              </a:schemeClr>
+            </a:gs>
+          </a:gsLst>
+          <a:lin ang="5400000" scaled="0"/>
+        </a:gradFill>
+        <a:gradFill rotWithShape="1">
+          <a:gsLst>
+            <a:gs pos="0">
+              <a:schemeClr val="phClr">
+                <a:tint val="94000"/>
+                <a:satMod val="103000"/>
+                <a:lumMod val="102000"/>
+              </a:schemeClr>
+            </a:gs>
+            <a:gs pos="50000">
+              <a:schemeClr val="phClr">
+                <a:shade val="100000"/>
+                <a:satMod val="110000"/>
+                <a:lumMod val="100000"/>
+              </a:schemeClr>
+            </a:gs>
+            <a:gs pos="100000">
+              <a:schemeClr val="phClr">
+                <a:shade val="78000"/>
+                <a:satMod val="120000"/>
+                <a:lumMod val="99000"/>
+              </a:schemeClr>
+            </a:gs>
+          </a:gsLst>
+          <a:lin ang="5400000" scaled="0"/>
+        </a:gradFill>
+      </a:fillStyleLst>
+      <a:lnStyleLst>
+        <a:ln w="6350" cap="flat" cmpd="sng" algn="in">
+          <a:solidFill>
+            <a:schemeClr val="phClr"/>
+          </a:solidFill>
+          <a:prstDash val="solid"/>
+        </a:ln>
+        <a:ln w="12700" cap="flat" cmpd="sng" algn="in">
+          <a:solidFill>
+            <a:schemeClr val="phClr"/>
+          </a:solidFill>
+          <a:prstDash val="solid"/>
+        </a:ln>
+        <a:ln w="50800" cap="flat" cmpd="sng" algn="in">
+          <a:solidFill>
+            <a:schemeClr val="phClr"/>
+          </a:solidFill>
+          <a:prstDash val="solid"/>
+        </a:ln>
+      </a:lnStyleLst>
+      <a:effectStyleLst>
+        <a:effectStyle>
+          <a:effectLst/>
+        </a:effectStyle>
+        <a:effectStyle>
+          <a:effectLst/>
+        </a:effectStyle>
+        <a:effectStyle>
+          <a:effectLst>
+            <a:outerShdw blurRad="38100" dist="25400" dir="5400000" algn="ctr" rotWithShape="0">
+              <a:srgbClr val="000000">
+                <a:alpha val="25000"/>
+              </a:srgbClr>
+            </a:outerShdw>
+          </a:effectLst>
+        </a:effectStyle>
+      </a:effectStyleLst>
+      <a:bgFillStyleLst>
+        <a:solidFill>
+          <a:schemeClr val="phClr"/>
+        </a:solidFill>
+        <a:solidFill>
+          <a:schemeClr val="phClr">
+            <a:tint val="95000"/>
+            <a:satMod val="170000"/>
+          </a:schemeClr>
+        </a:solidFill>
+        <a:gradFill rotWithShape="1">
+          <a:gsLst>
+            <a:gs pos="0">
+              <a:schemeClr val="phClr">
+                <a:tint val="93000"/>
+                <a:shade val="98000"/>
+                <a:satMod val="150000"/>
+                <a:lumMod val="102000"/>
+              </a:schemeClr>
+            </a:gs>
+            <a:gs pos="50000">
+              <a:schemeClr val="phClr">
+                <a:tint val="98000"/>
+                <a:shade val="90000"/>
+                <a:satMod val="130000"/>
+                <a:lumMod val="103000"/>
+              </a:schemeClr>
+            </a:gs>
+            <a:gs pos="100000">
+              <a:schemeClr val="phClr">
+                <a:shade val="63000"/>
+                <a:satMod val="120000"/>
+              </a:schemeClr>
+            </a:gs>
+          </a:gsLst>
+          <a:lin ang="5400000" scaled="0"/>
+        </a:gradFill>
+      </a:bgFillStyleLst>
+    </a:fmtScheme>
+  </a:themeElements>
+  <a:objectDefaults/>
+  <a:extraClrSchemeLst/>
+  <a:extLst>
+    <a:ext uri="{05A4C25C-085E-4340-85A3-A5531E510DB2}">
+      <thm15:themeFamily xmlns:thm15="http://schemas.microsoft.com/office/thememl/2012/main" name="Badge" id="{71A07785-5930-41D4-9A83-E23602B48E98}" vid="{771EA782-DFA6-45B1-AEA3-661F1715B310}"/>
+    </a:ext>
+  </a:extLst>
+</a:theme>
+</file>
+
+<file path=ppt/theme/theme2.xml><?xml version="1.0" encoding="utf-8"?>
 <a:theme xmlns:a="http://schemas.openxmlformats.org/drawingml/2006/main" name="Office-tema">
   <a:themeElements>
     <a:clrScheme name="Office">

--- a/PizzaSolution Presentation.pptx
+++ b/PizzaSolution Presentation.pptx
@@ -5,15 +5,17 @@
     <p:sldMasterId id="2147483660" r:id="rId1"/>
   </p:sldMasterIdLst>
   <p:notesMasterIdLst>
-    <p:notesMasterId r:id="rId8"/>
+    <p:notesMasterId r:id="rId10"/>
   </p:notesMasterIdLst>
   <p:sldIdLst>
     <p:sldId id="256" r:id="rId2"/>
     <p:sldId id="257" r:id="rId3"/>
-    <p:sldId id="258" r:id="rId4"/>
-    <p:sldId id="259" r:id="rId5"/>
-    <p:sldId id="261" r:id="rId6"/>
-    <p:sldId id="260" r:id="rId7"/>
+    <p:sldId id="262" r:id="rId4"/>
+    <p:sldId id="263" r:id="rId5"/>
+    <p:sldId id="258" r:id="rId6"/>
+    <p:sldId id="259" r:id="rId7"/>
+    <p:sldId id="261" r:id="rId8"/>
+    <p:sldId id="260" r:id="rId9"/>
   </p:sldIdLst>
   <p:sldSz cx="12192000" cy="6858000"/>
   <p:notesSz cx="6858000" cy="9144000"/>
@@ -852,24 +854,186 @@
           <a:lstStyle/>
           <a:p>
             <a:r>
+              <a:rPr lang="da-DK" dirty="0"/>
+              <a:t>Order and </a:t>
+            </a:r>
+            <a:r>
               <a:rPr lang="da-DK" dirty="0" err="1"/>
-              <a:t>Could</a:t>
+              <a:t>recipes</a:t>
             </a:r>
             <a:r>
               <a:rPr lang="da-DK" dirty="0"/>
-              <a:t> have </a:t>
+              <a:t> </a:t>
             </a:r>
             <a:r>
               <a:rPr lang="da-DK" dirty="0" err="1"/>
-              <a:t>one</a:t>
+              <a:t>are</a:t>
             </a:r>
             <a:r>
               <a:rPr lang="da-DK" dirty="0"/>
-              <a:t> for </a:t>
+              <a:t> </a:t>
             </a:r>
             <a:r>
               <a:rPr lang="da-DK" dirty="0" err="1"/>
-              <a:t>HasInsufficientStock</a:t>
+              <a:t>clearly</a:t>
+            </a:r>
+            <a:r>
+              <a:rPr lang="da-DK" dirty="0"/>
+              <a:t> </a:t>
+            </a:r>
+            <a:r>
+              <a:rPr lang="da-DK" dirty="0" err="1"/>
+              <a:t>connected</a:t>
+            </a:r>
+            <a:r>
+              <a:rPr lang="da-DK" dirty="0"/>
+              <a:t>, </a:t>
+            </a:r>
+            <a:r>
+              <a:rPr lang="da-DK" dirty="0" err="1"/>
+              <a:t>yet</a:t>
+            </a:r>
+            <a:r>
+              <a:rPr lang="da-DK" dirty="0"/>
+              <a:t> </a:t>
+            </a:r>
+            <a:r>
+              <a:rPr lang="da-DK" dirty="0" err="1"/>
+              <a:t>they</a:t>
+            </a:r>
+            <a:r>
+              <a:rPr lang="da-DK" dirty="0"/>
+              <a:t> </a:t>
+            </a:r>
+            <a:r>
+              <a:rPr lang="da-DK" dirty="0" err="1"/>
+              <a:t>are</a:t>
+            </a:r>
+            <a:r>
+              <a:rPr lang="da-DK" dirty="0"/>
+              <a:t> </a:t>
+            </a:r>
+            <a:r>
+              <a:rPr lang="da-DK" dirty="0" err="1"/>
+              <a:t>separated</a:t>
+            </a:r>
+            <a:endParaRPr lang="da-DK" dirty="0"/>
+          </a:p>
+        </p:txBody>
+      </p:sp>
+      <p:sp>
+        <p:nvSpPr>
+          <p:cNvPr id="4" name="Pladsholder til slidenummer 3"/>
+          <p:cNvSpPr>
+            <a:spLocks noGrp="1"/>
+          </p:cNvSpPr>
+          <p:nvPr>
+            <p:ph type="sldNum" sz="quarter" idx="5"/>
+          </p:nvPr>
+        </p:nvSpPr>
+        <p:spPr/>
+        <p:txBody>
+          <a:bodyPr/>
+          <a:lstStyle/>
+          <a:p>
+            <a:fld id="{C2B1EF5D-2231-4646-8EED-1BCCADFE16C5}" type="slidenum">
+              <a:rPr lang="da-DK" smtClean="0"/>
+              <a:t>3</a:t>
+            </a:fld>
+            <a:endParaRPr lang="da-DK"/>
+          </a:p>
+        </p:txBody>
+      </p:sp>
+    </p:spTree>
+    <p:extLst>
+      <p:ext uri="{BB962C8B-B14F-4D97-AF65-F5344CB8AC3E}">
+        <p14:creationId xmlns:p14="http://schemas.microsoft.com/office/powerpoint/2010/main" val="2941018283"/>
+      </p:ext>
+    </p:extLst>
+  </p:cSld>
+  <p:clrMapOvr>
+    <a:masterClrMapping/>
+  </p:clrMapOvr>
+</p:notes>
+</file>
+
+<file path=ppt/notesSlides/notesSlide3.xml><?xml version="1.0" encoding="utf-8"?>
+<p:notes xmlns:a="http://schemas.openxmlformats.org/drawingml/2006/main" xmlns:r="http://schemas.openxmlformats.org/officeDocument/2006/relationships" xmlns:p="http://schemas.openxmlformats.org/presentationml/2006/main">
+  <p:cSld>
+    <p:spTree>
+      <p:nvGrpSpPr>
+        <p:cNvPr id="1" name=""/>
+        <p:cNvGrpSpPr/>
+        <p:nvPr/>
+      </p:nvGrpSpPr>
+      <p:grpSpPr>
+        <a:xfrm>
+          <a:off x="0" y="0"/>
+          <a:ext cx="0" cy="0"/>
+          <a:chOff x="0" y="0"/>
+          <a:chExt cx="0" cy="0"/>
+        </a:xfrm>
+      </p:grpSpPr>
+      <p:sp>
+        <p:nvSpPr>
+          <p:cNvPr id="2" name="Pladsholder til slidebillede 1"/>
+          <p:cNvSpPr>
+            <a:spLocks noGrp="1" noRot="1" noChangeAspect="1"/>
+          </p:cNvSpPr>
+          <p:nvPr>
+            <p:ph type="sldImg"/>
+          </p:nvPr>
+        </p:nvSpPr>
+        <p:spPr/>
+      </p:sp>
+      <p:sp>
+        <p:nvSpPr>
+          <p:cNvPr id="3" name="Pladsholder til noter 2"/>
+          <p:cNvSpPr>
+            <a:spLocks noGrp="1"/>
+          </p:cNvSpPr>
+          <p:nvPr>
+            <p:ph type="body" idx="1"/>
+          </p:nvPr>
+        </p:nvSpPr>
+        <p:spPr/>
+        <p:txBody>
+          <a:bodyPr/>
+          <a:lstStyle/>
+          <a:p>
+            <a:r>
+              <a:rPr lang="da-DK" dirty="0"/>
+              <a:t>RIP </a:t>
+            </a:r>
+            <a:r>
+              <a:rPr lang="da-DK" dirty="0" err="1"/>
+              <a:t>me</a:t>
+            </a:r>
+            <a:endParaRPr lang="da-DK" dirty="0"/>
+          </a:p>
+          <a:p>
+            <a:endParaRPr lang="da-DK" dirty="0"/>
+          </a:p>
+          <a:p>
+            <a:r>
+              <a:rPr lang="da-DK" dirty="0" err="1"/>
+              <a:t>Only</a:t>
+            </a:r>
+            <a:r>
+              <a:rPr lang="da-DK" dirty="0"/>
+              <a:t> </a:t>
+            </a:r>
+            <a:r>
+              <a:rPr lang="da-DK" dirty="0" err="1"/>
+              <a:t>stumbled</a:t>
+            </a:r>
+            <a:r>
+              <a:rPr lang="da-DK" dirty="0"/>
+              <a:t> upon </a:t>
+            </a:r>
+            <a:r>
+              <a:rPr lang="da-DK" dirty="0" err="1"/>
+              <a:t>HasEnough</a:t>
             </a:r>
             <a:r>
               <a:rPr lang="da-DK" dirty="0"/>
@@ -877,7 +1041,139 @@
             </a:r>
             <a:r>
               <a:rPr lang="da-DK" dirty="0" err="1"/>
-              <a:t>StockService</a:t>
+              <a:t>some</a:t>
+            </a:r>
+            <a:r>
+              <a:rPr lang="da-DK" dirty="0"/>
+              <a:t> </a:t>
+            </a:r>
+            <a:r>
+              <a:rPr lang="da-DK" dirty="0" err="1"/>
+              <a:t>prewritten</a:t>
+            </a:r>
+            <a:r>
+              <a:rPr lang="da-DK" dirty="0"/>
+              <a:t> test </a:t>
+            </a:r>
+            <a:r>
+              <a:rPr lang="da-DK" dirty="0" err="1"/>
+              <a:t>much</a:t>
+            </a:r>
+            <a:r>
+              <a:rPr lang="da-DK" dirty="0"/>
+              <a:t> </a:t>
+            </a:r>
+            <a:r>
+              <a:rPr lang="da-DK" dirty="0" err="1"/>
+              <a:t>later</a:t>
+            </a:r>
+            <a:endParaRPr lang="da-DK" dirty="0"/>
+          </a:p>
+          <a:p>
+            <a:endParaRPr lang="da-DK" dirty="0"/>
+          </a:p>
+          <a:p>
+            <a:r>
+              <a:rPr lang="da-DK" dirty="0"/>
+              <a:t>Even had </a:t>
+            </a:r>
+            <a:r>
+              <a:rPr lang="da-DK" dirty="0" err="1"/>
+              <a:t>trouble</a:t>
+            </a:r>
+            <a:r>
+              <a:rPr lang="da-DK" dirty="0"/>
+              <a:t> </a:t>
+            </a:r>
+            <a:r>
+              <a:rPr lang="da-DK" dirty="0" err="1"/>
+              <a:t>finding</a:t>
+            </a:r>
+            <a:r>
+              <a:rPr lang="da-DK" dirty="0"/>
+              <a:t> </a:t>
+            </a:r>
+            <a:r>
+              <a:rPr lang="da-DK" dirty="0" err="1"/>
+              <a:t>this</a:t>
+            </a:r>
+            <a:r>
+              <a:rPr lang="da-DK" dirty="0"/>
+              <a:t> file for </a:t>
+            </a:r>
+            <a:r>
+              <a:rPr lang="da-DK" dirty="0" err="1"/>
+              <a:t>this</a:t>
+            </a:r>
+            <a:r>
+              <a:rPr lang="da-DK" dirty="0"/>
+              <a:t> </a:t>
+            </a:r>
+            <a:r>
+              <a:rPr lang="da-DK" dirty="0" err="1"/>
+              <a:t>powerpoint</a:t>
+            </a:r>
+            <a:endParaRPr lang="da-DK" dirty="0"/>
+          </a:p>
+          <a:p>
+            <a:endParaRPr lang="da-DK" dirty="0"/>
+          </a:p>
+          <a:p>
+            <a:r>
+              <a:rPr lang="da-DK" dirty="0"/>
+              <a:t>This is </a:t>
+            </a:r>
+            <a:r>
+              <a:rPr lang="da-DK" dirty="0" err="1"/>
+              <a:t>why</a:t>
+            </a:r>
+            <a:r>
+              <a:rPr lang="da-DK" dirty="0"/>
+              <a:t> </a:t>
+            </a:r>
+            <a:r>
+              <a:rPr lang="da-DK" dirty="0" err="1"/>
+              <a:t>code</a:t>
+            </a:r>
+            <a:r>
+              <a:rPr lang="da-DK" dirty="0"/>
+              <a:t> </a:t>
+            </a:r>
+            <a:r>
+              <a:rPr lang="da-DK" dirty="0" err="1"/>
+              <a:t>documentation</a:t>
+            </a:r>
+            <a:r>
+              <a:rPr lang="da-DK" dirty="0"/>
+              <a:t> </a:t>
+            </a:r>
+            <a:r>
+              <a:rPr lang="da-DK" dirty="0" err="1"/>
+              <a:t>when</a:t>
+            </a:r>
+            <a:r>
+              <a:rPr lang="da-DK" dirty="0"/>
+              <a:t> </a:t>
+            </a:r>
+            <a:r>
+              <a:rPr lang="da-DK" dirty="0" err="1"/>
+              <a:t>handing</a:t>
+            </a:r>
+            <a:r>
+              <a:rPr lang="da-DK" dirty="0"/>
+              <a:t> over </a:t>
+            </a:r>
+            <a:r>
+              <a:rPr lang="da-DK" dirty="0" err="1"/>
+              <a:t>code</a:t>
+            </a:r>
+            <a:r>
+              <a:rPr lang="da-DK" dirty="0"/>
+              <a:t> is so </a:t>
+            </a:r>
+            <a:r>
+              <a:rPr lang="da-DK" dirty="0" err="1"/>
+              <a:t>important</a:t>
             </a:r>
             <a:endParaRPr lang="da-DK" dirty="0"/>
           </a:p>
@@ -900,7 +1196,91 @@
           <a:p>
             <a:fld id="{C2B1EF5D-2231-4646-8EED-1BCCADFE16C5}" type="slidenum">
               <a:rPr lang="da-DK" smtClean="0"/>
-              <a:t>5</a:t>
+              <a:t>4</a:t>
+            </a:fld>
+            <a:endParaRPr lang="da-DK"/>
+          </a:p>
+        </p:txBody>
+      </p:sp>
+    </p:spTree>
+    <p:extLst>
+      <p:ext uri="{BB962C8B-B14F-4D97-AF65-F5344CB8AC3E}">
+        <p14:creationId xmlns:p14="http://schemas.microsoft.com/office/powerpoint/2010/main" val="1391895046"/>
+      </p:ext>
+    </p:extLst>
+  </p:cSld>
+  <p:clrMapOvr>
+    <a:masterClrMapping/>
+  </p:clrMapOvr>
+</p:notes>
+</file>
+
+<file path=ppt/notesSlides/notesSlide4.xml><?xml version="1.0" encoding="utf-8"?>
+<p:notes xmlns:a="http://schemas.openxmlformats.org/drawingml/2006/main" xmlns:r="http://schemas.openxmlformats.org/officeDocument/2006/relationships" xmlns:p="http://schemas.openxmlformats.org/presentationml/2006/main">
+  <p:cSld>
+    <p:spTree>
+      <p:nvGrpSpPr>
+        <p:cNvPr id="1" name=""/>
+        <p:cNvGrpSpPr/>
+        <p:nvPr/>
+      </p:nvGrpSpPr>
+      <p:grpSpPr>
+        <a:xfrm>
+          <a:off x="0" y="0"/>
+          <a:ext cx="0" cy="0"/>
+          <a:chOff x="0" y="0"/>
+          <a:chExt cx="0" cy="0"/>
+        </a:xfrm>
+      </p:grpSpPr>
+      <p:sp>
+        <p:nvSpPr>
+          <p:cNvPr id="2" name="Pladsholder til slidebillede 1"/>
+          <p:cNvSpPr>
+            <a:spLocks noGrp="1" noRot="1" noChangeAspect="1"/>
+          </p:cNvSpPr>
+          <p:nvPr>
+            <p:ph type="sldImg"/>
+          </p:nvPr>
+        </p:nvSpPr>
+        <p:spPr/>
+      </p:sp>
+      <p:sp>
+        <p:nvSpPr>
+          <p:cNvPr id="3" name="Pladsholder til noter 2"/>
+          <p:cNvSpPr>
+            <a:spLocks noGrp="1"/>
+          </p:cNvSpPr>
+          <p:nvPr>
+            <p:ph type="body" idx="1"/>
+          </p:nvPr>
+        </p:nvSpPr>
+        <p:spPr/>
+        <p:txBody>
+          <a:bodyPr/>
+          <a:lstStyle/>
+          <a:p>
+            <a:endParaRPr lang="da-DK" dirty="0"/>
+          </a:p>
+        </p:txBody>
+      </p:sp>
+      <p:sp>
+        <p:nvSpPr>
+          <p:cNvPr id="4" name="Pladsholder til slidenummer 3"/>
+          <p:cNvSpPr>
+            <a:spLocks noGrp="1"/>
+          </p:cNvSpPr>
+          <p:nvPr>
+            <p:ph type="sldNum" sz="quarter" idx="5"/>
+          </p:nvPr>
+        </p:nvSpPr>
+        <p:spPr/>
+        <p:txBody>
+          <a:bodyPr/>
+          <a:lstStyle/>
+          <a:p>
+            <a:fld id="{C2B1EF5D-2231-4646-8EED-1BCCADFE16C5}" type="slidenum">
+              <a:rPr lang="da-DK" smtClean="0"/>
+              <a:t>7</a:t>
             </a:fld>
             <a:endParaRPr lang="da-DK"/>
           </a:p>
@@ -7770,8 +8150,8 @@
         </p:nvSpPr>
         <p:spPr>
           <a:xfrm>
-            <a:off x="1257300" y="1364762"/>
-            <a:ext cx="4800600" cy="4540738"/>
+            <a:off x="1257300" y="1364761"/>
+            <a:ext cx="4800600" cy="5110853"/>
           </a:xfrm>
         </p:spPr>
         <p:txBody>
@@ -7787,13 +8167,6 @@
           <a:p>
             <a:r>
               <a:rPr lang="en-US" dirty="0"/>
-              <a:t>Relationship between order, recipe and stock was confusing</a:t>
-            </a:r>
-            <a:endParaRPr lang="en-US" noProof="0" dirty="0"/>
-          </a:p>
-          <a:p>
-            <a:r>
-              <a:rPr lang="en-US" dirty="0"/>
               <a:t>Getting used to </a:t>
             </a:r>
             <a:r>
@@ -7807,6 +8180,12 @@
           </a:p>
           <a:p>
             <a:r>
+              <a:rPr lang="en-US" dirty="0"/>
+              <a:t>TDD – what I did last project</a:t>
+            </a:r>
+          </a:p>
+          <a:p>
+            <a:r>
               <a:rPr lang="en-US" noProof="0" dirty="0"/>
               <a:t>Codebase lacking in</a:t>
             </a:r>
@@ -7820,7 +8199,19 @@
               <a:rPr lang="en-US" noProof="0" dirty="0"/>
               <a:t>Throwing exceptions for the controller to handle – is that ideal?</a:t>
             </a:r>
-            <a:endParaRPr lang="en-DK" noProof="0" dirty="0"/>
+          </a:p>
+          <a:p>
+            <a:r>
+              <a:rPr lang="en-US" dirty="0"/>
+              <a:t>Use existing methods in the fake repositories and database</a:t>
+            </a:r>
+            <a:endParaRPr lang="en-US" noProof="0" dirty="0"/>
+          </a:p>
+          <a:p>
+            <a:r>
+              <a:rPr lang="en-US" dirty="0"/>
+              <a:t>Relationship between order, recipe and stock was confusing</a:t>
+            </a:r>
           </a:p>
         </p:txBody>
       </p:sp>
@@ -7891,7 +8282,7 @@
           <p:cNvPr id="2" name="Titel 1">
             <a:extLst>
               <a:ext uri="{FF2B5EF4-FFF2-40B4-BE49-F238E27FC236}">
-                <a16:creationId xmlns:a16="http://schemas.microsoft.com/office/drawing/2014/main" id="{34D9E8E1-E657-E332-2B9A-1809FC7466A1}"/>
+                <a16:creationId xmlns:a16="http://schemas.microsoft.com/office/drawing/2014/main" id="{4E9E8CF5-AF2D-79AE-5789-2DF6B25D10CC}"/>
               </a:ext>
             </a:extLst>
           </p:cNvPr>
@@ -7908,9 +8299,10 @@
           <a:lstStyle/>
           <a:p>
             <a:r>
-              <a:rPr lang="en-DK" noProof="0" dirty="0"/>
-              <a:t>Morten’s advice</a:t>
-            </a:r>
+              <a:rPr lang="da-DK" dirty="0" err="1"/>
+              <a:t>HasInsufficientStock</a:t>
+            </a:r>
+            <a:endParaRPr lang="da-DK" dirty="0"/>
           </a:p>
         </p:txBody>
       </p:sp>
@@ -7919,7 +8311,7 @@
           <p:cNvPr id="3" name="Pladsholder til indhold 2">
             <a:extLst>
               <a:ext uri="{FF2B5EF4-FFF2-40B4-BE49-F238E27FC236}">
-                <a16:creationId xmlns:a16="http://schemas.microsoft.com/office/drawing/2014/main" id="{62F9B0A4-6473-B666-2C27-1C3A4D0EB4A0}"/>
+                <a16:creationId xmlns:a16="http://schemas.microsoft.com/office/drawing/2014/main" id="{38CED439-0052-153D-E8ED-E39C30D1CFF2}"/>
               </a:ext>
             </a:extLst>
           </p:cNvPr>
@@ -7935,7 +8327,26 @@
           <a:bodyPr/>
           <a:lstStyle/>
           <a:p>
-            <a:endParaRPr lang="da-DK" dirty="0"/>
+            <a:r>
+              <a:rPr lang="da-DK" dirty="0"/>
+              <a:t>Pictures of the </a:t>
+            </a:r>
+            <a:r>
+              <a:rPr lang="da-DK" dirty="0" err="1"/>
+              <a:t>code</a:t>
+            </a:r>
+            <a:r>
+              <a:rPr lang="da-DK" dirty="0"/>
+              <a:t> in </a:t>
+            </a:r>
+            <a:r>
+              <a:rPr lang="da-DK" dirty="0" err="1"/>
+              <a:t>its</a:t>
+            </a:r>
+            <a:r>
+              <a:rPr lang="da-DK" dirty="0"/>
+              <a:t> final form</a:t>
+            </a:r>
           </a:p>
         </p:txBody>
       </p:sp>
@@ -7944,7 +8355,7 @@
           <p:cNvPr id="4" name="Pladsholder til indhold 3">
             <a:extLst>
               <a:ext uri="{FF2B5EF4-FFF2-40B4-BE49-F238E27FC236}">
-                <a16:creationId xmlns:a16="http://schemas.microsoft.com/office/drawing/2014/main" id="{B75FDCF1-01E1-9778-7CD1-8816D1822B14}"/>
+                <a16:creationId xmlns:a16="http://schemas.microsoft.com/office/drawing/2014/main" id="{41D8DE06-E25F-89B7-2785-302FC80E5F0A}"/>
               </a:ext>
             </a:extLst>
           </p:cNvPr>
@@ -7967,7 +8378,7 @@
     </p:spTree>
     <p:extLst>
       <p:ext uri="{BB962C8B-B14F-4D97-AF65-F5344CB8AC3E}">
-        <p14:creationId xmlns:p14="http://schemas.microsoft.com/office/powerpoint/2010/main" val="4086695093"/>
+        <p14:creationId xmlns:p14="http://schemas.microsoft.com/office/powerpoint/2010/main" val="3504721035"/>
       </p:ext>
     </p:extLst>
   </p:cSld>
@@ -7999,7 +8410,7 @@
           <p:cNvPr id="2" name="Titel 1">
             <a:extLst>
               <a:ext uri="{FF2B5EF4-FFF2-40B4-BE49-F238E27FC236}">
-                <a16:creationId xmlns:a16="http://schemas.microsoft.com/office/drawing/2014/main" id="{16D6FD49-2DB9-5A7C-B33A-EB8FD60B1770}"/>
+                <a16:creationId xmlns:a16="http://schemas.microsoft.com/office/drawing/2014/main" id="{A2A13169-081D-7DBF-D963-FF58FFA71AF4}"/>
               </a:ext>
             </a:extLst>
           </p:cNvPr>
@@ -8015,45 +8426,48 @@
           <a:bodyPr/>
           <a:lstStyle/>
           <a:p>
-            <a:r>
-              <a:rPr lang="en-US" noProof="0" dirty="0"/>
-              <a:t>Later problems/thoughts</a:t>
-            </a:r>
-            <a:endParaRPr lang="en-DK" noProof="0" dirty="0"/>
-          </a:p>
-        </p:txBody>
-      </p:sp>
-      <p:sp>
-        <p:nvSpPr>
-          <p:cNvPr id="3" name="Pladsholder til indhold 2">
+            <a:endParaRPr lang="da-DK"/>
+          </a:p>
+        </p:txBody>
+      </p:sp>
+      <p:pic>
+        <p:nvPicPr>
+          <p:cNvPr id="6" name="Pladsholder til indhold 5">
             <a:extLst>
               <a:ext uri="{FF2B5EF4-FFF2-40B4-BE49-F238E27FC236}">
-                <a16:creationId xmlns:a16="http://schemas.microsoft.com/office/drawing/2014/main" id="{BC1823F3-3FB9-49C5-B880-461F2701AD27}"/>
+                <a16:creationId xmlns:a16="http://schemas.microsoft.com/office/drawing/2014/main" id="{06FD59A4-78E4-8598-C426-83F9643FB619}"/>
               </a:ext>
             </a:extLst>
           </p:cNvPr>
-          <p:cNvSpPr>
-            <a:spLocks noGrp="1"/>
-          </p:cNvSpPr>
+          <p:cNvPicPr>
+            <a:picLocks noGrp="1" noChangeAspect="1"/>
+          </p:cNvPicPr>
           <p:nvPr>
             <p:ph sz="half" idx="1"/>
           </p:nvPr>
-        </p:nvSpPr>
-        <p:spPr/>
-        <p:txBody>
-          <a:bodyPr/>
-          <a:lstStyle/>
-          <a:p>
-            <a:endParaRPr lang="da-DK" dirty="0"/>
-          </a:p>
-        </p:txBody>
-      </p:sp>
+        </p:nvPicPr>
+        <p:blipFill>
+          <a:blip r:embed="rId3"/>
+          <a:stretch>
+            <a:fillRect/>
+          </a:stretch>
+        </p:blipFill>
+        <p:spPr>
+          <a:xfrm>
+            <a:off x="1443148" y="1820413"/>
+            <a:ext cx="9305704" cy="3217173"/>
+          </a:xfrm>
+          <a:prstGeom prst="rect">
+            <a:avLst/>
+          </a:prstGeom>
+        </p:spPr>
+      </p:pic>
       <p:sp>
         <p:nvSpPr>
           <p:cNvPr id="4" name="Pladsholder til indhold 3">
             <a:extLst>
               <a:ext uri="{FF2B5EF4-FFF2-40B4-BE49-F238E27FC236}">
-                <a16:creationId xmlns:a16="http://schemas.microsoft.com/office/drawing/2014/main" id="{47C8E8B0-70D6-0E5E-F1F3-83A2F00EB827}"/>
+                <a16:creationId xmlns:a16="http://schemas.microsoft.com/office/drawing/2014/main" id="{248C94CB-C527-4CFC-5747-C611C827423C}"/>
               </a:ext>
             </a:extLst>
           </p:cNvPr>
@@ -8076,7 +8490,7 @@
     </p:spTree>
     <p:extLst>
       <p:ext uri="{BB962C8B-B14F-4D97-AF65-F5344CB8AC3E}">
-        <p14:creationId xmlns:p14="http://schemas.microsoft.com/office/powerpoint/2010/main" val="1482066582"/>
+        <p14:creationId xmlns:p14="http://schemas.microsoft.com/office/powerpoint/2010/main" val="2059460990"/>
       </p:ext>
     </p:extLst>
   </p:cSld>
@@ -8108,6 +8522,223 @@
           <p:cNvPr id="2" name="Titel 1">
             <a:extLst>
               <a:ext uri="{FF2B5EF4-FFF2-40B4-BE49-F238E27FC236}">
+                <a16:creationId xmlns:a16="http://schemas.microsoft.com/office/drawing/2014/main" id="{34D9E8E1-E657-E332-2B9A-1809FC7466A1}"/>
+              </a:ext>
+            </a:extLst>
+          </p:cNvPr>
+          <p:cNvSpPr>
+            <a:spLocks noGrp="1"/>
+          </p:cNvSpPr>
+          <p:nvPr>
+            <p:ph type="title"/>
+          </p:nvPr>
+        </p:nvSpPr>
+        <p:spPr/>
+        <p:txBody>
+          <a:bodyPr/>
+          <a:lstStyle/>
+          <a:p>
+            <a:r>
+              <a:rPr lang="en-DK" noProof="0" dirty="0"/>
+              <a:t>Morten’s advice</a:t>
+            </a:r>
+          </a:p>
+        </p:txBody>
+      </p:sp>
+      <p:sp>
+        <p:nvSpPr>
+          <p:cNvPr id="3" name="Pladsholder til indhold 2">
+            <a:extLst>
+              <a:ext uri="{FF2B5EF4-FFF2-40B4-BE49-F238E27FC236}">
+                <a16:creationId xmlns:a16="http://schemas.microsoft.com/office/drawing/2014/main" id="{62F9B0A4-6473-B666-2C27-1C3A4D0EB4A0}"/>
+              </a:ext>
+            </a:extLst>
+          </p:cNvPr>
+          <p:cNvSpPr>
+            <a:spLocks noGrp="1"/>
+          </p:cNvSpPr>
+          <p:nvPr>
+            <p:ph sz="half" idx="1"/>
+          </p:nvPr>
+        </p:nvSpPr>
+        <p:spPr/>
+        <p:txBody>
+          <a:bodyPr/>
+          <a:lstStyle/>
+          <a:p>
+            <a:endParaRPr lang="da-DK" dirty="0"/>
+          </a:p>
+        </p:txBody>
+      </p:sp>
+      <p:sp>
+        <p:nvSpPr>
+          <p:cNvPr id="4" name="Pladsholder til indhold 3">
+            <a:extLst>
+              <a:ext uri="{FF2B5EF4-FFF2-40B4-BE49-F238E27FC236}">
+                <a16:creationId xmlns:a16="http://schemas.microsoft.com/office/drawing/2014/main" id="{B75FDCF1-01E1-9778-7CD1-8816D1822B14}"/>
+              </a:ext>
+            </a:extLst>
+          </p:cNvPr>
+          <p:cNvSpPr>
+            <a:spLocks noGrp="1"/>
+          </p:cNvSpPr>
+          <p:nvPr>
+            <p:ph sz="half" idx="2"/>
+          </p:nvPr>
+        </p:nvSpPr>
+        <p:spPr/>
+        <p:txBody>
+          <a:bodyPr/>
+          <a:lstStyle/>
+          <a:p>
+            <a:endParaRPr lang="da-DK"/>
+          </a:p>
+        </p:txBody>
+      </p:sp>
+    </p:spTree>
+    <p:extLst>
+      <p:ext uri="{BB962C8B-B14F-4D97-AF65-F5344CB8AC3E}">
+        <p14:creationId xmlns:p14="http://schemas.microsoft.com/office/powerpoint/2010/main" val="4086695093"/>
+      </p:ext>
+    </p:extLst>
+  </p:cSld>
+  <p:clrMapOvr>
+    <a:masterClrMapping/>
+  </p:clrMapOvr>
+</p:sld>
+</file>
+
+<file path=ppt/slides/slide6.xml><?xml version="1.0" encoding="utf-8"?>
+<p:sld xmlns:a="http://schemas.openxmlformats.org/drawingml/2006/main" xmlns:r="http://schemas.openxmlformats.org/officeDocument/2006/relationships" xmlns:p="http://schemas.openxmlformats.org/presentationml/2006/main">
+  <p:cSld>
+    <p:spTree>
+      <p:nvGrpSpPr>
+        <p:cNvPr id="1" name=""/>
+        <p:cNvGrpSpPr/>
+        <p:nvPr/>
+      </p:nvGrpSpPr>
+      <p:grpSpPr>
+        <a:xfrm>
+          <a:off x="0" y="0"/>
+          <a:ext cx="0" cy="0"/>
+          <a:chOff x="0" y="0"/>
+          <a:chExt cx="0" cy="0"/>
+        </a:xfrm>
+      </p:grpSpPr>
+      <p:sp>
+        <p:nvSpPr>
+          <p:cNvPr id="2" name="Titel 1">
+            <a:extLst>
+              <a:ext uri="{FF2B5EF4-FFF2-40B4-BE49-F238E27FC236}">
+                <a16:creationId xmlns:a16="http://schemas.microsoft.com/office/drawing/2014/main" id="{16D6FD49-2DB9-5A7C-B33A-EB8FD60B1770}"/>
+              </a:ext>
+            </a:extLst>
+          </p:cNvPr>
+          <p:cNvSpPr>
+            <a:spLocks noGrp="1"/>
+          </p:cNvSpPr>
+          <p:nvPr>
+            <p:ph type="title"/>
+          </p:nvPr>
+        </p:nvSpPr>
+        <p:spPr/>
+        <p:txBody>
+          <a:bodyPr/>
+          <a:lstStyle/>
+          <a:p>
+            <a:r>
+              <a:rPr lang="en-US" noProof="0" dirty="0"/>
+              <a:t>Later problems/thoughts</a:t>
+            </a:r>
+            <a:endParaRPr lang="en-DK" noProof="0" dirty="0"/>
+          </a:p>
+        </p:txBody>
+      </p:sp>
+      <p:sp>
+        <p:nvSpPr>
+          <p:cNvPr id="3" name="Pladsholder til indhold 2">
+            <a:extLst>
+              <a:ext uri="{FF2B5EF4-FFF2-40B4-BE49-F238E27FC236}">
+                <a16:creationId xmlns:a16="http://schemas.microsoft.com/office/drawing/2014/main" id="{BC1823F3-3FB9-49C5-B880-461F2701AD27}"/>
+              </a:ext>
+            </a:extLst>
+          </p:cNvPr>
+          <p:cNvSpPr>
+            <a:spLocks noGrp="1"/>
+          </p:cNvSpPr>
+          <p:nvPr>
+            <p:ph sz="half" idx="1"/>
+          </p:nvPr>
+        </p:nvSpPr>
+        <p:spPr/>
+        <p:txBody>
+          <a:bodyPr/>
+          <a:lstStyle/>
+          <a:p>
+            <a:endParaRPr lang="da-DK" dirty="0"/>
+          </a:p>
+        </p:txBody>
+      </p:sp>
+      <p:sp>
+        <p:nvSpPr>
+          <p:cNvPr id="4" name="Pladsholder til indhold 3">
+            <a:extLst>
+              <a:ext uri="{FF2B5EF4-FFF2-40B4-BE49-F238E27FC236}">
+                <a16:creationId xmlns:a16="http://schemas.microsoft.com/office/drawing/2014/main" id="{47C8E8B0-70D6-0E5E-F1F3-83A2F00EB827}"/>
+              </a:ext>
+            </a:extLst>
+          </p:cNvPr>
+          <p:cNvSpPr>
+            <a:spLocks noGrp="1"/>
+          </p:cNvSpPr>
+          <p:nvPr>
+            <p:ph sz="half" idx="2"/>
+          </p:nvPr>
+        </p:nvSpPr>
+        <p:spPr/>
+        <p:txBody>
+          <a:bodyPr/>
+          <a:lstStyle/>
+          <a:p>
+            <a:endParaRPr lang="da-DK"/>
+          </a:p>
+        </p:txBody>
+      </p:sp>
+    </p:spTree>
+    <p:extLst>
+      <p:ext uri="{BB962C8B-B14F-4D97-AF65-F5344CB8AC3E}">
+        <p14:creationId xmlns:p14="http://schemas.microsoft.com/office/powerpoint/2010/main" val="1482066582"/>
+      </p:ext>
+    </p:extLst>
+  </p:cSld>
+  <p:clrMapOvr>
+    <a:masterClrMapping/>
+  </p:clrMapOvr>
+</p:sld>
+</file>
+
+<file path=ppt/slides/slide7.xml><?xml version="1.0" encoding="utf-8"?>
+<p:sld xmlns:a="http://schemas.openxmlformats.org/drawingml/2006/main" xmlns:r="http://schemas.openxmlformats.org/officeDocument/2006/relationships" xmlns:p="http://schemas.openxmlformats.org/presentationml/2006/main">
+  <p:cSld>
+    <p:spTree>
+      <p:nvGrpSpPr>
+        <p:cNvPr id="1" name=""/>
+        <p:cNvGrpSpPr/>
+        <p:nvPr/>
+      </p:nvGrpSpPr>
+      <p:grpSpPr>
+        <a:xfrm>
+          <a:off x="0" y="0"/>
+          <a:ext cx="0" cy="0"/>
+          <a:chOff x="0" y="0"/>
+          <a:chExt cx="0" cy="0"/>
+        </a:xfrm>
+      </p:grpSpPr>
+      <p:sp>
+        <p:nvSpPr>
+          <p:cNvPr id="2" name="Titel 1">
+            <a:extLst>
+              <a:ext uri="{FF2B5EF4-FFF2-40B4-BE49-F238E27FC236}">
                 <a16:creationId xmlns:a16="http://schemas.microsoft.com/office/drawing/2014/main" id="{6ACDFDA2-DBC4-31F5-4D86-13F3D8C2D1E4}"/>
               </a:ext>
             </a:extLst>
@@ -8124,6 +8755,10 @@
           <a:bodyPr/>
           <a:lstStyle/>
           <a:p>
+            <a:r>
+              <a:rPr lang="en-US" noProof="0" dirty="0"/>
+              <a:t>More </a:t>
+            </a:r>
             <a:r>
               <a:rPr lang="en-DK" noProof="0" dirty="0"/>
               <a:t>Interesting code bits</a:t>
@@ -8194,7 +8829,7 @@
 </p:sld>
 </file>
 
-<file path=ppt/slides/slide6.xml><?xml version="1.0" encoding="utf-8"?>
+<file path=ppt/slides/slide8.xml><?xml version="1.0" encoding="utf-8"?>
 <p:sld xmlns:a="http://schemas.openxmlformats.org/drawingml/2006/main" xmlns:r="http://schemas.openxmlformats.org/officeDocument/2006/relationships" xmlns:p="http://schemas.openxmlformats.org/presentationml/2006/main">
   <p:cSld>
     <p:spTree>

--- a/PizzaSolution Presentation.pptx
+++ b/PizzaSolution Presentation.pptx
@@ -8293,7 +8293,12 @@
             <p:ph type="title"/>
           </p:nvPr>
         </p:nvSpPr>
-        <p:spPr/>
+        <p:spPr>
+          <a:xfrm>
+            <a:off x="1006839" y="22786"/>
+            <a:ext cx="10178322" cy="1492132"/>
+          </a:xfrm>
+        </p:spPr>
         <p:txBody>
           <a:bodyPr/>
           <a:lstStyle/>
@@ -8306,75 +8311,100 @@
           </a:p>
         </p:txBody>
       </p:sp>
-      <p:sp>
-        <p:nvSpPr>
-          <p:cNvPr id="3" name="Pladsholder til indhold 2">
+      <p:pic>
+        <p:nvPicPr>
+          <p:cNvPr id="6" name="Pladsholder til indhold 5">
             <a:extLst>
               <a:ext uri="{FF2B5EF4-FFF2-40B4-BE49-F238E27FC236}">
-                <a16:creationId xmlns:a16="http://schemas.microsoft.com/office/drawing/2014/main" id="{38CED439-0052-153D-E8ED-E39C30D1CFF2}"/>
+                <a16:creationId xmlns:a16="http://schemas.microsoft.com/office/drawing/2014/main" id="{7960B9B7-D567-F571-3BA5-13B710D0B6F5}"/>
               </a:ext>
             </a:extLst>
           </p:cNvPr>
-          <p:cNvSpPr>
-            <a:spLocks noGrp="1"/>
-          </p:cNvSpPr>
+          <p:cNvPicPr>
+            <a:picLocks noGrp="1" noChangeAspect="1"/>
+          </p:cNvPicPr>
           <p:nvPr>
             <p:ph sz="half" idx="1"/>
           </p:nvPr>
-        </p:nvSpPr>
-        <p:spPr/>
-        <p:txBody>
-          <a:bodyPr/>
-          <a:lstStyle/>
-          <a:p>
-            <a:r>
-              <a:rPr lang="da-DK" dirty="0"/>
-              <a:t>Pictures of the </a:t>
-            </a:r>
-            <a:r>
-              <a:rPr lang="da-DK" dirty="0" err="1"/>
-              <a:t>code</a:t>
-            </a:r>
-            <a:r>
-              <a:rPr lang="da-DK" dirty="0"/>
-              <a:t> in </a:t>
-            </a:r>
-            <a:r>
-              <a:rPr lang="da-DK" dirty="0" err="1"/>
-              <a:t>its</a:t>
-            </a:r>
-            <a:r>
-              <a:rPr lang="da-DK" dirty="0"/>
-              <a:t> final form</a:t>
-            </a:r>
-          </a:p>
-        </p:txBody>
-      </p:sp>
-      <p:sp>
-        <p:nvSpPr>
-          <p:cNvPr id="4" name="Pladsholder til indhold 3">
+        </p:nvPicPr>
+        <p:blipFill>
+          <a:blip r:embed="rId3"/>
+          <a:stretch>
+            <a:fillRect/>
+          </a:stretch>
+        </p:blipFill>
+        <p:spPr>
+          <a:xfrm>
+            <a:off x="168011" y="768852"/>
+            <a:ext cx="6437254" cy="2150678"/>
+          </a:xfrm>
+          <a:prstGeom prst="rect">
+            <a:avLst/>
+          </a:prstGeom>
+        </p:spPr>
+      </p:pic>
+      <p:pic>
+        <p:nvPicPr>
+          <p:cNvPr id="10" name="Pladsholder til indhold 9">
             <a:extLst>
               <a:ext uri="{FF2B5EF4-FFF2-40B4-BE49-F238E27FC236}">
-                <a16:creationId xmlns:a16="http://schemas.microsoft.com/office/drawing/2014/main" id="{41D8DE06-E25F-89B7-2785-302FC80E5F0A}"/>
+                <a16:creationId xmlns:a16="http://schemas.microsoft.com/office/drawing/2014/main" id="{ABC519E2-208C-36C1-FDD3-1EFEFFB6A9E6}"/>
               </a:ext>
             </a:extLst>
           </p:cNvPr>
-          <p:cNvSpPr>
-            <a:spLocks noGrp="1"/>
-          </p:cNvSpPr>
+          <p:cNvPicPr>
+            <a:picLocks noGrp="1" noChangeAspect="1"/>
+          </p:cNvPicPr>
           <p:nvPr>
             <p:ph sz="half" idx="2"/>
           </p:nvPr>
-        </p:nvSpPr>
-        <p:spPr/>
-        <p:txBody>
-          <a:bodyPr/>
-          <a:lstStyle/>
-          <a:p>
-            <a:endParaRPr lang="da-DK"/>
-          </a:p>
-        </p:txBody>
-      </p:sp>
+        </p:nvPicPr>
+        <p:blipFill>
+          <a:blip r:embed="rId4"/>
+          <a:stretch>
+            <a:fillRect/>
+          </a:stretch>
+        </p:blipFill>
+        <p:spPr>
+          <a:xfrm>
+            <a:off x="6685497" y="825677"/>
+            <a:ext cx="5432075" cy="2037028"/>
+          </a:xfrm>
+          <a:prstGeom prst="rect">
+            <a:avLst/>
+          </a:prstGeom>
+        </p:spPr>
+      </p:pic>
+      <p:pic>
+        <p:nvPicPr>
+          <p:cNvPr id="8" name="Billede 7">
+            <a:extLst>
+              <a:ext uri="{FF2B5EF4-FFF2-40B4-BE49-F238E27FC236}">
+                <a16:creationId xmlns:a16="http://schemas.microsoft.com/office/drawing/2014/main" id="{3F5DBA51-BD90-BD5A-539D-E38EB69C323B}"/>
+              </a:ext>
+            </a:extLst>
+          </p:cNvPr>
+          <p:cNvPicPr>
+            <a:picLocks noChangeAspect="1"/>
+          </p:cNvPicPr>
+          <p:nvPr/>
+        </p:nvPicPr>
+        <p:blipFill>
+          <a:blip r:embed="rId5"/>
+          <a:stretch>
+            <a:fillRect/>
+          </a:stretch>
+        </p:blipFill>
+        <p:spPr>
+          <a:xfrm>
+            <a:off x="2349223" y="3036489"/>
+            <a:ext cx="7493553" cy="3703461"/>
+          </a:xfrm>
+          <a:prstGeom prst="rect">
+            <a:avLst/>
+          </a:prstGeom>
+        </p:spPr>
+      </p:pic>
     </p:spTree>
     <p:extLst>
       <p:ext uri="{BB962C8B-B14F-4D97-AF65-F5344CB8AC3E}">
@@ -8561,12 +8591,39 @@
             <p:ph sz="half" idx="1"/>
           </p:nvPr>
         </p:nvSpPr>
-        <p:spPr/>
+        <p:spPr>
+          <a:xfrm>
+            <a:off x="1257300" y="1339703"/>
+            <a:ext cx="4800600" cy="4565798"/>
+          </a:xfrm>
+        </p:spPr>
         <p:txBody>
           <a:bodyPr/>
           <a:lstStyle/>
           <a:p>
-            <a:endParaRPr lang="da-DK" dirty="0"/>
+            <a:r>
+              <a:rPr lang="en-US" noProof="0" dirty="0"/>
+              <a:t>Ideal code is written so that it doesn’t need comments (so try to write less of them)</a:t>
+            </a:r>
+          </a:p>
+          <a:p>
+            <a:r>
+              <a:rPr lang="en-US" dirty="0"/>
+              <a:t>Perhaps take the time to learn LINQ</a:t>
+            </a:r>
+          </a:p>
+          <a:p>
+            <a:r>
+              <a:rPr lang="en-US" dirty="0"/>
+              <a:t>The giant revolving pizza oven is terrible to implement, so can move on to other stuff if I want</a:t>
+            </a:r>
+          </a:p>
+          <a:p>
+            <a:r>
+              <a:rPr lang="en-US" noProof="0" dirty="0"/>
+              <a:t>The code is meant to make you pull your hair out</a:t>
+            </a:r>
+            <a:endParaRPr lang="en-DK" noProof="0" dirty="0"/>
           </a:p>
         </p:txBody>
       </p:sp>
@@ -8586,12 +8643,48 @@
             <p:ph sz="half" idx="2"/>
           </p:nvPr>
         </p:nvSpPr>
-        <p:spPr/>
+        <p:spPr>
+          <a:xfrm>
+            <a:off x="6647796" y="2892056"/>
+            <a:ext cx="4800600" cy="3583558"/>
+          </a:xfrm>
+        </p:spPr>
         <p:txBody>
           <a:bodyPr/>
           <a:lstStyle/>
           <a:p>
-            <a:endParaRPr lang="da-DK"/>
+            <a:pPr marL="0" indent="0">
+              <a:buNone/>
+            </a:pPr>
+            <a:r>
+              <a:rPr lang="en-DK" b="1" noProof="0" dirty="0"/>
+              <a:t>What I decided after:</a:t>
+            </a:r>
+          </a:p>
+          <a:p>
+            <a:r>
+              <a:rPr lang="en-US" dirty="0"/>
+              <a:t>Making the giant revolving pizza oven pass the tests will take a long time, so would rather focus on other stuff</a:t>
+            </a:r>
+          </a:p>
+          <a:p>
+            <a:r>
+              <a:rPr lang="en-US" dirty="0"/>
+              <a:t>Want to implement the helper functions into my code</a:t>
+            </a:r>
+          </a:p>
+          <a:p>
+            <a:r>
+              <a:rPr lang="en-US" noProof="0" dirty="0"/>
+              <a:t>Want to learn LINQ and get rid of as many foreaches as possible</a:t>
+            </a:r>
+          </a:p>
+          <a:p>
+            <a:r>
+              <a:rPr lang="en-US" dirty="0"/>
+              <a:t>If I have time, add database</a:t>
+            </a:r>
+            <a:endParaRPr lang="en-DK" noProof="0" dirty="0"/>
           </a:p>
         </p:txBody>
       </p:sp>

--- a/PizzaSolution Presentation.pptx
+++ b/PizzaSolution Presentation.pptx
@@ -8598,7 +8598,9 @@
           </a:xfrm>
         </p:spPr>
         <p:txBody>
-          <a:bodyPr/>
+          <a:bodyPr>
+            <a:normAutofit/>
+          </a:bodyPr>
           <a:lstStyle/>
           <a:p>
             <a:r>
@@ -8645,12 +8647,14 @@
         </p:nvSpPr>
         <p:spPr>
           <a:xfrm>
-            <a:off x="6647796" y="2892056"/>
-            <a:ext cx="4800600" cy="3583558"/>
+            <a:off x="6647796" y="2689412"/>
+            <a:ext cx="4800600" cy="3969572"/>
           </a:xfrm>
         </p:spPr>
         <p:txBody>
-          <a:bodyPr/>
+          <a:bodyPr>
+            <a:normAutofit/>
+          </a:bodyPr>
           <a:lstStyle/>
           <a:p>
             <a:pPr marL="0" indent="0">
@@ -8677,6 +8681,12 @@
             <a:r>
               <a:rPr lang="en-US" noProof="0" dirty="0"/>
               <a:t>Want to learn LINQ and get rid of as many foreaches as possible</a:t>
+            </a:r>
+          </a:p>
+          <a:p>
+            <a:r>
+              <a:rPr lang="en-US" noProof="0" dirty="0"/>
+              <a:t>Maybe get back to the oven</a:t>
             </a:r>
           </a:p>
           <a:p>

--- a/PizzaSolution Presentation.pptx
+++ b/PizzaSolution Presentation.pptx
@@ -5,7 +5,7 @@
     <p:sldMasterId id="2147483660" r:id="rId1"/>
   </p:sldMasterIdLst>
   <p:notesMasterIdLst>
-    <p:notesMasterId r:id="rId10"/>
+    <p:notesMasterId r:id="rId11"/>
   </p:notesMasterIdLst>
   <p:sldIdLst>
     <p:sldId id="256" r:id="rId2"/>
@@ -13,9 +13,10 @@
     <p:sldId id="262" r:id="rId4"/>
     <p:sldId id="263" r:id="rId5"/>
     <p:sldId id="258" r:id="rId6"/>
-    <p:sldId id="259" r:id="rId7"/>
-    <p:sldId id="261" r:id="rId8"/>
-    <p:sldId id="260" r:id="rId9"/>
+    <p:sldId id="264" r:id="rId7"/>
+    <p:sldId id="259" r:id="rId8"/>
+    <p:sldId id="261" r:id="rId9"/>
+    <p:sldId id="260" r:id="rId10"/>
   </p:sldIdLst>
   <p:sldSz cx="12192000" cy="6858000"/>
   <p:notesSz cx="6858000" cy="9144000"/>
@@ -204,7 +205,7 @@
           <a:p>
             <a:fld id="{0F1AA9B0-0C32-482B-B713-D8137480A8FA}" type="datetimeFigureOut">
               <a:rPr lang="da-DK" smtClean="0"/>
-              <a:t>20-03-2026</a:t>
+              <a:t>23-03-2026</a:t>
             </a:fld>
             <a:endParaRPr lang="da-DK"/>
           </a:p>
@@ -1259,7 +1260,482 @@
           <a:bodyPr/>
           <a:lstStyle/>
           <a:p>
-            <a:endParaRPr lang="da-DK" dirty="0"/>
+            <a:pPr marL="0" marR="0" lvl="0" indent="0" algn="l" defTabSz="914400" rtl="0" eaLnBrk="1" fontAlgn="auto" latinLnBrk="0" hangingPunct="1">
+              <a:lnSpc>
+                <a:spcPct val="100000"/>
+              </a:lnSpc>
+              <a:spcBef>
+                <a:spcPts val="0"/>
+              </a:spcBef>
+              <a:spcAft>
+                <a:spcPts val="0"/>
+              </a:spcAft>
+              <a:buClrTx/>
+              <a:buSzTx/>
+              <a:buFontTx/>
+              <a:buNone/>
+              <a:tabLst/>
+              <a:defRPr/>
+            </a:pPr>
+            <a:r>
+              <a:rPr lang="en-US" dirty="0"/>
+              <a:t>Using the helper functions was worse for </a:t>
+            </a:r>
+            <a:r>
+              <a:rPr lang="en-US" dirty="0" err="1"/>
+              <a:t>GetSufficientStock</a:t>
+            </a:r>
+            <a:r>
+              <a:rPr lang="en-US" dirty="0"/>
+              <a:t> and my helper function </a:t>
+            </a:r>
+            <a:r>
+              <a:rPr lang="en-US" dirty="0" err="1"/>
+              <a:t>GetRecipeTypeAmountsInOrder</a:t>
+            </a:r>
+            <a:r>
+              <a:rPr lang="en-US" dirty="0"/>
+              <a:t>:</a:t>
+            </a:r>
+          </a:p>
+          <a:p>
+            <a:pPr marL="171450" marR="0" lvl="0" indent="-171450" algn="l" defTabSz="914400" rtl="0" eaLnBrk="1" fontAlgn="auto" latinLnBrk="0" hangingPunct="1">
+              <a:lnSpc>
+                <a:spcPct val="100000"/>
+              </a:lnSpc>
+              <a:spcBef>
+                <a:spcPts val="0"/>
+              </a:spcBef>
+              <a:spcAft>
+                <a:spcPts val="0"/>
+              </a:spcAft>
+              <a:buClrTx/>
+              <a:buSzTx/>
+              <a:buFontTx/>
+              <a:buChar char="-"/>
+              <a:tabLst/>
+              <a:defRPr/>
+            </a:pPr>
+            <a:r>
+              <a:rPr lang="da-DK" dirty="0" err="1"/>
+              <a:t>When</a:t>
+            </a:r>
+            <a:r>
+              <a:rPr lang="da-DK" dirty="0"/>
+              <a:t> </a:t>
+            </a:r>
+            <a:r>
+              <a:rPr lang="da-DK" dirty="0" err="1"/>
+              <a:t>trying</a:t>
+            </a:r>
+            <a:r>
+              <a:rPr lang="da-DK" dirty="0"/>
+              <a:t> to give </a:t>
+            </a:r>
+            <a:r>
+              <a:rPr lang="en-US" dirty="0" err="1"/>
+              <a:t>GetRecipeTypeAmountsInOrder</a:t>
+            </a:r>
+            <a:r>
+              <a:rPr lang="en-US" dirty="0"/>
+              <a:t> the </a:t>
+            </a:r>
+            <a:r>
+              <a:rPr lang="en-US" sz="1200" kern="1200" dirty="0" err="1">
+                <a:solidFill>
+                  <a:schemeClr val="tx1"/>
+                </a:solidFill>
+                <a:effectLst/>
+                <a:latin typeface="+mn-lt"/>
+                <a:ea typeface="+mn-ea"/>
+                <a:cs typeface="+mn-cs"/>
+              </a:rPr>
+              <a:t>GatherSameTypeOfStock</a:t>
+            </a:r>
+            <a:r>
+              <a:rPr lang="en-US" sz="1200" kern="1200" dirty="0">
+                <a:solidFill>
+                  <a:schemeClr val="tx1"/>
+                </a:solidFill>
+                <a:effectLst/>
+                <a:latin typeface="+mn-lt"/>
+                <a:ea typeface="+mn-ea"/>
+                <a:cs typeface="+mn-cs"/>
+              </a:rPr>
+              <a:t>-method from </a:t>
+            </a:r>
+            <a:r>
+              <a:rPr lang="da-DK" dirty="0" err="1"/>
+              <a:t>PizzaHelperExtensions</a:t>
+            </a:r>
+            <a:r>
+              <a:rPr lang="da-DK" dirty="0"/>
+              <a:t>, I </a:t>
+            </a:r>
+            <a:r>
+              <a:rPr lang="da-DK" dirty="0" err="1"/>
+              <a:t>ended</a:t>
+            </a:r>
+            <a:r>
+              <a:rPr lang="da-DK" dirty="0"/>
+              <a:t> up with a </a:t>
+            </a:r>
+            <a:r>
+              <a:rPr lang="da-DK" dirty="0" err="1"/>
+              <a:t>triple-nested</a:t>
+            </a:r>
+            <a:r>
+              <a:rPr lang="da-DK" dirty="0"/>
+              <a:t> </a:t>
+            </a:r>
+            <a:r>
+              <a:rPr lang="da-DK" dirty="0" err="1"/>
+              <a:t>foreach</a:t>
+            </a:r>
+            <a:r>
+              <a:rPr lang="da-DK" dirty="0"/>
+              <a:t> loop </a:t>
+            </a:r>
+            <a:r>
+              <a:rPr lang="da-DK" dirty="0" err="1"/>
+              <a:t>that</a:t>
+            </a:r>
+            <a:r>
+              <a:rPr lang="da-DK" dirty="0"/>
+              <a:t> I had to </a:t>
+            </a:r>
+            <a:r>
+              <a:rPr lang="da-DK" dirty="0" err="1"/>
+              <a:t>turn</a:t>
+            </a:r>
+            <a:r>
+              <a:rPr lang="da-DK" dirty="0"/>
+              <a:t> </a:t>
+            </a:r>
+            <a:r>
+              <a:rPr lang="da-DK" dirty="0" err="1"/>
+              <a:t>into</a:t>
+            </a:r>
+            <a:r>
+              <a:rPr lang="da-DK" dirty="0"/>
+              <a:t> a LINQ. </a:t>
+            </a:r>
+            <a:r>
+              <a:rPr lang="da-DK" dirty="0" err="1"/>
+              <a:t>Which</a:t>
+            </a:r>
+            <a:r>
+              <a:rPr lang="da-DK" dirty="0"/>
+              <a:t> </a:t>
+            </a:r>
+            <a:r>
+              <a:rPr lang="da-DK" dirty="0" err="1"/>
+              <a:t>was</a:t>
+            </a:r>
+            <a:r>
+              <a:rPr lang="da-DK" dirty="0"/>
+              <a:t> </a:t>
+            </a:r>
+            <a:r>
+              <a:rPr lang="da-DK" dirty="0" err="1"/>
+              <a:t>way</a:t>
+            </a:r>
+            <a:r>
+              <a:rPr lang="da-DK" dirty="0"/>
+              <a:t> </a:t>
+            </a:r>
+            <a:r>
+              <a:rPr lang="da-DK" dirty="0" err="1"/>
+              <a:t>less</a:t>
+            </a:r>
+            <a:r>
+              <a:rPr lang="da-DK" dirty="0"/>
+              <a:t> </a:t>
+            </a:r>
+            <a:r>
+              <a:rPr lang="da-DK" dirty="0" err="1"/>
+              <a:t>effective</a:t>
+            </a:r>
+            <a:r>
+              <a:rPr lang="da-DK" dirty="0"/>
+              <a:t> </a:t>
+            </a:r>
+            <a:r>
+              <a:rPr lang="da-DK" dirty="0" err="1"/>
+              <a:t>than</a:t>
+            </a:r>
+            <a:r>
+              <a:rPr lang="da-DK" dirty="0"/>
+              <a:t> the </a:t>
+            </a:r>
+            <a:r>
+              <a:rPr lang="da-DK" dirty="0" err="1"/>
+              <a:t>dictionary</a:t>
+            </a:r>
+            <a:r>
+              <a:rPr lang="da-DK" dirty="0"/>
+              <a:t> I had </a:t>
+            </a:r>
+            <a:r>
+              <a:rPr lang="da-DK" dirty="0" err="1"/>
+              <a:t>already</a:t>
+            </a:r>
+            <a:r>
+              <a:rPr lang="da-DK" dirty="0"/>
+              <a:t> made. And </a:t>
+            </a:r>
+            <a:r>
+              <a:rPr lang="da-DK" dirty="0" err="1"/>
+              <a:t>adding</a:t>
+            </a:r>
+            <a:r>
+              <a:rPr lang="da-DK" dirty="0"/>
+              <a:t> </a:t>
+            </a:r>
+            <a:r>
+              <a:rPr lang="da-DK" dirty="0" err="1"/>
+              <a:t>things</a:t>
+            </a:r>
+            <a:r>
+              <a:rPr lang="da-DK" dirty="0"/>
+              <a:t> to a </a:t>
+            </a:r>
+            <a:r>
+              <a:rPr lang="da-DK" dirty="0" err="1"/>
+              <a:t>dictionary</a:t>
+            </a:r>
+            <a:r>
+              <a:rPr lang="da-DK" dirty="0"/>
+              <a:t> with a LINQ </a:t>
+            </a:r>
+            <a:r>
+              <a:rPr lang="da-DK" dirty="0" err="1"/>
+              <a:t>was</a:t>
+            </a:r>
+            <a:r>
+              <a:rPr lang="da-DK" dirty="0"/>
+              <a:t> </a:t>
+            </a:r>
+            <a:r>
+              <a:rPr lang="da-DK" dirty="0" err="1"/>
+              <a:t>apparently</a:t>
+            </a:r>
+            <a:r>
+              <a:rPr lang="da-DK" dirty="0"/>
+              <a:t> </a:t>
+            </a:r>
+            <a:r>
+              <a:rPr lang="da-DK" dirty="0" err="1"/>
+              <a:t>slower</a:t>
+            </a:r>
+            <a:r>
+              <a:rPr lang="da-DK" dirty="0"/>
+              <a:t> </a:t>
+            </a:r>
+            <a:r>
+              <a:rPr lang="da-DK" dirty="0" err="1"/>
+              <a:t>than</a:t>
+            </a:r>
+            <a:r>
+              <a:rPr lang="da-DK" dirty="0"/>
+              <a:t> just </a:t>
+            </a:r>
+            <a:r>
+              <a:rPr lang="da-DK" dirty="0" err="1"/>
+              <a:t>doing</a:t>
+            </a:r>
+            <a:r>
+              <a:rPr lang="da-DK" dirty="0"/>
+              <a:t> it </a:t>
+            </a:r>
+            <a:r>
+              <a:rPr lang="da-DK" dirty="0" err="1"/>
+              <a:t>normally</a:t>
+            </a:r>
+            <a:r>
+              <a:rPr lang="da-DK" dirty="0"/>
+              <a:t>.</a:t>
+            </a:r>
+          </a:p>
+          <a:p>
+            <a:pPr marL="171450" marR="0" lvl="0" indent="-171450" algn="l" defTabSz="914400" rtl="0" eaLnBrk="1" fontAlgn="auto" latinLnBrk="0" hangingPunct="1">
+              <a:lnSpc>
+                <a:spcPct val="100000"/>
+              </a:lnSpc>
+              <a:spcBef>
+                <a:spcPts val="0"/>
+              </a:spcBef>
+              <a:spcAft>
+                <a:spcPts val="0"/>
+              </a:spcAft>
+              <a:buClrTx/>
+              <a:buSzTx/>
+              <a:buFontTx/>
+              <a:buChar char="-"/>
+              <a:tabLst/>
+              <a:defRPr/>
+            </a:pPr>
+            <a:r>
+              <a:rPr lang="da-DK" dirty="0"/>
+              <a:t>My normal </a:t>
+            </a:r>
+            <a:r>
+              <a:rPr lang="da-DK" dirty="0" err="1"/>
+              <a:t>foreaches</a:t>
+            </a:r>
+            <a:r>
+              <a:rPr lang="da-DK" dirty="0"/>
+              <a:t> </a:t>
+            </a:r>
+            <a:r>
+              <a:rPr lang="da-DK" dirty="0" err="1"/>
+              <a:t>were</a:t>
+            </a:r>
+            <a:r>
+              <a:rPr lang="da-DK" dirty="0"/>
+              <a:t> </a:t>
+            </a:r>
+            <a:r>
+              <a:rPr lang="da-DK" dirty="0" err="1"/>
+              <a:t>better</a:t>
+            </a:r>
+            <a:r>
+              <a:rPr lang="da-DK" dirty="0"/>
+              <a:t> </a:t>
+            </a:r>
+            <a:r>
+              <a:rPr lang="da-DK" dirty="0" err="1"/>
+              <a:t>than</a:t>
+            </a:r>
+            <a:r>
+              <a:rPr lang="da-DK" dirty="0"/>
+              <a:t> the alternative </a:t>
+            </a:r>
+            <a:r>
+              <a:rPr lang="da-DK" dirty="0" err="1"/>
+              <a:t>because</a:t>
+            </a:r>
+            <a:r>
+              <a:rPr lang="da-DK" dirty="0"/>
+              <a:t> in </a:t>
+            </a:r>
+            <a:r>
+              <a:rPr lang="da-DK" dirty="0" err="1"/>
+              <a:t>order</a:t>
+            </a:r>
+            <a:r>
+              <a:rPr lang="da-DK" dirty="0"/>
+              <a:t> to </a:t>
+            </a:r>
+            <a:r>
+              <a:rPr lang="da-DK" dirty="0" err="1"/>
+              <a:t>convert</a:t>
+            </a:r>
+            <a:r>
+              <a:rPr lang="da-DK" dirty="0"/>
+              <a:t> </a:t>
+            </a:r>
+            <a:r>
+              <a:rPr lang="da-DK" dirty="0" err="1"/>
+              <a:t>into</a:t>
+            </a:r>
+            <a:r>
+              <a:rPr lang="da-DK" dirty="0"/>
+              <a:t> the format the </a:t>
+            </a:r>
+            <a:r>
+              <a:rPr lang="da-DK" dirty="0" err="1"/>
+              <a:t>helper</a:t>
+            </a:r>
+            <a:r>
+              <a:rPr lang="da-DK" dirty="0"/>
+              <a:t> </a:t>
+            </a:r>
+            <a:r>
+              <a:rPr lang="da-DK" dirty="0" err="1"/>
+              <a:t>functions</a:t>
+            </a:r>
+            <a:r>
+              <a:rPr lang="da-DK" dirty="0"/>
+              <a:t> </a:t>
+            </a:r>
+            <a:r>
+              <a:rPr lang="da-DK" dirty="0" err="1"/>
+              <a:t>wanted</a:t>
+            </a:r>
+            <a:r>
+              <a:rPr lang="da-DK" dirty="0"/>
+              <a:t>, </a:t>
+            </a:r>
+            <a:r>
+              <a:rPr lang="da-DK" dirty="0" err="1"/>
+              <a:t>foreaches</a:t>
+            </a:r>
+            <a:r>
+              <a:rPr lang="da-DK" dirty="0"/>
+              <a:t> </a:t>
+            </a:r>
+            <a:r>
+              <a:rPr lang="da-DK" dirty="0" err="1"/>
+              <a:t>were</a:t>
+            </a:r>
+            <a:r>
+              <a:rPr lang="da-DK" dirty="0"/>
+              <a:t> </a:t>
+            </a:r>
+            <a:r>
+              <a:rPr lang="da-DK" dirty="0" err="1"/>
+              <a:t>needed</a:t>
+            </a:r>
+            <a:endParaRPr lang="en-US" dirty="0"/>
+          </a:p>
+          <a:p>
+            <a:pPr marL="0" marR="0" lvl="0" indent="0" algn="l" defTabSz="914400" rtl="0" eaLnBrk="1" fontAlgn="auto" latinLnBrk="0" hangingPunct="1">
+              <a:lnSpc>
+                <a:spcPct val="100000"/>
+              </a:lnSpc>
+              <a:spcBef>
+                <a:spcPts val="0"/>
+              </a:spcBef>
+              <a:spcAft>
+                <a:spcPts val="0"/>
+              </a:spcAft>
+              <a:buClrTx/>
+              <a:buSzTx/>
+              <a:buFontTx/>
+              <a:buNone/>
+              <a:tabLst/>
+              <a:defRPr/>
+            </a:pPr>
+            <a:endParaRPr lang="en-US" dirty="0"/>
+          </a:p>
+          <a:p>
+            <a:pPr marL="0" marR="0" lvl="0" indent="0" algn="l" defTabSz="914400" rtl="0" eaLnBrk="1" fontAlgn="auto" latinLnBrk="0" hangingPunct="1">
+              <a:lnSpc>
+                <a:spcPct val="100000"/>
+              </a:lnSpc>
+              <a:spcBef>
+                <a:spcPts val="0"/>
+              </a:spcBef>
+              <a:spcAft>
+                <a:spcPts val="0"/>
+              </a:spcAft>
+              <a:buClrTx/>
+              <a:buSzTx/>
+              <a:buFontTx/>
+              <a:buNone/>
+              <a:tabLst/>
+              <a:defRPr/>
+            </a:pPr>
+            <a:r>
+              <a:rPr lang="en-US" dirty="0"/>
+              <a:t>Really cut down </a:t>
+            </a:r>
+            <a:r>
+              <a:rPr lang="en-US" dirty="0" err="1"/>
+              <a:t>GetStock</a:t>
+            </a:r>
+            <a:endParaRPr lang="en-US" dirty="0"/>
           </a:p>
         </p:txBody>
       </p:sp>
@@ -1280,7 +1756,175 @@
           <a:p>
             <a:fld id="{C2B1EF5D-2231-4646-8EED-1BCCADFE16C5}" type="slidenum">
               <a:rPr lang="da-DK" smtClean="0"/>
+              <a:t>6</a:t>
+            </a:fld>
+            <a:endParaRPr lang="da-DK"/>
+          </a:p>
+        </p:txBody>
+      </p:sp>
+    </p:spTree>
+    <p:extLst>
+      <p:ext uri="{BB962C8B-B14F-4D97-AF65-F5344CB8AC3E}">
+        <p14:creationId xmlns:p14="http://schemas.microsoft.com/office/powerpoint/2010/main" val="16619558"/>
+      </p:ext>
+    </p:extLst>
+  </p:cSld>
+  <p:clrMapOvr>
+    <a:masterClrMapping/>
+  </p:clrMapOvr>
+</p:notes>
+</file>
+
+<file path=ppt/notesSlides/notesSlide5.xml><?xml version="1.0" encoding="utf-8"?>
+<p:notes xmlns:a="http://schemas.openxmlformats.org/drawingml/2006/main" xmlns:r="http://schemas.openxmlformats.org/officeDocument/2006/relationships" xmlns:p="http://schemas.openxmlformats.org/presentationml/2006/main">
+  <p:cSld>
+    <p:spTree>
+      <p:nvGrpSpPr>
+        <p:cNvPr id="1" name=""/>
+        <p:cNvGrpSpPr/>
+        <p:nvPr/>
+      </p:nvGrpSpPr>
+      <p:grpSpPr>
+        <a:xfrm>
+          <a:off x="0" y="0"/>
+          <a:ext cx="0" cy="0"/>
+          <a:chOff x="0" y="0"/>
+          <a:chExt cx="0" cy="0"/>
+        </a:xfrm>
+      </p:grpSpPr>
+      <p:sp>
+        <p:nvSpPr>
+          <p:cNvPr id="2" name="Pladsholder til slidebillede 1"/>
+          <p:cNvSpPr>
+            <a:spLocks noGrp="1" noRot="1" noChangeAspect="1"/>
+          </p:cNvSpPr>
+          <p:nvPr>
+            <p:ph type="sldImg"/>
+          </p:nvPr>
+        </p:nvSpPr>
+        <p:spPr/>
+      </p:sp>
+      <p:sp>
+        <p:nvSpPr>
+          <p:cNvPr id="3" name="Pladsholder til noter 2"/>
+          <p:cNvSpPr>
+            <a:spLocks noGrp="1"/>
+          </p:cNvSpPr>
+          <p:nvPr>
+            <p:ph type="body" idx="1"/>
+          </p:nvPr>
+        </p:nvSpPr>
+        <p:spPr/>
+        <p:txBody>
+          <a:bodyPr/>
+          <a:lstStyle/>
+          <a:p>
+            <a:endParaRPr lang="da-DK" dirty="0"/>
+          </a:p>
+        </p:txBody>
+      </p:sp>
+      <p:sp>
+        <p:nvSpPr>
+          <p:cNvPr id="4" name="Pladsholder til slidenummer 3"/>
+          <p:cNvSpPr>
+            <a:spLocks noGrp="1"/>
+          </p:cNvSpPr>
+          <p:nvPr>
+            <p:ph type="sldNum" sz="quarter" idx="5"/>
+          </p:nvPr>
+        </p:nvSpPr>
+        <p:spPr/>
+        <p:txBody>
+          <a:bodyPr/>
+          <a:lstStyle/>
+          <a:p>
+            <a:fld id="{C2B1EF5D-2231-4646-8EED-1BCCADFE16C5}" type="slidenum">
+              <a:rPr lang="da-DK" smtClean="0"/>
               <a:t>7</a:t>
+            </a:fld>
+            <a:endParaRPr lang="da-DK"/>
+          </a:p>
+        </p:txBody>
+      </p:sp>
+    </p:spTree>
+    <p:extLst>
+      <p:ext uri="{BB962C8B-B14F-4D97-AF65-F5344CB8AC3E}">
+        <p14:creationId xmlns:p14="http://schemas.microsoft.com/office/powerpoint/2010/main" val="3668114257"/>
+      </p:ext>
+    </p:extLst>
+  </p:cSld>
+  <p:clrMapOvr>
+    <a:masterClrMapping/>
+  </p:clrMapOvr>
+</p:notes>
+</file>
+
+<file path=ppt/notesSlides/notesSlide6.xml><?xml version="1.0" encoding="utf-8"?>
+<p:notes xmlns:a="http://schemas.openxmlformats.org/drawingml/2006/main" xmlns:r="http://schemas.openxmlformats.org/officeDocument/2006/relationships" xmlns:p="http://schemas.openxmlformats.org/presentationml/2006/main">
+  <p:cSld>
+    <p:spTree>
+      <p:nvGrpSpPr>
+        <p:cNvPr id="1" name=""/>
+        <p:cNvGrpSpPr/>
+        <p:nvPr/>
+      </p:nvGrpSpPr>
+      <p:grpSpPr>
+        <a:xfrm>
+          <a:off x="0" y="0"/>
+          <a:ext cx="0" cy="0"/>
+          <a:chOff x="0" y="0"/>
+          <a:chExt cx="0" cy="0"/>
+        </a:xfrm>
+      </p:grpSpPr>
+      <p:sp>
+        <p:nvSpPr>
+          <p:cNvPr id="2" name="Pladsholder til slidebillede 1"/>
+          <p:cNvSpPr>
+            <a:spLocks noGrp="1" noRot="1" noChangeAspect="1"/>
+          </p:cNvSpPr>
+          <p:nvPr>
+            <p:ph type="sldImg"/>
+          </p:nvPr>
+        </p:nvSpPr>
+        <p:spPr/>
+      </p:sp>
+      <p:sp>
+        <p:nvSpPr>
+          <p:cNvPr id="3" name="Pladsholder til noter 2"/>
+          <p:cNvSpPr>
+            <a:spLocks noGrp="1"/>
+          </p:cNvSpPr>
+          <p:nvPr>
+            <p:ph type="body" idx="1"/>
+          </p:nvPr>
+        </p:nvSpPr>
+        <p:spPr/>
+        <p:txBody>
+          <a:bodyPr/>
+          <a:lstStyle/>
+          <a:p>
+            <a:endParaRPr lang="da-DK" dirty="0"/>
+          </a:p>
+        </p:txBody>
+      </p:sp>
+      <p:sp>
+        <p:nvSpPr>
+          <p:cNvPr id="4" name="Pladsholder til slidenummer 3"/>
+          <p:cNvSpPr>
+            <a:spLocks noGrp="1"/>
+          </p:cNvSpPr>
+          <p:nvPr>
+            <p:ph type="sldNum" sz="quarter" idx="5"/>
+          </p:nvPr>
+        </p:nvSpPr>
+        <p:spPr/>
+        <p:txBody>
+          <a:bodyPr/>
+          <a:lstStyle/>
+          <a:p>
+            <a:fld id="{C2B1EF5D-2231-4646-8EED-1BCCADFE16C5}" type="slidenum">
+              <a:rPr lang="da-DK" smtClean="0"/>
+              <a:t>8</a:t>
             </a:fld>
             <a:endParaRPr lang="da-DK"/>
           </a:p>
@@ -2510,7 +3154,7 @@
           <a:p>
             <a:fld id="{9F2C61E5-4FB9-4B7B-BFC7-89973F7231D0}" type="datetimeFigureOut">
               <a:rPr lang="da-DK" smtClean="0"/>
-              <a:t>20-03-2026</a:t>
+              <a:t>23-03-2026</a:t>
             </a:fld>
             <a:endParaRPr lang="da-DK"/>
           </a:p>
@@ -2748,7 +3392,7 @@
           <a:p>
             <a:fld id="{9F2C61E5-4FB9-4B7B-BFC7-89973F7231D0}" type="datetimeFigureOut">
               <a:rPr lang="da-DK" smtClean="0"/>
-              <a:t>20-03-2026</a:t>
+              <a:t>23-03-2026</a:t>
             </a:fld>
             <a:endParaRPr lang="da-DK"/>
           </a:p>
@@ -2928,7 +3572,7 @@
           <a:p>
             <a:fld id="{9F2C61E5-4FB9-4B7B-BFC7-89973F7231D0}" type="datetimeFigureOut">
               <a:rPr lang="da-DK" smtClean="0"/>
-              <a:t>20-03-2026</a:t>
+              <a:t>23-03-2026</a:t>
             </a:fld>
             <a:endParaRPr lang="da-DK"/>
           </a:p>
@@ -3098,7 +3742,7 @@
           <a:p>
             <a:fld id="{9F2C61E5-4FB9-4B7B-BFC7-89973F7231D0}" type="datetimeFigureOut">
               <a:rPr lang="da-DK" smtClean="0"/>
-              <a:t>20-03-2026</a:t>
+              <a:t>23-03-2026</a:t>
             </a:fld>
             <a:endParaRPr lang="da-DK"/>
           </a:p>
@@ -3374,7 +4018,7 @@
           <a:p>
             <a:fld id="{9F2C61E5-4FB9-4B7B-BFC7-89973F7231D0}" type="datetimeFigureOut">
               <a:rPr lang="da-DK" smtClean="0"/>
-              <a:t>20-03-2026</a:t>
+              <a:t>23-03-2026</a:t>
             </a:fld>
             <a:endParaRPr lang="da-DK"/>
           </a:p>
@@ -4575,7 +5219,7 @@
           <a:p>
             <a:fld id="{9F2C61E5-4FB9-4B7B-BFC7-89973F7231D0}" type="datetimeFigureOut">
               <a:rPr lang="da-DK" smtClean="0"/>
-              <a:t>20-03-2026</a:t>
+              <a:t>23-03-2026</a:t>
             </a:fld>
             <a:endParaRPr lang="da-DK"/>
           </a:p>
@@ -4965,7 +5609,7 @@
           <a:p>
             <a:fld id="{9F2C61E5-4FB9-4B7B-BFC7-89973F7231D0}" type="datetimeFigureOut">
               <a:rPr lang="da-DK" smtClean="0"/>
-              <a:t>20-03-2026</a:t>
+              <a:t>23-03-2026</a:t>
             </a:fld>
             <a:endParaRPr lang="da-DK"/>
           </a:p>
@@ -5088,7 +5732,7 @@
           <a:p>
             <a:fld id="{9F2C61E5-4FB9-4B7B-BFC7-89973F7231D0}" type="datetimeFigureOut">
               <a:rPr lang="da-DK" smtClean="0"/>
-              <a:t>20-03-2026</a:t>
+              <a:t>23-03-2026</a:t>
             </a:fld>
             <a:endParaRPr lang="da-DK"/>
           </a:p>
@@ -5183,7 +5827,7 @@
           <a:p>
             <a:fld id="{9F2C61E5-4FB9-4B7B-BFC7-89973F7231D0}" type="datetimeFigureOut">
               <a:rPr lang="da-DK" smtClean="0"/>
-              <a:t>20-03-2026</a:t>
+              <a:t>23-03-2026</a:t>
             </a:fld>
             <a:endParaRPr lang="da-DK"/>
           </a:p>
@@ -5946,7 +6590,7 @@
           <a:p>
             <a:fld id="{9F2C61E5-4FB9-4B7B-BFC7-89973F7231D0}" type="datetimeFigureOut">
               <a:rPr lang="da-DK" smtClean="0"/>
-              <a:t>20-03-2026</a:t>
+              <a:t>23-03-2026</a:t>
             </a:fld>
             <a:endParaRPr lang="da-DK"/>
           </a:p>
@@ -6786,7 +7430,7 @@
           <a:p>
             <a:fld id="{9F2C61E5-4FB9-4B7B-BFC7-89973F7231D0}" type="datetimeFigureOut">
               <a:rPr lang="da-DK" smtClean="0"/>
-              <a:t>20-03-2026</a:t>
+              <a:t>23-03-2026</a:t>
             </a:fld>
             <a:endParaRPr lang="da-DK"/>
           </a:p>
@@ -7013,7 +7657,7 @@
           <a:p>
             <a:fld id="{9F2C61E5-4FB9-4B7B-BFC7-89973F7231D0}" type="datetimeFigureOut">
               <a:rPr lang="da-DK" smtClean="0"/>
-              <a:t>20-03-2026</a:t>
+              <a:t>23-03-2026</a:t>
             </a:fld>
             <a:endParaRPr lang="da-DK"/>
           </a:p>
@@ -8305,7 +8949,7 @@
           <a:p>
             <a:r>
               <a:rPr lang="da-DK" dirty="0" err="1"/>
-              <a:t>HasInsufficientStock</a:t>
+              <a:t>StockService</a:t>
             </a:r>
             <a:endParaRPr lang="da-DK" dirty="0"/>
           </a:p>
@@ -8733,7 +9377,7 @@
           <p:cNvPr id="2" name="Titel 1">
             <a:extLst>
               <a:ext uri="{FF2B5EF4-FFF2-40B4-BE49-F238E27FC236}">
-                <a16:creationId xmlns:a16="http://schemas.microsoft.com/office/drawing/2014/main" id="{16D6FD49-2DB9-5A7C-B33A-EB8FD60B1770}"/>
+                <a16:creationId xmlns:a16="http://schemas.microsoft.com/office/drawing/2014/main" id="{995A713E-8C92-130A-61FF-0FD30DFFC80C}"/>
               </a:ext>
             </a:extLst>
           </p:cNvPr>
@@ -8750,19 +9394,22 @@
           <a:lstStyle/>
           <a:p>
             <a:r>
-              <a:rPr lang="en-US" noProof="0" dirty="0"/>
-              <a:t>Later problems/thoughts</a:t>
-            </a:r>
-            <a:endParaRPr lang="en-DK" noProof="0" dirty="0"/>
+              <a:rPr lang="en-US" noProof="0" dirty="0" err="1"/>
+              <a:t>StockService</a:t>
+            </a:r>
+            <a:r>
+              <a:rPr lang="en-DK" noProof="0" dirty="0"/>
+              <a:t> 2.0</a:t>
+            </a:r>
           </a:p>
         </p:txBody>
       </p:sp>
       <p:sp>
         <p:nvSpPr>
-          <p:cNvPr id="3" name="Pladsholder til indhold 2">
+          <p:cNvPr id="4" name="Pladsholder til indhold 3">
             <a:extLst>
               <a:ext uri="{FF2B5EF4-FFF2-40B4-BE49-F238E27FC236}">
-                <a16:creationId xmlns:a16="http://schemas.microsoft.com/office/drawing/2014/main" id="{BC1823F3-3FB9-49C5-B880-461F2701AD27}"/>
+                <a16:creationId xmlns:a16="http://schemas.microsoft.com/office/drawing/2014/main" id="{70A43850-0C58-53C7-4371-E14AF5F231AF}"/>
               </a:ext>
             </a:extLst>
           </p:cNvPr>
@@ -8770,7 +9417,7 @@
             <a:spLocks noGrp="1"/>
           </p:cNvSpPr>
           <p:nvPr>
-            <p:ph sz="half" idx="1"/>
+            <p:ph sz="half" idx="2"/>
           </p:nvPr>
         </p:nvSpPr>
         <p:spPr/>
@@ -8778,45 +9425,248 @@
           <a:bodyPr/>
           <a:lstStyle/>
           <a:p>
-            <a:endParaRPr lang="da-DK" dirty="0"/>
+            <a:endParaRPr lang="da-DK"/>
           </a:p>
         </p:txBody>
       </p:sp>
-      <p:sp>
-        <p:nvSpPr>
-          <p:cNvPr id="4" name="Pladsholder til indhold 3">
+      <p:pic>
+        <p:nvPicPr>
+          <p:cNvPr id="5" name="Pladsholder til indhold 4">
             <a:extLst>
               <a:ext uri="{FF2B5EF4-FFF2-40B4-BE49-F238E27FC236}">
-                <a16:creationId xmlns:a16="http://schemas.microsoft.com/office/drawing/2014/main" id="{47C8E8B0-70D6-0E5E-F1F3-83A2F00EB827}"/>
+                <a16:creationId xmlns:a16="http://schemas.microsoft.com/office/drawing/2014/main" id="{6597DF00-55C1-FC3A-A33B-41C32C64AC8F}"/>
               </a:ext>
             </a:extLst>
           </p:cNvPr>
-          <p:cNvSpPr>
-            <a:spLocks noGrp="1"/>
-          </p:cNvSpPr>
-          <p:nvPr>
-            <p:ph sz="half" idx="2"/>
-          </p:nvPr>
-        </p:nvSpPr>
-        <p:spPr/>
-        <p:txBody>
-          <a:bodyPr/>
-          <a:lstStyle/>
-          <a:p>
-            <a:endParaRPr lang="da-DK"/>
-          </a:p>
-        </p:txBody>
-      </p:sp>
+          <p:cNvPicPr>
+            <a:picLocks noGrp="1" noChangeAspect="1"/>
+          </p:cNvPicPr>
+          <p:nvPr>
+            <p:ph sz="half" idx="1"/>
+          </p:nvPr>
+        </p:nvPicPr>
+        <p:blipFill>
+          <a:blip r:embed="rId3"/>
+          <a:stretch>
+            <a:fillRect/>
+          </a:stretch>
+        </p:blipFill>
+        <p:spPr>
+          <a:xfrm>
+            <a:off x="2780207" y="1177962"/>
+            <a:ext cx="6631585" cy="3277458"/>
+          </a:xfrm>
+          <a:prstGeom prst="rect">
+            <a:avLst/>
+          </a:prstGeom>
+        </p:spPr>
+      </p:pic>
+      <p:pic>
+        <p:nvPicPr>
+          <p:cNvPr id="7" name="Billede 6">
+            <a:extLst>
+              <a:ext uri="{FF2B5EF4-FFF2-40B4-BE49-F238E27FC236}">
+                <a16:creationId xmlns:a16="http://schemas.microsoft.com/office/drawing/2014/main" id="{39800786-4F93-F5D6-AE46-588934001C80}"/>
+              </a:ext>
+            </a:extLst>
+          </p:cNvPr>
+          <p:cNvPicPr>
+            <a:picLocks noChangeAspect="1"/>
+          </p:cNvPicPr>
+          <p:nvPr/>
+        </p:nvPicPr>
+        <p:blipFill>
+          <a:blip r:embed="rId4"/>
+          <a:stretch>
+            <a:fillRect/>
+          </a:stretch>
+        </p:blipFill>
+        <p:spPr>
+          <a:xfrm>
+            <a:off x="1134885" y="4727053"/>
+            <a:ext cx="10411908" cy="1450080"/>
+          </a:xfrm>
+          <a:prstGeom prst="rect">
+            <a:avLst/>
+          </a:prstGeom>
+        </p:spPr>
+      </p:pic>
     </p:spTree>
     <p:extLst>
       <p:ext uri="{BB962C8B-B14F-4D97-AF65-F5344CB8AC3E}">
-        <p14:creationId xmlns:p14="http://schemas.microsoft.com/office/powerpoint/2010/main" val="1482066582"/>
+        <p14:creationId xmlns:p14="http://schemas.microsoft.com/office/powerpoint/2010/main" val="270921356"/>
       </p:ext>
     </p:extLst>
   </p:cSld>
   <p:clrMapOvr>
     <a:masterClrMapping/>
   </p:clrMapOvr>
+  <p:timing>
+    <p:tnLst>
+      <p:par>
+        <p:cTn id="1" dur="indefinite" restart="never" nodeType="tmRoot">
+          <p:childTnLst>
+            <p:seq concurrent="1" nextAc="seek">
+              <p:cTn id="2" dur="indefinite" nodeType="mainSeq">
+                <p:childTnLst>
+                  <p:par>
+                    <p:cTn id="3" fill="hold">
+                      <p:stCondLst>
+                        <p:cond delay="indefinite"/>
+                      </p:stCondLst>
+                      <p:childTnLst>
+                        <p:par>
+                          <p:cTn id="4" fill="hold">
+                            <p:stCondLst>
+                              <p:cond delay="0"/>
+                            </p:stCondLst>
+                            <p:childTnLst>
+                              <p:par>
+                                <p:cTn id="5" presetID="1" presetClass="entr" presetSubtype="0" fill="hold" nodeType="clickEffect">
+                                  <p:stCondLst>
+                                    <p:cond delay="0"/>
+                                  </p:stCondLst>
+                                  <p:childTnLst>
+                                    <p:set>
+                                      <p:cBhvr>
+                                        <p:cTn id="6" dur="1" fill="hold">
+                                          <p:stCondLst>
+                                            <p:cond delay="0"/>
+                                          </p:stCondLst>
+                                        </p:cTn>
+                                        <p:tgtEl>
+                                          <p:spTgt spid="5"/>
+                                        </p:tgtEl>
+                                        <p:attrNameLst>
+                                          <p:attrName>style.visibility</p:attrName>
+                                        </p:attrNameLst>
+                                      </p:cBhvr>
+                                      <p:to>
+                                        <p:strVal val="visible"/>
+                                      </p:to>
+                                    </p:set>
+                                  </p:childTnLst>
+                                </p:cTn>
+                              </p:par>
+                            </p:childTnLst>
+                          </p:cTn>
+                        </p:par>
+                      </p:childTnLst>
+                    </p:cTn>
+                  </p:par>
+                  <p:par>
+                    <p:cTn id="7" fill="hold">
+                      <p:stCondLst>
+                        <p:cond delay="indefinite"/>
+                      </p:stCondLst>
+                      <p:childTnLst>
+                        <p:par>
+                          <p:cTn id="8" fill="hold">
+                            <p:stCondLst>
+                              <p:cond delay="0"/>
+                            </p:stCondLst>
+                            <p:childTnLst>
+                              <p:par>
+                                <p:cTn id="9" presetID="2" presetClass="entr" presetSubtype="8" fill="hold" nodeType="clickEffect">
+                                  <p:stCondLst>
+                                    <p:cond delay="0"/>
+                                  </p:stCondLst>
+                                  <p:childTnLst>
+                                    <p:set>
+                                      <p:cBhvr>
+                                        <p:cTn id="10" dur="1" fill="hold">
+                                          <p:stCondLst>
+                                            <p:cond delay="0"/>
+                                          </p:stCondLst>
+                                        </p:cTn>
+                                        <p:tgtEl>
+                                          <p:spTgt spid="7"/>
+                                        </p:tgtEl>
+                                        <p:attrNameLst>
+                                          <p:attrName>style.visibility</p:attrName>
+                                        </p:attrNameLst>
+                                      </p:cBhvr>
+                                      <p:to>
+                                        <p:strVal val="visible"/>
+                                      </p:to>
+                                    </p:set>
+                                    <p:anim calcmode="lin" valueType="num">
+                                      <p:cBhvr additive="base">
+                                        <p:cTn id="11" dur="500" fill="hold"/>
+                                        <p:tgtEl>
+                                          <p:spTgt spid="7"/>
+                                        </p:tgtEl>
+                                        <p:attrNameLst>
+                                          <p:attrName>ppt_x</p:attrName>
+                                        </p:attrNameLst>
+                                      </p:cBhvr>
+                                      <p:tavLst>
+                                        <p:tav tm="0">
+                                          <p:val>
+                                            <p:strVal val="0-#ppt_w/2"/>
+                                          </p:val>
+                                        </p:tav>
+                                        <p:tav tm="100000">
+                                          <p:val>
+                                            <p:strVal val="#ppt_x"/>
+                                          </p:val>
+                                        </p:tav>
+                                      </p:tavLst>
+                                    </p:anim>
+                                    <p:anim calcmode="lin" valueType="num">
+                                      <p:cBhvr additive="base">
+                                        <p:cTn id="12" dur="500" fill="hold"/>
+                                        <p:tgtEl>
+                                          <p:spTgt spid="7"/>
+                                        </p:tgtEl>
+                                        <p:attrNameLst>
+                                          <p:attrName>ppt_y</p:attrName>
+                                        </p:attrNameLst>
+                                      </p:cBhvr>
+                                      <p:tavLst>
+                                        <p:tav tm="0">
+                                          <p:val>
+                                            <p:strVal val="#ppt_y"/>
+                                          </p:val>
+                                        </p:tav>
+                                        <p:tav tm="100000">
+                                          <p:val>
+                                            <p:strVal val="#ppt_y"/>
+                                          </p:val>
+                                        </p:tav>
+                                      </p:tavLst>
+                                    </p:anim>
+                                  </p:childTnLst>
+                                </p:cTn>
+                              </p:par>
+                            </p:childTnLst>
+                          </p:cTn>
+                        </p:par>
+                      </p:childTnLst>
+                    </p:cTn>
+                  </p:par>
+                </p:childTnLst>
+              </p:cTn>
+              <p:prevCondLst>
+                <p:cond evt="onPrev" delay="0">
+                  <p:tgtEl>
+                    <p:sldTgt/>
+                  </p:tgtEl>
+                </p:cond>
+              </p:prevCondLst>
+              <p:nextCondLst>
+                <p:cond evt="onNext" delay="0">
+                  <p:tgtEl>
+                    <p:sldTgt/>
+                  </p:tgtEl>
+                </p:cond>
+              </p:nextCondLst>
+            </p:seq>
+          </p:childTnLst>
+        </p:cTn>
+      </p:par>
+    </p:tnLst>
+  </p:timing>
 </p:sld>
 </file>
 
@@ -8842,6 +9692,115 @@
           <p:cNvPr id="2" name="Titel 1">
             <a:extLst>
               <a:ext uri="{FF2B5EF4-FFF2-40B4-BE49-F238E27FC236}">
+                <a16:creationId xmlns:a16="http://schemas.microsoft.com/office/drawing/2014/main" id="{16D6FD49-2DB9-5A7C-B33A-EB8FD60B1770}"/>
+              </a:ext>
+            </a:extLst>
+          </p:cNvPr>
+          <p:cNvSpPr>
+            <a:spLocks noGrp="1"/>
+          </p:cNvSpPr>
+          <p:nvPr>
+            <p:ph type="title"/>
+          </p:nvPr>
+        </p:nvSpPr>
+        <p:spPr/>
+        <p:txBody>
+          <a:bodyPr/>
+          <a:lstStyle/>
+          <a:p>
+            <a:r>
+              <a:rPr lang="en-US" noProof="0" dirty="0"/>
+              <a:t>Later problems/thoughts</a:t>
+            </a:r>
+            <a:endParaRPr lang="en-DK" noProof="0" dirty="0"/>
+          </a:p>
+        </p:txBody>
+      </p:sp>
+      <p:sp>
+        <p:nvSpPr>
+          <p:cNvPr id="3" name="Pladsholder til indhold 2">
+            <a:extLst>
+              <a:ext uri="{FF2B5EF4-FFF2-40B4-BE49-F238E27FC236}">
+                <a16:creationId xmlns:a16="http://schemas.microsoft.com/office/drawing/2014/main" id="{BC1823F3-3FB9-49C5-B880-461F2701AD27}"/>
+              </a:ext>
+            </a:extLst>
+          </p:cNvPr>
+          <p:cNvSpPr>
+            <a:spLocks noGrp="1"/>
+          </p:cNvSpPr>
+          <p:nvPr>
+            <p:ph sz="half" idx="1"/>
+          </p:nvPr>
+        </p:nvSpPr>
+        <p:spPr/>
+        <p:txBody>
+          <a:bodyPr/>
+          <a:lstStyle/>
+          <a:p>
+            <a:endParaRPr lang="en-DK" noProof="0" dirty="0"/>
+          </a:p>
+        </p:txBody>
+      </p:sp>
+      <p:sp>
+        <p:nvSpPr>
+          <p:cNvPr id="4" name="Pladsholder til indhold 3">
+            <a:extLst>
+              <a:ext uri="{FF2B5EF4-FFF2-40B4-BE49-F238E27FC236}">
+                <a16:creationId xmlns:a16="http://schemas.microsoft.com/office/drawing/2014/main" id="{47C8E8B0-70D6-0E5E-F1F3-83A2F00EB827}"/>
+              </a:ext>
+            </a:extLst>
+          </p:cNvPr>
+          <p:cNvSpPr>
+            <a:spLocks noGrp="1"/>
+          </p:cNvSpPr>
+          <p:nvPr>
+            <p:ph sz="half" idx="2"/>
+          </p:nvPr>
+        </p:nvSpPr>
+        <p:spPr/>
+        <p:txBody>
+          <a:bodyPr/>
+          <a:lstStyle/>
+          <a:p>
+            <a:endParaRPr lang="da-DK"/>
+          </a:p>
+        </p:txBody>
+      </p:sp>
+    </p:spTree>
+    <p:extLst>
+      <p:ext uri="{BB962C8B-B14F-4D97-AF65-F5344CB8AC3E}">
+        <p14:creationId xmlns:p14="http://schemas.microsoft.com/office/powerpoint/2010/main" val="1482066582"/>
+      </p:ext>
+    </p:extLst>
+  </p:cSld>
+  <p:clrMapOvr>
+    <a:masterClrMapping/>
+  </p:clrMapOvr>
+</p:sld>
+</file>
+
+<file path=ppt/slides/slide8.xml><?xml version="1.0" encoding="utf-8"?>
+<p:sld xmlns:a="http://schemas.openxmlformats.org/drawingml/2006/main" xmlns:r="http://schemas.openxmlformats.org/officeDocument/2006/relationships" xmlns:p="http://schemas.openxmlformats.org/presentationml/2006/main">
+  <p:cSld>
+    <p:spTree>
+      <p:nvGrpSpPr>
+        <p:cNvPr id="1" name=""/>
+        <p:cNvGrpSpPr/>
+        <p:nvPr/>
+      </p:nvGrpSpPr>
+      <p:grpSpPr>
+        <a:xfrm>
+          <a:off x="0" y="0"/>
+          <a:ext cx="0" cy="0"/>
+          <a:chOff x="0" y="0"/>
+          <a:chExt cx="0" cy="0"/>
+        </a:xfrm>
+      </p:grpSpPr>
+      <p:sp>
+        <p:nvSpPr>
+          <p:cNvPr id="2" name="Titel 1">
+            <a:extLst>
+              <a:ext uri="{FF2B5EF4-FFF2-40B4-BE49-F238E27FC236}">
                 <a16:creationId xmlns:a16="http://schemas.microsoft.com/office/drawing/2014/main" id="{6ACDFDA2-DBC4-31F5-4D86-13F3D8C2D1E4}"/>
               </a:ext>
             </a:extLst>
@@ -8932,7 +9891,7 @@
 </p:sld>
 </file>
 
-<file path=ppt/slides/slide8.xml><?xml version="1.0" encoding="utf-8"?>
+<file path=ppt/slides/slide9.xml><?xml version="1.0" encoding="utf-8"?>
 <p:sld xmlns:a="http://schemas.openxmlformats.org/drawingml/2006/main" xmlns:r="http://schemas.openxmlformats.org/officeDocument/2006/relationships" xmlns:p="http://schemas.openxmlformats.org/presentationml/2006/main">
   <p:cSld>
     <p:spTree>

--- a/PizzaSolution Presentation.pptx
+++ b/PizzaSolution Presentation.pptx
@@ -5,7 +5,7 @@
     <p:sldMasterId id="2147483660" r:id="rId1"/>
   </p:sldMasterIdLst>
   <p:notesMasterIdLst>
-    <p:notesMasterId r:id="rId11"/>
+    <p:notesMasterId r:id="rId13"/>
   </p:notesMasterIdLst>
   <p:sldIdLst>
     <p:sldId id="256" r:id="rId2"/>
@@ -15,8 +15,10 @@
     <p:sldId id="258" r:id="rId6"/>
     <p:sldId id="264" r:id="rId7"/>
     <p:sldId id="259" r:id="rId8"/>
-    <p:sldId id="261" r:id="rId9"/>
-    <p:sldId id="260" r:id="rId10"/>
+    <p:sldId id="266" r:id="rId9"/>
+    <p:sldId id="261" r:id="rId10"/>
+    <p:sldId id="260" r:id="rId11"/>
+    <p:sldId id="268" r:id="rId12"/>
   </p:sldIdLst>
   <p:sldSz cx="12192000" cy="6858000"/>
   <p:notesSz cx="6858000" cy="9144000"/>
@@ -205,7 +207,7 @@
           <a:p>
             <a:fld id="{0F1AA9B0-0C32-482B-B713-D8137480A8FA}" type="datetimeFigureOut">
               <a:rPr lang="da-DK" smtClean="0"/>
-              <a:t>23-03-2026</a:t>
+              <a:t>26-03-2026</a:t>
             </a:fld>
             <a:endParaRPr lang="da-DK"/>
           </a:p>
@@ -1260,65 +1262,45 @@
           <a:bodyPr/>
           <a:lstStyle/>
           <a:p>
-            <a:pPr marL="0" marR="0" lvl="0" indent="0" algn="l" defTabSz="914400" rtl="0" eaLnBrk="1" fontAlgn="auto" latinLnBrk="0" hangingPunct="1">
-              <a:lnSpc>
-                <a:spcPct val="100000"/>
-              </a:lnSpc>
-              <a:spcBef>
-                <a:spcPts val="0"/>
-              </a:spcBef>
-              <a:spcAft>
-                <a:spcPts val="0"/>
-              </a:spcAft>
-              <a:buClrTx/>
-              <a:buSzTx/>
-              <a:buFontTx/>
-              <a:buNone/>
-              <a:tabLst/>
-              <a:defRPr/>
-            </a:pPr>
-            <a:r>
-              <a:rPr lang="en-US" dirty="0"/>
-              <a:t>Using the helper functions was worse for </a:t>
-            </a:r>
-            <a:r>
-              <a:rPr lang="en-US" dirty="0" err="1"/>
-              <a:t>GetSufficientStock</a:t>
-            </a:r>
-            <a:r>
-              <a:rPr lang="en-US" dirty="0"/>
-              <a:t> and my helper function </a:t>
-            </a:r>
-            <a:r>
-              <a:rPr lang="en-US" dirty="0" err="1"/>
-              <a:t>GetRecipeTypeAmountsInOrder</a:t>
-            </a:r>
-            <a:r>
-              <a:rPr lang="en-US" dirty="0"/>
-              <a:t>:</a:t>
-            </a:r>
-          </a:p>
-          <a:p>
-            <a:pPr marL="171450" marR="0" lvl="0" indent="-171450" algn="l" defTabSz="914400" rtl="0" eaLnBrk="1" fontAlgn="auto" latinLnBrk="0" hangingPunct="1">
-              <a:lnSpc>
-                <a:spcPct val="100000"/>
-              </a:lnSpc>
-              <a:spcBef>
-                <a:spcPts val="0"/>
-              </a:spcBef>
-              <a:spcAft>
-                <a:spcPts val="0"/>
-              </a:spcAft>
-              <a:buClrTx/>
-              <a:buSzTx/>
-              <a:buFontTx/>
-              <a:buChar char="-"/>
-              <a:tabLst/>
-              <a:defRPr/>
-            </a:pPr>
+            <a:r>
+              <a:rPr lang="da-DK" dirty="0"/>
+              <a:t>Had </a:t>
+            </a:r>
             <a:r>
               <a:rPr lang="da-DK" dirty="0" err="1"/>
-              <a:t>When</a:t>
+              <a:t>reached</a:t>
+            </a:r>
+            <a:r>
+              <a:rPr lang="da-DK" dirty="0"/>
+              <a:t> part 4 of the </a:t>
+            </a:r>
+            <a:r>
+              <a:rPr lang="da-DK" dirty="0" err="1"/>
+              <a:t>assignment</a:t>
+            </a:r>
+            <a:r>
+              <a:rPr lang="da-DK" dirty="0"/>
+              <a:t>, i.e. the </a:t>
+            </a:r>
+            <a:r>
+              <a:rPr lang="da-DK" dirty="0" err="1"/>
+              <a:t>ovens</a:t>
+            </a:r>
+            <a:r>
+              <a:rPr lang="da-DK" dirty="0"/>
+              <a:t>, </a:t>
+            </a:r>
+            <a:r>
+              <a:rPr lang="da-DK" dirty="0" err="1"/>
+              <a:t>when</a:t>
+            </a:r>
+            <a:r>
+              <a:rPr lang="da-DK" dirty="0"/>
+              <a:t> I had </a:t>
+            </a:r>
+            <a:r>
+              <a:rPr lang="da-DK" dirty="0" err="1"/>
+              <a:t>my</a:t>
             </a:r>
             <a:r>
               <a:rPr lang="da-DK" dirty="0"/>
@@ -1326,416 +1308,17 @@
             </a:r>
             <a:r>
               <a:rPr lang="da-DK" dirty="0" err="1"/>
-              <a:t>trying</a:t>
+              <a:t>conversation</a:t>
             </a:r>
             <a:r>
               <a:rPr lang="da-DK" dirty="0"/>
-              <a:t> to give </a:t>
-            </a:r>
-            <a:r>
-              <a:rPr lang="en-US" dirty="0" err="1"/>
-              <a:t>GetRecipeTypeAmountsInOrder</a:t>
-            </a:r>
-            <a:r>
-              <a:rPr lang="en-US" dirty="0"/>
-              <a:t> the </a:t>
-            </a:r>
-            <a:r>
-              <a:rPr lang="en-US" sz="1200" kern="1200" dirty="0" err="1">
-                <a:solidFill>
-                  <a:schemeClr val="tx1"/>
-                </a:solidFill>
-                <a:effectLst/>
-                <a:latin typeface="+mn-lt"/>
-                <a:ea typeface="+mn-ea"/>
-                <a:cs typeface="+mn-cs"/>
-              </a:rPr>
-              <a:t>GatherSameTypeOfStock</a:t>
-            </a:r>
-            <a:r>
-              <a:rPr lang="en-US" sz="1200" kern="1200" dirty="0">
-                <a:solidFill>
-                  <a:schemeClr val="tx1"/>
-                </a:solidFill>
-                <a:effectLst/>
-                <a:latin typeface="+mn-lt"/>
-                <a:ea typeface="+mn-ea"/>
-                <a:cs typeface="+mn-cs"/>
-              </a:rPr>
-              <a:t>-method from </a:t>
+              <a:t> with </a:t>
             </a:r>
             <a:r>
               <a:rPr lang="da-DK" dirty="0" err="1"/>
-              <a:t>PizzaHelperExtensions</a:t>
-            </a:r>
-            <a:r>
-              <a:rPr lang="da-DK" dirty="0"/>
-              <a:t>, I </a:t>
-            </a:r>
-            <a:r>
-              <a:rPr lang="da-DK" dirty="0" err="1"/>
-              <a:t>ended</a:t>
-            </a:r>
-            <a:r>
-              <a:rPr lang="da-DK" dirty="0"/>
-              <a:t> up with a </a:t>
-            </a:r>
-            <a:r>
-              <a:rPr lang="da-DK" dirty="0" err="1"/>
-              <a:t>triple-nested</a:t>
-            </a:r>
-            <a:r>
-              <a:rPr lang="da-DK" dirty="0"/>
-              <a:t> </a:t>
-            </a:r>
-            <a:r>
-              <a:rPr lang="da-DK" dirty="0" err="1"/>
-              <a:t>foreach</a:t>
-            </a:r>
-            <a:r>
-              <a:rPr lang="da-DK" dirty="0"/>
-              <a:t> loop </a:t>
-            </a:r>
-            <a:r>
-              <a:rPr lang="da-DK" dirty="0" err="1"/>
-              <a:t>that</a:t>
-            </a:r>
-            <a:r>
-              <a:rPr lang="da-DK" dirty="0"/>
-              <a:t> I had to </a:t>
-            </a:r>
-            <a:r>
-              <a:rPr lang="da-DK" dirty="0" err="1"/>
-              <a:t>turn</a:t>
-            </a:r>
-            <a:r>
-              <a:rPr lang="da-DK" dirty="0"/>
-              <a:t> </a:t>
-            </a:r>
-            <a:r>
-              <a:rPr lang="da-DK" dirty="0" err="1"/>
-              <a:t>into</a:t>
-            </a:r>
-            <a:r>
-              <a:rPr lang="da-DK" dirty="0"/>
-              <a:t> a LINQ. </a:t>
-            </a:r>
-            <a:r>
-              <a:rPr lang="da-DK" dirty="0" err="1"/>
-              <a:t>Which</a:t>
-            </a:r>
-            <a:r>
-              <a:rPr lang="da-DK" dirty="0"/>
-              <a:t> </a:t>
-            </a:r>
-            <a:r>
-              <a:rPr lang="da-DK" dirty="0" err="1"/>
-              <a:t>was</a:t>
-            </a:r>
-            <a:r>
-              <a:rPr lang="da-DK" dirty="0"/>
-              <a:t> </a:t>
-            </a:r>
-            <a:r>
-              <a:rPr lang="da-DK" dirty="0" err="1"/>
-              <a:t>way</a:t>
-            </a:r>
-            <a:r>
-              <a:rPr lang="da-DK" dirty="0"/>
-              <a:t> </a:t>
-            </a:r>
-            <a:r>
-              <a:rPr lang="da-DK" dirty="0" err="1"/>
-              <a:t>less</a:t>
-            </a:r>
-            <a:r>
-              <a:rPr lang="da-DK" dirty="0"/>
-              <a:t> </a:t>
-            </a:r>
-            <a:r>
-              <a:rPr lang="da-DK" dirty="0" err="1"/>
-              <a:t>effective</a:t>
-            </a:r>
-            <a:r>
-              <a:rPr lang="da-DK" dirty="0"/>
-              <a:t> </a:t>
-            </a:r>
-            <a:r>
-              <a:rPr lang="da-DK" dirty="0" err="1"/>
-              <a:t>than</a:t>
-            </a:r>
-            <a:r>
-              <a:rPr lang="da-DK" dirty="0"/>
-              <a:t> the </a:t>
-            </a:r>
-            <a:r>
-              <a:rPr lang="da-DK" dirty="0" err="1"/>
-              <a:t>dictionary</a:t>
-            </a:r>
-            <a:r>
-              <a:rPr lang="da-DK" dirty="0"/>
-              <a:t> I had </a:t>
-            </a:r>
-            <a:r>
-              <a:rPr lang="da-DK" dirty="0" err="1"/>
-              <a:t>already</a:t>
-            </a:r>
-            <a:r>
-              <a:rPr lang="da-DK" dirty="0"/>
-              <a:t> made. And </a:t>
-            </a:r>
-            <a:r>
-              <a:rPr lang="da-DK" dirty="0" err="1"/>
-              <a:t>adding</a:t>
-            </a:r>
-            <a:r>
-              <a:rPr lang="da-DK" dirty="0"/>
-              <a:t> </a:t>
-            </a:r>
-            <a:r>
-              <a:rPr lang="da-DK" dirty="0" err="1"/>
-              <a:t>things</a:t>
-            </a:r>
-            <a:r>
-              <a:rPr lang="da-DK" dirty="0"/>
-              <a:t> to a </a:t>
-            </a:r>
-            <a:r>
-              <a:rPr lang="da-DK" dirty="0" err="1"/>
-              <a:t>dictionary</a:t>
-            </a:r>
-            <a:r>
-              <a:rPr lang="da-DK" dirty="0"/>
-              <a:t> with a LINQ </a:t>
-            </a:r>
-            <a:r>
-              <a:rPr lang="da-DK" dirty="0" err="1"/>
-              <a:t>was</a:t>
-            </a:r>
-            <a:r>
-              <a:rPr lang="da-DK" dirty="0"/>
-              <a:t> </a:t>
-            </a:r>
-            <a:r>
-              <a:rPr lang="da-DK" dirty="0" err="1"/>
-              <a:t>apparently</a:t>
-            </a:r>
-            <a:r>
-              <a:rPr lang="da-DK" dirty="0"/>
-              <a:t> </a:t>
-            </a:r>
-            <a:r>
-              <a:rPr lang="da-DK" dirty="0" err="1"/>
-              <a:t>slower</a:t>
-            </a:r>
-            <a:r>
-              <a:rPr lang="da-DK" dirty="0"/>
-              <a:t> </a:t>
-            </a:r>
-            <a:r>
-              <a:rPr lang="da-DK" dirty="0" err="1"/>
-              <a:t>than</a:t>
-            </a:r>
-            <a:r>
-              <a:rPr lang="da-DK" dirty="0"/>
-              <a:t> just </a:t>
-            </a:r>
-            <a:r>
-              <a:rPr lang="da-DK" dirty="0" err="1"/>
-              <a:t>doing</a:t>
-            </a:r>
-            <a:r>
-              <a:rPr lang="da-DK" dirty="0"/>
-              <a:t> it </a:t>
-            </a:r>
-            <a:r>
-              <a:rPr lang="da-DK" dirty="0" err="1"/>
-              <a:t>normally</a:t>
-            </a:r>
-            <a:r>
-              <a:rPr lang="da-DK" dirty="0"/>
-              <a:t>.</a:t>
-            </a:r>
-          </a:p>
-          <a:p>
-            <a:pPr marL="171450" marR="0" lvl="0" indent="-171450" algn="l" defTabSz="914400" rtl="0" eaLnBrk="1" fontAlgn="auto" latinLnBrk="0" hangingPunct="1">
-              <a:lnSpc>
-                <a:spcPct val="100000"/>
-              </a:lnSpc>
-              <a:spcBef>
-                <a:spcPts val="0"/>
-              </a:spcBef>
-              <a:spcAft>
-                <a:spcPts val="0"/>
-              </a:spcAft>
-              <a:buClrTx/>
-              <a:buSzTx/>
-              <a:buFontTx/>
-              <a:buChar char="-"/>
-              <a:tabLst/>
-              <a:defRPr/>
-            </a:pPr>
-            <a:r>
-              <a:rPr lang="da-DK" dirty="0"/>
-              <a:t>My normal </a:t>
-            </a:r>
-            <a:r>
-              <a:rPr lang="da-DK" dirty="0" err="1"/>
-              <a:t>foreaches</a:t>
-            </a:r>
-            <a:r>
-              <a:rPr lang="da-DK" dirty="0"/>
-              <a:t> </a:t>
-            </a:r>
-            <a:r>
-              <a:rPr lang="da-DK" dirty="0" err="1"/>
-              <a:t>were</a:t>
-            </a:r>
-            <a:r>
-              <a:rPr lang="da-DK" dirty="0"/>
-              <a:t> </a:t>
-            </a:r>
-            <a:r>
-              <a:rPr lang="da-DK" dirty="0" err="1"/>
-              <a:t>better</a:t>
-            </a:r>
-            <a:r>
-              <a:rPr lang="da-DK" dirty="0"/>
-              <a:t> </a:t>
-            </a:r>
-            <a:r>
-              <a:rPr lang="da-DK" dirty="0" err="1"/>
-              <a:t>than</a:t>
-            </a:r>
-            <a:r>
-              <a:rPr lang="da-DK" dirty="0"/>
-              <a:t> the alternative </a:t>
-            </a:r>
-            <a:r>
-              <a:rPr lang="da-DK" dirty="0" err="1"/>
-              <a:t>because</a:t>
-            </a:r>
-            <a:r>
-              <a:rPr lang="da-DK" dirty="0"/>
-              <a:t> in </a:t>
-            </a:r>
-            <a:r>
-              <a:rPr lang="da-DK" dirty="0" err="1"/>
-              <a:t>order</a:t>
-            </a:r>
-            <a:r>
-              <a:rPr lang="da-DK" dirty="0"/>
-              <a:t> to </a:t>
-            </a:r>
-            <a:r>
-              <a:rPr lang="da-DK" dirty="0" err="1"/>
-              <a:t>convert</a:t>
-            </a:r>
-            <a:r>
-              <a:rPr lang="da-DK" dirty="0"/>
-              <a:t> </a:t>
-            </a:r>
-            <a:r>
-              <a:rPr lang="da-DK" dirty="0" err="1"/>
-              <a:t>into</a:t>
-            </a:r>
-            <a:r>
-              <a:rPr lang="da-DK" dirty="0"/>
-              <a:t> the format the </a:t>
-            </a:r>
-            <a:r>
-              <a:rPr lang="da-DK" dirty="0" err="1"/>
-              <a:t>helper</a:t>
-            </a:r>
-            <a:r>
-              <a:rPr lang="da-DK" dirty="0"/>
-              <a:t> </a:t>
-            </a:r>
-            <a:r>
-              <a:rPr lang="da-DK" dirty="0" err="1"/>
-              <a:t>functions</a:t>
-            </a:r>
-            <a:r>
-              <a:rPr lang="da-DK" dirty="0"/>
-              <a:t> </a:t>
-            </a:r>
-            <a:r>
-              <a:rPr lang="da-DK" dirty="0" err="1"/>
-              <a:t>wanted</a:t>
-            </a:r>
-            <a:r>
-              <a:rPr lang="da-DK" dirty="0"/>
-              <a:t>, </a:t>
-            </a:r>
-            <a:r>
-              <a:rPr lang="da-DK" dirty="0" err="1"/>
-              <a:t>foreaches</a:t>
-            </a:r>
-            <a:r>
-              <a:rPr lang="da-DK" dirty="0"/>
-              <a:t> </a:t>
-            </a:r>
-            <a:r>
-              <a:rPr lang="da-DK" dirty="0" err="1"/>
-              <a:t>were</a:t>
-            </a:r>
-            <a:r>
-              <a:rPr lang="da-DK" dirty="0"/>
-              <a:t> </a:t>
-            </a:r>
-            <a:r>
-              <a:rPr lang="da-DK" dirty="0" err="1"/>
-              <a:t>needed</a:t>
-            </a:r>
-            <a:endParaRPr lang="en-US" dirty="0"/>
-          </a:p>
-          <a:p>
-            <a:pPr marL="0" marR="0" lvl="0" indent="0" algn="l" defTabSz="914400" rtl="0" eaLnBrk="1" fontAlgn="auto" latinLnBrk="0" hangingPunct="1">
-              <a:lnSpc>
-                <a:spcPct val="100000"/>
-              </a:lnSpc>
-              <a:spcBef>
-                <a:spcPts val="0"/>
-              </a:spcBef>
-              <a:spcAft>
-                <a:spcPts val="0"/>
-              </a:spcAft>
-              <a:buClrTx/>
-              <a:buSzTx/>
-              <a:buFontTx/>
-              <a:buNone/>
-              <a:tabLst/>
-              <a:defRPr/>
-            </a:pPr>
-            <a:endParaRPr lang="en-US" dirty="0"/>
-          </a:p>
-          <a:p>
-            <a:pPr marL="0" marR="0" lvl="0" indent="0" algn="l" defTabSz="914400" rtl="0" eaLnBrk="1" fontAlgn="auto" latinLnBrk="0" hangingPunct="1">
-              <a:lnSpc>
-                <a:spcPct val="100000"/>
-              </a:lnSpc>
-              <a:spcBef>
-                <a:spcPts val="0"/>
-              </a:spcBef>
-              <a:spcAft>
-                <a:spcPts val="0"/>
-              </a:spcAft>
-              <a:buClrTx/>
-              <a:buSzTx/>
-              <a:buFontTx/>
-              <a:buNone/>
-              <a:tabLst/>
-              <a:defRPr/>
-            </a:pPr>
-            <a:r>
-              <a:rPr lang="en-US" dirty="0"/>
-              <a:t>Really cut down </a:t>
-            </a:r>
-            <a:r>
-              <a:rPr lang="en-US" dirty="0" err="1"/>
-              <a:t>GetStock</a:t>
-            </a:r>
-            <a:endParaRPr lang="en-US" dirty="0"/>
+              <a:t>him</a:t>
+            </a:r>
+            <a:endParaRPr lang="da-DK" dirty="0"/>
           </a:p>
         </p:txBody>
       </p:sp>
@@ -1756,7 +1339,7 @@
           <a:p>
             <a:fld id="{C2B1EF5D-2231-4646-8EED-1BCCADFE16C5}" type="slidenum">
               <a:rPr lang="da-DK" smtClean="0"/>
-              <a:t>6</a:t>
+              <a:t>5</a:t>
             </a:fld>
             <a:endParaRPr lang="da-DK"/>
           </a:p>
@@ -1765,7 +1348,7 @@
     </p:spTree>
     <p:extLst>
       <p:ext uri="{BB962C8B-B14F-4D97-AF65-F5344CB8AC3E}">
-        <p14:creationId xmlns:p14="http://schemas.microsoft.com/office/powerpoint/2010/main" val="16619558"/>
+        <p14:creationId xmlns:p14="http://schemas.microsoft.com/office/powerpoint/2010/main" val="329431416"/>
       </p:ext>
     </p:extLst>
   </p:cSld>
@@ -1819,7 +1402,525 @@
           <a:bodyPr/>
           <a:lstStyle/>
           <a:p>
-            <a:endParaRPr lang="da-DK" dirty="0"/>
+            <a:pPr marL="0" marR="0" lvl="0" indent="0" algn="l" defTabSz="914400" rtl="0" eaLnBrk="1" fontAlgn="auto" latinLnBrk="0" hangingPunct="1">
+              <a:lnSpc>
+                <a:spcPct val="100000"/>
+              </a:lnSpc>
+              <a:spcBef>
+                <a:spcPts val="0"/>
+              </a:spcBef>
+              <a:spcAft>
+                <a:spcPts val="0"/>
+              </a:spcAft>
+              <a:buClrTx/>
+              <a:buSzTx/>
+              <a:buFontTx/>
+              <a:buNone/>
+              <a:tabLst/>
+              <a:defRPr/>
+            </a:pPr>
+            <a:r>
+              <a:rPr lang="en-US" dirty="0"/>
+              <a:t>Using the helper functions was worse for </a:t>
+            </a:r>
+            <a:r>
+              <a:rPr lang="en-US" dirty="0" err="1"/>
+              <a:t>GetSufficientStock</a:t>
+            </a:r>
+            <a:r>
+              <a:rPr lang="en-US" dirty="0"/>
+              <a:t> and my helper function </a:t>
+            </a:r>
+            <a:r>
+              <a:rPr lang="en-US" dirty="0" err="1"/>
+              <a:t>GetRecipeTypeAmountsInOrder</a:t>
+            </a:r>
+            <a:r>
+              <a:rPr lang="en-US" dirty="0"/>
+              <a:t>:</a:t>
+            </a:r>
+          </a:p>
+          <a:p>
+            <a:pPr marL="171450" marR="0" lvl="0" indent="-171450" algn="l" defTabSz="914400" rtl="0" eaLnBrk="1" fontAlgn="auto" latinLnBrk="0" hangingPunct="1">
+              <a:lnSpc>
+                <a:spcPct val="100000"/>
+              </a:lnSpc>
+              <a:spcBef>
+                <a:spcPts val="0"/>
+              </a:spcBef>
+              <a:spcAft>
+                <a:spcPts val="0"/>
+              </a:spcAft>
+              <a:buClrTx/>
+              <a:buSzTx/>
+              <a:buFontTx/>
+              <a:buChar char="-"/>
+              <a:tabLst/>
+              <a:defRPr/>
+            </a:pPr>
+            <a:r>
+              <a:rPr lang="da-DK" dirty="0" err="1"/>
+              <a:t>When</a:t>
+            </a:r>
+            <a:r>
+              <a:rPr lang="da-DK" dirty="0"/>
+              <a:t> </a:t>
+            </a:r>
+            <a:r>
+              <a:rPr lang="da-DK" dirty="0" err="1"/>
+              <a:t>trying</a:t>
+            </a:r>
+            <a:r>
+              <a:rPr lang="da-DK" dirty="0"/>
+              <a:t> to give </a:t>
+            </a:r>
+            <a:r>
+              <a:rPr lang="en-US" dirty="0" err="1"/>
+              <a:t>GetRecipeTypeAmountsInOrder</a:t>
+            </a:r>
+            <a:r>
+              <a:rPr lang="en-US" dirty="0"/>
+              <a:t> the </a:t>
+            </a:r>
+            <a:r>
+              <a:rPr lang="en-US" sz="1200" kern="1200" dirty="0" err="1">
+                <a:solidFill>
+                  <a:schemeClr val="tx1"/>
+                </a:solidFill>
+                <a:effectLst/>
+                <a:latin typeface="+mn-lt"/>
+                <a:ea typeface="+mn-ea"/>
+                <a:cs typeface="+mn-cs"/>
+              </a:rPr>
+              <a:t>GatherSameTypeOfStock</a:t>
+            </a:r>
+            <a:r>
+              <a:rPr lang="en-US" sz="1200" kern="1200" dirty="0">
+                <a:solidFill>
+                  <a:schemeClr val="tx1"/>
+                </a:solidFill>
+                <a:effectLst/>
+                <a:latin typeface="+mn-lt"/>
+                <a:ea typeface="+mn-ea"/>
+                <a:cs typeface="+mn-cs"/>
+              </a:rPr>
+              <a:t>-method from </a:t>
+            </a:r>
+            <a:r>
+              <a:rPr lang="da-DK" dirty="0" err="1"/>
+              <a:t>PizzaHelperExtensions</a:t>
+            </a:r>
+            <a:r>
+              <a:rPr lang="da-DK" dirty="0"/>
+              <a:t>, I </a:t>
+            </a:r>
+            <a:r>
+              <a:rPr lang="da-DK" dirty="0" err="1"/>
+              <a:t>ended</a:t>
+            </a:r>
+            <a:r>
+              <a:rPr lang="da-DK" dirty="0"/>
+              <a:t> up with a </a:t>
+            </a:r>
+            <a:r>
+              <a:rPr lang="da-DK" dirty="0" err="1"/>
+              <a:t>triple-nested</a:t>
+            </a:r>
+            <a:r>
+              <a:rPr lang="da-DK" dirty="0"/>
+              <a:t> </a:t>
+            </a:r>
+            <a:r>
+              <a:rPr lang="da-DK" dirty="0" err="1"/>
+              <a:t>foreach</a:t>
+            </a:r>
+            <a:r>
+              <a:rPr lang="da-DK" dirty="0"/>
+              <a:t> loop </a:t>
+            </a:r>
+            <a:r>
+              <a:rPr lang="da-DK" dirty="0" err="1"/>
+              <a:t>that</a:t>
+            </a:r>
+            <a:r>
+              <a:rPr lang="da-DK" dirty="0"/>
+              <a:t> I had to </a:t>
+            </a:r>
+            <a:r>
+              <a:rPr lang="da-DK" dirty="0" err="1"/>
+              <a:t>turn</a:t>
+            </a:r>
+            <a:r>
+              <a:rPr lang="da-DK" dirty="0"/>
+              <a:t> </a:t>
+            </a:r>
+            <a:r>
+              <a:rPr lang="da-DK" dirty="0" err="1"/>
+              <a:t>into</a:t>
+            </a:r>
+            <a:r>
+              <a:rPr lang="da-DK" dirty="0"/>
+              <a:t> a LINQ. </a:t>
+            </a:r>
+            <a:r>
+              <a:rPr lang="da-DK" dirty="0" err="1"/>
+              <a:t>Which</a:t>
+            </a:r>
+            <a:r>
+              <a:rPr lang="da-DK" dirty="0"/>
+              <a:t> </a:t>
+            </a:r>
+            <a:r>
+              <a:rPr lang="da-DK" dirty="0" err="1"/>
+              <a:t>was</a:t>
+            </a:r>
+            <a:r>
+              <a:rPr lang="da-DK" dirty="0"/>
+              <a:t> </a:t>
+            </a:r>
+            <a:r>
+              <a:rPr lang="da-DK" dirty="0" err="1"/>
+              <a:t>way</a:t>
+            </a:r>
+            <a:r>
+              <a:rPr lang="da-DK" dirty="0"/>
+              <a:t> </a:t>
+            </a:r>
+            <a:r>
+              <a:rPr lang="da-DK" dirty="0" err="1"/>
+              <a:t>less</a:t>
+            </a:r>
+            <a:r>
+              <a:rPr lang="da-DK" dirty="0"/>
+              <a:t> </a:t>
+            </a:r>
+            <a:r>
+              <a:rPr lang="da-DK" dirty="0" err="1"/>
+              <a:t>effective</a:t>
+            </a:r>
+            <a:r>
+              <a:rPr lang="da-DK" dirty="0"/>
+              <a:t> </a:t>
+            </a:r>
+            <a:r>
+              <a:rPr lang="da-DK" dirty="0" err="1"/>
+              <a:t>than</a:t>
+            </a:r>
+            <a:r>
+              <a:rPr lang="da-DK" dirty="0"/>
+              <a:t> the </a:t>
+            </a:r>
+            <a:r>
+              <a:rPr lang="da-DK" dirty="0" err="1"/>
+              <a:t>dictionary</a:t>
+            </a:r>
+            <a:r>
+              <a:rPr lang="da-DK" dirty="0"/>
+              <a:t> I had </a:t>
+            </a:r>
+            <a:r>
+              <a:rPr lang="da-DK" dirty="0" err="1"/>
+              <a:t>already</a:t>
+            </a:r>
+            <a:r>
+              <a:rPr lang="da-DK" dirty="0"/>
+              <a:t> made. And </a:t>
+            </a:r>
+            <a:r>
+              <a:rPr lang="da-DK" dirty="0" err="1"/>
+              <a:t>adding</a:t>
+            </a:r>
+            <a:r>
+              <a:rPr lang="da-DK" dirty="0"/>
+              <a:t> </a:t>
+            </a:r>
+            <a:r>
+              <a:rPr lang="da-DK" dirty="0" err="1"/>
+              <a:t>things</a:t>
+            </a:r>
+            <a:r>
+              <a:rPr lang="da-DK" dirty="0"/>
+              <a:t> to a </a:t>
+            </a:r>
+            <a:r>
+              <a:rPr lang="da-DK" dirty="0" err="1"/>
+              <a:t>dictionary</a:t>
+            </a:r>
+            <a:r>
+              <a:rPr lang="da-DK" dirty="0"/>
+              <a:t> with a LINQ </a:t>
+            </a:r>
+            <a:r>
+              <a:rPr lang="da-DK" dirty="0" err="1"/>
+              <a:t>was</a:t>
+            </a:r>
+            <a:r>
+              <a:rPr lang="da-DK" dirty="0"/>
+              <a:t> </a:t>
+            </a:r>
+            <a:r>
+              <a:rPr lang="da-DK" dirty="0" err="1"/>
+              <a:t>apparently</a:t>
+            </a:r>
+            <a:r>
+              <a:rPr lang="da-DK" dirty="0"/>
+              <a:t> </a:t>
+            </a:r>
+            <a:r>
+              <a:rPr lang="da-DK" dirty="0" err="1"/>
+              <a:t>slower</a:t>
+            </a:r>
+            <a:r>
+              <a:rPr lang="da-DK" dirty="0"/>
+              <a:t> </a:t>
+            </a:r>
+            <a:r>
+              <a:rPr lang="da-DK" dirty="0" err="1"/>
+              <a:t>than</a:t>
+            </a:r>
+            <a:r>
+              <a:rPr lang="da-DK" dirty="0"/>
+              <a:t> just </a:t>
+            </a:r>
+            <a:r>
+              <a:rPr lang="da-DK" dirty="0" err="1"/>
+              <a:t>doing</a:t>
+            </a:r>
+            <a:r>
+              <a:rPr lang="da-DK" dirty="0"/>
+              <a:t> it </a:t>
+            </a:r>
+            <a:r>
+              <a:rPr lang="da-DK" dirty="0" err="1"/>
+              <a:t>normally</a:t>
+            </a:r>
+            <a:r>
+              <a:rPr lang="da-DK" dirty="0"/>
+              <a:t>.</a:t>
+            </a:r>
+          </a:p>
+          <a:p>
+            <a:pPr marL="171450" marR="0" lvl="0" indent="-171450" algn="l" defTabSz="914400" rtl="0" eaLnBrk="1" fontAlgn="auto" latinLnBrk="0" hangingPunct="1">
+              <a:lnSpc>
+                <a:spcPct val="100000"/>
+              </a:lnSpc>
+              <a:spcBef>
+                <a:spcPts val="0"/>
+              </a:spcBef>
+              <a:spcAft>
+                <a:spcPts val="0"/>
+              </a:spcAft>
+              <a:buClrTx/>
+              <a:buSzTx/>
+              <a:buFontTx/>
+              <a:buChar char="-"/>
+              <a:tabLst/>
+              <a:defRPr/>
+            </a:pPr>
+            <a:r>
+              <a:rPr lang="da-DK" dirty="0"/>
+              <a:t>My normal </a:t>
+            </a:r>
+            <a:r>
+              <a:rPr lang="da-DK" dirty="0" err="1"/>
+              <a:t>foreaches</a:t>
+            </a:r>
+            <a:r>
+              <a:rPr lang="da-DK" dirty="0"/>
+              <a:t> </a:t>
+            </a:r>
+            <a:r>
+              <a:rPr lang="da-DK" dirty="0" err="1"/>
+              <a:t>were</a:t>
+            </a:r>
+            <a:r>
+              <a:rPr lang="da-DK" dirty="0"/>
+              <a:t> </a:t>
+            </a:r>
+            <a:r>
+              <a:rPr lang="da-DK" dirty="0" err="1"/>
+              <a:t>better</a:t>
+            </a:r>
+            <a:r>
+              <a:rPr lang="da-DK" dirty="0"/>
+              <a:t> </a:t>
+            </a:r>
+            <a:r>
+              <a:rPr lang="da-DK" dirty="0" err="1"/>
+              <a:t>than</a:t>
+            </a:r>
+            <a:r>
+              <a:rPr lang="da-DK" dirty="0"/>
+              <a:t> the alternative </a:t>
+            </a:r>
+            <a:r>
+              <a:rPr lang="da-DK" dirty="0" err="1"/>
+              <a:t>because</a:t>
+            </a:r>
+            <a:r>
+              <a:rPr lang="da-DK" dirty="0"/>
+              <a:t> in </a:t>
+            </a:r>
+            <a:r>
+              <a:rPr lang="da-DK" dirty="0" err="1"/>
+              <a:t>order</a:t>
+            </a:r>
+            <a:r>
+              <a:rPr lang="da-DK" dirty="0"/>
+              <a:t> to </a:t>
+            </a:r>
+            <a:r>
+              <a:rPr lang="da-DK" dirty="0" err="1"/>
+              <a:t>convert</a:t>
+            </a:r>
+            <a:r>
+              <a:rPr lang="da-DK" dirty="0"/>
+              <a:t> </a:t>
+            </a:r>
+            <a:r>
+              <a:rPr lang="da-DK" dirty="0" err="1"/>
+              <a:t>into</a:t>
+            </a:r>
+            <a:r>
+              <a:rPr lang="da-DK" dirty="0"/>
+              <a:t> the format the </a:t>
+            </a:r>
+            <a:r>
+              <a:rPr lang="da-DK" dirty="0" err="1"/>
+              <a:t>helper</a:t>
+            </a:r>
+            <a:r>
+              <a:rPr lang="da-DK" dirty="0"/>
+              <a:t> </a:t>
+            </a:r>
+            <a:r>
+              <a:rPr lang="da-DK" dirty="0" err="1"/>
+              <a:t>functions</a:t>
+            </a:r>
+            <a:r>
+              <a:rPr lang="da-DK" dirty="0"/>
+              <a:t> </a:t>
+            </a:r>
+            <a:r>
+              <a:rPr lang="da-DK" dirty="0" err="1"/>
+              <a:t>wanted</a:t>
+            </a:r>
+            <a:r>
+              <a:rPr lang="da-DK" dirty="0"/>
+              <a:t>, </a:t>
+            </a:r>
+            <a:r>
+              <a:rPr lang="da-DK" dirty="0" err="1"/>
+              <a:t>foreaches</a:t>
+            </a:r>
+            <a:r>
+              <a:rPr lang="da-DK" dirty="0"/>
+              <a:t> </a:t>
+            </a:r>
+            <a:r>
+              <a:rPr lang="da-DK" dirty="0" err="1"/>
+              <a:t>were</a:t>
+            </a:r>
+            <a:r>
+              <a:rPr lang="da-DK" dirty="0"/>
+              <a:t> </a:t>
+            </a:r>
+            <a:r>
+              <a:rPr lang="da-DK" dirty="0" err="1"/>
+              <a:t>needed</a:t>
+            </a:r>
+            <a:endParaRPr lang="en-US" dirty="0"/>
+          </a:p>
+          <a:p>
+            <a:pPr marL="0" marR="0" lvl="0" indent="0" algn="l" defTabSz="914400" rtl="0" eaLnBrk="1" fontAlgn="auto" latinLnBrk="0" hangingPunct="1">
+              <a:lnSpc>
+                <a:spcPct val="100000"/>
+              </a:lnSpc>
+              <a:spcBef>
+                <a:spcPts val="0"/>
+              </a:spcBef>
+              <a:spcAft>
+                <a:spcPts val="0"/>
+              </a:spcAft>
+              <a:buClrTx/>
+              <a:buSzTx/>
+              <a:buFontTx/>
+              <a:buNone/>
+              <a:tabLst/>
+              <a:defRPr/>
+            </a:pPr>
+            <a:endParaRPr lang="en-US" dirty="0"/>
+          </a:p>
+          <a:p>
+            <a:pPr marL="0" marR="0" lvl="0" indent="0" algn="l" defTabSz="914400" rtl="0" eaLnBrk="1" fontAlgn="auto" latinLnBrk="0" hangingPunct="1">
+              <a:lnSpc>
+                <a:spcPct val="100000"/>
+              </a:lnSpc>
+              <a:spcBef>
+                <a:spcPts val="0"/>
+              </a:spcBef>
+              <a:spcAft>
+                <a:spcPts val="0"/>
+              </a:spcAft>
+              <a:buClrTx/>
+              <a:buSzTx/>
+              <a:buFontTx/>
+              <a:buNone/>
+              <a:tabLst/>
+              <a:defRPr/>
+            </a:pPr>
+            <a:r>
+              <a:rPr lang="en-US" dirty="0"/>
+              <a:t>Really cut down </a:t>
+            </a:r>
+            <a:r>
+              <a:rPr lang="en-US" dirty="0" err="1"/>
+              <a:t>GetStock</a:t>
+            </a:r>
+            <a:endParaRPr lang="en-US" dirty="0"/>
+          </a:p>
+          <a:p>
+            <a:pPr marL="0" marR="0" lvl="0" indent="0" algn="l" defTabSz="914400" rtl="0" eaLnBrk="1" fontAlgn="auto" latinLnBrk="0" hangingPunct="1">
+              <a:lnSpc>
+                <a:spcPct val="100000"/>
+              </a:lnSpc>
+              <a:spcBef>
+                <a:spcPts val="0"/>
+              </a:spcBef>
+              <a:spcAft>
+                <a:spcPts val="0"/>
+              </a:spcAft>
+              <a:buClrTx/>
+              <a:buSzTx/>
+              <a:buFontTx/>
+              <a:buNone/>
+              <a:tabLst/>
+              <a:defRPr/>
+            </a:pPr>
+            <a:endParaRPr lang="en-US" dirty="0"/>
+          </a:p>
+          <a:p>
+            <a:pPr marL="0" marR="0" lvl="0" indent="0" algn="l" defTabSz="914400" rtl="0" eaLnBrk="1" fontAlgn="auto" latinLnBrk="0" hangingPunct="1">
+              <a:lnSpc>
+                <a:spcPct val="100000"/>
+              </a:lnSpc>
+              <a:spcBef>
+                <a:spcPts val="0"/>
+              </a:spcBef>
+              <a:spcAft>
+                <a:spcPts val="0"/>
+              </a:spcAft>
+              <a:buClrTx/>
+              <a:buSzTx/>
+              <a:buFontTx/>
+              <a:buNone/>
+              <a:tabLst/>
+              <a:defRPr/>
+            </a:pPr>
+            <a:r>
+              <a:rPr lang="en-US" dirty="0"/>
+              <a:t>Didn’t do much LINQ outside this, because…</a:t>
+            </a:r>
           </a:p>
         </p:txBody>
       </p:sp>
@@ -1840,7 +1941,7 @@
           <a:p>
             <a:fld id="{C2B1EF5D-2231-4646-8EED-1BCCADFE16C5}" type="slidenum">
               <a:rPr lang="da-DK" smtClean="0"/>
-              <a:t>7</a:t>
+              <a:t>6</a:t>
             </a:fld>
             <a:endParaRPr lang="da-DK"/>
           </a:p>
@@ -1849,7 +1950,7 @@
     </p:spTree>
     <p:extLst>
       <p:ext uri="{BB962C8B-B14F-4D97-AF65-F5344CB8AC3E}">
-        <p14:creationId xmlns:p14="http://schemas.microsoft.com/office/powerpoint/2010/main" val="3668114257"/>
+        <p14:creationId xmlns:p14="http://schemas.microsoft.com/office/powerpoint/2010/main" val="16619558"/>
       </p:ext>
     </p:extLst>
   </p:cSld>
@@ -1924,7 +2025,151 @@
           <a:p>
             <a:fld id="{C2B1EF5D-2231-4646-8EED-1BCCADFE16C5}" type="slidenum">
               <a:rPr lang="da-DK" smtClean="0"/>
-              <a:t>8</a:t>
+              <a:t>7</a:t>
+            </a:fld>
+            <a:endParaRPr lang="da-DK"/>
+          </a:p>
+        </p:txBody>
+      </p:sp>
+    </p:spTree>
+    <p:extLst>
+      <p:ext uri="{BB962C8B-B14F-4D97-AF65-F5344CB8AC3E}">
+        <p14:creationId xmlns:p14="http://schemas.microsoft.com/office/powerpoint/2010/main" val="3668114257"/>
+      </p:ext>
+    </p:extLst>
+  </p:cSld>
+  <p:clrMapOvr>
+    <a:masterClrMapping/>
+  </p:clrMapOvr>
+</p:notes>
+</file>
+
+<file path=ppt/notesSlides/notesSlide7.xml><?xml version="1.0" encoding="utf-8"?>
+<p:notes xmlns:a="http://schemas.openxmlformats.org/drawingml/2006/main" xmlns:r="http://schemas.openxmlformats.org/officeDocument/2006/relationships" xmlns:p="http://schemas.openxmlformats.org/presentationml/2006/main">
+  <p:cSld>
+    <p:spTree>
+      <p:nvGrpSpPr>
+        <p:cNvPr id="1" name=""/>
+        <p:cNvGrpSpPr/>
+        <p:nvPr/>
+      </p:nvGrpSpPr>
+      <p:grpSpPr>
+        <a:xfrm>
+          <a:off x="0" y="0"/>
+          <a:ext cx="0" cy="0"/>
+          <a:chOff x="0" y="0"/>
+          <a:chExt cx="0" cy="0"/>
+        </a:xfrm>
+      </p:grpSpPr>
+      <p:sp>
+        <p:nvSpPr>
+          <p:cNvPr id="2" name="Pladsholder til slidebillede 1"/>
+          <p:cNvSpPr>
+            <a:spLocks noGrp="1" noRot="1" noChangeAspect="1"/>
+          </p:cNvSpPr>
+          <p:nvPr>
+            <p:ph type="sldImg"/>
+          </p:nvPr>
+        </p:nvSpPr>
+        <p:spPr/>
+      </p:sp>
+      <p:sp>
+        <p:nvSpPr>
+          <p:cNvPr id="3" name="Pladsholder til noter 2"/>
+          <p:cNvSpPr>
+            <a:spLocks noGrp="1"/>
+          </p:cNvSpPr>
+          <p:nvPr>
+            <p:ph type="body" idx="1"/>
+          </p:nvPr>
+        </p:nvSpPr>
+        <p:spPr/>
+        <p:txBody>
+          <a:bodyPr/>
+          <a:lstStyle/>
+          <a:p>
+            <a:r>
+              <a:rPr lang="da-DK" dirty="0" err="1"/>
+              <a:t>Inserting</a:t>
+            </a:r>
+            <a:r>
+              <a:rPr lang="da-DK" dirty="0"/>
+              <a:t> the Normal Pizza </a:t>
+            </a:r>
+            <a:r>
+              <a:rPr lang="da-DK" dirty="0" err="1"/>
+              <a:t>Oven’s</a:t>
+            </a:r>
+            <a:r>
+              <a:rPr lang="da-DK" dirty="0"/>
+              <a:t> </a:t>
+            </a:r>
+            <a:r>
+              <a:rPr lang="da-DK" dirty="0" err="1"/>
+              <a:t>code</a:t>
+            </a:r>
+            <a:r>
+              <a:rPr lang="da-DK" dirty="0"/>
+              <a:t> </a:t>
+            </a:r>
+            <a:r>
+              <a:rPr lang="da-DK" dirty="0" err="1"/>
+              <a:t>makes</a:t>
+            </a:r>
+            <a:r>
+              <a:rPr lang="da-DK" dirty="0"/>
+              <a:t> more tests </a:t>
+            </a:r>
+            <a:r>
+              <a:rPr lang="da-DK" dirty="0" err="1"/>
+              <a:t>pass</a:t>
+            </a:r>
+            <a:r>
+              <a:rPr lang="da-DK" dirty="0"/>
+              <a:t> </a:t>
+            </a:r>
+            <a:r>
+              <a:rPr lang="da-DK" dirty="0" err="1"/>
+              <a:t>than</a:t>
+            </a:r>
+            <a:r>
+              <a:rPr lang="da-DK" dirty="0"/>
+              <a:t> </a:t>
+            </a:r>
+            <a:r>
+              <a:rPr lang="da-DK" dirty="0" err="1"/>
+              <a:t>these</a:t>
+            </a:r>
+            <a:r>
+              <a:rPr lang="da-DK" dirty="0"/>
+              <a:t> </a:t>
+            </a:r>
+            <a:r>
+              <a:rPr lang="da-DK" dirty="0" err="1"/>
+              <a:t>two</a:t>
+            </a:r>
+            <a:endParaRPr lang="da-DK" dirty="0"/>
+          </a:p>
+        </p:txBody>
+      </p:sp>
+      <p:sp>
+        <p:nvSpPr>
+          <p:cNvPr id="4" name="Pladsholder til slidenummer 3"/>
+          <p:cNvSpPr>
+            <a:spLocks noGrp="1"/>
+          </p:cNvSpPr>
+          <p:nvPr>
+            <p:ph type="sldNum" sz="quarter" idx="5"/>
+          </p:nvPr>
+        </p:nvSpPr>
+        <p:spPr/>
+        <p:txBody>
+          <a:bodyPr/>
+          <a:lstStyle/>
+          <a:p>
+            <a:fld id="{C2B1EF5D-2231-4646-8EED-1BCCADFE16C5}" type="slidenum">
+              <a:rPr lang="da-DK" smtClean="0"/>
+              <a:t>9</a:t>
             </a:fld>
             <a:endParaRPr lang="da-DK"/>
           </a:p>
@@ -3013,6 +3258,13 @@
             <a:tailEnd/>
           </a:ln>
         </p:spPr>
+        <p:txBody>
+          <a:bodyPr/>
+          <a:lstStyle/>
+          <a:p>
+            <a:endParaRPr lang="da-DK"/>
+          </a:p>
+        </p:txBody>
       </p:sp>
       <p:sp>
         <p:nvSpPr>
@@ -3154,7 +3406,7 @@
           <a:p>
             <a:fld id="{9F2C61E5-4FB9-4B7B-BFC7-89973F7231D0}" type="datetimeFigureOut">
               <a:rPr lang="da-DK" smtClean="0"/>
-              <a:t>23-03-2026</a:t>
+              <a:t>26-03-2026</a:t>
             </a:fld>
             <a:endParaRPr lang="da-DK"/>
           </a:p>
@@ -3269,6 +3521,13 @@
             <a:schemeClr val="lt1"/>
           </a:fontRef>
         </p:style>
+        <p:txBody>
+          <a:bodyPr/>
+          <a:lstStyle/>
+          <a:p>
+            <a:endParaRPr lang="da-DK"/>
+          </a:p>
+        </p:txBody>
       </p:sp>
     </p:spTree>
     <p:extLst>
@@ -3392,7 +3651,7 @@
           <a:p>
             <a:fld id="{9F2C61E5-4FB9-4B7B-BFC7-89973F7231D0}" type="datetimeFigureOut">
               <a:rPr lang="da-DK" smtClean="0"/>
-              <a:t>23-03-2026</a:t>
+              <a:t>26-03-2026</a:t>
             </a:fld>
             <a:endParaRPr lang="da-DK"/>
           </a:p>
@@ -3572,7 +3831,7 @@
           <a:p>
             <a:fld id="{9F2C61E5-4FB9-4B7B-BFC7-89973F7231D0}" type="datetimeFigureOut">
               <a:rPr lang="da-DK" smtClean="0"/>
-              <a:t>23-03-2026</a:t>
+              <a:t>26-03-2026</a:t>
             </a:fld>
             <a:endParaRPr lang="da-DK"/>
           </a:p>
@@ -3742,7 +4001,7 @@
           <a:p>
             <a:fld id="{9F2C61E5-4FB9-4B7B-BFC7-89973F7231D0}" type="datetimeFigureOut">
               <a:rPr lang="da-DK" smtClean="0"/>
-              <a:t>23-03-2026</a:t>
+              <a:t>26-03-2026</a:t>
             </a:fld>
             <a:endParaRPr lang="da-DK"/>
           </a:p>
@@ -4018,7 +4277,7 @@
           <a:p>
             <a:fld id="{9F2C61E5-4FB9-4B7B-BFC7-89973F7231D0}" type="datetimeFigureOut">
               <a:rPr lang="da-DK" smtClean="0"/>
-              <a:t>23-03-2026</a:t>
+              <a:t>26-03-2026</a:t>
             </a:fld>
             <a:endParaRPr lang="da-DK"/>
           </a:p>
@@ -5219,7 +5478,7 @@
           <a:p>
             <a:fld id="{9F2C61E5-4FB9-4B7B-BFC7-89973F7231D0}" type="datetimeFigureOut">
               <a:rPr lang="da-DK" smtClean="0"/>
-              <a:t>23-03-2026</a:t>
+              <a:t>26-03-2026</a:t>
             </a:fld>
             <a:endParaRPr lang="da-DK"/>
           </a:p>
@@ -5609,7 +5868,7 @@
           <a:p>
             <a:fld id="{9F2C61E5-4FB9-4B7B-BFC7-89973F7231D0}" type="datetimeFigureOut">
               <a:rPr lang="da-DK" smtClean="0"/>
-              <a:t>23-03-2026</a:t>
+              <a:t>26-03-2026</a:t>
             </a:fld>
             <a:endParaRPr lang="da-DK"/>
           </a:p>
@@ -5732,7 +5991,7 @@
           <a:p>
             <a:fld id="{9F2C61E5-4FB9-4B7B-BFC7-89973F7231D0}" type="datetimeFigureOut">
               <a:rPr lang="da-DK" smtClean="0"/>
-              <a:t>23-03-2026</a:t>
+              <a:t>26-03-2026</a:t>
             </a:fld>
             <a:endParaRPr lang="da-DK"/>
           </a:p>
@@ -5827,7 +6086,7 @@
           <a:p>
             <a:fld id="{9F2C61E5-4FB9-4B7B-BFC7-89973F7231D0}" type="datetimeFigureOut">
               <a:rPr lang="da-DK" smtClean="0"/>
-              <a:t>23-03-2026</a:t>
+              <a:t>26-03-2026</a:t>
             </a:fld>
             <a:endParaRPr lang="da-DK"/>
           </a:p>
@@ -6590,7 +6849,7 @@
           <a:p>
             <a:fld id="{9F2C61E5-4FB9-4B7B-BFC7-89973F7231D0}" type="datetimeFigureOut">
               <a:rPr lang="da-DK" smtClean="0"/>
-              <a:t>23-03-2026</a:t>
+              <a:t>26-03-2026</a:t>
             </a:fld>
             <a:endParaRPr lang="da-DK"/>
           </a:p>
@@ -7430,7 +7689,7 @@
           <a:p>
             <a:fld id="{9F2C61E5-4FB9-4B7B-BFC7-89973F7231D0}" type="datetimeFigureOut">
               <a:rPr lang="da-DK" smtClean="0"/>
-              <a:t>23-03-2026</a:t>
+              <a:t>26-03-2026</a:t>
             </a:fld>
             <a:endParaRPr lang="da-DK"/>
           </a:p>
@@ -7657,7 +7916,7 @@
           <a:p>
             <a:fld id="{9F2C61E5-4FB9-4B7B-BFC7-89973F7231D0}" type="datetimeFigureOut">
               <a:rPr lang="da-DK" smtClean="0"/>
-              <a:t>23-03-2026</a:t>
+              <a:t>26-03-2026</a:t>
             </a:fld>
             <a:endParaRPr lang="da-DK"/>
           </a:p>
@@ -8206,6 +8465,13 @@
             <a:tailEnd/>
           </a:ln>
         </p:spPr>
+        <p:txBody>
+          <a:bodyPr/>
+          <a:lstStyle/>
+          <a:p>
+            <a:endParaRPr lang="da-DK"/>
+          </a:p>
+        </p:txBody>
       </p:sp>
       <p:sp>
         <p:nvSpPr>
@@ -8244,6 +8510,13 @@
             <a:schemeClr val="lt1"/>
           </a:fontRef>
         </p:style>
+        <p:txBody>
+          <a:bodyPr/>
+          <a:lstStyle/>
+          <a:p>
+            <a:endParaRPr lang="da-DK"/>
+          </a:p>
+        </p:txBody>
       </p:sp>
     </p:spTree>
     <p:extLst>
@@ -8726,6 +8999,241 @@
 </p:sld>
 </file>
 
+<file path=ppt/slides/slide10.xml><?xml version="1.0" encoding="utf-8"?>
+<p:sld xmlns:a="http://schemas.openxmlformats.org/drawingml/2006/main" xmlns:r="http://schemas.openxmlformats.org/officeDocument/2006/relationships" xmlns:p="http://schemas.openxmlformats.org/presentationml/2006/main">
+  <p:cSld>
+    <p:spTree>
+      <p:nvGrpSpPr>
+        <p:cNvPr id="1" name=""/>
+        <p:cNvGrpSpPr/>
+        <p:nvPr/>
+      </p:nvGrpSpPr>
+      <p:grpSpPr>
+        <a:xfrm>
+          <a:off x="0" y="0"/>
+          <a:ext cx="0" cy="0"/>
+          <a:chOff x="0" y="0"/>
+          <a:chExt cx="0" cy="0"/>
+        </a:xfrm>
+      </p:grpSpPr>
+      <p:sp>
+        <p:nvSpPr>
+          <p:cNvPr id="2" name="Titel 1">
+            <a:extLst>
+              <a:ext uri="{FF2B5EF4-FFF2-40B4-BE49-F238E27FC236}">
+                <a16:creationId xmlns:a16="http://schemas.microsoft.com/office/drawing/2014/main" id="{B726AEE8-C798-4136-E025-F1A260436E52}"/>
+              </a:ext>
+            </a:extLst>
+          </p:cNvPr>
+          <p:cNvSpPr>
+            <a:spLocks noGrp="1"/>
+          </p:cNvSpPr>
+          <p:nvPr>
+            <p:ph type="title"/>
+          </p:nvPr>
+        </p:nvSpPr>
+        <p:spPr/>
+        <p:txBody>
+          <a:bodyPr/>
+          <a:lstStyle/>
+          <a:p>
+            <a:r>
+              <a:rPr lang="en-DK" noProof="0" dirty="0"/>
+              <a:t>Final Thoughts</a:t>
+            </a:r>
+          </a:p>
+        </p:txBody>
+      </p:sp>
+      <p:sp>
+        <p:nvSpPr>
+          <p:cNvPr id="3" name="Pladsholder til indhold 2">
+            <a:extLst>
+              <a:ext uri="{FF2B5EF4-FFF2-40B4-BE49-F238E27FC236}">
+                <a16:creationId xmlns:a16="http://schemas.microsoft.com/office/drawing/2014/main" id="{726D3CD8-F4EE-27A8-6FFC-51B30ACA61B1}"/>
+              </a:ext>
+            </a:extLst>
+          </p:cNvPr>
+          <p:cNvSpPr>
+            <a:spLocks noGrp="1"/>
+          </p:cNvSpPr>
+          <p:nvPr>
+            <p:ph sz="half" idx="1"/>
+          </p:nvPr>
+        </p:nvSpPr>
+        <p:spPr/>
+        <p:txBody>
+          <a:bodyPr/>
+          <a:lstStyle/>
+          <a:p>
+            <a:r>
+              <a:rPr lang="en-GB" noProof="0" dirty="0"/>
+              <a:t>Things were pretty good until the </a:t>
+            </a:r>
+            <a:r>
+              <a:rPr lang="en-GB" dirty="0"/>
+              <a:t>Giant Revolving Pizza Oven </a:t>
+            </a:r>
+            <a:r>
+              <a:rPr lang="en-GB" dirty="0">
+                <a:sym typeface="Wingdings" panose="05000000000000000000" pitchFamily="2" charset="2"/>
+              </a:rPr>
+              <a:t> I should’ve just skipped it</a:t>
+            </a:r>
+          </a:p>
+          <a:p>
+            <a:r>
+              <a:rPr lang="en-GB" dirty="0">
+                <a:sym typeface="Wingdings" panose="05000000000000000000" pitchFamily="2" charset="2"/>
+              </a:rPr>
+              <a:t>Could have studied LINQ some more</a:t>
+            </a:r>
+            <a:endParaRPr lang="en-GB" noProof="0" dirty="0"/>
+          </a:p>
+        </p:txBody>
+      </p:sp>
+      <p:sp>
+        <p:nvSpPr>
+          <p:cNvPr id="4" name="Pladsholder til indhold 3">
+            <a:extLst>
+              <a:ext uri="{FF2B5EF4-FFF2-40B4-BE49-F238E27FC236}">
+                <a16:creationId xmlns:a16="http://schemas.microsoft.com/office/drawing/2014/main" id="{5C2531A8-AFD4-C0F8-51BC-68177D2CD808}"/>
+              </a:ext>
+            </a:extLst>
+          </p:cNvPr>
+          <p:cNvSpPr>
+            <a:spLocks noGrp="1"/>
+          </p:cNvSpPr>
+          <p:nvPr>
+            <p:ph sz="half" idx="2"/>
+          </p:nvPr>
+        </p:nvSpPr>
+        <p:spPr/>
+        <p:txBody>
+          <a:bodyPr/>
+          <a:lstStyle/>
+          <a:p>
+            <a:r>
+              <a:rPr lang="en-GB" noProof="0" dirty="0"/>
+              <a:t>Would’ve like to get have gotten to the database and some frontend</a:t>
+            </a:r>
+          </a:p>
+        </p:txBody>
+      </p:sp>
+    </p:spTree>
+    <p:extLst>
+      <p:ext uri="{BB962C8B-B14F-4D97-AF65-F5344CB8AC3E}">
+        <p14:creationId xmlns:p14="http://schemas.microsoft.com/office/powerpoint/2010/main" val="627090686"/>
+      </p:ext>
+    </p:extLst>
+  </p:cSld>
+  <p:clrMapOvr>
+    <a:masterClrMapping/>
+  </p:clrMapOvr>
+</p:sld>
+</file>
+
+<file path=ppt/slides/slide11.xml><?xml version="1.0" encoding="utf-8"?>
+<p:sld xmlns:a="http://schemas.openxmlformats.org/drawingml/2006/main" xmlns:r="http://schemas.openxmlformats.org/officeDocument/2006/relationships" xmlns:p="http://schemas.openxmlformats.org/presentationml/2006/main">
+  <p:cSld>
+    <p:spTree>
+      <p:nvGrpSpPr>
+        <p:cNvPr id="1" name=""/>
+        <p:cNvGrpSpPr/>
+        <p:nvPr/>
+      </p:nvGrpSpPr>
+      <p:grpSpPr>
+        <a:xfrm>
+          <a:off x="0" y="0"/>
+          <a:ext cx="0" cy="0"/>
+          <a:chOff x="0" y="0"/>
+          <a:chExt cx="0" cy="0"/>
+        </a:xfrm>
+      </p:grpSpPr>
+      <p:sp>
+        <p:nvSpPr>
+          <p:cNvPr id="2" name="Titel 1">
+            <a:extLst>
+              <a:ext uri="{FF2B5EF4-FFF2-40B4-BE49-F238E27FC236}">
+                <a16:creationId xmlns:a16="http://schemas.microsoft.com/office/drawing/2014/main" id="{9B2F1985-FF08-A6D1-747C-F81E5CE98856}"/>
+              </a:ext>
+            </a:extLst>
+          </p:cNvPr>
+          <p:cNvSpPr>
+            <a:spLocks noGrp="1"/>
+          </p:cNvSpPr>
+          <p:nvPr>
+            <p:ph type="ctrTitle"/>
+          </p:nvPr>
+        </p:nvSpPr>
+        <p:spPr/>
+        <p:txBody>
+          <a:bodyPr/>
+          <a:lstStyle/>
+          <a:p>
+            <a:r>
+              <a:rPr lang="en-GB" noProof="0" dirty="0"/>
+              <a:t>Questions</a:t>
+            </a:r>
+            <a:br>
+              <a:rPr lang="da-DK" dirty="0"/>
+            </a:br>
+            <a:r>
+              <a:rPr lang="ja-JP" altLang="da-DK" dirty="0"/>
+              <a:t>質問</a:t>
+            </a:r>
+            <a:endParaRPr lang="da-DK" dirty="0"/>
+          </a:p>
+        </p:txBody>
+      </p:sp>
+      <p:sp>
+        <p:nvSpPr>
+          <p:cNvPr id="3" name="Undertitel 2">
+            <a:extLst>
+              <a:ext uri="{FF2B5EF4-FFF2-40B4-BE49-F238E27FC236}">
+                <a16:creationId xmlns:a16="http://schemas.microsoft.com/office/drawing/2014/main" id="{43F0204D-0539-7534-091A-07925CA2DEE6}"/>
+              </a:ext>
+            </a:extLst>
+          </p:cNvPr>
+          <p:cNvSpPr>
+            <a:spLocks noGrp="1"/>
+          </p:cNvSpPr>
+          <p:nvPr>
+            <p:ph type="subTitle" idx="1"/>
+          </p:nvPr>
+        </p:nvSpPr>
+        <p:spPr/>
+        <p:txBody>
+          <a:bodyPr>
+            <a:normAutofit/>
+          </a:bodyPr>
+          <a:lstStyle/>
+          <a:p>
+            <a:r>
+              <a:rPr lang="en-GB" noProof="0" dirty="0"/>
+              <a:t>Thank you for listening</a:t>
+            </a:r>
+          </a:p>
+          <a:p>
+            <a:r>
+              <a:rPr lang="en-GB" sz="600" noProof="0" dirty="0"/>
+              <a:t>(hopefully I didn’t yap too much)</a:t>
+            </a:r>
+          </a:p>
+        </p:txBody>
+      </p:sp>
+    </p:spTree>
+    <p:extLst>
+      <p:ext uri="{BB962C8B-B14F-4D97-AF65-F5344CB8AC3E}">
+        <p14:creationId xmlns:p14="http://schemas.microsoft.com/office/powerpoint/2010/main" val="2255987726"/>
+      </p:ext>
+    </p:extLst>
+  </p:cSld>
+  <p:clrMapOvr>
+    <a:masterClrMapping/>
+  </p:clrMapOvr>
+</p:sld>
+</file>
+
 <file path=ppt/slides/slide2.xml><?xml version="1.0" encoding="utf-8"?>
 <p:sld xmlns:a="http://schemas.openxmlformats.org/drawingml/2006/main" xmlns:r="http://schemas.openxmlformats.org/officeDocument/2006/relationships" xmlns:p="http://schemas.openxmlformats.org/presentationml/2006/main">
   <p:cSld>
@@ -9710,7 +10218,7 @@
           <a:p>
             <a:r>
               <a:rPr lang="en-US" noProof="0" dirty="0"/>
-              <a:t>Later problems/thoughts</a:t>
+              <a:t>Back to the oven…</a:t>
             </a:r>
             <a:endParaRPr lang="en-DK" noProof="0" dirty="0"/>
           </a:p>
@@ -9732,40 +10240,116 @@
             <p:ph sz="half" idx="1"/>
           </p:nvPr>
         </p:nvSpPr>
-        <p:spPr/>
+        <p:spPr>
+          <a:xfrm>
+            <a:off x="1257300" y="1191718"/>
+            <a:ext cx="4800600" cy="5433934"/>
+          </a:xfrm>
+        </p:spPr>
         <p:txBody>
           <a:bodyPr/>
           <a:lstStyle/>
           <a:p>
-            <a:endParaRPr lang="en-DK" noProof="0" dirty="0"/>
+            <a:r>
+              <a:rPr lang="en-GB" noProof="0" dirty="0"/>
+              <a:t>Idea:</a:t>
+            </a:r>
+          </a:p>
+          <a:p>
+            <a:pPr lvl="1"/>
+            <a:r>
+              <a:rPr lang="en-GB" dirty="0"/>
+              <a:t>Make alternate version of Michael’s</a:t>
+            </a:r>
+          </a:p>
+          <a:p>
+            <a:pPr lvl="1"/>
+            <a:r>
+              <a:rPr lang="en-GB" dirty="0"/>
+              <a:t>Make the first element have the correct cooking type, set rest to 0</a:t>
+            </a:r>
+          </a:p>
+          <a:p>
+            <a:pPr lvl="1"/>
+            <a:r>
+              <a:rPr lang="en-GB" dirty="0"/>
+              <a:t>Manipulating cooking time worked with the Assembly Line Oven, so why not this?</a:t>
+            </a:r>
+          </a:p>
+          <a:p>
+            <a:endParaRPr lang="en-GB" noProof="0" dirty="0"/>
+          </a:p>
+          <a:p>
+            <a:r>
+              <a:rPr lang="en-GB" dirty="0"/>
+              <a:t>Problem:</a:t>
+            </a:r>
+          </a:p>
+          <a:p>
+            <a:pPr lvl="1"/>
+            <a:r>
+              <a:rPr lang="en-GB" noProof="0" dirty="0"/>
+              <a:t>Only works with 100 pizzas testcase</a:t>
+            </a:r>
+          </a:p>
+          <a:p>
+            <a:pPr lvl="1"/>
+            <a:r>
+              <a:rPr lang="en-GB" dirty="0"/>
+              <a:t>Different cooking times</a:t>
+            </a:r>
+            <a:r>
+              <a:rPr lang="en-GB" noProof="0" dirty="0"/>
+              <a:t> can be in the oven at the same time</a:t>
+            </a:r>
+            <a:endParaRPr lang="en-GB" dirty="0"/>
+          </a:p>
+          <a:p>
+            <a:pPr lvl="1"/>
+            <a:r>
+              <a:rPr lang="en-GB" dirty="0"/>
+              <a:t>Feels like I definitely can get rid of that while-loop somehow</a:t>
+            </a:r>
+            <a:endParaRPr lang="en-GB" noProof="0" dirty="0"/>
+          </a:p>
+          <a:p>
+            <a:pPr lvl="1"/>
+            <a:endParaRPr lang="en-GB" noProof="0" dirty="0"/>
           </a:p>
         </p:txBody>
       </p:sp>
-      <p:sp>
-        <p:nvSpPr>
-          <p:cNvPr id="4" name="Pladsholder til indhold 3">
+      <p:pic>
+        <p:nvPicPr>
+          <p:cNvPr id="6" name="Pladsholder til indhold 5">
             <a:extLst>
               <a:ext uri="{FF2B5EF4-FFF2-40B4-BE49-F238E27FC236}">
-                <a16:creationId xmlns:a16="http://schemas.microsoft.com/office/drawing/2014/main" id="{47C8E8B0-70D6-0E5E-F1F3-83A2F00EB827}"/>
+                <a16:creationId xmlns:a16="http://schemas.microsoft.com/office/drawing/2014/main" id="{A9129C86-25D8-BB61-FDBC-050F963302B9}"/>
               </a:ext>
             </a:extLst>
           </p:cNvPr>
-          <p:cNvSpPr>
-            <a:spLocks noGrp="1"/>
-          </p:cNvSpPr>
+          <p:cNvPicPr>
+            <a:picLocks noGrp="1" noChangeAspect="1"/>
+          </p:cNvPicPr>
           <p:nvPr>
             <p:ph sz="half" idx="2"/>
           </p:nvPr>
-        </p:nvSpPr>
-        <p:spPr/>
-        <p:txBody>
-          <a:bodyPr/>
-          <a:lstStyle/>
-          <a:p>
-            <a:endParaRPr lang="da-DK"/>
-          </a:p>
-        </p:txBody>
-      </p:sp>
+        </p:nvPicPr>
+        <p:blipFill>
+          <a:blip r:embed="rId3"/>
+          <a:stretch>
+            <a:fillRect/>
+          </a:stretch>
+        </p:blipFill>
+        <p:spPr>
+          <a:xfrm>
+            <a:off x="6134102" y="1648979"/>
+            <a:ext cx="5576569" cy="4482059"/>
+          </a:xfrm>
+          <a:prstGeom prst="rect">
+            <a:avLst/>
+          </a:prstGeom>
+        </p:spPr>
+      </p:pic>
     </p:spTree>
     <p:extLst>
       <p:ext uri="{BB962C8B-B14F-4D97-AF65-F5344CB8AC3E}">
@@ -9798,10 +10382,10 @@
       </p:grpSpPr>
       <p:sp>
         <p:nvSpPr>
-          <p:cNvPr id="2" name="Titel 1">
+          <p:cNvPr id="3" name="Pladsholder til tekst 2">
             <a:extLst>
               <a:ext uri="{FF2B5EF4-FFF2-40B4-BE49-F238E27FC236}">
-                <a16:creationId xmlns:a16="http://schemas.microsoft.com/office/drawing/2014/main" id="{6ACDFDA2-DBC4-31F5-4D86-13F3D8C2D1E4}"/>
+                <a16:creationId xmlns:a16="http://schemas.microsoft.com/office/drawing/2014/main" id="{1D27ADBE-6C29-E655-6801-3357EE470D93}"/>
               </a:ext>
             </a:extLst>
           </p:cNvPr>
@@ -9809,79 +10393,1240 @@
             <a:spLocks noGrp="1"/>
           </p:cNvSpPr>
           <p:nvPr>
-            <p:ph type="title"/>
+            <p:ph type="body" idx="1"/>
           </p:nvPr>
         </p:nvSpPr>
-        <p:spPr/>
+        <p:spPr>
+          <a:xfrm rot="20344839">
+            <a:off x="1824319" y="5017375"/>
+            <a:ext cx="7017488" cy="951135"/>
+          </a:xfrm>
+        </p:spPr>
         <p:txBody>
           <a:bodyPr/>
           <a:lstStyle/>
           <a:p>
             <a:r>
               <a:rPr lang="en-US" noProof="0" dirty="0"/>
-              <a:t>More </a:t>
-            </a:r>
-            <a:r>
-              <a:rPr lang="en-DK" noProof="0" dirty="0"/>
-              <a:t>Interesting code bits</a:t>
+              <a:t>Give last element cooking time?</a:t>
             </a:r>
           </a:p>
         </p:txBody>
       </p:sp>
       <p:sp>
         <p:nvSpPr>
-          <p:cNvPr id="3" name="Pladsholder til indhold 2">
+          <p:cNvPr id="4" name="Pladsholder til tekst 2">
             <a:extLst>
               <a:ext uri="{FF2B5EF4-FFF2-40B4-BE49-F238E27FC236}">
-                <a16:creationId xmlns:a16="http://schemas.microsoft.com/office/drawing/2014/main" id="{0139D2AC-9FBF-E54A-C1EF-C5B61B08497E}"/>
+                <a16:creationId xmlns:a16="http://schemas.microsoft.com/office/drawing/2014/main" id="{FD5D8786-4C86-82DF-E2B4-DB5658D1CB2C}"/>
               </a:ext>
             </a:extLst>
           </p:cNvPr>
-          <p:cNvSpPr>
-            <a:spLocks noGrp="1"/>
+          <p:cNvSpPr txBox="1">
+            <a:spLocks/>
           </p:cNvSpPr>
-          <p:nvPr>
-            <p:ph sz="half" idx="1"/>
-          </p:nvPr>
-        </p:nvSpPr>
-        <p:spPr/>
+          <p:nvPr/>
+        </p:nvSpPr>
+        <p:spPr>
+          <a:xfrm rot="494728">
+            <a:off x="5359042" y="3492059"/>
+            <a:ext cx="8169581" cy="951135"/>
+          </a:xfrm>
+          <a:prstGeom prst="rect">
+            <a:avLst/>
+          </a:prstGeom>
+        </p:spPr>
         <p:txBody>
-          <a:bodyPr/>
-          <a:lstStyle/>
-          <a:p>
-            <a:endParaRPr lang="da-DK"/>
+          <a:bodyPr vert="horz" lIns="91440" tIns="45720" rIns="91440" bIns="45720" rtlCol="0">
+            <a:normAutofit/>
+          </a:bodyPr>
+          <a:lstStyle>
+            <a:lvl1pPr marL="0" indent="0" algn="l" defTabSz="914400" rtl="0" eaLnBrk="1" latinLnBrk="0" hangingPunct="1">
+              <a:lnSpc>
+                <a:spcPct val="100000"/>
+              </a:lnSpc>
+              <a:spcBef>
+                <a:spcPts val="700"/>
+              </a:spcBef>
+              <a:buClr>
+                <a:schemeClr val="tx2"/>
+              </a:buClr>
+              <a:buFont typeface="Arial" panose="020B0604020202020204" pitchFamily="34" charset="0"/>
+              <a:buNone/>
+              <a:defRPr sz="2000" b="1" i="0" kern="1200" cap="all" spc="400" baseline="0">
+                <a:solidFill>
+                  <a:schemeClr val="accent1"/>
+                </a:solidFill>
+                <a:latin typeface="+mn-lt"/>
+                <a:ea typeface="+mn-ea"/>
+                <a:cs typeface="+mn-cs"/>
+              </a:defRPr>
+            </a:lvl1pPr>
+            <a:lvl2pPr marL="457200" indent="0" algn="l" defTabSz="914400" rtl="0" eaLnBrk="1" latinLnBrk="0" hangingPunct="1">
+              <a:lnSpc>
+                <a:spcPct val="110000"/>
+              </a:lnSpc>
+              <a:spcBef>
+                <a:spcPts val="700"/>
+              </a:spcBef>
+              <a:buClr>
+                <a:schemeClr val="tx2"/>
+              </a:buClr>
+              <a:buFont typeface="Gill Sans MT" panose="020B0502020104020203" pitchFamily="34" charset="0"/>
+              <a:buNone/>
+              <a:defRPr sz="2000" kern="1200">
+                <a:solidFill>
+                  <a:schemeClr val="tx1">
+                    <a:tint val="75000"/>
+                  </a:schemeClr>
+                </a:solidFill>
+                <a:latin typeface="+mn-lt"/>
+                <a:ea typeface="+mn-ea"/>
+                <a:cs typeface="+mn-cs"/>
+              </a:defRPr>
+            </a:lvl2pPr>
+            <a:lvl3pPr marL="914400" indent="0" algn="l" defTabSz="914400" rtl="0" eaLnBrk="1" latinLnBrk="0" hangingPunct="1">
+              <a:lnSpc>
+                <a:spcPct val="110000"/>
+              </a:lnSpc>
+              <a:spcBef>
+                <a:spcPts val="700"/>
+              </a:spcBef>
+              <a:buClr>
+                <a:schemeClr val="tx2"/>
+              </a:buClr>
+              <a:buFont typeface="Arial" panose="020B0604020202020204" pitchFamily="34" charset="0"/>
+              <a:buNone/>
+              <a:defRPr sz="1800" kern="1200">
+                <a:solidFill>
+                  <a:schemeClr val="tx1">
+                    <a:tint val="75000"/>
+                  </a:schemeClr>
+                </a:solidFill>
+                <a:latin typeface="+mn-lt"/>
+                <a:ea typeface="+mn-ea"/>
+                <a:cs typeface="+mn-cs"/>
+              </a:defRPr>
+            </a:lvl3pPr>
+            <a:lvl4pPr marL="1371600" indent="0" algn="l" defTabSz="914400" rtl="0" eaLnBrk="1" latinLnBrk="0" hangingPunct="1">
+              <a:lnSpc>
+                <a:spcPct val="110000"/>
+              </a:lnSpc>
+              <a:spcBef>
+                <a:spcPts val="700"/>
+              </a:spcBef>
+              <a:buClr>
+                <a:schemeClr val="tx2"/>
+              </a:buClr>
+              <a:buFont typeface="Gill Sans MT" panose="020B0502020104020203" pitchFamily="34" charset="0"/>
+              <a:buNone/>
+              <a:defRPr sz="1600" kern="1200">
+                <a:solidFill>
+                  <a:schemeClr val="tx1">
+                    <a:tint val="75000"/>
+                  </a:schemeClr>
+                </a:solidFill>
+                <a:latin typeface="+mn-lt"/>
+                <a:ea typeface="+mn-ea"/>
+                <a:cs typeface="+mn-cs"/>
+              </a:defRPr>
+            </a:lvl4pPr>
+            <a:lvl5pPr marL="1828800" indent="0" algn="l" defTabSz="914400" rtl="0" eaLnBrk="1" latinLnBrk="0" hangingPunct="1">
+              <a:lnSpc>
+                <a:spcPct val="110000"/>
+              </a:lnSpc>
+              <a:spcBef>
+                <a:spcPts val="700"/>
+              </a:spcBef>
+              <a:buClr>
+                <a:schemeClr val="tx2"/>
+              </a:buClr>
+              <a:buFont typeface="Arial" panose="020B0604020202020204" pitchFamily="34" charset="0"/>
+              <a:buNone/>
+              <a:defRPr sz="1600" kern="1200">
+                <a:solidFill>
+                  <a:schemeClr val="tx1">
+                    <a:tint val="75000"/>
+                  </a:schemeClr>
+                </a:solidFill>
+                <a:latin typeface="+mn-lt"/>
+                <a:ea typeface="+mn-ea"/>
+                <a:cs typeface="+mn-cs"/>
+              </a:defRPr>
+            </a:lvl5pPr>
+            <a:lvl6pPr marL="2286000" indent="0" algn="l" defTabSz="914400" rtl="0" eaLnBrk="1" latinLnBrk="0" hangingPunct="1">
+              <a:lnSpc>
+                <a:spcPct val="110000"/>
+              </a:lnSpc>
+              <a:spcBef>
+                <a:spcPts val="700"/>
+              </a:spcBef>
+              <a:buClr>
+                <a:schemeClr val="tx2"/>
+              </a:buClr>
+              <a:buFont typeface="Gill Sans MT" panose="020B0502020104020203" pitchFamily="34" charset="0"/>
+              <a:buNone/>
+              <a:defRPr sz="1600" kern="1200">
+                <a:solidFill>
+                  <a:schemeClr val="tx1">
+                    <a:tint val="75000"/>
+                  </a:schemeClr>
+                </a:solidFill>
+                <a:latin typeface="+mn-lt"/>
+                <a:ea typeface="+mn-ea"/>
+                <a:cs typeface="+mn-cs"/>
+              </a:defRPr>
+            </a:lvl6pPr>
+            <a:lvl7pPr marL="2743200" indent="0" algn="l" defTabSz="914400" rtl="0" eaLnBrk="1" latinLnBrk="0" hangingPunct="1">
+              <a:lnSpc>
+                <a:spcPct val="110000"/>
+              </a:lnSpc>
+              <a:spcBef>
+                <a:spcPts val="700"/>
+              </a:spcBef>
+              <a:buClr>
+                <a:schemeClr val="tx2"/>
+              </a:buClr>
+              <a:buFont typeface="Arial" panose="020B0604020202020204" pitchFamily="34" charset="0"/>
+              <a:buNone/>
+              <a:defRPr sz="1600" kern="1200">
+                <a:solidFill>
+                  <a:schemeClr val="tx1">
+                    <a:tint val="75000"/>
+                  </a:schemeClr>
+                </a:solidFill>
+                <a:latin typeface="+mn-lt"/>
+                <a:ea typeface="+mn-ea"/>
+                <a:cs typeface="+mn-cs"/>
+              </a:defRPr>
+            </a:lvl7pPr>
+            <a:lvl8pPr marL="3200400" indent="0" algn="l" defTabSz="914400" rtl="0" eaLnBrk="1" latinLnBrk="0" hangingPunct="1">
+              <a:lnSpc>
+                <a:spcPct val="110000"/>
+              </a:lnSpc>
+              <a:spcBef>
+                <a:spcPts val="700"/>
+              </a:spcBef>
+              <a:buClr>
+                <a:schemeClr val="tx2"/>
+              </a:buClr>
+              <a:buFont typeface="Gill Sans MT" panose="020B0502020104020203" pitchFamily="34" charset="0"/>
+              <a:buNone/>
+              <a:defRPr sz="1600" kern="1200" baseline="0">
+                <a:solidFill>
+                  <a:schemeClr val="tx1">
+                    <a:tint val="75000"/>
+                  </a:schemeClr>
+                </a:solidFill>
+                <a:latin typeface="+mn-lt"/>
+                <a:ea typeface="+mn-ea"/>
+                <a:cs typeface="+mn-cs"/>
+              </a:defRPr>
+            </a:lvl8pPr>
+            <a:lvl9pPr marL="3657600" indent="0" algn="l" defTabSz="914400" rtl="0" eaLnBrk="1" latinLnBrk="0" hangingPunct="1">
+              <a:lnSpc>
+                <a:spcPct val="110000"/>
+              </a:lnSpc>
+              <a:spcBef>
+                <a:spcPts val="700"/>
+              </a:spcBef>
+              <a:buClr>
+                <a:schemeClr val="tx2"/>
+              </a:buClr>
+              <a:buFont typeface="Arial" panose="020B0604020202020204" pitchFamily="34" charset="0"/>
+              <a:buNone/>
+              <a:defRPr sz="1600" kern="1200" baseline="0">
+                <a:solidFill>
+                  <a:schemeClr val="tx1">
+                    <a:tint val="75000"/>
+                  </a:schemeClr>
+                </a:solidFill>
+                <a:latin typeface="+mn-lt"/>
+                <a:ea typeface="+mn-ea"/>
+                <a:cs typeface="+mn-cs"/>
+              </a:defRPr>
+            </a:lvl9pPr>
+          </a:lstStyle>
+          <a:p>
+            <a:r>
+              <a:rPr lang="en-US" noProof="0" dirty="0"/>
+              <a:t>Insert Empty pizzas with equal cooking time to fill up batch?</a:t>
+            </a:r>
           </a:p>
         </p:txBody>
       </p:sp>
       <p:sp>
         <p:nvSpPr>
-          <p:cNvPr id="4" name="Pladsholder til indhold 3">
+          <p:cNvPr id="5" name="Pladsholder til tekst 2">
             <a:extLst>
               <a:ext uri="{FF2B5EF4-FFF2-40B4-BE49-F238E27FC236}">
-                <a16:creationId xmlns:a16="http://schemas.microsoft.com/office/drawing/2014/main" id="{F9C84B06-3C3A-A31C-FA40-47A33CAEECF2}"/>
+                <a16:creationId xmlns:a16="http://schemas.microsoft.com/office/drawing/2014/main" id="{85E611FE-01EA-BBBF-B9B3-8F11C1B3491F}"/>
               </a:ext>
             </a:extLst>
           </p:cNvPr>
-          <p:cNvSpPr>
-            <a:spLocks noGrp="1"/>
+          <p:cNvSpPr txBox="1">
+            <a:spLocks/>
           </p:cNvSpPr>
-          <p:nvPr>
-            <p:ph sz="half" idx="2"/>
-          </p:nvPr>
-        </p:nvSpPr>
-        <p:spPr/>
+          <p:nvPr/>
+        </p:nvSpPr>
+        <p:spPr>
+          <a:xfrm rot="20931083">
+            <a:off x="2952016" y="2245578"/>
+            <a:ext cx="7017488" cy="504002"/>
+          </a:xfrm>
+          <a:prstGeom prst="rect">
+            <a:avLst/>
+          </a:prstGeom>
+        </p:spPr>
         <p:txBody>
-          <a:bodyPr/>
-          <a:lstStyle/>
-          <a:p>
-            <a:endParaRPr lang="da-DK"/>
+          <a:bodyPr vert="horz" lIns="91440" tIns="45720" rIns="91440" bIns="45720" rtlCol="0">
+            <a:normAutofit/>
+          </a:bodyPr>
+          <a:lstStyle>
+            <a:lvl1pPr marL="0" indent="0" algn="l" defTabSz="914400" rtl="0" eaLnBrk="1" latinLnBrk="0" hangingPunct="1">
+              <a:lnSpc>
+                <a:spcPct val="100000"/>
+              </a:lnSpc>
+              <a:spcBef>
+                <a:spcPts val="700"/>
+              </a:spcBef>
+              <a:buClr>
+                <a:schemeClr val="tx2"/>
+              </a:buClr>
+              <a:buFont typeface="Arial" panose="020B0604020202020204" pitchFamily="34" charset="0"/>
+              <a:buNone/>
+              <a:defRPr sz="2000" b="1" i="0" kern="1200" cap="all" spc="400" baseline="0">
+                <a:solidFill>
+                  <a:schemeClr val="accent1"/>
+                </a:solidFill>
+                <a:latin typeface="+mn-lt"/>
+                <a:ea typeface="+mn-ea"/>
+                <a:cs typeface="+mn-cs"/>
+              </a:defRPr>
+            </a:lvl1pPr>
+            <a:lvl2pPr marL="457200" indent="0" algn="l" defTabSz="914400" rtl="0" eaLnBrk="1" latinLnBrk="0" hangingPunct="1">
+              <a:lnSpc>
+                <a:spcPct val="110000"/>
+              </a:lnSpc>
+              <a:spcBef>
+                <a:spcPts val="700"/>
+              </a:spcBef>
+              <a:buClr>
+                <a:schemeClr val="tx2"/>
+              </a:buClr>
+              <a:buFont typeface="Gill Sans MT" panose="020B0502020104020203" pitchFamily="34" charset="0"/>
+              <a:buNone/>
+              <a:defRPr sz="2000" kern="1200">
+                <a:solidFill>
+                  <a:schemeClr val="tx1">
+                    <a:tint val="75000"/>
+                  </a:schemeClr>
+                </a:solidFill>
+                <a:latin typeface="+mn-lt"/>
+                <a:ea typeface="+mn-ea"/>
+                <a:cs typeface="+mn-cs"/>
+              </a:defRPr>
+            </a:lvl2pPr>
+            <a:lvl3pPr marL="914400" indent="0" algn="l" defTabSz="914400" rtl="0" eaLnBrk="1" latinLnBrk="0" hangingPunct="1">
+              <a:lnSpc>
+                <a:spcPct val="110000"/>
+              </a:lnSpc>
+              <a:spcBef>
+                <a:spcPts val="700"/>
+              </a:spcBef>
+              <a:buClr>
+                <a:schemeClr val="tx2"/>
+              </a:buClr>
+              <a:buFont typeface="Arial" panose="020B0604020202020204" pitchFamily="34" charset="0"/>
+              <a:buNone/>
+              <a:defRPr sz="1800" kern="1200">
+                <a:solidFill>
+                  <a:schemeClr val="tx1">
+                    <a:tint val="75000"/>
+                  </a:schemeClr>
+                </a:solidFill>
+                <a:latin typeface="+mn-lt"/>
+                <a:ea typeface="+mn-ea"/>
+                <a:cs typeface="+mn-cs"/>
+              </a:defRPr>
+            </a:lvl3pPr>
+            <a:lvl4pPr marL="1371600" indent="0" algn="l" defTabSz="914400" rtl="0" eaLnBrk="1" latinLnBrk="0" hangingPunct="1">
+              <a:lnSpc>
+                <a:spcPct val="110000"/>
+              </a:lnSpc>
+              <a:spcBef>
+                <a:spcPts val="700"/>
+              </a:spcBef>
+              <a:buClr>
+                <a:schemeClr val="tx2"/>
+              </a:buClr>
+              <a:buFont typeface="Gill Sans MT" panose="020B0502020104020203" pitchFamily="34" charset="0"/>
+              <a:buNone/>
+              <a:defRPr sz="1600" kern="1200">
+                <a:solidFill>
+                  <a:schemeClr val="tx1">
+                    <a:tint val="75000"/>
+                  </a:schemeClr>
+                </a:solidFill>
+                <a:latin typeface="+mn-lt"/>
+                <a:ea typeface="+mn-ea"/>
+                <a:cs typeface="+mn-cs"/>
+              </a:defRPr>
+            </a:lvl4pPr>
+            <a:lvl5pPr marL="1828800" indent="0" algn="l" defTabSz="914400" rtl="0" eaLnBrk="1" latinLnBrk="0" hangingPunct="1">
+              <a:lnSpc>
+                <a:spcPct val="110000"/>
+              </a:lnSpc>
+              <a:spcBef>
+                <a:spcPts val="700"/>
+              </a:spcBef>
+              <a:buClr>
+                <a:schemeClr val="tx2"/>
+              </a:buClr>
+              <a:buFont typeface="Arial" panose="020B0604020202020204" pitchFamily="34" charset="0"/>
+              <a:buNone/>
+              <a:defRPr sz="1600" kern="1200">
+                <a:solidFill>
+                  <a:schemeClr val="tx1">
+                    <a:tint val="75000"/>
+                  </a:schemeClr>
+                </a:solidFill>
+                <a:latin typeface="+mn-lt"/>
+                <a:ea typeface="+mn-ea"/>
+                <a:cs typeface="+mn-cs"/>
+              </a:defRPr>
+            </a:lvl5pPr>
+            <a:lvl6pPr marL="2286000" indent="0" algn="l" defTabSz="914400" rtl="0" eaLnBrk="1" latinLnBrk="0" hangingPunct="1">
+              <a:lnSpc>
+                <a:spcPct val="110000"/>
+              </a:lnSpc>
+              <a:spcBef>
+                <a:spcPts val="700"/>
+              </a:spcBef>
+              <a:buClr>
+                <a:schemeClr val="tx2"/>
+              </a:buClr>
+              <a:buFont typeface="Gill Sans MT" panose="020B0502020104020203" pitchFamily="34" charset="0"/>
+              <a:buNone/>
+              <a:defRPr sz="1600" kern="1200">
+                <a:solidFill>
+                  <a:schemeClr val="tx1">
+                    <a:tint val="75000"/>
+                  </a:schemeClr>
+                </a:solidFill>
+                <a:latin typeface="+mn-lt"/>
+                <a:ea typeface="+mn-ea"/>
+                <a:cs typeface="+mn-cs"/>
+              </a:defRPr>
+            </a:lvl6pPr>
+            <a:lvl7pPr marL="2743200" indent="0" algn="l" defTabSz="914400" rtl="0" eaLnBrk="1" latinLnBrk="0" hangingPunct="1">
+              <a:lnSpc>
+                <a:spcPct val="110000"/>
+              </a:lnSpc>
+              <a:spcBef>
+                <a:spcPts val="700"/>
+              </a:spcBef>
+              <a:buClr>
+                <a:schemeClr val="tx2"/>
+              </a:buClr>
+              <a:buFont typeface="Arial" panose="020B0604020202020204" pitchFamily="34" charset="0"/>
+              <a:buNone/>
+              <a:defRPr sz="1600" kern="1200">
+                <a:solidFill>
+                  <a:schemeClr val="tx1">
+                    <a:tint val="75000"/>
+                  </a:schemeClr>
+                </a:solidFill>
+                <a:latin typeface="+mn-lt"/>
+                <a:ea typeface="+mn-ea"/>
+                <a:cs typeface="+mn-cs"/>
+              </a:defRPr>
+            </a:lvl7pPr>
+            <a:lvl8pPr marL="3200400" indent="0" algn="l" defTabSz="914400" rtl="0" eaLnBrk="1" latinLnBrk="0" hangingPunct="1">
+              <a:lnSpc>
+                <a:spcPct val="110000"/>
+              </a:lnSpc>
+              <a:spcBef>
+                <a:spcPts val="700"/>
+              </a:spcBef>
+              <a:buClr>
+                <a:schemeClr val="tx2"/>
+              </a:buClr>
+              <a:buFont typeface="Gill Sans MT" panose="020B0502020104020203" pitchFamily="34" charset="0"/>
+              <a:buNone/>
+              <a:defRPr sz="1600" kern="1200" baseline="0">
+                <a:solidFill>
+                  <a:schemeClr val="tx1">
+                    <a:tint val="75000"/>
+                  </a:schemeClr>
+                </a:solidFill>
+                <a:latin typeface="+mn-lt"/>
+                <a:ea typeface="+mn-ea"/>
+                <a:cs typeface="+mn-cs"/>
+              </a:defRPr>
+            </a:lvl8pPr>
+            <a:lvl9pPr marL="3657600" indent="0" algn="l" defTabSz="914400" rtl="0" eaLnBrk="1" latinLnBrk="0" hangingPunct="1">
+              <a:lnSpc>
+                <a:spcPct val="110000"/>
+              </a:lnSpc>
+              <a:spcBef>
+                <a:spcPts val="700"/>
+              </a:spcBef>
+              <a:buClr>
+                <a:schemeClr val="tx2"/>
+              </a:buClr>
+              <a:buFont typeface="Arial" panose="020B0604020202020204" pitchFamily="34" charset="0"/>
+              <a:buNone/>
+              <a:defRPr sz="1600" kern="1200" baseline="0">
+                <a:solidFill>
+                  <a:schemeClr val="tx1">
+                    <a:tint val="75000"/>
+                  </a:schemeClr>
+                </a:solidFill>
+                <a:latin typeface="+mn-lt"/>
+                <a:ea typeface="+mn-ea"/>
+                <a:cs typeface="+mn-cs"/>
+              </a:defRPr>
+            </a:lvl9pPr>
+          </a:lstStyle>
+          <a:p>
+            <a:r>
+              <a:rPr lang="en-US" noProof="0" dirty="0"/>
+              <a:t>Divide into Batches?</a:t>
+            </a:r>
+          </a:p>
+        </p:txBody>
+      </p:sp>
+      <p:sp>
+        <p:nvSpPr>
+          <p:cNvPr id="6" name="Pladsholder til tekst 2">
+            <a:extLst>
+              <a:ext uri="{FF2B5EF4-FFF2-40B4-BE49-F238E27FC236}">
+                <a16:creationId xmlns:a16="http://schemas.microsoft.com/office/drawing/2014/main" id="{A0BC7C3D-647E-B2E9-52DC-A9FFF7206C06}"/>
+              </a:ext>
+            </a:extLst>
+          </p:cNvPr>
+          <p:cNvSpPr txBox="1">
+            <a:spLocks/>
+          </p:cNvSpPr>
+          <p:nvPr/>
+        </p:nvSpPr>
+        <p:spPr>
+          <a:xfrm rot="231659">
+            <a:off x="4664496" y="1096335"/>
+            <a:ext cx="8169581" cy="951135"/>
+          </a:xfrm>
+          <a:prstGeom prst="rect">
+            <a:avLst/>
+          </a:prstGeom>
+        </p:spPr>
+        <p:txBody>
+          <a:bodyPr vert="horz" lIns="91440" tIns="45720" rIns="91440" bIns="45720" rtlCol="0">
+            <a:normAutofit/>
+          </a:bodyPr>
+          <a:lstStyle>
+            <a:lvl1pPr marL="0" indent="0" algn="l" defTabSz="914400" rtl="0" eaLnBrk="1" latinLnBrk="0" hangingPunct="1">
+              <a:lnSpc>
+                <a:spcPct val="100000"/>
+              </a:lnSpc>
+              <a:spcBef>
+                <a:spcPts val="700"/>
+              </a:spcBef>
+              <a:buClr>
+                <a:schemeClr val="tx2"/>
+              </a:buClr>
+              <a:buFont typeface="Arial" panose="020B0604020202020204" pitchFamily="34" charset="0"/>
+              <a:buNone/>
+              <a:defRPr sz="2000" b="1" i="0" kern="1200" cap="all" spc="400" baseline="0">
+                <a:solidFill>
+                  <a:schemeClr val="accent1"/>
+                </a:solidFill>
+                <a:latin typeface="+mn-lt"/>
+                <a:ea typeface="+mn-ea"/>
+                <a:cs typeface="+mn-cs"/>
+              </a:defRPr>
+            </a:lvl1pPr>
+            <a:lvl2pPr marL="457200" indent="0" algn="l" defTabSz="914400" rtl="0" eaLnBrk="1" latinLnBrk="0" hangingPunct="1">
+              <a:lnSpc>
+                <a:spcPct val="110000"/>
+              </a:lnSpc>
+              <a:spcBef>
+                <a:spcPts val="700"/>
+              </a:spcBef>
+              <a:buClr>
+                <a:schemeClr val="tx2"/>
+              </a:buClr>
+              <a:buFont typeface="Gill Sans MT" panose="020B0502020104020203" pitchFamily="34" charset="0"/>
+              <a:buNone/>
+              <a:defRPr sz="2000" kern="1200">
+                <a:solidFill>
+                  <a:schemeClr val="tx1">
+                    <a:tint val="75000"/>
+                  </a:schemeClr>
+                </a:solidFill>
+                <a:latin typeface="+mn-lt"/>
+                <a:ea typeface="+mn-ea"/>
+                <a:cs typeface="+mn-cs"/>
+              </a:defRPr>
+            </a:lvl2pPr>
+            <a:lvl3pPr marL="914400" indent="0" algn="l" defTabSz="914400" rtl="0" eaLnBrk="1" latinLnBrk="0" hangingPunct="1">
+              <a:lnSpc>
+                <a:spcPct val="110000"/>
+              </a:lnSpc>
+              <a:spcBef>
+                <a:spcPts val="700"/>
+              </a:spcBef>
+              <a:buClr>
+                <a:schemeClr val="tx2"/>
+              </a:buClr>
+              <a:buFont typeface="Arial" panose="020B0604020202020204" pitchFamily="34" charset="0"/>
+              <a:buNone/>
+              <a:defRPr sz="1800" kern="1200">
+                <a:solidFill>
+                  <a:schemeClr val="tx1">
+                    <a:tint val="75000"/>
+                  </a:schemeClr>
+                </a:solidFill>
+                <a:latin typeface="+mn-lt"/>
+                <a:ea typeface="+mn-ea"/>
+                <a:cs typeface="+mn-cs"/>
+              </a:defRPr>
+            </a:lvl3pPr>
+            <a:lvl4pPr marL="1371600" indent="0" algn="l" defTabSz="914400" rtl="0" eaLnBrk="1" latinLnBrk="0" hangingPunct="1">
+              <a:lnSpc>
+                <a:spcPct val="110000"/>
+              </a:lnSpc>
+              <a:spcBef>
+                <a:spcPts val="700"/>
+              </a:spcBef>
+              <a:buClr>
+                <a:schemeClr val="tx2"/>
+              </a:buClr>
+              <a:buFont typeface="Gill Sans MT" panose="020B0502020104020203" pitchFamily="34" charset="0"/>
+              <a:buNone/>
+              <a:defRPr sz="1600" kern="1200">
+                <a:solidFill>
+                  <a:schemeClr val="tx1">
+                    <a:tint val="75000"/>
+                  </a:schemeClr>
+                </a:solidFill>
+                <a:latin typeface="+mn-lt"/>
+                <a:ea typeface="+mn-ea"/>
+                <a:cs typeface="+mn-cs"/>
+              </a:defRPr>
+            </a:lvl4pPr>
+            <a:lvl5pPr marL="1828800" indent="0" algn="l" defTabSz="914400" rtl="0" eaLnBrk="1" latinLnBrk="0" hangingPunct="1">
+              <a:lnSpc>
+                <a:spcPct val="110000"/>
+              </a:lnSpc>
+              <a:spcBef>
+                <a:spcPts val="700"/>
+              </a:spcBef>
+              <a:buClr>
+                <a:schemeClr val="tx2"/>
+              </a:buClr>
+              <a:buFont typeface="Arial" panose="020B0604020202020204" pitchFamily="34" charset="0"/>
+              <a:buNone/>
+              <a:defRPr sz="1600" kern="1200">
+                <a:solidFill>
+                  <a:schemeClr val="tx1">
+                    <a:tint val="75000"/>
+                  </a:schemeClr>
+                </a:solidFill>
+                <a:latin typeface="+mn-lt"/>
+                <a:ea typeface="+mn-ea"/>
+                <a:cs typeface="+mn-cs"/>
+              </a:defRPr>
+            </a:lvl5pPr>
+            <a:lvl6pPr marL="2286000" indent="0" algn="l" defTabSz="914400" rtl="0" eaLnBrk="1" latinLnBrk="0" hangingPunct="1">
+              <a:lnSpc>
+                <a:spcPct val="110000"/>
+              </a:lnSpc>
+              <a:spcBef>
+                <a:spcPts val="700"/>
+              </a:spcBef>
+              <a:buClr>
+                <a:schemeClr val="tx2"/>
+              </a:buClr>
+              <a:buFont typeface="Gill Sans MT" panose="020B0502020104020203" pitchFamily="34" charset="0"/>
+              <a:buNone/>
+              <a:defRPr sz="1600" kern="1200">
+                <a:solidFill>
+                  <a:schemeClr val="tx1">
+                    <a:tint val="75000"/>
+                  </a:schemeClr>
+                </a:solidFill>
+                <a:latin typeface="+mn-lt"/>
+                <a:ea typeface="+mn-ea"/>
+                <a:cs typeface="+mn-cs"/>
+              </a:defRPr>
+            </a:lvl6pPr>
+            <a:lvl7pPr marL="2743200" indent="0" algn="l" defTabSz="914400" rtl="0" eaLnBrk="1" latinLnBrk="0" hangingPunct="1">
+              <a:lnSpc>
+                <a:spcPct val="110000"/>
+              </a:lnSpc>
+              <a:spcBef>
+                <a:spcPts val="700"/>
+              </a:spcBef>
+              <a:buClr>
+                <a:schemeClr val="tx2"/>
+              </a:buClr>
+              <a:buFont typeface="Arial" panose="020B0604020202020204" pitchFamily="34" charset="0"/>
+              <a:buNone/>
+              <a:defRPr sz="1600" kern="1200">
+                <a:solidFill>
+                  <a:schemeClr val="tx1">
+                    <a:tint val="75000"/>
+                  </a:schemeClr>
+                </a:solidFill>
+                <a:latin typeface="+mn-lt"/>
+                <a:ea typeface="+mn-ea"/>
+                <a:cs typeface="+mn-cs"/>
+              </a:defRPr>
+            </a:lvl7pPr>
+            <a:lvl8pPr marL="3200400" indent="0" algn="l" defTabSz="914400" rtl="0" eaLnBrk="1" latinLnBrk="0" hangingPunct="1">
+              <a:lnSpc>
+                <a:spcPct val="110000"/>
+              </a:lnSpc>
+              <a:spcBef>
+                <a:spcPts val="700"/>
+              </a:spcBef>
+              <a:buClr>
+                <a:schemeClr val="tx2"/>
+              </a:buClr>
+              <a:buFont typeface="Gill Sans MT" panose="020B0502020104020203" pitchFamily="34" charset="0"/>
+              <a:buNone/>
+              <a:defRPr sz="1600" kern="1200" baseline="0">
+                <a:solidFill>
+                  <a:schemeClr val="tx1">
+                    <a:tint val="75000"/>
+                  </a:schemeClr>
+                </a:solidFill>
+                <a:latin typeface="+mn-lt"/>
+                <a:ea typeface="+mn-ea"/>
+                <a:cs typeface="+mn-cs"/>
+              </a:defRPr>
+            </a:lvl8pPr>
+            <a:lvl9pPr marL="3657600" indent="0" algn="l" defTabSz="914400" rtl="0" eaLnBrk="1" latinLnBrk="0" hangingPunct="1">
+              <a:lnSpc>
+                <a:spcPct val="110000"/>
+              </a:lnSpc>
+              <a:spcBef>
+                <a:spcPts val="700"/>
+              </a:spcBef>
+              <a:buClr>
+                <a:schemeClr val="tx2"/>
+              </a:buClr>
+              <a:buFont typeface="Arial" panose="020B0604020202020204" pitchFamily="34" charset="0"/>
+              <a:buNone/>
+              <a:defRPr sz="1600" kern="1200" baseline="0">
+                <a:solidFill>
+                  <a:schemeClr val="tx1">
+                    <a:tint val="75000"/>
+                  </a:schemeClr>
+                </a:solidFill>
+                <a:latin typeface="+mn-lt"/>
+                <a:ea typeface="+mn-ea"/>
+                <a:cs typeface="+mn-cs"/>
+              </a:defRPr>
+            </a:lvl9pPr>
+          </a:lstStyle>
+          <a:p>
+            <a:r>
+              <a:rPr lang="en-US" noProof="0" dirty="0"/>
+              <a:t>Insert Empty pizzas with 0 cooking time to fill up batch?</a:t>
+            </a:r>
+          </a:p>
+        </p:txBody>
+      </p:sp>
+      <p:sp>
+        <p:nvSpPr>
+          <p:cNvPr id="7" name="Pladsholder til tekst 2">
+            <a:extLst>
+              <a:ext uri="{FF2B5EF4-FFF2-40B4-BE49-F238E27FC236}">
+                <a16:creationId xmlns:a16="http://schemas.microsoft.com/office/drawing/2014/main" id="{822AB52D-885A-0181-A536-6E2EA43CDF88}"/>
+              </a:ext>
+            </a:extLst>
+          </p:cNvPr>
+          <p:cNvSpPr txBox="1">
+            <a:spLocks/>
+          </p:cNvSpPr>
+          <p:nvPr/>
+        </p:nvSpPr>
+        <p:spPr>
+          <a:xfrm rot="21364985">
+            <a:off x="2354907" y="239092"/>
+            <a:ext cx="7017488" cy="504002"/>
+          </a:xfrm>
+          <a:prstGeom prst="rect">
+            <a:avLst/>
+          </a:prstGeom>
+        </p:spPr>
+        <p:txBody>
+          <a:bodyPr vert="horz" lIns="91440" tIns="45720" rIns="91440" bIns="45720" rtlCol="0">
+            <a:normAutofit/>
+          </a:bodyPr>
+          <a:lstStyle>
+            <a:lvl1pPr marL="0" indent="0" algn="l" defTabSz="914400" rtl="0" eaLnBrk="1" latinLnBrk="0" hangingPunct="1">
+              <a:lnSpc>
+                <a:spcPct val="100000"/>
+              </a:lnSpc>
+              <a:spcBef>
+                <a:spcPts val="700"/>
+              </a:spcBef>
+              <a:buClr>
+                <a:schemeClr val="tx2"/>
+              </a:buClr>
+              <a:buFont typeface="Arial" panose="020B0604020202020204" pitchFamily="34" charset="0"/>
+              <a:buNone/>
+              <a:defRPr sz="2000" b="1" i="0" kern="1200" cap="all" spc="400" baseline="0">
+                <a:solidFill>
+                  <a:schemeClr val="accent1"/>
+                </a:solidFill>
+                <a:latin typeface="+mn-lt"/>
+                <a:ea typeface="+mn-ea"/>
+                <a:cs typeface="+mn-cs"/>
+              </a:defRPr>
+            </a:lvl1pPr>
+            <a:lvl2pPr marL="457200" indent="0" algn="l" defTabSz="914400" rtl="0" eaLnBrk="1" latinLnBrk="0" hangingPunct="1">
+              <a:lnSpc>
+                <a:spcPct val="110000"/>
+              </a:lnSpc>
+              <a:spcBef>
+                <a:spcPts val="700"/>
+              </a:spcBef>
+              <a:buClr>
+                <a:schemeClr val="tx2"/>
+              </a:buClr>
+              <a:buFont typeface="Gill Sans MT" panose="020B0502020104020203" pitchFamily="34" charset="0"/>
+              <a:buNone/>
+              <a:defRPr sz="2000" kern="1200">
+                <a:solidFill>
+                  <a:schemeClr val="tx1">
+                    <a:tint val="75000"/>
+                  </a:schemeClr>
+                </a:solidFill>
+                <a:latin typeface="+mn-lt"/>
+                <a:ea typeface="+mn-ea"/>
+                <a:cs typeface="+mn-cs"/>
+              </a:defRPr>
+            </a:lvl2pPr>
+            <a:lvl3pPr marL="914400" indent="0" algn="l" defTabSz="914400" rtl="0" eaLnBrk="1" latinLnBrk="0" hangingPunct="1">
+              <a:lnSpc>
+                <a:spcPct val="110000"/>
+              </a:lnSpc>
+              <a:spcBef>
+                <a:spcPts val="700"/>
+              </a:spcBef>
+              <a:buClr>
+                <a:schemeClr val="tx2"/>
+              </a:buClr>
+              <a:buFont typeface="Arial" panose="020B0604020202020204" pitchFamily="34" charset="0"/>
+              <a:buNone/>
+              <a:defRPr sz="1800" kern="1200">
+                <a:solidFill>
+                  <a:schemeClr val="tx1">
+                    <a:tint val="75000"/>
+                  </a:schemeClr>
+                </a:solidFill>
+                <a:latin typeface="+mn-lt"/>
+                <a:ea typeface="+mn-ea"/>
+                <a:cs typeface="+mn-cs"/>
+              </a:defRPr>
+            </a:lvl3pPr>
+            <a:lvl4pPr marL="1371600" indent="0" algn="l" defTabSz="914400" rtl="0" eaLnBrk="1" latinLnBrk="0" hangingPunct="1">
+              <a:lnSpc>
+                <a:spcPct val="110000"/>
+              </a:lnSpc>
+              <a:spcBef>
+                <a:spcPts val="700"/>
+              </a:spcBef>
+              <a:buClr>
+                <a:schemeClr val="tx2"/>
+              </a:buClr>
+              <a:buFont typeface="Gill Sans MT" panose="020B0502020104020203" pitchFamily="34" charset="0"/>
+              <a:buNone/>
+              <a:defRPr sz="1600" kern="1200">
+                <a:solidFill>
+                  <a:schemeClr val="tx1">
+                    <a:tint val="75000"/>
+                  </a:schemeClr>
+                </a:solidFill>
+                <a:latin typeface="+mn-lt"/>
+                <a:ea typeface="+mn-ea"/>
+                <a:cs typeface="+mn-cs"/>
+              </a:defRPr>
+            </a:lvl4pPr>
+            <a:lvl5pPr marL="1828800" indent="0" algn="l" defTabSz="914400" rtl="0" eaLnBrk="1" latinLnBrk="0" hangingPunct="1">
+              <a:lnSpc>
+                <a:spcPct val="110000"/>
+              </a:lnSpc>
+              <a:spcBef>
+                <a:spcPts val="700"/>
+              </a:spcBef>
+              <a:buClr>
+                <a:schemeClr val="tx2"/>
+              </a:buClr>
+              <a:buFont typeface="Arial" panose="020B0604020202020204" pitchFamily="34" charset="0"/>
+              <a:buNone/>
+              <a:defRPr sz="1600" kern="1200">
+                <a:solidFill>
+                  <a:schemeClr val="tx1">
+                    <a:tint val="75000"/>
+                  </a:schemeClr>
+                </a:solidFill>
+                <a:latin typeface="+mn-lt"/>
+                <a:ea typeface="+mn-ea"/>
+                <a:cs typeface="+mn-cs"/>
+              </a:defRPr>
+            </a:lvl5pPr>
+            <a:lvl6pPr marL="2286000" indent="0" algn="l" defTabSz="914400" rtl="0" eaLnBrk="1" latinLnBrk="0" hangingPunct="1">
+              <a:lnSpc>
+                <a:spcPct val="110000"/>
+              </a:lnSpc>
+              <a:spcBef>
+                <a:spcPts val="700"/>
+              </a:spcBef>
+              <a:buClr>
+                <a:schemeClr val="tx2"/>
+              </a:buClr>
+              <a:buFont typeface="Gill Sans MT" panose="020B0502020104020203" pitchFamily="34" charset="0"/>
+              <a:buNone/>
+              <a:defRPr sz="1600" kern="1200">
+                <a:solidFill>
+                  <a:schemeClr val="tx1">
+                    <a:tint val="75000"/>
+                  </a:schemeClr>
+                </a:solidFill>
+                <a:latin typeface="+mn-lt"/>
+                <a:ea typeface="+mn-ea"/>
+                <a:cs typeface="+mn-cs"/>
+              </a:defRPr>
+            </a:lvl6pPr>
+            <a:lvl7pPr marL="2743200" indent="0" algn="l" defTabSz="914400" rtl="0" eaLnBrk="1" latinLnBrk="0" hangingPunct="1">
+              <a:lnSpc>
+                <a:spcPct val="110000"/>
+              </a:lnSpc>
+              <a:spcBef>
+                <a:spcPts val="700"/>
+              </a:spcBef>
+              <a:buClr>
+                <a:schemeClr val="tx2"/>
+              </a:buClr>
+              <a:buFont typeface="Arial" panose="020B0604020202020204" pitchFamily="34" charset="0"/>
+              <a:buNone/>
+              <a:defRPr sz="1600" kern="1200">
+                <a:solidFill>
+                  <a:schemeClr val="tx1">
+                    <a:tint val="75000"/>
+                  </a:schemeClr>
+                </a:solidFill>
+                <a:latin typeface="+mn-lt"/>
+                <a:ea typeface="+mn-ea"/>
+                <a:cs typeface="+mn-cs"/>
+              </a:defRPr>
+            </a:lvl7pPr>
+            <a:lvl8pPr marL="3200400" indent="0" algn="l" defTabSz="914400" rtl="0" eaLnBrk="1" latinLnBrk="0" hangingPunct="1">
+              <a:lnSpc>
+                <a:spcPct val="110000"/>
+              </a:lnSpc>
+              <a:spcBef>
+                <a:spcPts val="700"/>
+              </a:spcBef>
+              <a:buClr>
+                <a:schemeClr val="tx2"/>
+              </a:buClr>
+              <a:buFont typeface="Gill Sans MT" panose="020B0502020104020203" pitchFamily="34" charset="0"/>
+              <a:buNone/>
+              <a:defRPr sz="1600" kern="1200" baseline="0">
+                <a:solidFill>
+                  <a:schemeClr val="tx1">
+                    <a:tint val="75000"/>
+                  </a:schemeClr>
+                </a:solidFill>
+                <a:latin typeface="+mn-lt"/>
+                <a:ea typeface="+mn-ea"/>
+                <a:cs typeface="+mn-cs"/>
+              </a:defRPr>
+            </a:lvl8pPr>
+            <a:lvl9pPr marL="3657600" indent="0" algn="l" defTabSz="914400" rtl="0" eaLnBrk="1" latinLnBrk="0" hangingPunct="1">
+              <a:lnSpc>
+                <a:spcPct val="110000"/>
+              </a:lnSpc>
+              <a:spcBef>
+                <a:spcPts val="700"/>
+              </a:spcBef>
+              <a:buClr>
+                <a:schemeClr val="tx2"/>
+              </a:buClr>
+              <a:buFont typeface="Arial" panose="020B0604020202020204" pitchFamily="34" charset="0"/>
+              <a:buNone/>
+              <a:defRPr sz="1600" kern="1200" baseline="0">
+                <a:solidFill>
+                  <a:schemeClr val="tx1">
+                    <a:tint val="75000"/>
+                  </a:schemeClr>
+                </a:solidFill>
+                <a:latin typeface="+mn-lt"/>
+                <a:ea typeface="+mn-ea"/>
+                <a:cs typeface="+mn-cs"/>
+              </a:defRPr>
+            </a:lvl9pPr>
+          </a:lstStyle>
+          <a:p>
+            <a:r>
+              <a:rPr lang="en-US" noProof="0" dirty="0"/>
+              <a:t>Perhaps order that list?</a:t>
+            </a:r>
+          </a:p>
+        </p:txBody>
+      </p:sp>
+      <p:sp>
+        <p:nvSpPr>
+          <p:cNvPr id="8" name="Pladsholder til tekst 2">
+            <a:extLst>
+              <a:ext uri="{FF2B5EF4-FFF2-40B4-BE49-F238E27FC236}">
+                <a16:creationId xmlns:a16="http://schemas.microsoft.com/office/drawing/2014/main" id="{57B6532C-0A6F-3E59-5B0C-10ECD94CCC82}"/>
+              </a:ext>
+            </a:extLst>
+          </p:cNvPr>
+          <p:cNvSpPr txBox="1">
+            <a:spLocks/>
+          </p:cNvSpPr>
+          <p:nvPr/>
+        </p:nvSpPr>
+        <p:spPr>
+          <a:xfrm rot="183458">
+            <a:off x="8431965" y="5984980"/>
+            <a:ext cx="4643027" cy="504002"/>
+          </a:xfrm>
+          <a:prstGeom prst="rect">
+            <a:avLst/>
+          </a:prstGeom>
+        </p:spPr>
+        <p:txBody>
+          <a:bodyPr vert="horz" lIns="91440" tIns="45720" rIns="91440" bIns="45720" rtlCol="0">
+            <a:normAutofit/>
+          </a:bodyPr>
+          <a:lstStyle>
+            <a:lvl1pPr marL="0" indent="0" algn="l" defTabSz="914400" rtl="0" eaLnBrk="1" latinLnBrk="0" hangingPunct="1">
+              <a:lnSpc>
+                <a:spcPct val="100000"/>
+              </a:lnSpc>
+              <a:spcBef>
+                <a:spcPts val="700"/>
+              </a:spcBef>
+              <a:buClr>
+                <a:schemeClr val="tx2"/>
+              </a:buClr>
+              <a:buFont typeface="Arial" panose="020B0604020202020204" pitchFamily="34" charset="0"/>
+              <a:buNone/>
+              <a:defRPr sz="2000" b="1" i="0" kern="1200" cap="all" spc="400" baseline="0">
+                <a:solidFill>
+                  <a:schemeClr val="accent1"/>
+                </a:solidFill>
+                <a:latin typeface="+mn-lt"/>
+                <a:ea typeface="+mn-ea"/>
+                <a:cs typeface="+mn-cs"/>
+              </a:defRPr>
+            </a:lvl1pPr>
+            <a:lvl2pPr marL="457200" indent="0" algn="l" defTabSz="914400" rtl="0" eaLnBrk="1" latinLnBrk="0" hangingPunct="1">
+              <a:lnSpc>
+                <a:spcPct val="110000"/>
+              </a:lnSpc>
+              <a:spcBef>
+                <a:spcPts val="700"/>
+              </a:spcBef>
+              <a:buClr>
+                <a:schemeClr val="tx2"/>
+              </a:buClr>
+              <a:buFont typeface="Gill Sans MT" panose="020B0502020104020203" pitchFamily="34" charset="0"/>
+              <a:buNone/>
+              <a:defRPr sz="2000" kern="1200">
+                <a:solidFill>
+                  <a:schemeClr val="tx1">
+                    <a:tint val="75000"/>
+                  </a:schemeClr>
+                </a:solidFill>
+                <a:latin typeface="+mn-lt"/>
+                <a:ea typeface="+mn-ea"/>
+                <a:cs typeface="+mn-cs"/>
+              </a:defRPr>
+            </a:lvl2pPr>
+            <a:lvl3pPr marL="914400" indent="0" algn="l" defTabSz="914400" rtl="0" eaLnBrk="1" latinLnBrk="0" hangingPunct="1">
+              <a:lnSpc>
+                <a:spcPct val="110000"/>
+              </a:lnSpc>
+              <a:spcBef>
+                <a:spcPts val="700"/>
+              </a:spcBef>
+              <a:buClr>
+                <a:schemeClr val="tx2"/>
+              </a:buClr>
+              <a:buFont typeface="Arial" panose="020B0604020202020204" pitchFamily="34" charset="0"/>
+              <a:buNone/>
+              <a:defRPr sz="1800" kern="1200">
+                <a:solidFill>
+                  <a:schemeClr val="tx1">
+                    <a:tint val="75000"/>
+                  </a:schemeClr>
+                </a:solidFill>
+                <a:latin typeface="+mn-lt"/>
+                <a:ea typeface="+mn-ea"/>
+                <a:cs typeface="+mn-cs"/>
+              </a:defRPr>
+            </a:lvl3pPr>
+            <a:lvl4pPr marL="1371600" indent="0" algn="l" defTabSz="914400" rtl="0" eaLnBrk="1" latinLnBrk="0" hangingPunct="1">
+              <a:lnSpc>
+                <a:spcPct val="110000"/>
+              </a:lnSpc>
+              <a:spcBef>
+                <a:spcPts val="700"/>
+              </a:spcBef>
+              <a:buClr>
+                <a:schemeClr val="tx2"/>
+              </a:buClr>
+              <a:buFont typeface="Gill Sans MT" panose="020B0502020104020203" pitchFamily="34" charset="0"/>
+              <a:buNone/>
+              <a:defRPr sz="1600" kern="1200">
+                <a:solidFill>
+                  <a:schemeClr val="tx1">
+                    <a:tint val="75000"/>
+                  </a:schemeClr>
+                </a:solidFill>
+                <a:latin typeface="+mn-lt"/>
+                <a:ea typeface="+mn-ea"/>
+                <a:cs typeface="+mn-cs"/>
+              </a:defRPr>
+            </a:lvl4pPr>
+            <a:lvl5pPr marL="1828800" indent="0" algn="l" defTabSz="914400" rtl="0" eaLnBrk="1" latinLnBrk="0" hangingPunct="1">
+              <a:lnSpc>
+                <a:spcPct val="110000"/>
+              </a:lnSpc>
+              <a:spcBef>
+                <a:spcPts val="700"/>
+              </a:spcBef>
+              <a:buClr>
+                <a:schemeClr val="tx2"/>
+              </a:buClr>
+              <a:buFont typeface="Arial" panose="020B0604020202020204" pitchFamily="34" charset="0"/>
+              <a:buNone/>
+              <a:defRPr sz="1600" kern="1200">
+                <a:solidFill>
+                  <a:schemeClr val="tx1">
+                    <a:tint val="75000"/>
+                  </a:schemeClr>
+                </a:solidFill>
+                <a:latin typeface="+mn-lt"/>
+                <a:ea typeface="+mn-ea"/>
+                <a:cs typeface="+mn-cs"/>
+              </a:defRPr>
+            </a:lvl5pPr>
+            <a:lvl6pPr marL="2286000" indent="0" algn="l" defTabSz="914400" rtl="0" eaLnBrk="1" latinLnBrk="0" hangingPunct="1">
+              <a:lnSpc>
+                <a:spcPct val="110000"/>
+              </a:lnSpc>
+              <a:spcBef>
+                <a:spcPts val="700"/>
+              </a:spcBef>
+              <a:buClr>
+                <a:schemeClr val="tx2"/>
+              </a:buClr>
+              <a:buFont typeface="Gill Sans MT" panose="020B0502020104020203" pitchFamily="34" charset="0"/>
+              <a:buNone/>
+              <a:defRPr sz="1600" kern="1200">
+                <a:solidFill>
+                  <a:schemeClr val="tx1">
+                    <a:tint val="75000"/>
+                  </a:schemeClr>
+                </a:solidFill>
+                <a:latin typeface="+mn-lt"/>
+                <a:ea typeface="+mn-ea"/>
+                <a:cs typeface="+mn-cs"/>
+              </a:defRPr>
+            </a:lvl6pPr>
+            <a:lvl7pPr marL="2743200" indent="0" algn="l" defTabSz="914400" rtl="0" eaLnBrk="1" latinLnBrk="0" hangingPunct="1">
+              <a:lnSpc>
+                <a:spcPct val="110000"/>
+              </a:lnSpc>
+              <a:spcBef>
+                <a:spcPts val="700"/>
+              </a:spcBef>
+              <a:buClr>
+                <a:schemeClr val="tx2"/>
+              </a:buClr>
+              <a:buFont typeface="Arial" panose="020B0604020202020204" pitchFamily="34" charset="0"/>
+              <a:buNone/>
+              <a:defRPr sz="1600" kern="1200">
+                <a:solidFill>
+                  <a:schemeClr val="tx1">
+                    <a:tint val="75000"/>
+                  </a:schemeClr>
+                </a:solidFill>
+                <a:latin typeface="+mn-lt"/>
+                <a:ea typeface="+mn-ea"/>
+                <a:cs typeface="+mn-cs"/>
+              </a:defRPr>
+            </a:lvl7pPr>
+            <a:lvl8pPr marL="3200400" indent="0" algn="l" defTabSz="914400" rtl="0" eaLnBrk="1" latinLnBrk="0" hangingPunct="1">
+              <a:lnSpc>
+                <a:spcPct val="110000"/>
+              </a:lnSpc>
+              <a:spcBef>
+                <a:spcPts val="700"/>
+              </a:spcBef>
+              <a:buClr>
+                <a:schemeClr val="tx2"/>
+              </a:buClr>
+              <a:buFont typeface="Gill Sans MT" panose="020B0502020104020203" pitchFamily="34" charset="0"/>
+              <a:buNone/>
+              <a:defRPr sz="1600" kern="1200" baseline="0">
+                <a:solidFill>
+                  <a:schemeClr val="tx1">
+                    <a:tint val="75000"/>
+                  </a:schemeClr>
+                </a:solidFill>
+                <a:latin typeface="+mn-lt"/>
+                <a:ea typeface="+mn-ea"/>
+                <a:cs typeface="+mn-cs"/>
+              </a:defRPr>
+            </a:lvl8pPr>
+            <a:lvl9pPr marL="3657600" indent="0" algn="l" defTabSz="914400" rtl="0" eaLnBrk="1" latinLnBrk="0" hangingPunct="1">
+              <a:lnSpc>
+                <a:spcPct val="110000"/>
+              </a:lnSpc>
+              <a:spcBef>
+                <a:spcPts val="700"/>
+              </a:spcBef>
+              <a:buClr>
+                <a:schemeClr val="tx2"/>
+              </a:buClr>
+              <a:buFont typeface="Arial" panose="020B0604020202020204" pitchFamily="34" charset="0"/>
+              <a:buNone/>
+              <a:defRPr sz="1600" kern="1200" baseline="0">
+                <a:solidFill>
+                  <a:schemeClr val="tx1">
+                    <a:tint val="75000"/>
+                  </a:schemeClr>
+                </a:solidFill>
+                <a:latin typeface="+mn-lt"/>
+                <a:ea typeface="+mn-ea"/>
+                <a:cs typeface="+mn-cs"/>
+              </a:defRPr>
+            </a:lvl9pPr>
+          </a:lstStyle>
+          <a:p>
+            <a:r>
+              <a:rPr lang="en-US" noProof="0" dirty="0"/>
+              <a:t>A combination???</a:t>
+            </a:r>
           </a:p>
         </p:txBody>
       </p:sp>
     </p:spTree>
     <p:extLst>
       <p:ext uri="{BB962C8B-B14F-4D97-AF65-F5344CB8AC3E}">
-        <p14:creationId xmlns:p14="http://schemas.microsoft.com/office/powerpoint/2010/main" val="3197318811"/>
+        <p14:creationId xmlns:p14="http://schemas.microsoft.com/office/powerpoint/2010/main" val="3147007501"/>
       </p:ext>
     </p:extLst>
   </p:cSld>
@@ -9913,7 +11658,7 @@
           <p:cNvPr id="2" name="Titel 1">
             <a:extLst>
               <a:ext uri="{FF2B5EF4-FFF2-40B4-BE49-F238E27FC236}">
-                <a16:creationId xmlns:a16="http://schemas.microsoft.com/office/drawing/2014/main" id="{B726AEE8-C798-4136-E025-F1A260436E52}"/>
+                <a16:creationId xmlns:a16="http://schemas.microsoft.com/office/drawing/2014/main" id="{6ACDFDA2-DBC4-31F5-4D86-13F3D8C2D1E4}"/>
               </a:ext>
             </a:extLst>
           </p:cNvPr>
@@ -9930,8 +11675,8 @@
           <a:lstStyle/>
           <a:p>
             <a:r>
-              <a:rPr lang="en-DK" noProof="0" dirty="0"/>
-              <a:t>Final Thoughts</a:t>
+              <a:rPr lang="en-GB" noProof="0" dirty="0"/>
+              <a:t>The ones I thought would work</a:t>
             </a:r>
           </a:p>
         </p:txBody>
@@ -9941,7 +11686,7 @@
           <p:cNvPr id="3" name="Pladsholder til indhold 2">
             <a:extLst>
               <a:ext uri="{FF2B5EF4-FFF2-40B4-BE49-F238E27FC236}">
-                <a16:creationId xmlns:a16="http://schemas.microsoft.com/office/drawing/2014/main" id="{726D3CD8-F4EE-27A8-6FFC-51B30ACA61B1}"/>
+                <a16:creationId xmlns:a16="http://schemas.microsoft.com/office/drawing/2014/main" id="{0139D2AC-9FBF-E54A-C1EF-C5B61B08497E}"/>
               </a:ext>
             </a:extLst>
           </p:cNvPr>
@@ -9952,21 +11697,45 @@
             <p:ph sz="half" idx="1"/>
           </p:nvPr>
         </p:nvSpPr>
-        <p:spPr/>
+        <p:spPr>
+          <a:xfrm>
+            <a:off x="1257300" y="4069830"/>
+            <a:ext cx="4800600" cy="2405784"/>
+          </a:xfrm>
+        </p:spPr>
         <p:txBody>
           <a:bodyPr/>
           <a:lstStyle/>
           <a:p>
             <a:r>
-              <a:rPr lang="en-DK" noProof="0" dirty="0"/>
-              <a:t>Think it’s been pretty good overall</a:t>
-            </a:r>
-          </a:p>
-          <a:p>
-            <a:r>
-              <a:rPr lang="en-DK" noProof="0" dirty="0"/>
-              <a:t>Wished I could go back and improve the bits I know aren’t ideal</a:t>
-            </a:r>
+              <a:rPr lang="en-GB" noProof="0" dirty="0"/>
+              <a:t>Kind of epitome of what I could come up with on my own</a:t>
+            </a:r>
+          </a:p>
+          <a:p>
+            <a:r>
+              <a:rPr lang="en-GB" noProof="0" dirty="0"/>
+              <a:t>Doesn’t work </a:t>
+            </a:r>
+            <a:r>
+              <a:rPr lang="en-GB" noProof="0" dirty="0">
+                <a:sym typeface="Wingdings" panose="05000000000000000000" pitchFamily="2" charset="2"/>
+              </a:rPr>
+              <a:t> Still allows for cooking of different cooking times at the </a:t>
+            </a:r>
+            <a:r>
+              <a:rPr lang="en-GB" noProof="0" dirty="0" err="1">
+                <a:sym typeface="Wingdings" panose="05000000000000000000" pitchFamily="2" charset="2"/>
+              </a:rPr>
+              <a:t>sam</a:t>
+            </a:r>
+            <a:r>
+              <a:rPr lang="en-GB" dirty="0">
+                <a:sym typeface="Wingdings" panose="05000000000000000000" pitchFamily="2" charset="2"/>
+              </a:rPr>
+              <a:t>e time</a:t>
+            </a:r>
+            <a:endParaRPr lang="en-GB" noProof="0" dirty="0"/>
           </a:p>
         </p:txBody>
       </p:sp>
@@ -9975,7 +11744,7 @@
           <p:cNvPr id="4" name="Pladsholder til indhold 3">
             <a:extLst>
               <a:ext uri="{FF2B5EF4-FFF2-40B4-BE49-F238E27FC236}">
-                <a16:creationId xmlns:a16="http://schemas.microsoft.com/office/drawing/2014/main" id="{5C2531A8-AFD4-C0F8-51BC-68177D2CD808}"/>
+                <a16:creationId xmlns:a16="http://schemas.microsoft.com/office/drawing/2014/main" id="{F9C84B06-3C3A-A31C-FA40-47A33CAEECF2}"/>
               </a:ext>
             </a:extLst>
           </p:cNvPr>
@@ -9986,19 +11755,111 @@
             <p:ph sz="half" idx="2"/>
           </p:nvPr>
         </p:nvSpPr>
-        <p:spPr/>
+        <p:spPr>
+          <a:xfrm>
+            <a:off x="6647796" y="4069830"/>
+            <a:ext cx="4800600" cy="2548327"/>
+          </a:xfrm>
+        </p:spPr>
         <p:txBody>
           <a:bodyPr/>
           <a:lstStyle/>
           <a:p>
-            <a:endParaRPr lang="da-DK"/>
+            <a:r>
+              <a:rPr lang="en-GB" noProof="0" dirty="0"/>
+              <a:t>Suggested by Copilot</a:t>
+            </a:r>
+          </a:p>
+          <a:p>
+            <a:r>
+              <a:rPr lang="en-GB" dirty="0"/>
+              <a:t>After I remembered Morten’s advice to give it empty pizzas</a:t>
+            </a:r>
+            <a:endParaRPr lang="en-GB" noProof="0" dirty="0"/>
+          </a:p>
+          <a:p>
+            <a:r>
+              <a:rPr lang="en-GB" noProof="0" dirty="0"/>
+              <a:t>Keeps running </a:t>
+            </a:r>
+            <a:r>
+              <a:rPr lang="en-GB" noProof="0" dirty="0">
+                <a:sym typeface="Wingdings" panose="05000000000000000000" pitchFamily="2" charset="2"/>
+              </a:rPr>
+              <a:t> </a:t>
+            </a:r>
+            <a:r>
+              <a:rPr lang="en-GB" dirty="0"/>
+              <a:t>Making all these empty elements for the program to handle makes it weird</a:t>
+            </a:r>
+            <a:endParaRPr lang="en-GB" noProof="0" dirty="0"/>
           </a:p>
         </p:txBody>
       </p:sp>
+      <p:pic>
+        <p:nvPicPr>
+          <p:cNvPr id="8" name="Billede 7">
+            <a:extLst>
+              <a:ext uri="{FF2B5EF4-FFF2-40B4-BE49-F238E27FC236}">
+                <a16:creationId xmlns:a16="http://schemas.microsoft.com/office/drawing/2014/main" id="{F42B9E80-75C5-578C-01C3-537545DDCE26}"/>
+              </a:ext>
+            </a:extLst>
+          </p:cNvPr>
+          <p:cNvPicPr>
+            <a:picLocks noChangeAspect="1"/>
+          </p:cNvPicPr>
+          <p:nvPr/>
+        </p:nvPicPr>
+        <p:blipFill>
+          <a:blip r:embed="rId3"/>
+          <a:stretch>
+            <a:fillRect/>
+          </a:stretch>
+        </p:blipFill>
+        <p:spPr>
+          <a:xfrm>
+            <a:off x="202644" y="1349274"/>
+            <a:ext cx="5896469" cy="2315821"/>
+          </a:xfrm>
+          <a:prstGeom prst="rect">
+            <a:avLst/>
+          </a:prstGeom>
+        </p:spPr>
+      </p:pic>
+      <p:pic>
+        <p:nvPicPr>
+          <p:cNvPr id="10" name="Billede 9">
+            <a:extLst>
+              <a:ext uri="{FF2B5EF4-FFF2-40B4-BE49-F238E27FC236}">
+                <a16:creationId xmlns:a16="http://schemas.microsoft.com/office/drawing/2014/main" id="{9D602B09-08EC-5901-63F3-52E144FE1A60}"/>
+              </a:ext>
+            </a:extLst>
+          </p:cNvPr>
+          <p:cNvPicPr>
+            <a:picLocks noChangeAspect="1"/>
+          </p:cNvPicPr>
+          <p:nvPr/>
+        </p:nvPicPr>
+        <p:blipFill>
+          <a:blip r:embed="rId4"/>
+          <a:stretch>
+            <a:fillRect/>
+          </a:stretch>
+        </p:blipFill>
+        <p:spPr>
+          <a:xfrm>
+            <a:off x="6345905" y="1349274"/>
+            <a:ext cx="5643451" cy="2315821"/>
+          </a:xfrm>
+          <a:prstGeom prst="rect">
+            <a:avLst/>
+          </a:prstGeom>
+        </p:spPr>
+      </p:pic>
     </p:spTree>
     <p:extLst>
       <p:ext uri="{BB962C8B-B14F-4D97-AF65-F5344CB8AC3E}">
-        <p14:creationId xmlns:p14="http://schemas.microsoft.com/office/powerpoint/2010/main" val="627090686"/>
+        <p14:creationId xmlns:p14="http://schemas.microsoft.com/office/powerpoint/2010/main" val="3197318811"/>
       </p:ext>
     </p:extLst>
   </p:cSld>

--- a/PizzaSolution Presentation.pptx
+++ b/PizzaSolution Presentation.pptx
@@ -207,7 +207,7 @@
           <a:p>
             <a:fld id="{0F1AA9B0-0C32-482B-B713-D8137480A8FA}" type="datetimeFigureOut">
               <a:rPr lang="da-DK" smtClean="0"/>
-              <a:t>26-03-2026</a:t>
+              <a:t>27-03-2026</a:t>
             </a:fld>
             <a:endParaRPr lang="da-DK"/>
           </a:p>
@@ -858,6 +858,36 @@
           <a:p>
             <a:r>
               <a:rPr lang="da-DK" dirty="0"/>
+              <a:t>First </a:t>
+            </a:r>
+            <a:r>
+              <a:rPr lang="da-DK" dirty="0" err="1"/>
+              <a:t>finished</a:t>
+            </a:r>
+            <a:r>
+              <a:rPr lang="da-DK" dirty="0"/>
+              <a:t> and </a:t>
+            </a:r>
+            <a:r>
+              <a:rPr lang="da-DK" dirty="0" err="1"/>
+              <a:t>working</a:t>
+            </a:r>
+            <a:r>
+              <a:rPr lang="da-DK" dirty="0"/>
+              <a:t> version of </a:t>
+            </a:r>
+            <a:r>
+              <a:rPr lang="da-DK" dirty="0" err="1"/>
+              <a:t>StockService</a:t>
+            </a:r>
+            <a:endParaRPr lang="da-DK" dirty="0"/>
+          </a:p>
+          <a:p>
+            <a:endParaRPr lang="da-DK" dirty="0"/>
+          </a:p>
+          <a:p>
+            <a:r>
+              <a:rPr lang="da-DK" dirty="0"/>
               <a:t>Order and </a:t>
             </a:r>
             <a:r>
@@ -1425,7 +1455,7 @@
             </a:r>
             <a:r>
               <a:rPr lang="en-US" dirty="0" err="1"/>
-              <a:t>GetSufficientStock</a:t>
+              <a:t>HasInsufficientStock</a:t>
             </a:r>
             <a:r>
               <a:rPr lang="en-US" dirty="0"/>
@@ -2090,6 +2120,120 @@
           <a:p>
             <a:r>
               <a:rPr lang="da-DK" dirty="0" err="1"/>
+              <a:t>They</a:t>
+            </a:r>
+            <a:r>
+              <a:rPr lang="da-DK" dirty="0"/>
+              <a:t> </a:t>
+            </a:r>
+            <a:r>
+              <a:rPr lang="da-DK" dirty="0" err="1"/>
+              <a:t>work</a:t>
+            </a:r>
+            <a:r>
+              <a:rPr lang="da-DK" dirty="0"/>
+              <a:t> as </a:t>
+            </a:r>
+            <a:r>
+              <a:rPr lang="da-DK" dirty="0" err="1"/>
+              <a:t>expected</a:t>
+            </a:r>
+            <a:r>
+              <a:rPr lang="da-DK" dirty="0"/>
+              <a:t> </a:t>
+            </a:r>
+            <a:r>
+              <a:rPr lang="da-DK" dirty="0" err="1"/>
+              <a:t>when</a:t>
+            </a:r>
+            <a:r>
+              <a:rPr lang="da-DK" dirty="0"/>
+              <a:t> </a:t>
+            </a:r>
+            <a:r>
+              <a:rPr lang="da-DK" dirty="0" err="1"/>
+              <a:t>debugging</a:t>
+            </a:r>
+            <a:r>
+              <a:rPr lang="da-DK" dirty="0"/>
+              <a:t>, </a:t>
+            </a:r>
+            <a:r>
+              <a:rPr lang="da-DK" dirty="0" err="1"/>
+              <a:t>meaning</a:t>
+            </a:r>
+            <a:r>
+              <a:rPr lang="da-DK" dirty="0"/>
+              <a:t> </a:t>
+            </a:r>
+            <a:r>
+              <a:rPr lang="da-DK" dirty="0" err="1"/>
+              <a:t>that</a:t>
+            </a:r>
+            <a:r>
+              <a:rPr lang="da-DK" dirty="0"/>
+              <a:t> the problem </a:t>
+            </a:r>
+            <a:r>
+              <a:rPr lang="da-DK" dirty="0" err="1"/>
+              <a:t>arises</a:t>
+            </a:r>
+            <a:r>
+              <a:rPr lang="da-DK" dirty="0"/>
+              <a:t> </a:t>
+            </a:r>
+            <a:r>
+              <a:rPr lang="da-DK" dirty="0" err="1"/>
+              <a:t>somewhere</a:t>
+            </a:r>
+            <a:r>
+              <a:rPr lang="da-DK" dirty="0"/>
+              <a:t> </a:t>
+            </a:r>
+            <a:r>
+              <a:rPr lang="da-DK" dirty="0" err="1"/>
+              <a:t>else</a:t>
+            </a:r>
+            <a:r>
+              <a:rPr lang="da-DK" dirty="0"/>
+              <a:t>, i.e. </a:t>
+            </a:r>
+            <a:r>
+              <a:rPr lang="da-DK" dirty="0" err="1"/>
+              <a:t>when</a:t>
+            </a:r>
+            <a:r>
+              <a:rPr lang="da-DK" dirty="0"/>
+              <a:t> the </a:t>
+            </a:r>
+            <a:r>
+              <a:rPr lang="da-DK" dirty="0" err="1"/>
+              <a:t>queue</a:t>
+            </a:r>
+            <a:r>
+              <a:rPr lang="da-DK" dirty="0"/>
+              <a:t> </a:t>
+            </a:r>
+            <a:r>
+              <a:rPr lang="da-DK" dirty="0" err="1"/>
+              <a:t>gets</a:t>
+            </a:r>
+            <a:r>
+              <a:rPr lang="da-DK" dirty="0"/>
+              <a:t> </a:t>
+            </a:r>
+            <a:r>
+              <a:rPr lang="da-DK" dirty="0" err="1"/>
+              <a:t>dequeued</a:t>
+            </a:r>
+            <a:endParaRPr lang="da-DK" dirty="0"/>
+          </a:p>
+          <a:p>
+            <a:endParaRPr lang="da-DK" dirty="0"/>
+          </a:p>
+          <a:p>
+            <a:r>
+              <a:rPr lang="da-DK" dirty="0" err="1"/>
               <a:t>Inserting</a:t>
             </a:r>
             <a:r>
@@ -2147,6 +2291,120 @@
             <a:r>
               <a:rPr lang="da-DK" dirty="0" err="1"/>
               <a:t>two</a:t>
+            </a:r>
+            <a:endParaRPr lang="da-DK" dirty="0"/>
+          </a:p>
+          <a:p>
+            <a:endParaRPr lang="da-DK" dirty="0"/>
+          </a:p>
+          <a:p>
+            <a:r>
+              <a:rPr lang="da-DK" dirty="0" err="1"/>
+              <a:t>Tried</a:t>
+            </a:r>
+            <a:r>
+              <a:rPr lang="da-DK" dirty="0"/>
+              <a:t> to </a:t>
+            </a:r>
+            <a:r>
+              <a:rPr lang="da-DK" dirty="0" err="1"/>
+              <a:t>make</a:t>
+            </a:r>
+            <a:r>
+              <a:rPr lang="da-DK" dirty="0"/>
+              <a:t> </a:t>
+            </a:r>
+            <a:r>
+              <a:rPr lang="da-DK" dirty="0" err="1"/>
+              <a:t>one</a:t>
+            </a:r>
+            <a:r>
+              <a:rPr lang="da-DK" dirty="0"/>
+              <a:t> </a:t>
+            </a:r>
+            <a:r>
+              <a:rPr lang="da-DK" dirty="0" err="1"/>
+              <a:t>that</a:t>
+            </a:r>
+            <a:r>
+              <a:rPr lang="da-DK" dirty="0"/>
+              <a:t> </a:t>
+            </a:r>
+            <a:r>
+              <a:rPr lang="da-DK" dirty="0" err="1"/>
+              <a:t>would</a:t>
+            </a:r>
+            <a:r>
+              <a:rPr lang="da-DK" dirty="0"/>
+              <a:t> handle </a:t>
+            </a:r>
+            <a:r>
+              <a:rPr lang="da-DK" dirty="0" err="1"/>
+              <a:t>orders</a:t>
+            </a:r>
+            <a:r>
+              <a:rPr lang="da-DK" dirty="0"/>
+              <a:t> in </a:t>
+            </a:r>
+            <a:r>
+              <a:rPr lang="da-DK" dirty="0" err="1"/>
+              <a:t>batches</a:t>
+            </a:r>
+            <a:r>
+              <a:rPr lang="da-DK" dirty="0"/>
+              <a:t> but it </a:t>
+            </a:r>
+            <a:r>
+              <a:rPr lang="da-DK" dirty="0" err="1"/>
+              <a:t>fails</a:t>
+            </a:r>
+            <a:r>
+              <a:rPr lang="da-DK" dirty="0"/>
+              <a:t> all tests, </a:t>
+            </a:r>
+            <a:r>
+              <a:rPr lang="da-DK" dirty="0" err="1"/>
+              <a:t>didn’t</a:t>
+            </a:r>
+            <a:r>
+              <a:rPr lang="da-DK" dirty="0"/>
+              <a:t> have time to </a:t>
+            </a:r>
+            <a:r>
+              <a:rPr lang="da-DK" dirty="0" err="1"/>
+              <a:t>debug</a:t>
+            </a:r>
+            <a:r>
+              <a:rPr lang="da-DK" dirty="0"/>
+              <a:t> and </a:t>
+            </a:r>
+            <a:r>
+              <a:rPr lang="da-DK" dirty="0" err="1"/>
+              <a:t>see</a:t>
+            </a:r>
+            <a:r>
+              <a:rPr lang="da-DK" dirty="0"/>
+              <a:t> </a:t>
+            </a:r>
+            <a:r>
+              <a:rPr lang="da-DK" dirty="0" err="1"/>
+              <a:t>what</a:t>
+            </a:r>
+            <a:r>
+              <a:rPr lang="da-DK" dirty="0"/>
+              <a:t> </a:t>
+            </a:r>
+            <a:r>
+              <a:rPr lang="da-DK" dirty="0" err="1"/>
+              <a:t>goes</a:t>
+            </a:r>
+            <a:r>
+              <a:rPr lang="da-DK" dirty="0"/>
+              <a:t> </a:t>
+            </a:r>
+            <a:r>
+              <a:rPr lang="da-DK" dirty="0" err="1"/>
+              <a:t>wrong</a:t>
             </a:r>
             <a:endParaRPr lang="da-DK" dirty="0"/>
           </a:p>
@@ -2179,6 +2437,210 @@
     <p:extLst>
       <p:ext uri="{BB962C8B-B14F-4D97-AF65-F5344CB8AC3E}">
         <p14:creationId xmlns:p14="http://schemas.microsoft.com/office/powerpoint/2010/main" val="2778589724"/>
+      </p:ext>
+    </p:extLst>
+  </p:cSld>
+  <p:clrMapOvr>
+    <a:masterClrMapping/>
+  </p:clrMapOvr>
+</p:notes>
+</file>
+
+<file path=ppt/notesSlides/notesSlide8.xml><?xml version="1.0" encoding="utf-8"?>
+<p:notes xmlns:a="http://schemas.openxmlformats.org/drawingml/2006/main" xmlns:r="http://schemas.openxmlformats.org/officeDocument/2006/relationships" xmlns:p="http://schemas.openxmlformats.org/presentationml/2006/main">
+  <p:cSld>
+    <p:spTree>
+      <p:nvGrpSpPr>
+        <p:cNvPr id="1" name=""/>
+        <p:cNvGrpSpPr/>
+        <p:nvPr/>
+      </p:nvGrpSpPr>
+      <p:grpSpPr>
+        <a:xfrm>
+          <a:off x="0" y="0"/>
+          <a:ext cx="0" cy="0"/>
+          <a:chOff x="0" y="0"/>
+          <a:chExt cx="0" cy="0"/>
+        </a:xfrm>
+      </p:grpSpPr>
+      <p:sp>
+        <p:nvSpPr>
+          <p:cNvPr id="2" name="Pladsholder til slidebillede 1"/>
+          <p:cNvSpPr>
+            <a:spLocks noGrp="1" noRot="1" noChangeAspect="1"/>
+          </p:cNvSpPr>
+          <p:nvPr>
+            <p:ph type="sldImg"/>
+          </p:nvPr>
+        </p:nvSpPr>
+        <p:spPr/>
+      </p:sp>
+      <p:sp>
+        <p:nvSpPr>
+          <p:cNvPr id="3" name="Pladsholder til noter 2"/>
+          <p:cNvSpPr>
+            <a:spLocks noGrp="1"/>
+          </p:cNvSpPr>
+          <p:nvPr>
+            <p:ph type="body" idx="1"/>
+          </p:nvPr>
+        </p:nvSpPr>
+        <p:spPr/>
+        <p:txBody>
+          <a:bodyPr/>
+          <a:lstStyle/>
+          <a:p>
+            <a:r>
+              <a:rPr lang="da-DK" dirty="0"/>
+              <a:t>I </a:t>
+            </a:r>
+            <a:r>
+              <a:rPr lang="da-DK" dirty="0" err="1"/>
+              <a:t>didn’t</a:t>
+            </a:r>
+            <a:r>
+              <a:rPr lang="da-DK" dirty="0"/>
+              <a:t> </a:t>
+            </a:r>
+            <a:r>
+              <a:rPr lang="da-DK" dirty="0" err="1"/>
+              <a:t>really</a:t>
+            </a:r>
+            <a:r>
+              <a:rPr lang="da-DK" dirty="0"/>
+              <a:t> have time to </a:t>
+            </a:r>
+            <a:r>
+              <a:rPr lang="da-DK" dirty="0" err="1"/>
+              <a:t>seriously</a:t>
+            </a:r>
+            <a:r>
+              <a:rPr lang="da-DK" dirty="0"/>
+              <a:t> </a:t>
+            </a:r>
+            <a:r>
+              <a:rPr lang="da-DK" dirty="0" err="1"/>
+              <a:t>consider</a:t>
+            </a:r>
+            <a:r>
+              <a:rPr lang="da-DK" dirty="0"/>
+              <a:t> </a:t>
+            </a:r>
+            <a:r>
+              <a:rPr lang="da-DK" dirty="0" err="1"/>
+              <a:t>skipping</a:t>
+            </a:r>
+            <a:r>
+              <a:rPr lang="da-DK" dirty="0"/>
+              <a:t> the oven </a:t>
+            </a:r>
+            <a:r>
+              <a:rPr lang="da-DK" dirty="0" err="1"/>
+              <a:t>because</a:t>
+            </a:r>
+            <a:r>
+              <a:rPr lang="da-DK" dirty="0"/>
+              <a:t> of job interview </a:t>
+            </a:r>
+            <a:r>
+              <a:rPr lang="da-DK" dirty="0" err="1"/>
+              <a:t>stuff</a:t>
+            </a:r>
+            <a:r>
+              <a:rPr lang="da-DK" dirty="0"/>
+              <a:t>, so </a:t>
+            </a:r>
+            <a:r>
+              <a:rPr lang="da-DK" dirty="0" err="1"/>
+              <a:t>instead</a:t>
+            </a:r>
+            <a:r>
+              <a:rPr lang="da-DK" dirty="0"/>
+              <a:t> I </a:t>
+            </a:r>
+            <a:r>
+              <a:rPr lang="da-DK" dirty="0" err="1"/>
+              <a:t>worked</a:t>
+            </a:r>
+            <a:r>
+              <a:rPr lang="da-DK" dirty="0"/>
+              <a:t> at it </a:t>
+            </a:r>
+            <a:r>
+              <a:rPr lang="da-DK" dirty="0" err="1"/>
+              <a:t>when</a:t>
+            </a:r>
+            <a:r>
+              <a:rPr lang="da-DK" dirty="0"/>
+              <a:t> I </a:t>
+            </a:r>
+            <a:r>
+              <a:rPr lang="da-DK" dirty="0" err="1"/>
+              <a:t>probably</a:t>
+            </a:r>
+            <a:r>
+              <a:rPr lang="da-DK" dirty="0"/>
+              <a:t> </a:t>
+            </a:r>
+            <a:r>
+              <a:rPr lang="da-DK" dirty="0" err="1"/>
+              <a:t>shouldn’t</a:t>
+            </a:r>
+            <a:r>
+              <a:rPr lang="da-DK" dirty="0"/>
+              <a:t> have or </a:t>
+            </a:r>
+            <a:r>
+              <a:rPr lang="da-DK" dirty="0" err="1"/>
+              <a:t>should’ve</a:t>
+            </a:r>
+            <a:r>
+              <a:rPr lang="da-DK" dirty="0"/>
+              <a:t> </a:t>
+            </a:r>
+            <a:r>
+              <a:rPr lang="da-DK" dirty="0" err="1"/>
+              <a:t>asked</a:t>
+            </a:r>
+            <a:r>
+              <a:rPr lang="da-DK" dirty="0"/>
+              <a:t> for </a:t>
+            </a:r>
+            <a:r>
+              <a:rPr lang="da-DK" dirty="0" err="1"/>
+              <a:t>help</a:t>
+            </a:r>
+            <a:endParaRPr lang="da-DK" dirty="0"/>
+          </a:p>
+        </p:txBody>
+      </p:sp>
+      <p:sp>
+        <p:nvSpPr>
+          <p:cNvPr id="4" name="Pladsholder til slidenummer 3"/>
+          <p:cNvSpPr>
+            <a:spLocks noGrp="1"/>
+          </p:cNvSpPr>
+          <p:nvPr>
+            <p:ph type="sldNum" sz="quarter" idx="5"/>
+          </p:nvPr>
+        </p:nvSpPr>
+        <p:spPr/>
+        <p:txBody>
+          <a:bodyPr/>
+          <a:lstStyle/>
+          <a:p>
+            <a:fld id="{C2B1EF5D-2231-4646-8EED-1BCCADFE16C5}" type="slidenum">
+              <a:rPr lang="da-DK" smtClean="0"/>
+              <a:t>10</a:t>
+            </a:fld>
+            <a:endParaRPr lang="da-DK"/>
+          </a:p>
+        </p:txBody>
+      </p:sp>
+    </p:spTree>
+    <p:extLst>
+      <p:ext uri="{BB962C8B-B14F-4D97-AF65-F5344CB8AC3E}">
+        <p14:creationId xmlns:p14="http://schemas.microsoft.com/office/powerpoint/2010/main" val="2514507924"/>
       </p:ext>
     </p:extLst>
   </p:cSld>
@@ -3406,7 +3868,7 @@
           <a:p>
             <a:fld id="{9F2C61E5-4FB9-4B7B-BFC7-89973F7231D0}" type="datetimeFigureOut">
               <a:rPr lang="da-DK" smtClean="0"/>
-              <a:t>26-03-2026</a:t>
+              <a:t>27-03-2026</a:t>
             </a:fld>
             <a:endParaRPr lang="da-DK"/>
           </a:p>
@@ -3651,7 +4113,7 @@
           <a:p>
             <a:fld id="{9F2C61E5-4FB9-4B7B-BFC7-89973F7231D0}" type="datetimeFigureOut">
               <a:rPr lang="da-DK" smtClean="0"/>
-              <a:t>26-03-2026</a:t>
+              <a:t>27-03-2026</a:t>
             </a:fld>
             <a:endParaRPr lang="da-DK"/>
           </a:p>
@@ -3831,7 +4293,7 @@
           <a:p>
             <a:fld id="{9F2C61E5-4FB9-4B7B-BFC7-89973F7231D0}" type="datetimeFigureOut">
               <a:rPr lang="da-DK" smtClean="0"/>
-              <a:t>26-03-2026</a:t>
+              <a:t>27-03-2026</a:t>
             </a:fld>
             <a:endParaRPr lang="da-DK"/>
           </a:p>
@@ -4001,7 +4463,7 @@
           <a:p>
             <a:fld id="{9F2C61E5-4FB9-4B7B-BFC7-89973F7231D0}" type="datetimeFigureOut">
               <a:rPr lang="da-DK" smtClean="0"/>
-              <a:t>26-03-2026</a:t>
+              <a:t>27-03-2026</a:t>
             </a:fld>
             <a:endParaRPr lang="da-DK"/>
           </a:p>
@@ -4277,7 +4739,7 @@
           <a:p>
             <a:fld id="{9F2C61E5-4FB9-4B7B-BFC7-89973F7231D0}" type="datetimeFigureOut">
               <a:rPr lang="da-DK" smtClean="0"/>
-              <a:t>26-03-2026</a:t>
+              <a:t>27-03-2026</a:t>
             </a:fld>
             <a:endParaRPr lang="da-DK"/>
           </a:p>
@@ -5478,7 +5940,7 @@
           <a:p>
             <a:fld id="{9F2C61E5-4FB9-4B7B-BFC7-89973F7231D0}" type="datetimeFigureOut">
               <a:rPr lang="da-DK" smtClean="0"/>
-              <a:t>26-03-2026</a:t>
+              <a:t>27-03-2026</a:t>
             </a:fld>
             <a:endParaRPr lang="da-DK"/>
           </a:p>
@@ -5868,7 +6330,7 @@
           <a:p>
             <a:fld id="{9F2C61E5-4FB9-4B7B-BFC7-89973F7231D0}" type="datetimeFigureOut">
               <a:rPr lang="da-DK" smtClean="0"/>
-              <a:t>26-03-2026</a:t>
+              <a:t>27-03-2026</a:t>
             </a:fld>
             <a:endParaRPr lang="da-DK"/>
           </a:p>
@@ -5991,7 +6453,7 @@
           <a:p>
             <a:fld id="{9F2C61E5-4FB9-4B7B-BFC7-89973F7231D0}" type="datetimeFigureOut">
               <a:rPr lang="da-DK" smtClean="0"/>
-              <a:t>26-03-2026</a:t>
+              <a:t>27-03-2026</a:t>
             </a:fld>
             <a:endParaRPr lang="da-DK"/>
           </a:p>
@@ -6086,7 +6548,7 @@
           <a:p>
             <a:fld id="{9F2C61E5-4FB9-4B7B-BFC7-89973F7231D0}" type="datetimeFigureOut">
               <a:rPr lang="da-DK" smtClean="0"/>
-              <a:t>26-03-2026</a:t>
+              <a:t>27-03-2026</a:t>
             </a:fld>
             <a:endParaRPr lang="da-DK"/>
           </a:p>
@@ -6849,7 +7311,7 @@
           <a:p>
             <a:fld id="{9F2C61E5-4FB9-4B7B-BFC7-89973F7231D0}" type="datetimeFigureOut">
               <a:rPr lang="da-DK" smtClean="0"/>
-              <a:t>26-03-2026</a:t>
+              <a:t>27-03-2026</a:t>
             </a:fld>
             <a:endParaRPr lang="da-DK"/>
           </a:p>
@@ -7689,7 +8151,7 @@
           <a:p>
             <a:fld id="{9F2C61E5-4FB9-4B7B-BFC7-89973F7231D0}" type="datetimeFigureOut">
               <a:rPr lang="da-DK" smtClean="0"/>
-              <a:t>26-03-2026</a:t>
+              <a:t>27-03-2026</a:t>
             </a:fld>
             <a:endParaRPr lang="da-DK"/>
           </a:p>
@@ -7916,7 +8378,7 @@
           <a:p>
             <a:fld id="{9F2C61E5-4FB9-4B7B-BFC7-89973F7231D0}" type="datetimeFigureOut">
               <a:rPr lang="da-DK" smtClean="0"/>
-              <a:t>26-03-2026</a:t>
+              <a:t>27-03-2026</a:t>
             </a:fld>
             <a:endParaRPr lang="da-DK"/>
           </a:p>
@@ -8954,6 +9416,13 @@
               <a:rPr lang="da-DK" dirty="0" err="1"/>
               <a:t>PizzaSolution</a:t>
             </a:r>
+            <a:br>
+              <a:rPr lang="da-DK" dirty="0"/>
+            </a:br>
+            <a:r>
+              <a:rPr lang="ja-JP" altLang="en-US" sz="4800" dirty="0"/>
+              <a:t>ピザソリューション</a:t>
+            </a:r>
             <a:endParaRPr lang="da-DK" dirty="0"/>
           </a:p>
         </p:txBody>
@@ -9060,7 +9529,12 @@
             <p:ph sz="half" idx="1"/>
           </p:nvPr>
         </p:nvSpPr>
-        <p:spPr/>
+        <p:spPr>
+          <a:xfrm>
+            <a:off x="1257300" y="1452281"/>
+            <a:ext cx="4800600" cy="4797911"/>
+          </a:xfrm>
+        </p:spPr>
         <p:txBody>
           <a:bodyPr/>
           <a:lstStyle/>
@@ -9087,38 +9561,107 @@
               </a:rPr>
               <a:t>Could have studied LINQ some more</a:t>
             </a:r>
-            <a:endParaRPr lang="en-GB" noProof="0" dirty="0"/>
+          </a:p>
+          <a:p>
+            <a:r>
+              <a:rPr lang="en-GB" noProof="0" dirty="0">
+                <a:sym typeface="Wingdings" panose="05000000000000000000" pitchFamily="2" charset="2"/>
+              </a:rPr>
+              <a:t>Working with code m</a:t>
+            </a:r>
+            <a:r>
+              <a:rPr lang="en-GB" dirty="0" err="1">
+                <a:sym typeface="Wingdings" panose="05000000000000000000" pitchFamily="2" charset="2"/>
+              </a:rPr>
+              <a:t>ade</a:t>
+            </a:r>
+            <a:r>
+              <a:rPr lang="en-GB" dirty="0">
+                <a:sym typeface="Wingdings" panose="05000000000000000000" pitchFamily="2" charset="2"/>
+              </a:rPr>
+              <a:t> to be frustrating can be frustrating – but also rewarding</a:t>
+            </a:r>
+          </a:p>
+          <a:p>
+            <a:r>
+              <a:rPr lang="en-GB" dirty="0"/>
+              <a:t>Was good to get back to a debugger – had been a while</a:t>
+            </a:r>
+            <a:endParaRPr lang="en-GB" dirty="0">
+              <a:sym typeface="Wingdings" panose="05000000000000000000" pitchFamily="2" charset="2"/>
+            </a:endParaRPr>
+          </a:p>
+          <a:p>
+            <a:r>
+              <a:rPr lang="en-GB" dirty="0"/>
+              <a:t>Would’ve liked to have gotten to the database and some frontend</a:t>
+            </a:r>
           </a:p>
         </p:txBody>
       </p:sp>
-      <p:sp>
-        <p:nvSpPr>
-          <p:cNvPr id="4" name="Pladsholder til indhold 3">
+      <p:pic>
+        <p:nvPicPr>
+          <p:cNvPr id="6" name="Pladsholder til indhold 5">
             <a:extLst>
               <a:ext uri="{FF2B5EF4-FFF2-40B4-BE49-F238E27FC236}">
-                <a16:creationId xmlns:a16="http://schemas.microsoft.com/office/drawing/2014/main" id="{5C2531A8-AFD4-C0F8-51BC-68177D2CD808}"/>
+                <a16:creationId xmlns:a16="http://schemas.microsoft.com/office/drawing/2014/main" id="{9D68F3D7-30E1-58F0-3504-B0FEA250A5D3}"/>
               </a:ext>
             </a:extLst>
           </p:cNvPr>
-          <p:cNvSpPr>
-            <a:spLocks noGrp="1"/>
-          </p:cNvSpPr>
+          <p:cNvPicPr>
+            <a:picLocks noGrp="1" noChangeAspect="1"/>
+          </p:cNvPicPr>
           <p:nvPr>
             <p:ph sz="half" idx="2"/>
           </p:nvPr>
-        </p:nvSpPr>
-        <p:spPr/>
-        <p:txBody>
-          <a:bodyPr/>
-          <a:lstStyle/>
-          <a:p>
-            <a:r>
-              <a:rPr lang="en-GB" noProof="0" dirty="0"/>
-              <a:t>Would’ve like to get have gotten to the database and some frontend</a:t>
-            </a:r>
-          </a:p>
-        </p:txBody>
-      </p:sp>
+        </p:nvPicPr>
+        <p:blipFill>
+          <a:blip r:embed="rId3"/>
+          <a:srcRect r="14314"/>
+          <a:stretch>
+            <a:fillRect/>
+          </a:stretch>
+        </p:blipFill>
+        <p:spPr>
+          <a:xfrm>
+            <a:off x="6562166" y="3094373"/>
+            <a:ext cx="5515296" cy="3713680"/>
+          </a:xfrm>
+          <a:prstGeom prst="rect">
+            <a:avLst/>
+          </a:prstGeom>
+        </p:spPr>
+      </p:pic>
+      <p:pic>
+        <p:nvPicPr>
+          <p:cNvPr id="8" name="Billede 7">
+            <a:extLst>
+              <a:ext uri="{FF2B5EF4-FFF2-40B4-BE49-F238E27FC236}">
+                <a16:creationId xmlns:a16="http://schemas.microsoft.com/office/drawing/2014/main" id="{3C455580-13A3-6D6B-84FC-7498888220BA}"/>
+              </a:ext>
+            </a:extLst>
+          </p:cNvPr>
+          <p:cNvPicPr>
+            <a:picLocks noChangeAspect="1"/>
+          </p:cNvPicPr>
+          <p:nvPr/>
+        </p:nvPicPr>
+        <p:blipFill>
+          <a:blip r:embed="rId4"/>
+          <a:stretch>
+            <a:fillRect/>
+          </a:stretch>
+        </p:blipFill>
+        <p:spPr>
+          <a:xfrm>
+            <a:off x="7101769" y="46076"/>
+            <a:ext cx="4436090" cy="2994507"/>
+          </a:xfrm>
+          <a:prstGeom prst="rect">
+            <a:avLst/>
+          </a:prstGeom>
+        </p:spPr>
+      </p:pic>
     </p:spTree>
     <p:extLst>
       <p:ext uri="{BB962C8B-B14F-4D97-AF65-F5344CB8AC3E}">
@@ -9274,11 +9817,19 @@
           <a:p>
             <a:r>
               <a:rPr lang="en-DK" noProof="0" dirty="0"/>
-              <a:t>Early problems</a:t>
+              <a:t>Early </a:t>
+            </a:r>
+            <a:r>
+              <a:rPr lang="en-US" dirty="0"/>
+              <a:t>thoughts/</a:t>
+            </a:r>
+            <a:r>
+              <a:rPr lang="en-DK" noProof="0" dirty="0"/>
+              <a:t>problem</a:t>
             </a:r>
             <a:r>
               <a:rPr lang="en-US" noProof="0" dirty="0"/>
-              <a:t>/thoughts</a:t>
+              <a:t>s</a:t>
             </a:r>
             <a:endParaRPr lang="en-DK" noProof="0" dirty="0"/>
           </a:p>
@@ -9447,8 +9998,8 @@
         </p:nvSpPr>
         <p:spPr>
           <a:xfrm>
-            <a:off x="1006839" y="22786"/>
-            <a:ext cx="10178322" cy="1492132"/>
+            <a:off x="1006839" y="55060"/>
+            <a:ext cx="10178322" cy="802891"/>
           </a:xfrm>
         </p:spPr>
         <p:txBody>
@@ -9463,38 +10014,6 @@
           </a:p>
         </p:txBody>
       </p:sp>
-      <p:pic>
-        <p:nvPicPr>
-          <p:cNvPr id="6" name="Pladsholder til indhold 5">
-            <a:extLst>
-              <a:ext uri="{FF2B5EF4-FFF2-40B4-BE49-F238E27FC236}">
-                <a16:creationId xmlns:a16="http://schemas.microsoft.com/office/drawing/2014/main" id="{7960B9B7-D567-F571-3BA5-13B710D0B6F5}"/>
-              </a:ext>
-            </a:extLst>
-          </p:cNvPr>
-          <p:cNvPicPr>
-            <a:picLocks noGrp="1" noChangeAspect="1"/>
-          </p:cNvPicPr>
-          <p:nvPr>
-            <p:ph sz="half" idx="1"/>
-          </p:nvPr>
-        </p:nvPicPr>
-        <p:blipFill>
-          <a:blip r:embed="rId3"/>
-          <a:stretch>
-            <a:fillRect/>
-          </a:stretch>
-        </p:blipFill>
-        <p:spPr>
-          <a:xfrm>
-            <a:off x="168011" y="768852"/>
-            <a:ext cx="6437254" cy="2150678"/>
-          </a:xfrm>
-          <a:prstGeom prst="rect">
-            <a:avLst/>
-          </a:prstGeom>
-        </p:spPr>
-      </p:pic>
       <p:pic>
         <p:nvPicPr>
           <p:cNvPr id="10" name="Pladsholder til indhold 9">
@@ -9512,7 +10031,7 @@
           </p:nvPr>
         </p:nvPicPr>
         <p:blipFill>
-          <a:blip r:embed="rId4"/>
+          <a:blip r:embed="rId3"/>
           <a:stretch>
             <a:fillRect/>
           </a:stretch>
@@ -9542,7 +10061,7 @@
           <p:nvPr/>
         </p:nvPicPr>
         <p:blipFill>
-          <a:blip r:embed="rId5"/>
+          <a:blip r:embed="rId4"/>
           <a:stretch>
             <a:fillRect/>
           </a:stretch>
@@ -9551,6 +10070,38 @@
           <a:xfrm>
             <a:off x="2349223" y="3036489"/>
             <a:ext cx="7493553" cy="3703461"/>
+          </a:xfrm>
+          <a:prstGeom prst="rect">
+            <a:avLst/>
+          </a:prstGeom>
+        </p:spPr>
+      </p:pic>
+      <p:pic>
+        <p:nvPicPr>
+          <p:cNvPr id="11" name="Pladsholder til indhold 10">
+            <a:extLst>
+              <a:ext uri="{FF2B5EF4-FFF2-40B4-BE49-F238E27FC236}">
+                <a16:creationId xmlns:a16="http://schemas.microsoft.com/office/drawing/2014/main" id="{872C4F5D-FBAD-41E8-2A07-51448B42CA6B}"/>
+              </a:ext>
+            </a:extLst>
+          </p:cNvPr>
+          <p:cNvPicPr>
+            <a:picLocks noGrp="1" noChangeAspect="1"/>
+          </p:cNvPicPr>
+          <p:nvPr>
+            <p:ph sz="half" idx="1"/>
+          </p:nvPr>
+        </p:nvPicPr>
+        <p:blipFill>
+          <a:blip r:embed="rId5"/>
+          <a:stretch>
+            <a:fillRect/>
+          </a:stretch>
+        </p:blipFill>
+        <p:spPr>
+          <a:xfrm>
+            <a:off x="673632" y="825676"/>
+            <a:ext cx="5999158" cy="2037027"/>
           </a:xfrm>
           <a:prstGeom prst="rect">
             <a:avLst/>
@@ -9644,31 +10195,6 @@
           </a:prstGeom>
         </p:spPr>
       </p:pic>
-      <p:sp>
-        <p:nvSpPr>
-          <p:cNvPr id="4" name="Pladsholder til indhold 3">
-            <a:extLst>
-              <a:ext uri="{FF2B5EF4-FFF2-40B4-BE49-F238E27FC236}">
-                <a16:creationId xmlns:a16="http://schemas.microsoft.com/office/drawing/2014/main" id="{248C94CB-C527-4CFC-5747-C611C827423C}"/>
-              </a:ext>
-            </a:extLst>
-          </p:cNvPr>
-          <p:cNvSpPr>
-            <a:spLocks noGrp="1"/>
-          </p:cNvSpPr>
-          <p:nvPr>
-            <p:ph sz="half" idx="2"/>
-          </p:nvPr>
-        </p:nvSpPr>
-        <p:spPr/>
-        <p:txBody>
-          <a:bodyPr/>
-          <a:lstStyle/>
-          <a:p>
-            <a:endParaRPr lang="da-DK"/>
-          </a:p>
-        </p:txBody>
-      </p:sp>
     </p:spTree>
     <p:extLst>
       <p:ext uri="{BB962C8B-B14F-4D97-AF65-F5344CB8AC3E}">
@@ -9961,7 +10487,7 @@
         </p:blipFill>
         <p:spPr>
           <a:xfrm>
-            <a:off x="2780207" y="1177962"/>
+            <a:off x="1117955" y="1790271"/>
             <a:ext cx="6631585" cy="3277458"/>
           </a:xfrm>
           <a:prstGeom prst="rect">
@@ -9991,8 +10517,38 @@
         </p:blipFill>
         <p:spPr>
           <a:xfrm>
-            <a:off x="1134885" y="4727053"/>
+            <a:off x="1117955" y="5180460"/>
             <a:ext cx="10411908" cy="1450080"/>
+          </a:xfrm>
+          <a:prstGeom prst="rect">
+            <a:avLst/>
+          </a:prstGeom>
+        </p:spPr>
+      </p:pic>
+      <p:pic>
+        <p:nvPicPr>
+          <p:cNvPr id="3" name="Pladsholder til indhold 5">
+            <a:extLst>
+              <a:ext uri="{FF2B5EF4-FFF2-40B4-BE49-F238E27FC236}">
+                <a16:creationId xmlns:a16="http://schemas.microsoft.com/office/drawing/2014/main" id="{11617E75-1BE1-186A-021C-531D91D88AC1}"/>
+              </a:ext>
+            </a:extLst>
+          </p:cNvPr>
+          <p:cNvPicPr>
+            <a:picLocks noChangeAspect="1"/>
+          </p:cNvPicPr>
+          <p:nvPr/>
+        </p:nvPicPr>
+        <p:blipFill>
+          <a:blip r:embed="rId5"/>
+          <a:stretch>
+            <a:fillRect/>
+          </a:stretch>
+        </p:blipFill>
+        <p:spPr>
+          <a:xfrm>
+            <a:off x="6789699" y="6831"/>
+            <a:ext cx="5402301" cy="1867686"/>
           </a:xfrm>
           <a:prstGeom prst="rect">
             <a:avLst/>
@@ -10030,7 +10586,7 @@
                             </p:stCondLst>
                             <p:childTnLst>
                               <p:par>
-                                <p:cTn id="5" presetID="1" presetClass="entr" presetSubtype="0" fill="hold" nodeType="clickEffect">
+                                <p:cTn id="5" presetID="42" presetClass="entr" presetSubtype="0" fill="hold" nodeType="clickEffect">
                                   <p:stCondLst>
                                     <p:cond delay="0"/>
                                   </p:stCondLst>
@@ -10053,6 +10609,60 @@
                                         <p:strVal val="visible"/>
                                       </p:to>
                                     </p:set>
+                                    <p:animEffect transition="in" filter="fade">
+                                      <p:cBhvr>
+                                        <p:cTn id="7" dur="1000"/>
+                                        <p:tgtEl>
+                                          <p:spTgt spid="5"/>
+                                        </p:tgtEl>
+                                      </p:cBhvr>
+                                    </p:animEffect>
+                                    <p:anim calcmode="lin" valueType="num">
+                                      <p:cBhvr>
+                                        <p:cTn id="8" dur="1000" fill="hold"/>
+                                        <p:tgtEl>
+                                          <p:spTgt spid="5"/>
+                                        </p:tgtEl>
+                                        <p:attrNameLst>
+                                          <p:attrName>ppt_x</p:attrName>
+                                        </p:attrNameLst>
+                                      </p:cBhvr>
+                                      <p:tavLst>
+                                        <p:tav tm="0">
+                                          <p:val>
+                                            <p:strVal val="#ppt_x"/>
+                                          </p:val>
+                                        </p:tav>
+                                        <p:tav tm="100000">
+                                          <p:val>
+                                            <p:strVal val="#ppt_x"/>
+                                          </p:val>
+                                        </p:tav>
+                                      </p:tavLst>
+                                    </p:anim>
+                                    <p:anim calcmode="lin" valueType="num">
+                                      <p:cBhvr>
+                                        <p:cTn id="9" dur="1000" fill="hold"/>
+                                        <p:tgtEl>
+                                          <p:spTgt spid="5"/>
+                                        </p:tgtEl>
+                                        <p:attrNameLst>
+                                          <p:attrName>ppt_y</p:attrName>
+                                        </p:attrNameLst>
+                                      </p:cBhvr>
+                                      <p:tavLst>
+                                        <p:tav tm="0">
+                                          <p:val>
+                                            <p:strVal val="#ppt_y+.1"/>
+                                          </p:val>
+                                        </p:tav>
+                                        <p:tav tm="100000">
+                                          <p:val>
+                                            <p:strVal val="#ppt_y"/>
+                                          </p:val>
+                                        </p:tav>
+                                      </p:tavLst>
+                                    </p:anim>
                                   </p:childTnLst>
                                 </p:cTn>
                               </p:par>
@@ -10063,26 +10673,26 @@
                     </p:cTn>
                   </p:par>
                   <p:par>
-                    <p:cTn id="7" fill="hold">
+                    <p:cTn id="10" fill="hold">
                       <p:stCondLst>
                         <p:cond delay="indefinite"/>
                       </p:stCondLst>
                       <p:childTnLst>
                         <p:par>
-                          <p:cTn id="8" fill="hold">
+                          <p:cTn id="11" fill="hold">
                             <p:stCondLst>
                               <p:cond delay="0"/>
                             </p:stCondLst>
                             <p:childTnLst>
                               <p:par>
-                                <p:cTn id="9" presetID="2" presetClass="entr" presetSubtype="8" fill="hold" nodeType="clickEffect">
+                                <p:cTn id="12" presetID="2" presetClass="entr" presetSubtype="8" fill="hold" nodeType="clickEffect">
                                   <p:stCondLst>
                                     <p:cond delay="0"/>
                                   </p:stCondLst>
                                   <p:childTnLst>
                                     <p:set>
                                       <p:cBhvr>
-                                        <p:cTn id="10" dur="1" fill="hold">
+                                        <p:cTn id="13" dur="1" fill="hold">
                                           <p:stCondLst>
                                             <p:cond delay="0"/>
                                           </p:stCondLst>
@@ -10100,7 +10710,7 @@
                                     </p:set>
                                     <p:anim calcmode="lin" valueType="num">
                                       <p:cBhvr additive="base">
-                                        <p:cTn id="11" dur="500" fill="hold"/>
+                                        <p:cTn id="14" dur="500" fill="hold"/>
                                         <p:tgtEl>
                                           <p:spTgt spid="7"/>
                                         </p:tgtEl>
@@ -10123,7 +10733,7 @@
                                     </p:anim>
                                     <p:anim calcmode="lin" valueType="num">
                                       <p:cBhvr additive="base">
-                                        <p:cTn id="12" dur="500" fill="hold"/>
+                                        <p:cTn id="15" dur="500" fill="hold"/>
                                         <p:tgtEl>
                                           <p:spTgt spid="7"/>
                                         </p:tgtEl>
@@ -10308,7 +10918,7 @@
             <a:pPr lvl="1"/>
             <a:r>
               <a:rPr lang="en-GB" dirty="0"/>
-              <a:t>Feels like I definitely can get rid of that while-loop somehow</a:t>
+              <a:t>Also feel like I definitely can get rid of that while-loop</a:t>
             </a:r>
             <a:endParaRPr lang="en-GB" noProof="0" dirty="0"/>
           </a:p>
@@ -10397,8 +11007,8 @@
           </p:nvPr>
         </p:nvSpPr>
         <p:spPr>
-          <a:xfrm rot="20344839">
-            <a:off x="1824319" y="5017375"/>
+          <a:xfrm rot="21375383">
+            <a:off x="5935088" y="5043434"/>
             <a:ext cx="7017488" cy="951135"/>
           </a:xfrm>
         </p:spPr>
@@ -10408,7 +11018,7 @@
           <a:p>
             <a:r>
               <a:rPr lang="en-US" noProof="0" dirty="0"/>
-              <a:t>Give last element cooking time?</a:t>
+              <a:t>Make it wait for entire batch before proceeding?</a:t>
             </a:r>
           </a:p>
         </p:txBody>
@@ -10429,7 +11039,7 @@
         </p:nvSpPr>
         <p:spPr>
           <a:xfrm rot="494728">
-            <a:off x="5359042" y="3492059"/>
+            <a:off x="5359041" y="3188733"/>
             <a:ext cx="8169581" cy="951135"/>
           </a:xfrm>
           <a:prstGeom prst="rect">
@@ -10671,7 +11281,7 @@
         </p:nvSpPr>
         <p:spPr>
           <a:xfrm rot="20931083">
-            <a:off x="2952016" y="2245578"/>
+            <a:off x="2952015" y="1815316"/>
             <a:ext cx="7017488" cy="504002"/>
           </a:xfrm>
           <a:prstGeom prst="rect">
@@ -10913,8 +11523,8 @@
         </p:nvSpPr>
         <p:spPr>
           <a:xfrm rot="231659">
-            <a:off x="4664496" y="1096335"/>
-            <a:ext cx="8169581" cy="951135"/>
+            <a:off x="5828365" y="969102"/>
+            <a:ext cx="7177582" cy="951135"/>
           </a:xfrm>
           <a:prstGeom prst="rect">
             <a:avLst/>
@@ -11397,7 +12007,7 @@
         </p:nvSpPr>
         <p:spPr>
           <a:xfrm rot="183458">
-            <a:off x="8431965" y="5984980"/>
+            <a:off x="8573266" y="6137381"/>
             <a:ext cx="4643027" cy="504002"/>
           </a:xfrm>
           <a:prstGeom prst="rect">
@@ -11623,6 +12233,248 @@
           </a:p>
         </p:txBody>
       </p:sp>
+      <p:sp>
+        <p:nvSpPr>
+          <p:cNvPr id="2" name="Pladsholder til tekst 2">
+            <a:extLst>
+              <a:ext uri="{FF2B5EF4-FFF2-40B4-BE49-F238E27FC236}">
+                <a16:creationId xmlns:a16="http://schemas.microsoft.com/office/drawing/2014/main" id="{A42F2352-6AB6-1B9A-35DD-421CDFB60C4C}"/>
+              </a:ext>
+            </a:extLst>
+          </p:cNvPr>
+          <p:cNvSpPr txBox="1">
+            <a:spLocks/>
+          </p:cNvSpPr>
+          <p:nvPr/>
+        </p:nvSpPr>
+        <p:spPr>
+          <a:xfrm rot="20651068">
+            <a:off x="2295743" y="4723767"/>
+            <a:ext cx="7017488" cy="606747"/>
+          </a:xfrm>
+          <a:prstGeom prst="rect">
+            <a:avLst/>
+          </a:prstGeom>
+        </p:spPr>
+        <p:txBody>
+          <a:bodyPr vert="horz" lIns="91440" tIns="45720" rIns="91440" bIns="45720" rtlCol="0">
+            <a:normAutofit/>
+          </a:bodyPr>
+          <a:lstStyle>
+            <a:lvl1pPr marL="0" indent="0" algn="l" defTabSz="914400" rtl="0" eaLnBrk="1" latinLnBrk="0" hangingPunct="1">
+              <a:lnSpc>
+                <a:spcPct val="100000"/>
+              </a:lnSpc>
+              <a:spcBef>
+                <a:spcPts val="700"/>
+              </a:spcBef>
+              <a:buClr>
+                <a:schemeClr val="tx2"/>
+              </a:buClr>
+              <a:buFont typeface="Arial" panose="020B0604020202020204" pitchFamily="34" charset="0"/>
+              <a:buNone/>
+              <a:defRPr sz="2000" b="1" i="0" kern="1200" cap="all" spc="400" baseline="0">
+                <a:solidFill>
+                  <a:schemeClr val="accent1"/>
+                </a:solidFill>
+                <a:latin typeface="+mn-lt"/>
+                <a:ea typeface="+mn-ea"/>
+                <a:cs typeface="+mn-cs"/>
+              </a:defRPr>
+            </a:lvl1pPr>
+            <a:lvl2pPr marL="457200" indent="0" algn="l" defTabSz="914400" rtl="0" eaLnBrk="1" latinLnBrk="0" hangingPunct="1">
+              <a:lnSpc>
+                <a:spcPct val="110000"/>
+              </a:lnSpc>
+              <a:spcBef>
+                <a:spcPts val="700"/>
+              </a:spcBef>
+              <a:buClr>
+                <a:schemeClr val="tx2"/>
+              </a:buClr>
+              <a:buFont typeface="Gill Sans MT" panose="020B0502020104020203" pitchFamily="34" charset="0"/>
+              <a:buNone/>
+              <a:defRPr sz="2000" kern="1200">
+                <a:solidFill>
+                  <a:schemeClr val="tx1">
+                    <a:tint val="75000"/>
+                  </a:schemeClr>
+                </a:solidFill>
+                <a:latin typeface="+mn-lt"/>
+                <a:ea typeface="+mn-ea"/>
+                <a:cs typeface="+mn-cs"/>
+              </a:defRPr>
+            </a:lvl2pPr>
+            <a:lvl3pPr marL="914400" indent="0" algn="l" defTabSz="914400" rtl="0" eaLnBrk="1" latinLnBrk="0" hangingPunct="1">
+              <a:lnSpc>
+                <a:spcPct val="110000"/>
+              </a:lnSpc>
+              <a:spcBef>
+                <a:spcPts val="700"/>
+              </a:spcBef>
+              <a:buClr>
+                <a:schemeClr val="tx2"/>
+              </a:buClr>
+              <a:buFont typeface="Arial" panose="020B0604020202020204" pitchFamily="34" charset="0"/>
+              <a:buNone/>
+              <a:defRPr sz="1800" kern="1200">
+                <a:solidFill>
+                  <a:schemeClr val="tx1">
+                    <a:tint val="75000"/>
+                  </a:schemeClr>
+                </a:solidFill>
+                <a:latin typeface="+mn-lt"/>
+                <a:ea typeface="+mn-ea"/>
+                <a:cs typeface="+mn-cs"/>
+              </a:defRPr>
+            </a:lvl3pPr>
+            <a:lvl4pPr marL="1371600" indent="0" algn="l" defTabSz="914400" rtl="0" eaLnBrk="1" latinLnBrk="0" hangingPunct="1">
+              <a:lnSpc>
+                <a:spcPct val="110000"/>
+              </a:lnSpc>
+              <a:spcBef>
+                <a:spcPts val="700"/>
+              </a:spcBef>
+              <a:buClr>
+                <a:schemeClr val="tx2"/>
+              </a:buClr>
+              <a:buFont typeface="Gill Sans MT" panose="020B0502020104020203" pitchFamily="34" charset="0"/>
+              <a:buNone/>
+              <a:defRPr sz="1600" kern="1200">
+                <a:solidFill>
+                  <a:schemeClr val="tx1">
+                    <a:tint val="75000"/>
+                  </a:schemeClr>
+                </a:solidFill>
+                <a:latin typeface="+mn-lt"/>
+                <a:ea typeface="+mn-ea"/>
+                <a:cs typeface="+mn-cs"/>
+              </a:defRPr>
+            </a:lvl4pPr>
+            <a:lvl5pPr marL="1828800" indent="0" algn="l" defTabSz="914400" rtl="0" eaLnBrk="1" latinLnBrk="0" hangingPunct="1">
+              <a:lnSpc>
+                <a:spcPct val="110000"/>
+              </a:lnSpc>
+              <a:spcBef>
+                <a:spcPts val="700"/>
+              </a:spcBef>
+              <a:buClr>
+                <a:schemeClr val="tx2"/>
+              </a:buClr>
+              <a:buFont typeface="Arial" panose="020B0604020202020204" pitchFamily="34" charset="0"/>
+              <a:buNone/>
+              <a:defRPr sz="1600" kern="1200">
+                <a:solidFill>
+                  <a:schemeClr val="tx1">
+                    <a:tint val="75000"/>
+                  </a:schemeClr>
+                </a:solidFill>
+                <a:latin typeface="+mn-lt"/>
+                <a:ea typeface="+mn-ea"/>
+                <a:cs typeface="+mn-cs"/>
+              </a:defRPr>
+            </a:lvl5pPr>
+            <a:lvl6pPr marL="2286000" indent="0" algn="l" defTabSz="914400" rtl="0" eaLnBrk="1" latinLnBrk="0" hangingPunct="1">
+              <a:lnSpc>
+                <a:spcPct val="110000"/>
+              </a:lnSpc>
+              <a:spcBef>
+                <a:spcPts val="700"/>
+              </a:spcBef>
+              <a:buClr>
+                <a:schemeClr val="tx2"/>
+              </a:buClr>
+              <a:buFont typeface="Gill Sans MT" panose="020B0502020104020203" pitchFamily="34" charset="0"/>
+              <a:buNone/>
+              <a:defRPr sz="1600" kern="1200">
+                <a:solidFill>
+                  <a:schemeClr val="tx1">
+                    <a:tint val="75000"/>
+                  </a:schemeClr>
+                </a:solidFill>
+                <a:latin typeface="+mn-lt"/>
+                <a:ea typeface="+mn-ea"/>
+                <a:cs typeface="+mn-cs"/>
+              </a:defRPr>
+            </a:lvl6pPr>
+            <a:lvl7pPr marL="2743200" indent="0" algn="l" defTabSz="914400" rtl="0" eaLnBrk="1" latinLnBrk="0" hangingPunct="1">
+              <a:lnSpc>
+                <a:spcPct val="110000"/>
+              </a:lnSpc>
+              <a:spcBef>
+                <a:spcPts val="700"/>
+              </a:spcBef>
+              <a:buClr>
+                <a:schemeClr val="tx2"/>
+              </a:buClr>
+              <a:buFont typeface="Arial" panose="020B0604020202020204" pitchFamily="34" charset="0"/>
+              <a:buNone/>
+              <a:defRPr sz="1600" kern="1200">
+                <a:solidFill>
+                  <a:schemeClr val="tx1">
+                    <a:tint val="75000"/>
+                  </a:schemeClr>
+                </a:solidFill>
+                <a:latin typeface="+mn-lt"/>
+                <a:ea typeface="+mn-ea"/>
+                <a:cs typeface="+mn-cs"/>
+              </a:defRPr>
+            </a:lvl7pPr>
+            <a:lvl8pPr marL="3200400" indent="0" algn="l" defTabSz="914400" rtl="0" eaLnBrk="1" latinLnBrk="0" hangingPunct="1">
+              <a:lnSpc>
+                <a:spcPct val="110000"/>
+              </a:lnSpc>
+              <a:spcBef>
+                <a:spcPts val="700"/>
+              </a:spcBef>
+              <a:buClr>
+                <a:schemeClr val="tx2"/>
+              </a:buClr>
+              <a:buFont typeface="Gill Sans MT" panose="020B0502020104020203" pitchFamily="34" charset="0"/>
+              <a:buNone/>
+              <a:defRPr sz="1600" kern="1200" baseline="0">
+                <a:solidFill>
+                  <a:schemeClr val="tx1">
+                    <a:tint val="75000"/>
+                  </a:schemeClr>
+                </a:solidFill>
+                <a:latin typeface="+mn-lt"/>
+                <a:ea typeface="+mn-ea"/>
+                <a:cs typeface="+mn-cs"/>
+              </a:defRPr>
+            </a:lvl8pPr>
+            <a:lvl9pPr marL="3657600" indent="0" algn="l" defTabSz="914400" rtl="0" eaLnBrk="1" latinLnBrk="0" hangingPunct="1">
+              <a:lnSpc>
+                <a:spcPct val="110000"/>
+              </a:lnSpc>
+              <a:spcBef>
+                <a:spcPts val="700"/>
+              </a:spcBef>
+              <a:buClr>
+                <a:schemeClr val="tx2"/>
+              </a:buClr>
+              <a:buFont typeface="Arial" panose="020B0604020202020204" pitchFamily="34" charset="0"/>
+              <a:buNone/>
+              <a:defRPr sz="1600" kern="1200" baseline="0">
+                <a:solidFill>
+                  <a:schemeClr val="tx1">
+                    <a:tint val="75000"/>
+                  </a:schemeClr>
+                </a:solidFill>
+                <a:latin typeface="+mn-lt"/>
+                <a:ea typeface="+mn-ea"/>
+                <a:cs typeface="+mn-cs"/>
+              </a:defRPr>
+            </a:lvl9pPr>
+          </a:lstStyle>
+          <a:p>
+            <a:r>
+              <a:rPr lang="en-US" dirty="0"/>
+              <a:t>Give last element cooking time?</a:t>
+            </a:r>
+          </a:p>
+        </p:txBody>
+      </p:sp>
     </p:spTree>
     <p:extLst>
       <p:ext uri="{BB962C8B-B14F-4D97-AF65-F5344CB8AC3E}">
@@ -11633,6 +12485,862 @@
   <p:clrMapOvr>
     <a:masterClrMapping/>
   </p:clrMapOvr>
+  <p:timing>
+    <p:tnLst>
+      <p:par>
+        <p:cTn id="1" dur="indefinite" restart="never" nodeType="tmRoot">
+          <p:childTnLst>
+            <p:seq concurrent="1" nextAc="seek">
+              <p:cTn id="2" dur="indefinite" nodeType="mainSeq">
+                <p:childTnLst>
+                  <p:par>
+                    <p:cTn id="3" fill="hold">
+                      <p:stCondLst>
+                        <p:cond delay="indefinite"/>
+                      </p:stCondLst>
+                      <p:childTnLst>
+                        <p:par>
+                          <p:cTn id="4" fill="hold">
+                            <p:stCondLst>
+                              <p:cond delay="0"/>
+                            </p:stCondLst>
+                            <p:childTnLst>
+                              <p:par>
+                                <p:cTn id="5" presetID="35" presetClass="entr" presetSubtype="0" fill="hold" grpId="0" nodeType="clickEffect">
+                                  <p:stCondLst>
+                                    <p:cond delay="0"/>
+                                  </p:stCondLst>
+                                  <p:childTnLst>
+                                    <p:set>
+                                      <p:cBhvr>
+                                        <p:cTn id="6" dur="1" fill="hold">
+                                          <p:stCondLst>
+                                            <p:cond delay="0"/>
+                                          </p:stCondLst>
+                                        </p:cTn>
+                                        <p:tgtEl>
+                                          <p:spTgt spid="7"/>
+                                        </p:tgtEl>
+                                        <p:attrNameLst>
+                                          <p:attrName>style.visibility</p:attrName>
+                                        </p:attrNameLst>
+                                      </p:cBhvr>
+                                      <p:to>
+                                        <p:strVal val="visible"/>
+                                      </p:to>
+                                    </p:set>
+                                    <p:animEffect transition="in" filter="fade">
+                                      <p:cBhvr>
+                                        <p:cTn id="7" dur="2000"/>
+                                        <p:tgtEl>
+                                          <p:spTgt spid="7"/>
+                                        </p:tgtEl>
+                                      </p:cBhvr>
+                                    </p:animEffect>
+                                    <p:anim calcmode="lin" valueType="num">
+                                      <p:cBhvr>
+                                        <p:cTn id="8" dur="2000" fill="hold"/>
+                                        <p:tgtEl>
+                                          <p:spTgt spid="7"/>
+                                        </p:tgtEl>
+                                        <p:attrNameLst>
+                                          <p:attrName>style.rotation</p:attrName>
+                                        </p:attrNameLst>
+                                      </p:cBhvr>
+                                      <p:tavLst>
+                                        <p:tav tm="0">
+                                          <p:val>
+                                            <p:fltVal val="720"/>
+                                          </p:val>
+                                        </p:tav>
+                                        <p:tav tm="100000">
+                                          <p:val>
+                                            <p:fltVal val="0"/>
+                                          </p:val>
+                                        </p:tav>
+                                      </p:tavLst>
+                                    </p:anim>
+                                    <p:anim calcmode="lin" valueType="num">
+                                      <p:cBhvr>
+                                        <p:cTn id="9" dur="2000" fill="hold"/>
+                                        <p:tgtEl>
+                                          <p:spTgt spid="7"/>
+                                        </p:tgtEl>
+                                        <p:attrNameLst>
+                                          <p:attrName>ppt_h</p:attrName>
+                                        </p:attrNameLst>
+                                      </p:cBhvr>
+                                      <p:tavLst>
+                                        <p:tav tm="0">
+                                          <p:val>
+                                            <p:fltVal val="0"/>
+                                          </p:val>
+                                        </p:tav>
+                                        <p:tav tm="100000">
+                                          <p:val>
+                                            <p:strVal val="#ppt_h"/>
+                                          </p:val>
+                                        </p:tav>
+                                      </p:tavLst>
+                                    </p:anim>
+                                    <p:anim calcmode="lin" valueType="num">
+                                      <p:cBhvr>
+                                        <p:cTn id="10" dur="2000" fill="hold"/>
+                                        <p:tgtEl>
+                                          <p:spTgt spid="7"/>
+                                        </p:tgtEl>
+                                        <p:attrNameLst>
+                                          <p:attrName>ppt_w</p:attrName>
+                                        </p:attrNameLst>
+                                      </p:cBhvr>
+                                      <p:tavLst>
+                                        <p:tav tm="0">
+                                          <p:val>
+                                            <p:fltVal val="0"/>
+                                          </p:val>
+                                        </p:tav>
+                                        <p:tav tm="100000">
+                                          <p:val>
+                                            <p:strVal val="#ppt_w"/>
+                                          </p:val>
+                                        </p:tav>
+                                      </p:tavLst>
+                                    </p:anim>
+                                  </p:childTnLst>
+                                </p:cTn>
+                              </p:par>
+                            </p:childTnLst>
+                          </p:cTn>
+                        </p:par>
+                        <p:par>
+                          <p:cTn id="11" fill="hold">
+                            <p:stCondLst>
+                              <p:cond delay="2000"/>
+                            </p:stCondLst>
+                            <p:childTnLst>
+                              <p:par>
+                                <p:cTn id="12" presetID="35" presetClass="entr" presetSubtype="0" fill="hold" grpId="0" nodeType="afterEffect">
+                                  <p:stCondLst>
+                                    <p:cond delay="0"/>
+                                  </p:stCondLst>
+                                  <p:childTnLst>
+                                    <p:set>
+                                      <p:cBhvr>
+                                        <p:cTn id="13" dur="1" fill="hold">
+                                          <p:stCondLst>
+                                            <p:cond delay="0"/>
+                                          </p:stCondLst>
+                                        </p:cTn>
+                                        <p:tgtEl>
+                                          <p:spTgt spid="6"/>
+                                        </p:tgtEl>
+                                        <p:attrNameLst>
+                                          <p:attrName>style.visibility</p:attrName>
+                                        </p:attrNameLst>
+                                      </p:cBhvr>
+                                      <p:to>
+                                        <p:strVal val="visible"/>
+                                      </p:to>
+                                    </p:set>
+                                    <p:animEffect transition="in" filter="fade">
+                                      <p:cBhvr>
+                                        <p:cTn id="14" dur="2000"/>
+                                        <p:tgtEl>
+                                          <p:spTgt spid="6"/>
+                                        </p:tgtEl>
+                                      </p:cBhvr>
+                                    </p:animEffect>
+                                    <p:anim calcmode="lin" valueType="num">
+                                      <p:cBhvr>
+                                        <p:cTn id="15" dur="2000" fill="hold"/>
+                                        <p:tgtEl>
+                                          <p:spTgt spid="6"/>
+                                        </p:tgtEl>
+                                        <p:attrNameLst>
+                                          <p:attrName>style.rotation</p:attrName>
+                                        </p:attrNameLst>
+                                      </p:cBhvr>
+                                      <p:tavLst>
+                                        <p:tav tm="0">
+                                          <p:val>
+                                            <p:fltVal val="720"/>
+                                          </p:val>
+                                        </p:tav>
+                                        <p:tav tm="100000">
+                                          <p:val>
+                                            <p:fltVal val="0"/>
+                                          </p:val>
+                                        </p:tav>
+                                      </p:tavLst>
+                                    </p:anim>
+                                    <p:anim calcmode="lin" valueType="num">
+                                      <p:cBhvr>
+                                        <p:cTn id="16" dur="2000" fill="hold"/>
+                                        <p:tgtEl>
+                                          <p:spTgt spid="6"/>
+                                        </p:tgtEl>
+                                        <p:attrNameLst>
+                                          <p:attrName>ppt_h</p:attrName>
+                                        </p:attrNameLst>
+                                      </p:cBhvr>
+                                      <p:tavLst>
+                                        <p:tav tm="0">
+                                          <p:val>
+                                            <p:fltVal val="0"/>
+                                          </p:val>
+                                        </p:tav>
+                                        <p:tav tm="100000">
+                                          <p:val>
+                                            <p:strVal val="#ppt_h"/>
+                                          </p:val>
+                                        </p:tav>
+                                      </p:tavLst>
+                                    </p:anim>
+                                    <p:anim calcmode="lin" valueType="num">
+                                      <p:cBhvr>
+                                        <p:cTn id="17" dur="2000" fill="hold"/>
+                                        <p:tgtEl>
+                                          <p:spTgt spid="6"/>
+                                        </p:tgtEl>
+                                        <p:attrNameLst>
+                                          <p:attrName>ppt_w</p:attrName>
+                                        </p:attrNameLst>
+                                      </p:cBhvr>
+                                      <p:tavLst>
+                                        <p:tav tm="0">
+                                          <p:val>
+                                            <p:fltVal val="0"/>
+                                          </p:val>
+                                        </p:tav>
+                                        <p:tav tm="100000">
+                                          <p:val>
+                                            <p:strVal val="#ppt_w"/>
+                                          </p:val>
+                                        </p:tav>
+                                      </p:tavLst>
+                                    </p:anim>
+                                  </p:childTnLst>
+                                </p:cTn>
+                              </p:par>
+                            </p:childTnLst>
+                          </p:cTn>
+                        </p:par>
+                        <p:par>
+                          <p:cTn id="18" fill="hold">
+                            <p:stCondLst>
+                              <p:cond delay="4000"/>
+                            </p:stCondLst>
+                            <p:childTnLst>
+                              <p:par>
+                                <p:cTn id="19" presetID="35" presetClass="entr" presetSubtype="0" fill="hold" grpId="0" nodeType="afterEffect">
+                                  <p:stCondLst>
+                                    <p:cond delay="0"/>
+                                  </p:stCondLst>
+                                  <p:childTnLst>
+                                    <p:set>
+                                      <p:cBhvr>
+                                        <p:cTn id="20" dur="1" fill="hold">
+                                          <p:stCondLst>
+                                            <p:cond delay="0"/>
+                                          </p:stCondLst>
+                                        </p:cTn>
+                                        <p:tgtEl>
+                                          <p:spTgt spid="5"/>
+                                        </p:tgtEl>
+                                        <p:attrNameLst>
+                                          <p:attrName>style.visibility</p:attrName>
+                                        </p:attrNameLst>
+                                      </p:cBhvr>
+                                      <p:to>
+                                        <p:strVal val="visible"/>
+                                      </p:to>
+                                    </p:set>
+                                    <p:animEffect transition="in" filter="fade">
+                                      <p:cBhvr>
+                                        <p:cTn id="21" dur="2000"/>
+                                        <p:tgtEl>
+                                          <p:spTgt spid="5"/>
+                                        </p:tgtEl>
+                                      </p:cBhvr>
+                                    </p:animEffect>
+                                    <p:anim calcmode="lin" valueType="num">
+                                      <p:cBhvr>
+                                        <p:cTn id="22" dur="2000" fill="hold"/>
+                                        <p:tgtEl>
+                                          <p:spTgt spid="5"/>
+                                        </p:tgtEl>
+                                        <p:attrNameLst>
+                                          <p:attrName>style.rotation</p:attrName>
+                                        </p:attrNameLst>
+                                      </p:cBhvr>
+                                      <p:tavLst>
+                                        <p:tav tm="0">
+                                          <p:val>
+                                            <p:fltVal val="720"/>
+                                          </p:val>
+                                        </p:tav>
+                                        <p:tav tm="100000">
+                                          <p:val>
+                                            <p:fltVal val="0"/>
+                                          </p:val>
+                                        </p:tav>
+                                      </p:tavLst>
+                                    </p:anim>
+                                    <p:anim calcmode="lin" valueType="num">
+                                      <p:cBhvr>
+                                        <p:cTn id="23" dur="2000" fill="hold"/>
+                                        <p:tgtEl>
+                                          <p:spTgt spid="5"/>
+                                        </p:tgtEl>
+                                        <p:attrNameLst>
+                                          <p:attrName>ppt_h</p:attrName>
+                                        </p:attrNameLst>
+                                      </p:cBhvr>
+                                      <p:tavLst>
+                                        <p:tav tm="0">
+                                          <p:val>
+                                            <p:fltVal val="0"/>
+                                          </p:val>
+                                        </p:tav>
+                                        <p:tav tm="100000">
+                                          <p:val>
+                                            <p:strVal val="#ppt_h"/>
+                                          </p:val>
+                                        </p:tav>
+                                      </p:tavLst>
+                                    </p:anim>
+                                    <p:anim calcmode="lin" valueType="num">
+                                      <p:cBhvr>
+                                        <p:cTn id="24" dur="2000" fill="hold"/>
+                                        <p:tgtEl>
+                                          <p:spTgt spid="5"/>
+                                        </p:tgtEl>
+                                        <p:attrNameLst>
+                                          <p:attrName>ppt_w</p:attrName>
+                                        </p:attrNameLst>
+                                      </p:cBhvr>
+                                      <p:tavLst>
+                                        <p:tav tm="0">
+                                          <p:val>
+                                            <p:fltVal val="0"/>
+                                          </p:val>
+                                        </p:tav>
+                                        <p:tav tm="100000">
+                                          <p:val>
+                                            <p:strVal val="#ppt_w"/>
+                                          </p:val>
+                                        </p:tav>
+                                      </p:tavLst>
+                                    </p:anim>
+                                  </p:childTnLst>
+                                </p:cTn>
+                              </p:par>
+                            </p:childTnLst>
+                          </p:cTn>
+                        </p:par>
+                        <p:par>
+                          <p:cTn id="25" fill="hold">
+                            <p:stCondLst>
+                              <p:cond delay="6000"/>
+                            </p:stCondLst>
+                            <p:childTnLst>
+                              <p:par>
+                                <p:cTn id="26" presetID="35" presetClass="entr" presetSubtype="0" fill="hold" grpId="0" nodeType="afterEffect">
+                                  <p:stCondLst>
+                                    <p:cond delay="0"/>
+                                  </p:stCondLst>
+                                  <p:childTnLst>
+                                    <p:set>
+                                      <p:cBhvr>
+                                        <p:cTn id="27" dur="1" fill="hold">
+                                          <p:stCondLst>
+                                            <p:cond delay="0"/>
+                                          </p:stCondLst>
+                                        </p:cTn>
+                                        <p:tgtEl>
+                                          <p:spTgt spid="4">
+                                            <p:txEl>
+                                              <p:pRg st="0" end="0"/>
+                                            </p:txEl>
+                                          </p:spTgt>
+                                        </p:tgtEl>
+                                        <p:attrNameLst>
+                                          <p:attrName>style.visibility</p:attrName>
+                                        </p:attrNameLst>
+                                      </p:cBhvr>
+                                      <p:to>
+                                        <p:strVal val="visible"/>
+                                      </p:to>
+                                    </p:set>
+                                    <p:animEffect transition="in" filter="fade">
+                                      <p:cBhvr>
+                                        <p:cTn id="28" dur="2000"/>
+                                        <p:tgtEl>
+                                          <p:spTgt spid="4">
+                                            <p:txEl>
+                                              <p:pRg st="0" end="0"/>
+                                            </p:txEl>
+                                          </p:spTgt>
+                                        </p:tgtEl>
+                                      </p:cBhvr>
+                                    </p:animEffect>
+                                    <p:anim calcmode="lin" valueType="num">
+                                      <p:cBhvr>
+                                        <p:cTn id="29" dur="2000" fill="hold"/>
+                                        <p:tgtEl>
+                                          <p:spTgt spid="4">
+                                            <p:txEl>
+                                              <p:pRg st="0" end="0"/>
+                                            </p:txEl>
+                                          </p:spTgt>
+                                        </p:tgtEl>
+                                        <p:attrNameLst>
+                                          <p:attrName>style.rotation</p:attrName>
+                                        </p:attrNameLst>
+                                      </p:cBhvr>
+                                      <p:tavLst>
+                                        <p:tav tm="0">
+                                          <p:val>
+                                            <p:fltVal val="720"/>
+                                          </p:val>
+                                        </p:tav>
+                                        <p:tav tm="100000">
+                                          <p:val>
+                                            <p:fltVal val="0"/>
+                                          </p:val>
+                                        </p:tav>
+                                      </p:tavLst>
+                                    </p:anim>
+                                    <p:anim calcmode="lin" valueType="num">
+                                      <p:cBhvr>
+                                        <p:cTn id="30" dur="2000" fill="hold"/>
+                                        <p:tgtEl>
+                                          <p:spTgt spid="4">
+                                            <p:txEl>
+                                              <p:pRg st="0" end="0"/>
+                                            </p:txEl>
+                                          </p:spTgt>
+                                        </p:tgtEl>
+                                        <p:attrNameLst>
+                                          <p:attrName>ppt_h</p:attrName>
+                                        </p:attrNameLst>
+                                      </p:cBhvr>
+                                      <p:tavLst>
+                                        <p:tav tm="0">
+                                          <p:val>
+                                            <p:fltVal val="0"/>
+                                          </p:val>
+                                        </p:tav>
+                                        <p:tav tm="100000">
+                                          <p:val>
+                                            <p:strVal val="#ppt_h"/>
+                                          </p:val>
+                                        </p:tav>
+                                      </p:tavLst>
+                                    </p:anim>
+                                    <p:anim calcmode="lin" valueType="num">
+                                      <p:cBhvr>
+                                        <p:cTn id="31" dur="2000" fill="hold"/>
+                                        <p:tgtEl>
+                                          <p:spTgt spid="4">
+                                            <p:txEl>
+                                              <p:pRg st="0" end="0"/>
+                                            </p:txEl>
+                                          </p:spTgt>
+                                        </p:tgtEl>
+                                        <p:attrNameLst>
+                                          <p:attrName>ppt_w</p:attrName>
+                                        </p:attrNameLst>
+                                      </p:cBhvr>
+                                      <p:tavLst>
+                                        <p:tav tm="0">
+                                          <p:val>
+                                            <p:fltVal val="0"/>
+                                          </p:val>
+                                        </p:tav>
+                                        <p:tav tm="100000">
+                                          <p:val>
+                                            <p:strVal val="#ppt_w"/>
+                                          </p:val>
+                                        </p:tav>
+                                      </p:tavLst>
+                                    </p:anim>
+                                  </p:childTnLst>
+                                </p:cTn>
+                              </p:par>
+                            </p:childTnLst>
+                          </p:cTn>
+                        </p:par>
+                        <p:par>
+                          <p:cTn id="32" fill="hold">
+                            <p:stCondLst>
+                              <p:cond delay="8000"/>
+                            </p:stCondLst>
+                            <p:childTnLst>
+                              <p:par>
+                                <p:cTn id="33" presetID="35" presetClass="entr" presetSubtype="0" fill="hold" grpId="0" nodeType="afterEffect">
+                                  <p:stCondLst>
+                                    <p:cond delay="0"/>
+                                  </p:stCondLst>
+                                  <p:childTnLst>
+                                    <p:set>
+                                      <p:cBhvr>
+                                        <p:cTn id="34" dur="1" fill="hold">
+                                          <p:stCondLst>
+                                            <p:cond delay="0"/>
+                                          </p:stCondLst>
+                                        </p:cTn>
+                                        <p:tgtEl>
+                                          <p:spTgt spid="2"/>
+                                        </p:tgtEl>
+                                        <p:attrNameLst>
+                                          <p:attrName>style.visibility</p:attrName>
+                                        </p:attrNameLst>
+                                      </p:cBhvr>
+                                      <p:to>
+                                        <p:strVal val="visible"/>
+                                      </p:to>
+                                    </p:set>
+                                    <p:animEffect transition="in" filter="fade">
+                                      <p:cBhvr>
+                                        <p:cTn id="35" dur="2000"/>
+                                        <p:tgtEl>
+                                          <p:spTgt spid="2"/>
+                                        </p:tgtEl>
+                                      </p:cBhvr>
+                                    </p:animEffect>
+                                    <p:anim calcmode="lin" valueType="num">
+                                      <p:cBhvr>
+                                        <p:cTn id="36" dur="2000" fill="hold"/>
+                                        <p:tgtEl>
+                                          <p:spTgt spid="2"/>
+                                        </p:tgtEl>
+                                        <p:attrNameLst>
+                                          <p:attrName>style.rotation</p:attrName>
+                                        </p:attrNameLst>
+                                      </p:cBhvr>
+                                      <p:tavLst>
+                                        <p:tav tm="0">
+                                          <p:val>
+                                            <p:fltVal val="720"/>
+                                          </p:val>
+                                        </p:tav>
+                                        <p:tav tm="100000">
+                                          <p:val>
+                                            <p:fltVal val="0"/>
+                                          </p:val>
+                                        </p:tav>
+                                      </p:tavLst>
+                                    </p:anim>
+                                    <p:anim calcmode="lin" valueType="num">
+                                      <p:cBhvr>
+                                        <p:cTn id="37" dur="2000" fill="hold"/>
+                                        <p:tgtEl>
+                                          <p:spTgt spid="2"/>
+                                        </p:tgtEl>
+                                        <p:attrNameLst>
+                                          <p:attrName>ppt_h</p:attrName>
+                                        </p:attrNameLst>
+                                      </p:cBhvr>
+                                      <p:tavLst>
+                                        <p:tav tm="0">
+                                          <p:val>
+                                            <p:fltVal val="0"/>
+                                          </p:val>
+                                        </p:tav>
+                                        <p:tav tm="100000">
+                                          <p:val>
+                                            <p:strVal val="#ppt_h"/>
+                                          </p:val>
+                                        </p:tav>
+                                      </p:tavLst>
+                                    </p:anim>
+                                    <p:anim calcmode="lin" valueType="num">
+                                      <p:cBhvr>
+                                        <p:cTn id="38" dur="2000" fill="hold"/>
+                                        <p:tgtEl>
+                                          <p:spTgt spid="2"/>
+                                        </p:tgtEl>
+                                        <p:attrNameLst>
+                                          <p:attrName>ppt_w</p:attrName>
+                                        </p:attrNameLst>
+                                      </p:cBhvr>
+                                      <p:tavLst>
+                                        <p:tav tm="0">
+                                          <p:val>
+                                            <p:fltVal val="0"/>
+                                          </p:val>
+                                        </p:tav>
+                                        <p:tav tm="100000">
+                                          <p:val>
+                                            <p:strVal val="#ppt_w"/>
+                                          </p:val>
+                                        </p:tav>
+                                      </p:tavLst>
+                                    </p:anim>
+                                  </p:childTnLst>
+                                </p:cTn>
+                              </p:par>
+                            </p:childTnLst>
+                          </p:cTn>
+                        </p:par>
+                        <p:par>
+                          <p:cTn id="39" fill="hold">
+                            <p:stCondLst>
+                              <p:cond delay="10000"/>
+                            </p:stCondLst>
+                            <p:childTnLst>
+                              <p:par>
+                                <p:cTn id="40" presetID="35" presetClass="entr" presetSubtype="0" fill="hold" grpId="0" nodeType="afterEffect">
+                                  <p:stCondLst>
+                                    <p:cond delay="0"/>
+                                  </p:stCondLst>
+                                  <p:childTnLst>
+                                    <p:set>
+                                      <p:cBhvr>
+                                        <p:cTn id="41" dur="1" fill="hold">
+                                          <p:stCondLst>
+                                            <p:cond delay="0"/>
+                                          </p:stCondLst>
+                                        </p:cTn>
+                                        <p:tgtEl>
+                                          <p:spTgt spid="3">
+                                            <p:txEl>
+                                              <p:pRg st="0" end="0"/>
+                                            </p:txEl>
+                                          </p:spTgt>
+                                        </p:tgtEl>
+                                        <p:attrNameLst>
+                                          <p:attrName>style.visibility</p:attrName>
+                                        </p:attrNameLst>
+                                      </p:cBhvr>
+                                      <p:to>
+                                        <p:strVal val="visible"/>
+                                      </p:to>
+                                    </p:set>
+                                    <p:animEffect transition="in" filter="fade">
+                                      <p:cBhvr>
+                                        <p:cTn id="42" dur="2000"/>
+                                        <p:tgtEl>
+                                          <p:spTgt spid="3">
+                                            <p:txEl>
+                                              <p:pRg st="0" end="0"/>
+                                            </p:txEl>
+                                          </p:spTgt>
+                                        </p:tgtEl>
+                                      </p:cBhvr>
+                                    </p:animEffect>
+                                    <p:anim calcmode="lin" valueType="num">
+                                      <p:cBhvr>
+                                        <p:cTn id="43" dur="2000" fill="hold"/>
+                                        <p:tgtEl>
+                                          <p:spTgt spid="3">
+                                            <p:txEl>
+                                              <p:pRg st="0" end="0"/>
+                                            </p:txEl>
+                                          </p:spTgt>
+                                        </p:tgtEl>
+                                        <p:attrNameLst>
+                                          <p:attrName>style.rotation</p:attrName>
+                                        </p:attrNameLst>
+                                      </p:cBhvr>
+                                      <p:tavLst>
+                                        <p:tav tm="0">
+                                          <p:val>
+                                            <p:fltVal val="720"/>
+                                          </p:val>
+                                        </p:tav>
+                                        <p:tav tm="100000">
+                                          <p:val>
+                                            <p:fltVal val="0"/>
+                                          </p:val>
+                                        </p:tav>
+                                      </p:tavLst>
+                                    </p:anim>
+                                    <p:anim calcmode="lin" valueType="num">
+                                      <p:cBhvr>
+                                        <p:cTn id="44" dur="2000" fill="hold"/>
+                                        <p:tgtEl>
+                                          <p:spTgt spid="3">
+                                            <p:txEl>
+                                              <p:pRg st="0" end="0"/>
+                                            </p:txEl>
+                                          </p:spTgt>
+                                        </p:tgtEl>
+                                        <p:attrNameLst>
+                                          <p:attrName>ppt_h</p:attrName>
+                                        </p:attrNameLst>
+                                      </p:cBhvr>
+                                      <p:tavLst>
+                                        <p:tav tm="0">
+                                          <p:val>
+                                            <p:fltVal val="0"/>
+                                          </p:val>
+                                        </p:tav>
+                                        <p:tav tm="100000">
+                                          <p:val>
+                                            <p:strVal val="#ppt_h"/>
+                                          </p:val>
+                                        </p:tav>
+                                      </p:tavLst>
+                                    </p:anim>
+                                    <p:anim calcmode="lin" valueType="num">
+                                      <p:cBhvr>
+                                        <p:cTn id="45" dur="2000" fill="hold"/>
+                                        <p:tgtEl>
+                                          <p:spTgt spid="3">
+                                            <p:txEl>
+                                              <p:pRg st="0" end="0"/>
+                                            </p:txEl>
+                                          </p:spTgt>
+                                        </p:tgtEl>
+                                        <p:attrNameLst>
+                                          <p:attrName>ppt_w</p:attrName>
+                                        </p:attrNameLst>
+                                      </p:cBhvr>
+                                      <p:tavLst>
+                                        <p:tav tm="0">
+                                          <p:val>
+                                            <p:fltVal val="0"/>
+                                          </p:val>
+                                        </p:tav>
+                                        <p:tav tm="100000">
+                                          <p:val>
+                                            <p:strVal val="#ppt_w"/>
+                                          </p:val>
+                                        </p:tav>
+                                      </p:tavLst>
+                                    </p:anim>
+                                  </p:childTnLst>
+                                </p:cTn>
+                              </p:par>
+                            </p:childTnLst>
+                          </p:cTn>
+                        </p:par>
+                        <p:par>
+                          <p:cTn id="46" fill="hold">
+                            <p:stCondLst>
+                              <p:cond delay="12000"/>
+                            </p:stCondLst>
+                            <p:childTnLst>
+                              <p:par>
+                                <p:cTn id="47" presetID="53" presetClass="entr" presetSubtype="16" fill="hold" grpId="0" nodeType="afterEffect">
+                                  <p:stCondLst>
+                                    <p:cond delay="0"/>
+                                  </p:stCondLst>
+                                  <p:childTnLst>
+                                    <p:set>
+                                      <p:cBhvr>
+                                        <p:cTn id="48" dur="1" fill="hold">
+                                          <p:stCondLst>
+                                            <p:cond delay="0"/>
+                                          </p:stCondLst>
+                                        </p:cTn>
+                                        <p:tgtEl>
+                                          <p:spTgt spid="8"/>
+                                        </p:tgtEl>
+                                        <p:attrNameLst>
+                                          <p:attrName>style.visibility</p:attrName>
+                                        </p:attrNameLst>
+                                      </p:cBhvr>
+                                      <p:to>
+                                        <p:strVal val="visible"/>
+                                      </p:to>
+                                    </p:set>
+                                    <p:anim calcmode="lin" valueType="num">
+                                      <p:cBhvr>
+                                        <p:cTn id="49" dur="500" fill="hold"/>
+                                        <p:tgtEl>
+                                          <p:spTgt spid="8"/>
+                                        </p:tgtEl>
+                                        <p:attrNameLst>
+                                          <p:attrName>ppt_w</p:attrName>
+                                        </p:attrNameLst>
+                                      </p:cBhvr>
+                                      <p:tavLst>
+                                        <p:tav tm="0">
+                                          <p:val>
+                                            <p:fltVal val="0"/>
+                                          </p:val>
+                                        </p:tav>
+                                        <p:tav tm="100000">
+                                          <p:val>
+                                            <p:strVal val="#ppt_w"/>
+                                          </p:val>
+                                        </p:tav>
+                                      </p:tavLst>
+                                    </p:anim>
+                                    <p:anim calcmode="lin" valueType="num">
+                                      <p:cBhvr>
+                                        <p:cTn id="50" dur="500" fill="hold"/>
+                                        <p:tgtEl>
+                                          <p:spTgt spid="8"/>
+                                        </p:tgtEl>
+                                        <p:attrNameLst>
+                                          <p:attrName>ppt_h</p:attrName>
+                                        </p:attrNameLst>
+                                      </p:cBhvr>
+                                      <p:tavLst>
+                                        <p:tav tm="0">
+                                          <p:val>
+                                            <p:fltVal val="0"/>
+                                          </p:val>
+                                        </p:tav>
+                                        <p:tav tm="100000">
+                                          <p:val>
+                                            <p:strVal val="#ppt_h"/>
+                                          </p:val>
+                                        </p:tav>
+                                      </p:tavLst>
+                                    </p:anim>
+                                    <p:animEffect transition="in" filter="fade">
+                                      <p:cBhvr>
+                                        <p:cTn id="51" dur="500"/>
+                                        <p:tgtEl>
+                                          <p:spTgt spid="8"/>
+                                        </p:tgtEl>
+                                      </p:cBhvr>
+                                    </p:animEffect>
+                                  </p:childTnLst>
+                                </p:cTn>
+                              </p:par>
+                            </p:childTnLst>
+                          </p:cTn>
+                        </p:par>
+                      </p:childTnLst>
+                    </p:cTn>
+                  </p:par>
+                </p:childTnLst>
+              </p:cTn>
+              <p:prevCondLst>
+                <p:cond evt="onPrev" delay="0">
+                  <p:tgtEl>
+                    <p:sldTgt/>
+                  </p:tgtEl>
+                </p:cond>
+              </p:prevCondLst>
+              <p:nextCondLst>
+                <p:cond evt="onNext" delay="0">
+                  <p:tgtEl>
+                    <p:sldTgt/>
+                  </p:tgtEl>
+                </p:cond>
+              </p:nextCondLst>
+            </p:seq>
+          </p:childTnLst>
+        </p:cTn>
+      </p:par>
+    </p:tnLst>
+    <p:bldLst>
+      <p:bldP spid="3" grpId="0" build="p"/>
+      <p:bldP spid="4" grpId="0" build="p"/>
+      <p:bldP spid="5" grpId="0"/>
+      <p:bldP spid="6" grpId="0"/>
+      <p:bldP spid="7" grpId="0"/>
+      <p:bldP spid="8" grpId="0"/>
+      <p:bldP spid="2" grpId="0"/>
+    </p:bldLst>
+  </p:timing>
 </p:sld>
 </file>
 
@@ -11669,15 +13377,39 @@
             <p:ph type="title"/>
           </p:nvPr>
         </p:nvSpPr>
-        <p:spPr/>
+        <p:spPr>
+          <a:xfrm>
+            <a:off x="1251678" y="382385"/>
+            <a:ext cx="10178322" cy="966889"/>
+          </a:xfrm>
+        </p:spPr>
         <p:txBody>
-          <a:bodyPr/>
+          <a:bodyPr>
+            <a:normAutofit/>
+          </a:bodyPr>
           <a:lstStyle/>
           <a:p>
+            <a:pPr algn="ctr"/>
             <a:r>
               <a:rPr lang="en-GB" noProof="0" dirty="0"/>
-              <a:t>The ones I thought would work</a:t>
-            </a:r>
+              <a:t>The ones that </a:t>
+            </a:r>
+            <a:r>
+              <a:rPr lang="en-GB" i="1" noProof="0" dirty="0"/>
+              <a:t>should</a:t>
+            </a:r>
+            <a:r>
+              <a:rPr lang="en-GB" noProof="0" dirty="0"/>
+              <a:t> work</a:t>
+            </a:r>
+            <a:br>
+              <a:rPr lang="en-GB" noProof="0" dirty="0"/>
+            </a:br>
+            <a:r>
+              <a:rPr lang="en-GB" sz="1200" noProof="0" dirty="0"/>
+              <a:t>(both work as expected when debugging)</a:t>
+            </a:r>
+            <a:endParaRPr lang="en-GB" noProof="0" dirty="0"/>
           </a:p>
         </p:txBody>
       </p:sp>
@@ -11704,7 +13436,9 @@
           </a:xfrm>
         </p:spPr>
         <p:txBody>
-          <a:bodyPr/>
+          <a:bodyPr>
+            <a:normAutofit/>
+          </a:bodyPr>
           <a:lstStyle/>
           <a:p>
             <a:r>
@@ -11762,7 +13496,9 @@
           </a:xfrm>
         </p:spPr>
         <p:txBody>
-          <a:bodyPr/>
+          <a:bodyPr>
+            <a:normAutofit/>
+          </a:bodyPr>
           <a:lstStyle/>
           <a:p>
             <a:r>

--- a/PizzaSolution Presentation.pptx
+++ b/PizzaSolution Presentation.pptx
@@ -2034,6 +2034,46 @@
           <a:bodyPr/>
           <a:lstStyle/>
           <a:p>
+            <a:r>
+              <a:rPr lang="da-DK" dirty="0"/>
+              <a:t>Basic </a:t>
+            </a:r>
+            <a:r>
+              <a:rPr lang="da-DK" dirty="0" err="1"/>
+              <a:t>idea</a:t>
+            </a:r>
+            <a:r>
+              <a:rPr lang="da-DK" dirty="0"/>
+              <a:t> is </a:t>
+            </a:r>
+            <a:r>
+              <a:rPr lang="da-DK" dirty="0" err="1"/>
+              <a:t>that</a:t>
+            </a:r>
+            <a:r>
+              <a:rPr lang="da-DK" dirty="0"/>
+              <a:t> it </a:t>
+            </a:r>
+            <a:r>
+              <a:rPr lang="da-DK" dirty="0" err="1"/>
+              <a:t>needs</a:t>
+            </a:r>
+            <a:r>
+              <a:rPr lang="da-DK" dirty="0"/>
+              <a:t> to </a:t>
+            </a:r>
+            <a:r>
+              <a:rPr lang="da-DK" dirty="0" err="1"/>
+              <a:t>add</a:t>
+            </a:r>
+            <a:r>
+              <a:rPr lang="da-DK" dirty="0"/>
+              <a:t> pizzas to the </a:t>
+            </a:r>
+            <a:r>
+              <a:rPr lang="da-DK" dirty="0" err="1"/>
+              <a:t>pizzaQueue</a:t>
+            </a:r>
             <a:endParaRPr lang="da-DK" dirty="0"/>
           </a:p>
         </p:txBody>
@@ -10876,7 +10916,7 @@
             <a:pPr lvl="1"/>
             <a:r>
               <a:rPr lang="en-GB" dirty="0"/>
-              <a:t>Make the first element have the correct cooking type, set rest to 0</a:t>
+              <a:t>Make the first element have the correct cooking time, set rest to 0</a:t>
             </a:r>
           </a:p>
           <a:p>
@@ -10930,10 +10970,10 @@
       </p:sp>
       <p:pic>
         <p:nvPicPr>
-          <p:cNvPr id="6" name="Pladsholder til indhold 5">
+          <p:cNvPr id="8" name="Pladsholder til indhold 7">
             <a:extLst>
               <a:ext uri="{FF2B5EF4-FFF2-40B4-BE49-F238E27FC236}">
-                <a16:creationId xmlns:a16="http://schemas.microsoft.com/office/drawing/2014/main" id="{A9129C86-25D8-BB61-FDBC-050F963302B9}"/>
+                <a16:creationId xmlns:a16="http://schemas.microsoft.com/office/drawing/2014/main" id="{BC4CFAAC-480E-A8A7-E33F-17520E111214}"/>
               </a:ext>
             </a:extLst>
           </p:cNvPr>
@@ -10952,8 +10992,8 @@
         </p:blipFill>
         <p:spPr>
           <a:xfrm>
-            <a:off x="6134102" y="1648979"/>
-            <a:ext cx="5576569" cy="4482059"/>
+            <a:off x="6938684" y="355107"/>
+            <a:ext cx="4896045" cy="6147785"/>
           </a:xfrm>
           <a:prstGeom prst="rect">
             <a:avLst/>
